--- a/praesentationen/tag-1-virtualisierung.pptx
+++ b/praesentationen/tag-1-virtualisierung.pptx
@@ -16,9 +16,10 @@
     <p:sldId id="264" r:id="rId10"/>
     <p:sldId id="265" r:id="rId11"/>
     <p:sldId id="266" r:id="rId12"/>
+    <p:sldId id="267" r:id="rId13"/>
   </p:sldIdLst>
   <p:notesMasterIdLst>
-    <p:notesMasterId r:id="rId13"/>
+    <p:notesMasterId r:id="rId14"/>
   </p:notesMasterIdLst>
   <p:sldSz cx="12192000" cy="6858000"/>
   <p:notesSz cx="6858000" cy="12192000"/>
@@ -117,7 +118,7 @@
   <p:extLst>
     <p:ext uri="{521415D9-36F7-43E2-AB2F-B90AF26B5E84}">
       <p14:sectionLst xmlns:p14="http://schemas.microsoft.com/office/powerpoint/2010/main">
-        <p14:section name="Start" id="{4e9b7e48-199d-ba46-4dd5-6d56a7deacf7}">
+        <p14:section name="Start" id="{f00fff78-a5f8-bf56-2202-e1b35318b053}">
           <p14:sldIdLst>
             <p14:sldId id="256"/>
             <p14:sldId id="257"/>
@@ -126,18 +127,19 @@
             <p14:sldId id="260"/>
           </p14:sldIdLst>
         </p14:section>
-        <p14:section name="Heute" id="{43428f74-6e48-912c-92ae-2bdcd6e008c9}">
+        <p14:section name="Heute" id="{ca6ad41d-2f2f-5cee-7e10-ffc3c7cd9581}">
           <p14:sldIdLst>
             <p14:sldId id="261"/>
             <p14:sldId id="262"/>
             <p14:sldId id="263"/>
             <p14:sldId id="264"/>
+            <p14:sldId id="265"/>
           </p14:sldIdLst>
         </p14:section>
-        <p14:section name="Abschluss" id="{3ba19fed-a625-b5aa-2e0b-c6bd3d6500b5}">
+        <p14:section name="Abschluss" id="{9846700f-24d2-a037-eb1f-e11c37622c8a}">
           <p14:sldIdLst>
-            <p14:sldId id="265"/>
             <p14:sldId id="266"/>
+            <p14:sldId id="267"/>
           </p14:sldIdLst>
         </p14:section>
       </p14:sectionLst>
@@ -632,7 +634,7 @@
           <a:p>
             <a:r>
               <a:rPr lang="en-US" dirty="0"/>
-              <a:t>Exit-Tickets einsammeln und an Tag 2 als Einstieg verwenden.</a:t>
+              <a:t>Live-Demo vor Auftrag 1.2. Erste VM vorab erstellt haben, damit die Demo nicht auf den Download wartet.</a:t>
             </a:r>
             <a:endParaRPr lang="en-US" dirty="0"/>
           </a:p>
@@ -720,7 +722,7 @@
           <a:p>
             <a:r>
               <a:rPr lang="en-US" dirty="0"/>
-              <a:t/>
+              <a:t>Exit-Tickets einsammeln und an Tag 2 als Einstieg verwenden.</a:t>
             </a:r>
             <a:endParaRPr lang="en-US" dirty="0"/>
           </a:p>
@@ -744,6 +746,94 @@
             <a:fld id="{F7021451-1387-4CA6-816F-3879F97B5CBC}" type="slidenum">
               <a:rPr lang="en-US"/>
               <a:t>11</a:t>
+            </a:fld>
+            <a:endParaRPr lang="en-US"/>
+          </a:p>
+        </p:txBody>
+      </p:sp>
+    </p:spTree>
+    <p:extLst>
+      <p:ext uri="{BB962C8B-B14F-4D97-AF65-F5344CB8AC3E}">
+        <p14:creationId xmlns:p14="http://schemas.microsoft.com/office/powerpoint/2010/main" val="1024086991"/>
+      </p:ext>
+    </p:extLst>
+  </p:cSld>
+  <p:clrMapOvr>
+    <a:masterClrMapping/>
+  </p:clrMapOvr>
+</p:notes>
+</file>
+
+<file path=ppt/notesSlides/notesSlide12.xml><?xml version="1.0" encoding="utf-8"?>
+<p:notes xmlns:a="http://schemas.openxmlformats.org/drawingml/2006/main" xmlns:r="http://schemas.openxmlformats.org/officeDocument/2006/relationships" xmlns:p="http://schemas.openxmlformats.org/presentationml/2006/main">
+  <p:cSld>
+    <p:spTree>
+      <p:nvGrpSpPr>
+        <p:cNvPr id="1" name=""/>
+        <p:cNvGrpSpPr/>
+        <p:nvPr/>
+      </p:nvGrpSpPr>
+      <p:grpSpPr>
+        <a:xfrm>
+          <a:off x="0" y="0"/>
+          <a:ext cx="0" cy="0"/>
+          <a:chOff x="0" y="0"/>
+          <a:chExt cx="0" cy="0"/>
+        </a:xfrm>
+      </p:grpSpPr>
+      <p:sp>
+        <p:nvSpPr>
+          <p:cNvPr id="2" name="Slide Image Placeholder 1"/>
+          <p:cNvSpPr>
+            <a:spLocks noGrp="1" noRot="1" noChangeAspect="1"/>
+          </p:cNvSpPr>
+          <p:nvPr>
+            <p:ph type="sldImg"/>
+          </p:nvPr>
+        </p:nvSpPr>
+        <p:spPr/>
+      </p:sp>
+      <p:sp>
+        <p:nvSpPr>
+          <p:cNvPr id="3" name="Notes Placeholder 2"/>
+          <p:cNvSpPr>
+            <a:spLocks noGrp="1"/>
+          </p:cNvSpPr>
+          <p:nvPr>
+            <p:ph type="body" idx="1"/>
+          </p:nvPr>
+        </p:nvSpPr>
+        <p:spPr/>
+        <p:txBody>
+          <a:bodyPr/>
+          <a:lstStyle/>
+          <a:p>
+            <a:r>
+              <a:rPr lang="en-US" dirty="0"/>
+              <a:t/>
+            </a:r>
+            <a:endParaRPr lang="en-US" dirty="0"/>
+          </a:p>
+        </p:txBody>
+      </p:sp>
+      <p:sp>
+        <p:nvSpPr>
+          <p:cNvPr id="4" name="Slide Number Placeholder 3"/>
+          <p:cNvSpPr>
+            <a:spLocks noGrp="1"/>
+          </p:cNvSpPr>
+          <p:nvPr>
+            <p:ph type="sldNum" sz="quarter" idx="10"/>
+          </p:nvPr>
+        </p:nvSpPr>
+        <p:spPr/>
+        <p:txBody>
+          <a:bodyPr/>
+          <a:lstStyle/>
+          <a:p>
+            <a:fld id="{F7021451-1387-4CA6-816F-3879F97B5CBC}" type="slidenum">
+              <a:rPr lang="en-US"/>
+              <a:t>12</a:t>
             </a:fld>
             <a:endParaRPr lang="en-US"/>
           </a:p>
@@ -1160,7 +1250,7 @@
           <a:p>
             <a:r>
               <a:rPr lang="en-US" dirty="0"/>
-              <a:t>⭐-Ziel für Schnelle: Unterschied VM und Container beschreiben (Auftrag 1.5).</a:t>
+              <a:t>⭐-Ziel für Schnelle: Unterschied VM und Container beschreiben (Auftrag 1.6).</a:t>
             </a:r>
             <a:endParaRPr lang="en-US" dirty="0"/>
           </a:p>
@@ -1336,7 +1426,7 @@
           <a:p>
             <a:r>
               <a:rPr lang="en-US" dirty="0"/>
-              <a:t>Ablage im Repository zeigen. Hinweis: Lösungen sind zum Vergleichen da.</a:t>
+              <a:t>Ablage auf der Website zeigen. Hinweis: Lösungen sind zum Vergleichen da.</a:t>
             </a:r>
             <a:endParaRPr lang="en-US" dirty="0"/>
           </a:p>
@@ -1424,7 +1514,7 @@
           <a:p>
             <a:r>
               <a:rPr lang="en-US" dirty="0"/>
-              <a:t>Laptops mit deaktivierter Virtualisierung sofort sammeln (BIOS/UEFI, evtl. IT des Lehrbetriebs).</a:t>
+              <a:t>Laptops mit deaktivierter Virtualisierung oder Windows Home sofort sammeln. Beim ersten launch evtl. reihenweise starten (Download ca. 600 MB).</a:t>
             </a:r>
             <a:endParaRPr lang="en-US" dirty="0"/>
           </a:p>
@@ -2634,6 +2724,465 @@
                   <a:srgbClr val="27303A"/>
                 </a:solidFill>
               </a:rPr>
+              <a:t>Multipass in 6 Befehlen</a:t>
+            </a:r>
+            <a:endParaRPr lang="en-US" sz="3400" dirty="0"/>
+          </a:p>
+        </p:txBody>
+      </p:sp>
+      <p:sp>
+        <p:nvSpPr>
+          <p:cNvPr id="3" name="code-box"/>
+          <p:cNvSpPr/>
+          <p:nvPr/>
+        </p:nvSpPr>
+        <p:spPr>
+          <a:xfrm>
+            <a:off x="548640" y="1325880"/>
+            <a:ext cx="6583680" cy="4709160"/>
+          </a:xfrm>
+          <a:prstGeom prst="roundRect">
+            <a:avLst>
+              <a:gd name="adj" fmla="val 1942"/>
+            </a:avLst>
+          </a:prstGeom>
+          <a:solidFill>
+            <a:srgbClr val="27303A"/>
+          </a:solidFill>
+          <a:ln w="12700">
+            <a:solidFill>
+              <a:srgbClr val="27303A"/>
+            </a:solidFill>
+            <a:prstDash val="solid"/>
+          </a:ln>
+        </p:spPr>
+      </p:sp>
+      <p:sp>
+        <p:nvSpPr>
+          <p:cNvPr id="4" name="Text 2"/>
+          <p:cNvSpPr txBox="1"/>
+          <p:nvPr/>
+        </p:nvSpPr>
+        <p:spPr>
+          <a:xfrm>
+            <a:off x="822960" y="1554480"/>
+            <a:ext cx="6035040" cy="4251960"/>
+          </a:xfrm>
+          <a:prstGeom prst="rect">
+            <a:avLst/>
+          </a:prstGeom>
+          <a:noFill/>
+          <a:ln/>
+        </p:spPr>
+        <p:txBody>
+          <a:bodyPr wrap="square" lIns="0" tIns="0" rIns="0" bIns="0" rtlCol="0" anchor="t"/>
+          <a:lstStyle/>
+          <a:p>
+            <a:pPr indent="0" marL="0">
+              <a:buNone/>
+            </a:pPr>
+            <a:r>
+              <a:rPr lang="en-US" sz="1800" dirty="0">
+                <a:solidFill>
+                  <a:srgbClr val="F7F7F7"/>
+                </a:solidFill>
+                <a:latin typeface="Courier New" pitchFamily="34" charset="0"/>
+                <a:ea typeface="Courier New" pitchFamily="34" charset="-122"/>
+                <a:cs typeface="Courier New" pitchFamily="34" charset="-120"/>
+              </a:rPr>
+              <a:t>multipass launch --name vm1</a:t>
+            </a:r>
+            <a:endParaRPr lang="en-US" sz="1800" dirty="0"/>
+          </a:p>
+          <a:p>
+            <a:pPr indent="0" marL="0">
+              <a:buNone/>
+            </a:pPr>
+            <a:r>
+              <a:rPr lang="en-US" sz="1800" dirty="0">
+                <a:solidFill>
+                  <a:srgbClr val="F7F7F7"/>
+                </a:solidFill>
+                <a:latin typeface="Courier New" pitchFamily="34" charset="0"/>
+                <a:ea typeface="Courier New" pitchFamily="34" charset="-122"/>
+                <a:cs typeface="Courier New" pitchFamily="34" charset="-120"/>
+              </a:rPr>
+              <a:t>multipass list</a:t>
+            </a:r>
+            <a:endParaRPr lang="en-US" sz="1800" dirty="0"/>
+          </a:p>
+          <a:p>
+            <a:pPr indent="0" marL="0">
+              <a:buNone/>
+            </a:pPr>
+            <a:r>
+              <a:rPr lang="en-US" sz="1800" dirty="0">
+                <a:solidFill>
+                  <a:srgbClr val="F7F7F7"/>
+                </a:solidFill>
+                <a:latin typeface="Courier New" pitchFamily="34" charset="0"/>
+                <a:ea typeface="Courier New" pitchFamily="34" charset="-122"/>
+                <a:cs typeface="Courier New" pitchFamily="34" charset="-120"/>
+              </a:rPr>
+              <a:t>multipass shell vm1</a:t>
+            </a:r>
+            <a:endParaRPr lang="en-US" sz="1800" dirty="0"/>
+          </a:p>
+          <a:p>
+            <a:pPr indent="0" marL="0">
+              <a:buNone/>
+            </a:pPr>
+            <a:r>
+              <a:rPr lang="en-US" sz="1800" dirty="0">
+                <a:solidFill>
+                  <a:srgbClr val="F7F7F7"/>
+                </a:solidFill>
+                <a:latin typeface="Courier New" pitchFamily="34" charset="0"/>
+                <a:ea typeface="Courier New" pitchFamily="34" charset="-122"/>
+                <a:cs typeface="Courier New" pitchFamily="34" charset="-120"/>
+              </a:rPr>
+              <a:t>multipass exec vm1 -- free -h</a:t>
+            </a:r>
+            <a:endParaRPr lang="en-US" sz="1800" dirty="0"/>
+          </a:p>
+          <a:p>
+            <a:pPr indent="0" marL="0">
+              <a:buNone/>
+            </a:pPr>
+            <a:r>
+              <a:rPr lang="en-US" sz="1800" dirty="0">
+                <a:solidFill>
+                  <a:srgbClr val="F7F7F7"/>
+                </a:solidFill>
+                <a:latin typeface="Courier New" pitchFamily="34" charset="0"/>
+                <a:ea typeface="Courier New" pitchFamily="34" charset="-122"/>
+                <a:cs typeface="Courier New" pitchFamily="34" charset="-120"/>
+              </a:rPr>
+              <a:t>multipass stop vm1</a:t>
+            </a:r>
+            <a:endParaRPr lang="en-US" sz="1800" dirty="0"/>
+          </a:p>
+          <a:p>
+            <a:pPr indent="0" marL="0">
+              <a:buNone/>
+            </a:pPr>
+            <a:r>
+              <a:rPr lang="en-US" sz="1800" dirty="0">
+                <a:solidFill>
+                  <a:srgbClr val="F7F7F7"/>
+                </a:solidFill>
+                <a:latin typeface="Courier New" pitchFamily="34" charset="0"/>
+                <a:ea typeface="Courier New" pitchFamily="34" charset="-122"/>
+                <a:cs typeface="Courier New" pitchFamily="34" charset="-120"/>
+              </a:rPr>
+              <a:t>multipass delete --purge vm1</a:t>
+            </a:r>
+            <a:endParaRPr lang="en-US" sz="1800" dirty="0"/>
+          </a:p>
+        </p:txBody>
+      </p:sp>
+      <p:sp>
+        <p:nvSpPr>
+          <p:cNvPr id="5" name="Text 3"/>
+          <p:cNvSpPr txBox="1"/>
+          <p:nvPr/>
+        </p:nvSpPr>
+        <p:spPr>
+          <a:xfrm>
+            <a:off x="7498080" y="1325880"/>
+            <a:ext cx="4144975" cy="1143000"/>
+          </a:xfrm>
+          <a:prstGeom prst="rect">
+            <a:avLst/>
+          </a:prstGeom>
+          <a:noFill/>
+          <a:ln/>
+        </p:spPr>
+        <p:txBody>
+          <a:bodyPr wrap="square" lIns="0" tIns="0" rIns="0" bIns="0" rtlCol="0" anchor="t"/>
+          <a:lstStyle/>
+          <a:p>
+            <a:pPr indent="0" marL="0">
+              <a:buNone/>
+            </a:pPr>
+            <a:r>
+              <a:rPr lang="en-US" sz="1700" b="1" dirty="0">
+                <a:solidFill>
+                  <a:srgbClr val="006FAD"/>
+                </a:solidFill>
+              </a:rPr>
+              <a:t>launch</a:t>
+            </a:r>
+            <a:endParaRPr lang="en-US" sz="1700" dirty="0"/>
+          </a:p>
+          <a:p>
+            <a:pPr indent="0" marL="0">
+              <a:buNone/>
+            </a:pPr>
+            <a:r>
+              <a:rPr lang="en-US" sz="1700" dirty="0">
+                <a:solidFill>
+                  <a:srgbClr val="27303A"/>
+                </a:solidFill>
+              </a:rPr>
+              <a:t>VM erstellen und starten</a:t>
+            </a:r>
+            <a:endParaRPr lang="en-US" sz="1700" dirty="0"/>
+          </a:p>
+        </p:txBody>
+      </p:sp>
+      <p:sp>
+        <p:nvSpPr>
+          <p:cNvPr id="6" name="Text 4"/>
+          <p:cNvSpPr txBox="1"/>
+          <p:nvPr/>
+        </p:nvSpPr>
+        <p:spPr>
+          <a:xfrm>
+            <a:off x="7498080" y="2468880"/>
+            <a:ext cx="4144975" cy="1143000"/>
+          </a:xfrm>
+          <a:prstGeom prst="rect">
+            <a:avLst/>
+          </a:prstGeom>
+          <a:noFill/>
+          <a:ln/>
+        </p:spPr>
+        <p:txBody>
+          <a:bodyPr wrap="square" lIns="0" tIns="0" rIns="0" bIns="0" rtlCol="0" anchor="t"/>
+          <a:lstStyle/>
+          <a:p>
+            <a:pPr indent="0" marL="0">
+              <a:buNone/>
+            </a:pPr>
+            <a:r>
+              <a:rPr lang="en-US" sz="1700" b="1" dirty="0">
+                <a:solidFill>
+                  <a:srgbClr val="006FAD"/>
+                </a:solidFill>
+              </a:rPr>
+              <a:t>list</a:t>
+            </a:r>
+            <a:endParaRPr lang="en-US" sz="1700" dirty="0"/>
+          </a:p>
+          <a:p>
+            <a:pPr indent="0" marL="0">
+              <a:buNone/>
+            </a:pPr>
+            <a:r>
+              <a:rPr lang="en-US" sz="1700" dirty="0">
+                <a:solidFill>
+                  <a:srgbClr val="27303A"/>
+                </a:solidFill>
+              </a:rPr>
+              <a:t>alle VMs anzeigen</a:t>
+            </a:r>
+            <a:endParaRPr lang="en-US" sz="1700" dirty="0"/>
+          </a:p>
+        </p:txBody>
+      </p:sp>
+      <p:sp>
+        <p:nvSpPr>
+          <p:cNvPr id="7" name="Text 5"/>
+          <p:cNvSpPr txBox="1"/>
+          <p:nvPr/>
+        </p:nvSpPr>
+        <p:spPr>
+          <a:xfrm>
+            <a:off x="7498080" y="3611880"/>
+            <a:ext cx="4144975" cy="1143000"/>
+          </a:xfrm>
+          <a:prstGeom prst="rect">
+            <a:avLst/>
+          </a:prstGeom>
+          <a:noFill/>
+          <a:ln/>
+        </p:spPr>
+        <p:txBody>
+          <a:bodyPr wrap="square" lIns="0" tIns="0" rIns="0" bIns="0" rtlCol="0" anchor="t"/>
+          <a:lstStyle/>
+          <a:p>
+            <a:pPr indent="0" marL="0">
+              <a:buNone/>
+            </a:pPr>
+            <a:r>
+              <a:rPr lang="en-US" sz="1700" b="1" dirty="0">
+                <a:solidFill>
+                  <a:srgbClr val="006FAD"/>
+                </a:solidFill>
+              </a:rPr>
+              <a:t>shell / exec</a:t>
+            </a:r>
+            <a:endParaRPr lang="en-US" sz="1700" dirty="0"/>
+          </a:p>
+          <a:p>
+            <a:pPr indent="0" marL="0">
+              <a:buNone/>
+            </a:pPr>
+            <a:r>
+              <a:rPr lang="en-US" sz="1700" dirty="0">
+                <a:solidFill>
+                  <a:srgbClr val="27303A"/>
+                </a:solidFill>
+              </a:rPr>
+              <a:t>in der VM arbeiten / einen Befehl ausführen</a:t>
+            </a:r>
+            <a:endParaRPr lang="en-US" sz="1700" dirty="0"/>
+          </a:p>
+        </p:txBody>
+      </p:sp>
+      <p:sp>
+        <p:nvSpPr>
+          <p:cNvPr id="8" name="Text 6"/>
+          <p:cNvSpPr txBox="1"/>
+          <p:nvPr/>
+        </p:nvSpPr>
+        <p:spPr>
+          <a:xfrm>
+            <a:off x="7498080" y="4754880"/>
+            <a:ext cx="4144975" cy="1143000"/>
+          </a:xfrm>
+          <a:prstGeom prst="rect">
+            <a:avLst/>
+          </a:prstGeom>
+          <a:noFill/>
+          <a:ln/>
+        </p:spPr>
+        <p:txBody>
+          <a:bodyPr wrap="square" lIns="0" tIns="0" rIns="0" bIns="0" rtlCol="0" anchor="t"/>
+          <a:lstStyle/>
+          <a:p>
+            <a:pPr indent="0" marL="0">
+              <a:buNone/>
+            </a:pPr>
+            <a:r>
+              <a:rPr lang="en-US" sz="1700" b="1" dirty="0">
+                <a:solidFill>
+                  <a:srgbClr val="006FAD"/>
+                </a:solidFill>
+              </a:rPr>
+              <a:t>stop / delete</a:t>
+            </a:r>
+            <a:endParaRPr lang="en-US" sz="1700" dirty="0"/>
+          </a:p>
+          <a:p>
+            <a:pPr indent="0" marL="0">
+              <a:buNone/>
+            </a:pPr>
+            <a:r>
+              <a:rPr lang="en-US" sz="1700" dirty="0">
+                <a:solidFill>
+                  <a:srgbClr val="27303A"/>
+                </a:solidFill>
+              </a:rPr>
+              <a:t>VM stoppen / endgültig löschen</a:t>
+            </a:r>
+            <a:endParaRPr lang="en-US" sz="1700" dirty="0"/>
+          </a:p>
+        </p:txBody>
+      </p:sp>
+      <p:sp>
+        <p:nvSpPr>
+          <p:cNvPr id="25" name="Slide Number Placeholder 0"/>
+          <p:cNvSpPr>
+            <a:spLocks noGrp="1"/>
+          </p:cNvSpPr>
+          <p:nvPr>
+            <p:ph type="sldNum" sz="quarter" idx="4294967295"/>
+          </p:nvPr>
+        </p:nvSpPr>
+        <p:spPr>
+          <a:xfrm>
+            <a:off x="11183112" y="6336792"/>
+            <a:ext cx="457200" cy="365760"/>
+          </a:xfrm>
+          <a:prstGeom prst="rect">
+            <a:avLst/>
+          </a:prstGeom>
+          <a:extLst>
+            <a:ext uri="{C572A759-6A51-4108-AA02-DFA0A04FC94B}">
+              <ma14:wrappingTextBoxFlag xmlns:ma14="http://schemas.microsoft.com/office/mac/drawingml/2011/main" val="0"/>
+            </a:ext>
+          </a:extLst>
+        </p:spPr>
+        <p:txBody>
+          <a:bodyPr/>
+          <a:lstStyle>
+            <a:lvl1pPr>
+              <a:defRPr sz="1000">
+                <a:solidFill>
+                  <a:srgbClr val="6F6F6F"/>
+                </a:solidFill>
+              </a:defRPr>
+            </a:lvl1pPr>
+          </a:lstStyle>
+          <a:p>
+            <a:pPr algn="r"/>
+            <a:fld id="{F7021451-1387-4CA6-816F-3879F97B5CBC}" type="slidenum">
+              <a:rPr b="0" lang="en-US"/>
+              <a:t>10</a:t>
+            </a:fld>
+            <a:endParaRPr lang="en-US"/>
+          </a:p>
+        </p:txBody>
+      </p:sp>
+    </p:spTree>
+  </p:cSld>
+  <p:clrMapOvr>
+    <a:masterClrMapping/>
+  </p:clrMapOvr>
+</p:sld>
+</file>
+
+<file path=ppt/slides/slide11.xml><?xml version="1.0" encoding="utf-8"?>
+<p:sld xmlns:a="http://schemas.openxmlformats.org/drawingml/2006/main" xmlns:r="http://schemas.openxmlformats.org/officeDocument/2006/relationships" xmlns:p="http://schemas.openxmlformats.org/presentationml/2006/main">
+  <p:cSld name="Slide 11">
+    <p:spTree>
+      <p:nvGrpSpPr>
+        <p:cNvPr id="1" name=""/>
+        <p:cNvGrpSpPr/>
+        <p:nvPr/>
+      </p:nvGrpSpPr>
+      <p:grpSpPr>
+        <a:xfrm>
+          <a:off x="0" y="0"/>
+          <a:ext cx="0" cy="0"/>
+          <a:chOff x="0" y="0"/>
+          <a:chExt cx="0" cy="0"/>
+        </a:xfrm>
+      </p:grpSpPr>
+      <p:sp>
+        <p:nvSpPr>
+          <p:cNvPr id="2" name="Text 1"/>
+          <p:cNvSpPr/>
+          <p:nvPr>
+            <p:ph idx="102" type="title" hasCustomPrompt="1"/>
+          </p:nvPr>
+        </p:nvSpPr>
+        <p:spPr>
+          <a:xfrm>
+            <a:off x="548640" y="320040"/>
+            <a:ext cx="11094415" cy="822960"/>
+          </a:xfrm>
+          <a:prstGeom prst="rect">
+            <a:avLst/>
+          </a:prstGeom>
+          <a:noFill/>
+          <a:ln/>
+        </p:spPr>
+        <p:txBody>
+          <a:bodyPr wrap="square" lIns="0" tIns="0" rIns="0" bIns="0" rtlCol="0" anchor="ctr"/>
+          <a:lstStyle/>
+          <a:p>
+            <a:pPr algn="l" indent="0" marL="0">
+              <a:buNone/>
+            </a:pPr>
+            <a:r>
+              <a:rPr lang="en-US" sz="3400" b="1" dirty="0">
+                <a:solidFill>
+                  <a:srgbClr val="27303A"/>
+                </a:solidFill>
+              </a:rPr>
               <a:t>Abschluss</a:t>
             </a:r>
             <a:endParaRPr lang="en-US" sz="3400" dirty="0"/>
@@ -2787,7 +3336,7 @@
                   <a:srgbClr val="27303A"/>
                 </a:solidFill>
               </a:rPr>
-              <a:t>Klon gelöscht? Netzwerk auf NAT? VM heruntergefahren und behalten (Vergleich an Tag 3)? SSH-Schlüssel behalten!</a:t>
+              <a:t>multipass delete --purge --all · Den SSH-Schlüssel behalten – du brauchst ihn an Tag 3!</a:t>
             </a:r>
             <a:endParaRPr lang="en-US" sz="1600" dirty="0"/>
           </a:p>
@@ -2985,7 +3534,7 @@
             <a:pPr algn="r"/>
             <a:fld id="{F7021451-1387-4CA6-816F-3879F97B5CBC}" type="slidenum">
               <a:rPr b="0" lang="en-US"/>
-              <a:t>10</a:t>
+              <a:t>11</a:t>
             </a:fld>
             <a:endParaRPr lang="en-US"/>
           </a:p>
@@ -2999,9 +3548,9 @@
 </p:sld>
 </file>
 
-<file path=ppt/slides/slide11.xml><?xml version="1.0" encoding="utf-8"?>
+<file path=ppt/slides/slide12.xml><?xml version="1.0" encoding="utf-8"?>
 <p:sld xmlns:a="http://schemas.openxmlformats.org/drawingml/2006/main" xmlns:r="http://schemas.openxmlformats.org/officeDocument/2006/relationships" xmlns:p="http://schemas.openxmlformats.org/presentationml/2006/main">
-  <p:cSld name="Slide 11">
+  <p:cSld name="Slide 12">
     <p:spTree>
       <p:nvGrpSpPr>
         <p:cNvPr id="1" name=""/>
@@ -4367,7 +4916,7 @@
                             <a:srgbClr val="27303A"/>
                           </a:solidFill>
                         </a:rPr>
-                        <a:t>eine lokale Linux-VM mit SSH-Zugriff, ⭐ einen Container</a:t>
+                        <a:t>lokale VMs mit Multipass, deine erste automatische VM</a:t>
                       </a:r>
                       <a:endParaRPr lang="en-US" sz="1700" dirty="0"/>
                     </a:p>
@@ -6401,7 +6950,7 @@
         <p:spPr>
           <a:xfrm>
             <a:off x="548640" y="1325880"/>
-            <a:ext cx="5410048" cy="2217420"/>
+            <a:ext cx="3515258" cy="2217420"/>
           </a:xfrm>
           <a:prstGeom prst="roundRect">
             <a:avLst>
@@ -6477,7 +7026,7 @@
         <p:spPr>
           <a:xfrm>
             <a:off x="1645920" y="1600200"/>
-            <a:ext cx="4084168" cy="640080"/>
+            <a:ext cx="2189378" cy="640080"/>
           </a:xfrm>
           <a:prstGeom prst="rect">
             <a:avLst/>
@@ -6500,7 +7049,7 @@
                   <a:srgbClr val="27303A"/>
                 </a:solidFill>
               </a:rPr>
-              <a:t>Hypervisor erklären (K2)</a:t>
+              <a:t>Hypervisor (K2)</a:t>
             </a:r>
             <a:endParaRPr lang="en-US" sz="2000" dirty="0"/>
           </a:p>
@@ -6515,7 +7064,7 @@
         <p:spPr>
           <a:xfrm>
             <a:off x="822960" y="2423160"/>
-            <a:ext cx="4861408" cy="982980"/>
+            <a:ext cx="2966618" cy="982980"/>
           </a:xfrm>
           <a:prstGeom prst="rect">
             <a:avLst/>
@@ -6539,7 +7088,7 @@
                   <a:srgbClr val="27303A"/>
                 </a:solidFill>
               </a:rPr>
-              <a:t>Du erklärst, was ein Hypervisor macht, und unterscheidest Typ 1 und Typ 2.</a:t>
+              <a:t>Du erklärst, was ein Hypervisor macht, und ordnest Typ 1 und Typ 2 zu.</a:t>
             </a:r>
             <a:endParaRPr lang="en-US" sz="1600" dirty="0"/>
           </a:p>
@@ -6553,8 +7102,8 @@
         </p:nvSpPr>
         <p:spPr>
           <a:xfrm>
-            <a:off x="6233008" y="1325880"/>
-            <a:ext cx="5410048" cy="2217420"/>
+            <a:off x="4338218" y="1325880"/>
+            <a:ext cx="3515258" cy="2217420"/>
           </a:xfrm>
           <a:prstGeom prst="roundRect">
             <a:avLst>
@@ -6580,7 +7129,7 @@
         </p:nvSpPr>
         <p:spPr>
           <a:xfrm>
-            <a:off x="6507328" y="1600200"/>
+            <a:off x="4612538" y="1600200"/>
             <a:ext cx="640080" cy="640080"/>
           </a:xfrm>
           <a:prstGeom prst="ellipse">
@@ -6613,7 +7162,7 @@
         </p:blipFill>
         <p:spPr>
           <a:xfrm>
-            <a:off x="6660947" y="1753819"/>
+            <a:off x="4766158" y="1753819"/>
             <a:ext cx="332842" cy="332842"/>
           </a:xfrm>
           <a:prstGeom prst="rect">
@@ -6629,8 +7178,8 @@
         </p:nvSpPr>
         <p:spPr>
           <a:xfrm>
-            <a:off x="7330288" y="1600200"/>
-            <a:ext cx="4084168" cy="640080"/>
+            <a:off x="5435498" y="1600200"/>
+            <a:ext cx="2189378" cy="640080"/>
           </a:xfrm>
           <a:prstGeom prst="rect">
             <a:avLst/>
@@ -6653,7 +7202,7 @@
                   <a:srgbClr val="27303A"/>
                 </a:solidFill>
               </a:rPr>
-              <a:t>VM installieren (K3)</a:t>
+              <a:t>VMs mit Multipass (K3)</a:t>
             </a:r>
             <a:endParaRPr lang="en-US" sz="2000" dirty="0"/>
           </a:p>
@@ -6667,8 +7216,8 @@
         </p:nvSpPr>
         <p:spPr>
           <a:xfrm>
-            <a:off x="6507328" y="2423160"/>
-            <a:ext cx="4861408" cy="982980"/>
+            <a:off x="4612538" y="2423160"/>
+            <a:ext cx="2966618" cy="982980"/>
           </a:xfrm>
           <a:prstGeom prst="rect">
             <a:avLst/>
@@ -6692,7 +7241,7 @@
                   <a:srgbClr val="27303A"/>
                 </a:solidFill>
               </a:rPr>
-              <a:t>Du installierst eine Linux-VM und legst CPU, RAM und Disk fest.</a:t>
+              <a:t>Du erstellst, startest, stoppst und löschst VMs.</a:t>
             </a:r>
             <a:endParaRPr lang="en-US" sz="1600" dirty="0"/>
           </a:p>
@@ -6706,8 +7255,8 @@
         </p:nvSpPr>
         <p:spPr>
           <a:xfrm>
-            <a:off x="548640" y="3817620"/>
-            <a:ext cx="5410048" cy="2217420"/>
+            <a:off x="8127797" y="1325880"/>
+            <a:ext cx="3515258" cy="2217420"/>
           </a:xfrm>
           <a:prstGeom prst="roundRect">
             <a:avLst>
@@ -6727,13 +7276,13 @@
       </p:sp>
       <p:sp>
         <p:nvSpPr>
-          <p:cNvPr id="14" name="icon-kreis-FaNetworkWired"/>
+          <p:cNvPr id="14" name="icon-kreis-FaMemory"/>
           <p:cNvSpPr/>
           <p:nvPr/>
         </p:nvSpPr>
         <p:spPr>
           <a:xfrm>
-            <a:off x="822960" y="4091940"/>
+            <a:off x="8402117" y="1600200"/>
             <a:ext cx="640080" cy="640080"/>
           </a:xfrm>
           <a:prstGeom prst="ellipse">
@@ -6752,7 +7301,7 @@
       </p:sp>
       <p:pic>
         <p:nvPicPr>
-          <p:cNvPr id="15" name="icon-FaNetworkWired" descr="C:\Users\Thanam\AppData\Local\Temp\claude\c--Projekt-Trainings-azure-basics-training\a9e0bf4e-0d08-4082-a38a-5b8886538508\scratchpad\pptx\assets\icons\FaNetworkWired.png">    </p:cNvPr>
+          <p:cNvPr id="15" name="icon-FaMemory" descr="C:\Users\Thanam\AppData\Local\Temp\claude\c--Projekt-Trainings-azure-basics-training\a9e0bf4e-0d08-4082-a38a-5b8886538508\scratchpad\pptx\assets\icons\FaMemory.png">    </p:cNvPr>
           <p:cNvPicPr>
             <a:picLocks noChangeAspect="1"/>
           </p:cNvPicPr>
@@ -6766,7 +7315,7 @@
         </p:blipFill>
         <p:spPr>
           <a:xfrm>
-            <a:off x="976579" y="4245559"/>
+            <a:off x="8555736" y="1753819"/>
             <a:ext cx="332842" cy="332842"/>
           </a:xfrm>
           <a:prstGeom prst="rect">
@@ -6782,8 +7331,8 @@
         </p:nvSpPr>
         <p:spPr>
           <a:xfrm>
-            <a:off x="1645920" y="4091940"/>
-            <a:ext cx="4084168" cy="640080"/>
+            <a:off x="9225077" y="1600200"/>
+            <a:ext cx="2189378" cy="640080"/>
           </a:xfrm>
           <a:prstGeom prst="rect">
             <a:avLst/>
@@ -6806,7 +7355,7 @@
                   <a:srgbClr val="27303A"/>
                 </a:solidFill>
               </a:rPr>
-              <a:t>Netzwerk und SSH (K3/K4)</a:t>
+              <a:t>Ressourcen (K3)</a:t>
             </a:r>
             <a:endParaRPr lang="en-US" sz="2000" dirty="0"/>
           </a:p>
@@ -6820,8 +7369,8 @@
         </p:nvSpPr>
         <p:spPr>
           <a:xfrm>
-            <a:off x="822960" y="4914900"/>
-            <a:ext cx="4861408" cy="982980"/>
+            <a:off x="8402117" y="2423160"/>
+            <a:ext cx="2966618" cy="982980"/>
           </a:xfrm>
           <a:prstGeom prst="rect">
             <a:avLst/>
@@ -6845,7 +7394,7 @@
                   <a:srgbClr val="27303A"/>
                 </a:solidFill>
               </a:rPr>
-              <a:t>Du vergleichst NAT und Netzwerkbrücke und meldest dich per SSH an.</a:t>
+              <a:t>Du gibst einer VM CPU, RAM und Festplatte und prüfst es.</a:t>
             </a:r>
             <a:endParaRPr lang="en-US" sz="1600" dirty="0"/>
           </a:p>
@@ -6859,8 +7408,8 @@
         </p:nvSpPr>
         <p:spPr>
           <a:xfrm>
-            <a:off x="6233008" y="3817620"/>
-            <a:ext cx="5410048" cy="2217420"/>
+            <a:off x="548640" y="3817620"/>
+            <a:ext cx="3515258" cy="2217420"/>
           </a:xfrm>
           <a:prstGeom prst="roundRect">
             <a:avLst>
@@ -6880,13 +7429,13 @@
       </p:sp>
       <p:sp>
         <p:nvSpPr>
-          <p:cNvPr id="19" name="icon-kreis-FaCamera"/>
+          <p:cNvPr id="19" name="icon-kreis-FaRocket"/>
           <p:cNvSpPr/>
           <p:nvPr/>
         </p:nvSpPr>
         <p:spPr>
           <a:xfrm>
-            <a:off x="6507328" y="4091940"/>
+            <a:off x="822960" y="4091940"/>
             <a:ext cx="640080" cy="640080"/>
           </a:xfrm>
           <a:prstGeom prst="ellipse">
@@ -6905,7 +7454,7 @@
       </p:sp>
       <p:pic>
         <p:nvPicPr>
-          <p:cNvPr id="20" name="icon-FaCamera" descr="C:\Users\Thanam\AppData\Local\Temp\claude\c--Projekt-Trainings-azure-basics-training\a9e0bf4e-0d08-4082-a38a-5b8886538508\scratchpad\pptx\assets\icons\FaCamera.png">    </p:cNvPr>
+          <p:cNvPr id="20" name="icon-FaRocket" descr="C:\Users\Thanam\AppData\Local\Temp\claude\c--Projekt-Trainings-azure-basics-training\a9e0bf4e-0d08-4082-a38a-5b8886538508\scratchpad\pptx\assets\icons\FaRocket.png">    </p:cNvPr>
           <p:cNvPicPr>
             <a:picLocks noChangeAspect="1"/>
           </p:cNvPicPr>
@@ -6919,7 +7468,7 @@
         </p:blipFill>
         <p:spPr>
           <a:xfrm>
-            <a:off x="6660947" y="4245559"/>
+            <a:off x="976579" y="4245559"/>
             <a:ext cx="332842" cy="332842"/>
           </a:xfrm>
           <a:prstGeom prst="rect">
@@ -6935,8 +7484,8 @@
         </p:nvSpPr>
         <p:spPr>
           <a:xfrm>
-            <a:off x="7330288" y="4091940"/>
-            <a:ext cx="4084168" cy="640080"/>
+            <a:off x="1645920" y="4091940"/>
+            <a:ext cx="2189378" cy="640080"/>
           </a:xfrm>
           <a:prstGeom prst="rect">
             <a:avLst/>
@@ -6959,7 +7508,7 @@
                   <a:srgbClr val="27303A"/>
                 </a:solidFill>
               </a:rPr>
-              <a:t>Snapshots (K3)</a:t>
+              <a:t>cloud-init (K3)</a:t>
             </a:r>
             <a:endParaRPr lang="en-US" sz="2000" dirty="0"/>
           </a:p>
@@ -6973,8 +7522,8 @@
         </p:nvSpPr>
         <p:spPr>
           <a:xfrm>
-            <a:off x="6507328" y="4914900"/>
-            <a:ext cx="4861408" cy="982980"/>
+            <a:off x="822960" y="4914900"/>
+            <a:ext cx="2966618" cy="982980"/>
           </a:xfrm>
           <a:prstGeom prst="rect">
             <a:avLst/>
@@ -6998,7 +7547,160 @@
                   <a:srgbClr val="27303A"/>
                 </a:solidFill>
               </a:rPr>
-              <a:t>Du stellst mit einem Snapshot einen früheren Zustand wieder her.</a:t>
+              <a:t>Du richtest eine VM automatisch mit einer Datei ein.</a:t>
+            </a:r>
+            <a:endParaRPr lang="en-US" sz="1600" dirty="0"/>
+          </a:p>
+        </p:txBody>
+      </p:sp>
+      <p:sp>
+        <p:nvSpPr>
+          <p:cNvPr id="23" name="karte"/>
+          <p:cNvSpPr/>
+          <p:nvPr/>
+        </p:nvSpPr>
+        <p:spPr>
+          <a:xfrm>
+            <a:off x="4338218" y="3817620"/>
+            <a:ext cx="3515258" cy="2217420"/>
+          </a:xfrm>
+          <a:prstGeom prst="roundRect">
+            <a:avLst>
+              <a:gd name="adj" fmla="val 4948"/>
+            </a:avLst>
+          </a:prstGeom>
+          <a:solidFill>
+            <a:srgbClr val="F7F7F7"/>
+          </a:solidFill>
+          <a:ln w="12700">
+            <a:solidFill>
+              <a:srgbClr val="F7F7F7"/>
+            </a:solidFill>
+            <a:prstDash val="solid"/>
+          </a:ln>
+        </p:spPr>
+      </p:sp>
+      <p:sp>
+        <p:nvSpPr>
+          <p:cNvPr id="24" name="icon-kreis-FaKey"/>
+          <p:cNvSpPr/>
+          <p:nvPr/>
+        </p:nvSpPr>
+        <p:spPr>
+          <a:xfrm>
+            <a:off x="4612538" y="4091940"/>
+            <a:ext cx="640080" cy="640080"/>
+          </a:xfrm>
+          <a:prstGeom prst="ellipse">
+            <a:avLst/>
+          </a:prstGeom>
+          <a:solidFill>
+            <a:srgbClr val="006FAD"/>
+          </a:solidFill>
+          <a:ln w="12700">
+            <a:solidFill>
+              <a:srgbClr val="006FAD"/>
+            </a:solidFill>
+            <a:prstDash val="solid"/>
+          </a:ln>
+        </p:spPr>
+      </p:sp>
+      <p:pic>
+        <p:nvPicPr>
+          <p:cNvPr id="25" name="icon-FaKey" descr="C:\Users\Thanam\AppData\Local\Temp\claude\c--Projekt-Trainings-azure-basics-training\a9e0bf4e-0d08-4082-a38a-5b8886538508\scratchpad\pptx\assets\icons\FaKey.png">    </p:cNvPr>
+          <p:cNvPicPr>
+            <a:picLocks noChangeAspect="1"/>
+          </p:cNvPicPr>
+          <p:nvPr/>
+        </p:nvPicPr>
+        <p:blipFill>
+          <a:blip r:embed="rId5"/>
+          <a:stretch>
+            <a:fillRect/>
+          </a:stretch>
+        </p:blipFill>
+        <p:spPr>
+          <a:xfrm>
+            <a:off x="4766158" y="4245559"/>
+            <a:ext cx="332842" cy="332842"/>
+          </a:xfrm>
+          <a:prstGeom prst="rect">
+            <a:avLst/>
+          </a:prstGeom>
+        </p:spPr>
+      </p:pic>
+      <p:sp>
+        <p:nvSpPr>
+          <p:cNvPr id="26" name="Text 19"/>
+          <p:cNvSpPr txBox="1"/>
+          <p:nvPr/>
+        </p:nvSpPr>
+        <p:spPr>
+          <a:xfrm>
+            <a:off x="5435498" y="4091940"/>
+            <a:ext cx="2189378" cy="640080"/>
+          </a:xfrm>
+          <a:prstGeom prst="rect">
+            <a:avLst/>
+          </a:prstGeom>
+          <a:noFill/>
+          <a:ln/>
+        </p:spPr>
+        <p:txBody>
+          <a:bodyPr wrap="square" lIns="0" tIns="0" rIns="0" bIns="0" rtlCol="0" anchor="ctr">
+            <a:normAutofit/>
+          </a:bodyPr>
+          <a:lstStyle/>
+          <a:p>
+            <a:pPr indent="0" marL="0">
+              <a:buNone/>
+            </a:pPr>
+            <a:r>
+              <a:rPr lang="en-US" sz="2000" b="1" dirty="0">
+                <a:solidFill>
+                  <a:srgbClr val="27303A"/>
+                </a:solidFill>
+              </a:rPr>
+              <a:t>SSH-Schlüssel (K3)</a:t>
+            </a:r>
+            <a:endParaRPr lang="en-US" sz="2000" dirty="0"/>
+          </a:p>
+        </p:txBody>
+      </p:sp>
+      <p:sp>
+        <p:nvSpPr>
+          <p:cNvPr id="27" name="Text 20"/>
+          <p:cNvSpPr txBox="1"/>
+          <p:nvPr/>
+        </p:nvSpPr>
+        <p:spPr>
+          <a:xfrm>
+            <a:off x="4612538" y="4914900"/>
+            <a:ext cx="2966618" cy="982980"/>
+          </a:xfrm>
+          <a:prstGeom prst="rect">
+            <a:avLst/>
+          </a:prstGeom>
+          <a:noFill/>
+          <a:ln/>
+        </p:spPr>
+        <p:txBody>
+          <a:bodyPr wrap="square" lIns="0" tIns="0" rIns="0" bIns="0" rtlCol="0" anchor="t"/>
+          <a:lstStyle/>
+          <a:p>
+            <a:pPr indent="0" marL="0">
+              <a:spcAft>
+                <a:spcPts val="400"/>
+              </a:spcAft>
+              <a:buNone/>
+            </a:pPr>
+            <a:r>
+              <a:rPr lang="en-US" sz="1600" dirty="0">
+                <a:solidFill>
+                  <a:srgbClr val="27303A"/>
+                </a:solidFill>
+              </a:rPr>
+              <a:t>Du erstellst ein Schlüsselpaar für die Cloud.</a:t>
             </a:r>
             <a:endParaRPr lang="en-US" sz="1600" dirty="0"/>
           </a:p>
@@ -7585,7 +8287,7 @@
                             <a:srgbClr val="27303A"/>
                           </a:solidFill>
                         </a:rPr>
-                        <a:t>Hands-on</a:t>
+                        <a:t>Hands-on, Demo</a:t>
                       </a:r>
                       <a:endParaRPr lang="en-US" sz="1700" dirty="0"/>
                     </a:p>
@@ -7646,7 +8348,7 @@
                             <a:srgbClr val="27303A"/>
                           </a:solidFill>
                         </a:rPr>
-                        <a:t>Auftrag 1.1: Hypervisor und dein Laptop</a:t>
+                        <a:t>Auftrag 1.1: Hypervisor und dein Laptop · Live-Demo Multipass</a:t>
                       </a:r>
                       <a:endParaRPr lang="en-US" sz="1700" dirty="0"/>
                     </a:p>
@@ -7831,7 +8533,7 @@
                             <a:srgbClr val="27303A"/>
                           </a:solidFill>
                         </a:rPr>
-                        <a:t>Auftrag 1.2: Ubuntu-Server-VM installieren</a:t>
+                        <a:t>Auftrag 1.2: Multipass und deine erste VM · 1.3: CPU und RAM</a:t>
                       </a:r>
                       <a:endParaRPr lang="en-US" sz="1700" dirty="0"/>
                     </a:p>
@@ -7955,7 +8657,7 @@
                             <a:srgbClr val="27303A"/>
                           </a:solidFill>
                         </a:rPr>
-                        <a:t>Input 2</a:t>
+                        <a:t>Input</a:t>
                       </a:r>
                       <a:endParaRPr lang="en-US" sz="1700" dirty="0"/>
                     </a:p>
@@ -8016,7 +8718,7 @@
                             <a:srgbClr val="27303A"/>
                           </a:solidFill>
                         </a:rPr>
-                        <a:t>VM-Netzwerk: NAT, Brücke, Portweiterleitung, SSH</a:t>
+                        <a:t>Automatisch statt von Hand: cloud-init</a:t>
                       </a:r>
                       <a:endParaRPr lang="en-US" sz="1700" dirty="0"/>
                     </a:p>
@@ -8201,7 +8903,7 @@
                             <a:srgbClr val="27303A"/>
                           </a:solidFill>
                         </a:rPr>
-                        <a:t>Auftrag 1.3: Netzwerk und SSH</a:t>
+                        <a:t>Auftrag 1.4: Deine erste automatische VM</a:t>
                       </a:r>
                       <a:endParaRPr lang="en-US" sz="1700" dirty="0"/>
                     </a:p>
@@ -8386,7 +9088,7 @@
                             <a:srgbClr val="27303A"/>
                           </a:solidFill>
                         </a:rPr>
-                        <a:t>Auftrag 1.4: Snapshot, Klon und Ressourcen · ⭐ 1.5: Container mit Docker</a:t>
+                        <a:t>Auftrag 1.5: SSH-Schlüssel · ⭐ 1.6: Container mit Docker</a:t>
                       </a:r>
                       <a:endParaRPr lang="en-US" sz="1700" dirty="0"/>
                     </a:p>
@@ -8510,7 +9212,7 @@
                             <a:srgbClr val="27303A"/>
                           </a:solidFill>
                         </a:rPr>
-                        <a:t>Input 3, Abschluss</a:t>
+                        <a:t>Input, Abschluss</a:t>
                       </a:r>
                       <a:endParaRPr lang="en-US" sz="1700" dirty="0"/>
                     </a:p>
@@ -9142,7 +9844,7 @@
                             <a:srgbClr val="27303A"/>
                           </a:solidFill>
                         </a:rPr>
-                        <a:t>45 Min.</a:t>
+                        <a:t>30 Min.</a:t>
                       </a:r>
                       <a:endParaRPr lang="en-US" sz="1700" dirty="0"/>
                     </a:p>
@@ -9327,7 +10029,7 @@
                             <a:srgbClr val="27303A"/>
                           </a:solidFill>
                         </a:rPr>
-                        <a:t>Ubuntu-Server-VM installieren</a:t>
+                        <a:t>Multipass und deine erste VM</a:t>
                       </a:r>
                       <a:endParaRPr lang="en-US" sz="1700" dirty="0"/>
                     </a:p>
@@ -9388,7 +10090,7 @@
                             <a:srgbClr val="27303A"/>
                           </a:solidFill>
                         </a:rPr>
-                        <a:t>90 Min.</a:t>
+                        <a:t>60 Min.</a:t>
                       </a:r>
                       <a:endParaRPr lang="en-US" sz="1700" dirty="0"/>
                     </a:p>
@@ -9573,7 +10275,7 @@
                             <a:srgbClr val="27303A"/>
                           </a:solidFill>
                         </a:rPr>
-                        <a:t>Netzwerk und SSH</a:t>
+                        <a:t>Wie viel CPU und RAM bekommt eine VM?</a:t>
                       </a:r>
                       <a:endParaRPr lang="en-US" sz="1700" dirty="0"/>
                     </a:p>
@@ -9634,7 +10336,7 @@
                             <a:srgbClr val="27303A"/>
                           </a:solidFill>
                         </a:rPr>
-                        <a:t>75 Min.</a:t>
+                        <a:t>30 Min.</a:t>
                       </a:r>
                       <a:endParaRPr lang="en-US" sz="1700" dirty="0"/>
                     </a:p>
@@ -9695,7 +10397,7 @@
                             <a:srgbClr val="27303A"/>
                           </a:solidFill>
                         </a:rPr>
-                        <a:t>Einzel + Partner</a:t>
+                        <a:t>Einzel</a:t>
                       </a:r>
                       <a:endParaRPr lang="en-US" sz="1700" dirty="0"/>
                     </a:p>
@@ -9819,7 +10521,7 @@
                             <a:srgbClr val="27303A"/>
                           </a:solidFill>
                         </a:rPr>
-                        <a:t>Snapshot, Klon und Ressourcen</a:t>
+                        <a:t>Deine erste automatische VM mit cloud-init</a:t>
                       </a:r>
                       <a:endParaRPr lang="en-US" sz="1700" dirty="0"/>
                     </a:p>
@@ -9880,7 +10582,7 @@
                             <a:srgbClr val="27303A"/>
                           </a:solidFill>
                         </a:rPr>
-                        <a:t>45 Min.</a:t>
+                        <a:t>60 Min.</a:t>
                       </a:r>
                       <a:endParaRPr lang="en-US" sz="1700" dirty="0"/>
                     </a:p>
@@ -10004,7 +10706,7 @@
                             <a:srgbClr val="27303A"/>
                           </a:solidFill>
                         </a:rPr>
-                        <a:t>⭐ 1.5</a:t>
+                        <a:t>1.5</a:t>
                       </a:r>
                       <a:endParaRPr lang="en-US" sz="1700" dirty="0"/>
                     </a:p>
@@ -10065,7 +10767,7 @@
                             <a:srgbClr val="27303A"/>
                           </a:solidFill>
                         </a:rPr>
-                        <a:t>Container mit Docker</a:t>
+                        <a:t>SSH-Schlüssel für die Cloud vorbereiten</a:t>
                       </a:r>
                       <a:endParaRPr lang="en-US" sz="1700" dirty="0"/>
                     </a:p>
@@ -10126,7 +10828,7 @@
                             <a:srgbClr val="27303A"/>
                           </a:solidFill>
                         </a:rPr>
-                        <a:t>45 Min.</a:t>
+                        <a:t>20 Min.</a:t>
                       </a:r>
                       <a:endParaRPr lang="en-US" sz="1700" dirty="0"/>
                     </a:p>
@@ -10235,6 +10937,252 @@
                   </a:tcPr>
                 </a:tc>
               </a:tr>
+              <a:tr h="0">
+                <a:tc>
+                  <a:txBody>
+                    <a:bodyPr/>
+                    <a:lstStyle/>
+                    <a:p>
+                      <a:pPr indent="0" marL="0">
+                        <a:buNone/>
+                      </a:pPr>
+                      <a:r>
+                        <a:rPr lang="en-US" sz="1700" dirty="0">
+                          <a:solidFill>
+                            <a:srgbClr val="27303A"/>
+                          </a:solidFill>
+                        </a:rPr>
+                        <a:t>⭐ 1.6</a:t>
+                      </a:r>
+                      <a:endParaRPr lang="en-US" sz="1700" dirty="0"/>
+                    </a:p>
+                  </a:txBody>
+                  <a:tcPr marL="127000" marR="127000" marT="88900" marB="88900" anchor="ctr">
+                    <a:lnL w="9525" cap="flat" cmpd="sng" algn="ctr">
+                      <a:solidFill>
+                        <a:srgbClr val="D5D8F4"/>
+                      </a:solidFill>
+                      <a:prstDash val="solid"/>
+                      <a:round/>
+                      <a:headEnd type="none" w="med" len="med"/>
+                      <a:tailEnd type="none" w="med" len="med"/>
+                    </a:lnL>
+                    <a:lnR w="9525" cap="flat" cmpd="sng" algn="ctr">
+                      <a:solidFill>
+                        <a:srgbClr val="D5D8F4"/>
+                      </a:solidFill>
+                      <a:prstDash val="solid"/>
+                      <a:round/>
+                      <a:headEnd type="none" w="med" len="med"/>
+                      <a:tailEnd type="none" w="med" len="med"/>
+                    </a:lnR>
+                    <a:lnT w="9525" cap="flat" cmpd="sng" algn="ctr">
+                      <a:solidFill>
+                        <a:srgbClr val="D5D8F4"/>
+                      </a:solidFill>
+                      <a:prstDash val="solid"/>
+                      <a:round/>
+                      <a:headEnd type="none" w="med" len="med"/>
+                      <a:tailEnd type="none" w="med" len="med"/>
+                    </a:lnT>
+                    <a:lnB w="9525" cap="flat" cmpd="sng" algn="ctr">
+                      <a:solidFill>
+                        <a:srgbClr val="D5D8F4"/>
+                      </a:solidFill>
+                      <a:prstDash val="solid"/>
+                      <a:round/>
+                      <a:headEnd type="none" w="med" len="med"/>
+                      <a:tailEnd type="none" w="med" len="med"/>
+                    </a:lnB>
+                    <a:solidFill>
+                      <a:srgbClr val="FFFFFF"/>
+                    </a:solidFill>
+                  </a:tcPr>
+                </a:tc>
+                <a:tc>
+                  <a:txBody>
+                    <a:bodyPr/>
+                    <a:lstStyle/>
+                    <a:p>
+                      <a:pPr indent="0" marL="0">
+                        <a:buNone/>
+                      </a:pPr>
+                      <a:r>
+                        <a:rPr lang="en-US" sz="1700" dirty="0">
+                          <a:solidFill>
+                            <a:srgbClr val="27303A"/>
+                          </a:solidFill>
+                        </a:rPr>
+                        <a:t>Container mit Docker</a:t>
+                      </a:r>
+                      <a:endParaRPr lang="en-US" sz="1700" dirty="0"/>
+                    </a:p>
+                  </a:txBody>
+                  <a:tcPr marL="127000" marR="127000" marT="88900" marB="88900" anchor="ctr">
+                    <a:lnL w="9525" cap="flat" cmpd="sng" algn="ctr">
+                      <a:solidFill>
+                        <a:srgbClr val="D5D8F4"/>
+                      </a:solidFill>
+                      <a:prstDash val="solid"/>
+                      <a:round/>
+                      <a:headEnd type="none" w="med" len="med"/>
+                      <a:tailEnd type="none" w="med" len="med"/>
+                    </a:lnL>
+                    <a:lnR w="9525" cap="flat" cmpd="sng" algn="ctr">
+                      <a:solidFill>
+                        <a:srgbClr val="D5D8F4"/>
+                      </a:solidFill>
+                      <a:prstDash val="solid"/>
+                      <a:round/>
+                      <a:headEnd type="none" w="med" len="med"/>
+                      <a:tailEnd type="none" w="med" len="med"/>
+                    </a:lnR>
+                    <a:lnT w="9525" cap="flat" cmpd="sng" algn="ctr">
+                      <a:solidFill>
+                        <a:srgbClr val="D5D8F4"/>
+                      </a:solidFill>
+                      <a:prstDash val="solid"/>
+                      <a:round/>
+                      <a:headEnd type="none" w="med" len="med"/>
+                      <a:tailEnd type="none" w="med" len="med"/>
+                    </a:lnT>
+                    <a:lnB w="9525" cap="flat" cmpd="sng" algn="ctr">
+                      <a:solidFill>
+                        <a:srgbClr val="D5D8F4"/>
+                      </a:solidFill>
+                      <a:prstDash val="solid"/>
+                      <a:round/>
+                      <a:headEnd type="none" w="med" len="med"/>
+                      <a:tailEnd type="none" w="med" len="med"/>
+                    </a:lnB>
+                    <a:solidFill>
+                      <a:srgbClr val="FFFFFF"/>
+                    </a:solidFill>
+                  </a:tcPr>
+                </a:tc>
+                <a:tc>
+                  <a:txBody>
+                    <a:bodyPr/>
+                    <a:lstStyle/>
+                    <a:p>
+                      <a:pPr indent="0" marL="0">
+                        <a:buNone/>
+                      </a:pPr>
+                      <a:r>
+                        <a:rPr lang="en-US" sz="1700" dirty="0">
+                          <a:solidFill>
+                            <a:srgbClr val="27303A"/>
+                          </a:solidFill>
+                        </a:rPr>
+                        <a:t>30 Min.</a:t>
+                      </a:r>
+                      <a:endParaRPr lang="en-US" sz="1700" dirty="0"/>
+                    </a:p>
+                  </a:txBody>
+                  <a:tcPr marL="127000" marR="127000" marT="88900" marB="88900" anchor="ctr">
+                    <a:lnL w="9525" cap="flat" cmpd="sng" algn="ctr">
+                      <a:solidFill>
+                        <a:srgbClr val="D5D8F4"/>
+                      </a:solidFill>
+                      <a:prstDash val="solid"/>
+                      <a:round/>
+                      <a:headEnd type="none" w="med" len="med"/>
+                      <a:tailEnd type="none" w="med" len="med"/>
+                    </a:lnL>
+                    <a:lnR w="9525" cap="flat" cmpd="sng" algn="ctr">
+                      <a:solidFill>
+                        <a:srgbClr val="D5D8F4"/>
+                      </a:solidFill>
+                      <a:prstDash val="solid"/>
+                      <a:round/>
+                      <a:headEnd type="none" w="med" len="med"/>
+                      <a:tailEnd type="none" w="med" len="med"/>
+                    </a:lnR>
+                    <a:lnT w="9525" cap="flat" cmpd="sng" algn="ctr">
+                      <a:solidFill>
+                        <a:srgbClr val="D5D8F4"/>
+                      </a:solidFill>
+                      <a:prstDash val="solid"/>
+                      <a:round/>
+                      <a:headEnd type="none" w="med" len="med"/>
+                      <a:tailEnd type="none" w="med" len="med"/>
+                    </a:lnT>
+                    <a:lnB w="9525" cap="flat" cmpd="sng" algn="ctr">
+                      <a:solidFill>
+                        <a:srgbClr val="D5D8F4"/>
+                      </a:solidFill>
+                      <a:prstDash val="solid"/>
+                      <a:round/>
+                      <a:headEnd type="none" w="med" len="med"/>
+                      <a:tailEnd type="none" w="med" len="med"/>
+                    </a:lnB>
+                    <a:solidFill>
+                      <a:srgbClr val="FFFFFF"/>
+                    </a:solidFill>
+                  </a:tcPr>
+                </a:tc>
+                <a:tc>
+                  <a:txBody>
+                    <a:bodyPr/>
+                    <a:lstStyle/>
+                    <a:p>
+                      <a:pPr indent="0" marL="0">
+                        <a:buNone/>
+                      </a:pPr>
+                      <a:r>
+                        <a:rPr lang="en-US" sz="1700" dirty="0">
+                          <a:solidFill>
+                            <a:srgbClr val="27303A"/>
+                          </a:solidFill>
+                        </a:rPr>
+                        <a:t>Einzel</a:t>
+                      </a:r>
+                      <a:endParaRPr lang="en-US" sz="1700" dirty="0"/>
+                    </a:p>
+                  </a:txBody>
+                  <a:tcPr marL="127000" marR="127000" marT="88900" marB="88900" anchor="ctr">
+                    <a:lnL w="9525" cap="flat" cmpd="sng" algn="ctr">
+                      <a:solidFill>
+                        <a:srgbClr val="D5D8F4"/>
+                      </a:solidFill>
+                      <a:prstDash val="solid"/>
+                      <a:round/>
+                      <a:headEnd type="none" w="med" len="med"/>
+                      <a:tailEnd type="none" w="med" len="med"/>
+                    </a:lnL>
+                    <a:lnR w="9525" cap="flat" cmpd="sng" algn="ctr">
+                      <a:solidFill>
+                        <a:srgbClr val="D5D8F4"/>
+                      </a:solidFill>
+                      <a:prstDash val="solid"/>
+                      <a:round/>
+                      <a:headEnd type="none" w="med" len="med"/>
+                      <a:tailEnd type="none" w="med" len="med"/>
+                    </a:lnR>
+                    <a:lnT w="9525" cap="flat" cmpd="sng" algn="ctr">
+                      <a:solidFill>
+                        <a:srgbClr val="D5D8F4"/>
+                      </a:solidFill>
+                      <a:prstDash val="solid"/>
+                      <a:round/>
+                      <a:headEnd type="none" w="med" len="med"/>
+                      <a:tailEnd type="none" w="med" len="med"/>
+                    </a:lnT>
+                    <a:lnB w="9525" cap="flat" cmpd="sng" algn="ctr">
+                      <a:solidFill>
+                        <a:srgbClr val="D5D8F4"/>
+                      </a:solidFill>
+                      <a:prstDash val="solid"/>
+                      <a:round/>
+                      <a:headEnd type="none" w="med" len="med"/>
+                      <a:tailEnd type="none" w="med" len="med"/>
+                    </a:lnB>
+                    <a:solidFill>
+                      <a:srgbClr val="FFFFFF"/>
+                    </a:solidFill>
+                  </a:tcPr>
+                </a:tc>
+              </a:tr>
             </a:tbl>
           </a:graphicData>
         </a:graphic>
@@ -10484,7 +11432,7 @@
       </p:sp>
       <p:sp>
         <p:nvSpPr>
-          <p:cNvPr id="6" name="icon-kreis-FaHdd"/>
+          <p:cNvPr id="6" name="icon-kreis-FaLaptop"/>
           <p:cNvSpPr/>
           <p:nvPr/>
         </p:nvSpPr>
@@ -10509,7 +11457,7 @@
       </p:sp>
       <p:pic>
         <p:nvPicPr>
-          <p:cNvPr id="7" name="icon-FaHdd" descr="C:\Users\Thanam\AppData\Local\Temp\claude\c--Projekt-Trainings-azure-basics-training\a9e0bf4e-0d08-4082-a38a-5b8886538508\scratchpad\pptx\assets\icons\FaHdd.png">    </p:cNvPr>
+          <p:cNvPr id="7" name="icon-FaLaptop" descr="C:\Users\Thanam\AppData\Local\Temp\claude\c--Projekt-Trainings-azure-basics-training\a9e0bf4e-0d08-4082-a38a-5b8886538508\scratchpad\pptx\assets\icons\FaLaptop.png">    </p:cNvPr>
           <p:cNvPicPr>
             <a:picLocks noChangeAspect="1"/>
           </p:cNvPicPr>
@@ -10540,6 +11488,105 @@
         <p:spPr>
           <a:xfrm>
             <a:off x="1325880" y="3200400"/>
+            <a:ext cx="10317175" cy="960120"/>
+          </a:xfrm>
+          <a:prstGeom prst="rect">
+            <a:avLst/>
+          </a:prstGeom>
+          <a:noFill/>
+          <a:ln/>
+        </p:spPr>
+        <p:txBody>
+          <a:bodyPr wrap="square" lIns="0" tIns="0" rIns="0" bIns="0" rtlCol="0" anchor="ctr"/>
+          <a:lstStyle/>
+          <a:p>
+            <a:pPr indent="0" marL="0">
+              <a:buNone/>
+            </a:pPr>
+            <a:r>
+              <a:rPr lang="en-US" sz="1800" b="1" dirty="0">
+                <a:solidFill>
+                  <a:srgbClr val="27303A"/>
+                </a:solidFill>
+              </a:rPr>
+              <a:t>Windows Pro oder Education?</a:t>
+            </a:r>
+            <a:endParaRPr lang="en-US" sz="1800" dirty="0"/>
+          </a:p>
+          <a:p>
+            <a:pPr indent="0" marL="0">
+              <a:buNone/>
+            </a:pPr>
+            <a:r>
+              <a:rPr lang="en-US" sz="1800" dirty="0">
+                <a:solidFill>
+                  <a:srgbClr val="6F6F6F"/>
+                </a:solidFill>
+              </a:rPr>
+              <a:t>Dann ist Hyper-V eingebaut. Bei Windows Home: Kursleitung holen.</a:t>
+            </a:r>
+            <a:endParaRPr lang="en-US" sz="1800" dirty="0"/>
+          </a:p>
+        </p:txBody>
+      </p:sp>
+      <p:sp>
+        <p:nvSpPr>
+          <p:cNvPr id="9" name="icon-kreis-FaHdd"/>
+          <p:cNvSpPr/>
+          <p:nvPr/>
+        </p:nvSpPr>
+        <p:spPr>
+          <a:xfrm>
+            <a:off x="548640" y="4366260"/>
+            <a:ext cx="548640" cy="548640"/>
+          </a:xfrm>
+          <a:prstGeom prst="ellipse">
+            <a:avLst/>
+          </a:prstGeom>
+          <a:solidFill>
+            <a:srgbClr val="006FAD"/>
+          </a:solidFill>
+          <a:ln w="12700">
+            <a:solidFill>
+              <a:srgbClr val="006FAD"/>
+            </a:solidFill>
+            <a:prstDash val="solid"/>
+          </a:ln>
+        </p:spPr>
+      </p:sp>
+      <p:pic>
+        <p:nvPicPr>
+          <p:cNvPr id="10" name="icon-FaHdd" descr="C:\Users\Thanam\AppData\Local\Temp\claude\c--Projekt-Trainings-azure-basics-training\a9e0bf4e-0d08-4082-a38a-5b8886538508\scratchpad\pptx\assets\icons\FaHdd.png">    </p:cNvPr>
+          <p:cNvPicPr>
+            <a:picLocks noChangeAspect="1"/>
+          </p:cNvPicPr>
+          <p:nvPr/>
+        </p:nvPicPr>
+        <p:blipFill>
+          <a:blip r:embed="rId3"/>
+          <a:stretch>
+            <a:fillRect/>
+          </a:stretch>
+        </p:blipFill>
+        <p:spPr>
+          <a:xfrm>
+            <a:off x="680314" y="4497934"/>
+            <a:ext cx="285293" cy="285293"/>
+          </a:xfrm>
+          <a:prstGeom prst="rect">
+            <a:avLst/>
+          </a:prstGeom>
+        </p:spPr>
+      </p:pic>
+      <p:sp>
+        <p:nvSpPr>
+          <p:cNvPr id="11" name="Text 6"/>
+          <p:cNvSpPr txBox="1"/>
+          <p:nvPr/>
+        </p:nvSpPr>
+        <p:spPr>
+          <a:xfrm>
+            <a:off x="1325880" y="4160520"/>
             <a:ext cx="10317175" cy="960120"/>
           </a:xfrm>
           <a:prstGeom prst="rect">
@@ -10575,106 +11622,7 @@
                   <a:srgbClr val="6F6F6F"/>
                 </a:solidFill>
               </a:rPr>
-              <a:t>Mindestens 25 GB frei für VM und ISO-Datei</a:t>
-            </a:r>
-            <a:endParaRPr lang="en-US" sz="1800" dirty="0"/>
-          </a:p>
-        </p:txBody>
-      </p:sp>
-      <p:sp>
-        <p:nvSpPr>
-          <p:cNvPr id="9" name="icon-kreis-FaArchive"/>
-          <p:cNvSpPr/>
-          <p:nvPr/>
-        </p:nvSpPr>
-        <p:spPr>
-          <a:xfrm>
-            <a:off x="548640" y="4366260"/>
-            <a:ext cx="548640" cy="548640"/>
-          </a:xfrm>
-          <a:prstGeom prst="ellipse">
-            <a:avLst/>
-          </a:prstGeom>
-          <a:solidFill>
-            <a:srgbClr val="006FAD"/>
-          </a:solidFill>
-          <a:ln w="12700">
-            <a:solidFill>
-              <a:srgbClr val="006FAD"/>
-            </a:solidFill>
-            <a:prstDash val="solid"/>
-          </a:ln>
-        </p:spPr>
-      </p:sp>
-      <p:pic>
-        <p:nvPicPr>
-          <p:cNvPr id="10" name="icon-FaArchive" descr="C:\Users\Thanam\AppData\Local\Temp\claude\c--Projekt-Trainings-azure-basics-training\a9e0bf4e-0d08-4082-a38a-5b8886538508\scratchpad\pptx\assets\icons\FaArchive.png">    </p:cNvPr>
-          <p:cNvPicPr>
-            <a:picLocks noChangeAspect="1"/>
-          </p:cNvPicPr>
-          <p:nvPr/>
-        </p:nvPicPr>
-        <p:blipFill>
-          <a:blip r:embed="rId3"/>
-          <a:stretch>
-            <a:fillRect/>
-          </a:stretch>
-        </p:blipFill>
-        <p:spPr>
-          <a:xfrm>
-            <a:off x="680314" y="4497934"/>
-            <a:ext cx="285293" cy="285293"/>
-          </a:xfrm>
-          <a:prstGeom prst="rect">
-            <a:avLst/>
-          </a:prstGeom>
-        </p:spPr>
-      </p:pic>
-      <p:sp>
-        <p:nvSpPr>
-          <p:cNvPr id="11" name="Text 6"/>
-          <p:cNvSpPr txBox="1"/>
-          <p:nvPr/>
-        </p:nvSpPr>
-        <p:spPr>
-          <a:xfrm>
-            <a:off x="1325880" y="4160520"/>
-            <a:ext cx="10317175" cy="960120"/>
-          </a:xfrm>
-          <a:prstGeom prst="rect">
-            <a:avLst/>
-          </a:prstGeom>
-          <a:noFill/>
-          <a:ln/>
-        </p:spPr>
-        <p:txBody>
-          <a:bodyPr wrap="square" lIns="0" tIns="0" rIns="0" bIns="0" rtlCol="0" anchor="ctr"/>
-          <a:lstStyle/>
-          <a:p>
-            <a:pPr indent="0" marL="0">
-              <a:buNone/>
-            </a:pPr>
-            <a:r>
-              <a:rPr lang="en-US" sz="1800" b="1" dirty="0">
-                <a:solidFill>
-                  <a:srgbClr val="27303A"/>
-                </a:solidFill>
-              </a:rPr>
-              <a:t>ISO bereit?</a:t>
-            </a:r>
-            <a:endParaRPr lang="en-US" sz="1800" dirty="0"/>
-          </a:p>
-          <a:p>
-            <a:pPr indent="0" marL="0">
-              <a:buNone/>
-            </a:pPr>
-            <a:r>
-              <a:rPr lang="en-US" sz="1800" dirty="0">
-                <a:solidFill>
-                  <a:srgbClr val="6F6F6F"/>
-                </a:solidFill>
-              </a:rPr>
-              <a:t>Ubuntu Server LTS vom USB-Stick der Kursleitung kopieren – nicht alle gleichzeitig herunterladen</a:t>
+              <a:t>Mindestens 15 GB frei. Multipass lädt Ubuntu selbst herunter.</a:t>
             </a:r>
             <a:endParaRPr lang="en-US" sz="1800" dirty="0"/>
           </a:p>

--- a/praesentationen/tag-1-virtualisierung.pptx
+++ b/praesentationen/tag-1-virtualisierung.pptx
@@ -118,7 +118,7 @@
   <p:extLst>
     <p:ext uri="{521415D9-36F7-43E2-AB2F-B90AF26B5E84}">
       <p14:sectionLst xmlns:p14="http://schemas.microsoft.com/office/powerpoint/2010/main">
-        <p14:section name="Start" id="{f00fff78-a5f8-bf56-2202-e1b35318b053}">
+        <p14:section name="Start" id="{b587953e-87f7-dd1e-5168-8d25b3295529}">
           <p14:sldIdLst>
             <p14:sldId id="256"/>
             <p14:sldId id="257"/>
@@ -127,7 +127,7 @@
             <p14:sldId id="260"/>
           </p14:sldIdLst>
         </p14:section>
-        <p14:section name="Heute" id="{ca6ad41d-2f2f-5cee-7e10-ffc3c7cd9581}">
+        <p14:section name="Heute" id="{e16aeae7-d49d-2b77-9bd4-710523b0f551}">
           <p14:sldIdLst>
             <p14:sldId id="261"/>
             <p14:sldId id="262"/>
@@ -136,7 +136,7 @@
             <p14:sldId id="265"/>
           </p14:sldIdLst>
         </p14:section>
-        <p14:section name="Abschluss" id="{9846700f-24d2-a037-eb1f-e11c37622c8a}">
+        <p14:section name="Abschluss" id="{d1cc3d9a-70e6-e6b5-5013-1dd9e36094de}">
           <p14:sldIdLst>
             <p14:sldId id="266"/>
             <p14:sldId id="267"/>
@@ -5286,7 +5286,7 @@
                             <a:srgbClr val="27303A"/>
                           </a:solidFill>
                         </a:rPr>
-                        <a:t>eine Linux-VM in Azure und einen Storage Account</a:t>
+                        <a:t>eine Linux-VM in Azure und ein Speicherkonto</a:t>
                       </a:r>
                       <a:endParaRPr lang="en-US" sz="1700" dirty="0"/>
                     </a:p>

--- a/praesentationen/tag-1-virtualisierung.pptx
+++ b/praesentationen/tag-1-virtualisierung.pptx
@@ -14,12 +14,9 @@
     <p:sldId id="262" r:id="rId8"/>
     <p:sldId id="263" r:id="rId9"/>
     <p:sldId id="264" r:id="rId10"/>
-    <p:sldId id="265" r:id="rId11"/>
-    <p:sldId id="266" r:id="rId12"/>
-    <p:sldId id="267" r:id="rId13"/>
   </p:sldIdLst>
   <p:notesMasterIdLst>
-    <p:notesMasterId r:id="rId14"/>
+    <p:notesMasterId r:id="rId11"/>
   </p:notesMasterIdLst>
   <p:sldSz cx="12192000" cy="6858000"/>
   <p:notesSz cx="6858000" cy="12192000"/>
@@ -118,28 +115,25 @@
   <p:extLst>
     <p:ext uri="{521415D9-36F7-43E2-AB2F-B90AF26B5E84}">
       <p14:sectionLst xmlns:p14="http://schemas.microsoft.com/office/powerpoint/2010/main">
-        <p14:section name="Start" id="{b587953e-87f7-dd1e-5168-8d25b3295529}">
+        <p14:section name="Start" id="{7f4df3f6-18b2-a2b5-0478-268eb239de84}">
           <p14:sldIdLst>
             <p14:sldId id="256"/>
             <p14:sldId id="257"/>
+          </p14:sldIdLst>
+        </p14:section>
+        <p14:section name="Heute" id="{1ea09e53-3192-7f96-1ad7-7cd7c1ad9e67}">
+          <p14:sldIdLst>
             <p14:sldId id="258"/>
             <p14:sldId id="259"/>
             <p14:sldId id="260"/>
+            <p14:sldId id="261"/>
+            <p14:sldId id="262"/>
           </p14:sldIdLst>
         </p14:section>
-        <p14:section name="Heute" id="{e16aeae7-d49d-2b77-9bd4-710523b0f551}">
+        <p14:section name="Abschluss" id="{19b5401e-bad2-a4ef-bf46-a17fece41dbc}">
           <p14:sldIdLst>
-            <p14:sldId id="261"/>
-            <p14:sldId id="262"/>
             <p14:sldId id="263"/>
             <p14:sldId id="264"/>
-            <p14:sldId id="265"/>
-          </p14:sldIdLst>
-        </p14:section>
-        <p14:section name="Abschluss" id="{d1cc3d9a-70e6-e6b5-5013-1dd9e36094de}">
-          <p14:sldIdLst>
-            <p14:sldId id="266"/>
-            <p14:sldId id="267"/>
           </p14:sldIdLst>
         </p14:section>
       </p14:sectionLst>
@@ -546,7 +540,7 @@
           <a:p>
             <a:r>
               <a:rPr lang="en-US" dirty="0"/>
-              <a:t>Begrüssung. Kurz vorstellen: Kursleitung, PAT Cloud Solutions. Ziel der Woche in einem Satz: Am Freitag stellst du eine komplette Umgebung in Azure per Code bereit.</a:t>
+              <a:t>Direkt nach der Kurseinführung (kurs-einfuehrung.pptx). Überleitung: Heute bleiben wir noch auf dem Laptop – ab Tag 2 geht es in die Cloud.</a:t>
             </a:r>
             <a:endParaRPr lang="en-US" dirty="0"/>
           </a:p>
@@ -570,270 +564,6 @@
             <a:fld id="{F7021451-1387-4CA6-816F-3879F97B5CBC}" type="slidenum">
               <a:rPr lang="en-US"/>
               <a:t>1</a:t>
-            </a:fld>
-            <a:endParaRPr lang="en-US"/>
-          </a:p>
-        </p:txBody>
-      </p:sp>
-    </p:spTree>
-    <p:extLst>
-      <p:ext uri="{BB962C8B-B14F-4D97-AF65-F5344CB8AC3E}">
-        <p14:creationId xmlns:p14="http://schemas.microsoft.com/office/powerpoint/2010/main" val="1024086991"/>
-      </p:ext>
-    </p:extLst>
-  </p:cSld>
-  <p:clrMapOvr>
-    <a:masterClrMapping/>
-  </p:clrMapOvr>
-</p:notes>
-</file>
-
-<file path=ppt/notesSlides/notesSlide10.xml><?xml version="1.0" encoding="utf-8"?>
-<p:notes xmlns:a="http://schemas.openxmlformats.org/drawingml/2006/main" xmlns:r="http://schemas.openxmlformats.org/officeDocument/2006/relationships" xmlns:p="http://schemas.openxmlformats.org/presentationml/2006/main">
-  <p:cSld>
-    <p:spTree>
-      <p:nvGrpSpPr>
-        <p:cNvPr id="1" name=""/>
-        <p:cNvGrpSpPr/>
-        <p:nvPr/>
-      </p:nvGrpSpPr>
-      <p:grpSpPr>
-        <a:xfrm>
-          <a:off x="0" y="0"/>
-          <a:ext cx="0" cy="0"/>
-          <a:chOff x="0" y="0"/>
-          <a:chExt cx="0" cy="0"/>
-        </a:xfrm>
-      </p:grpSpPr>
-      <p:sp>
-        <p:nvSpPr>
-          <p:cNvPr id="2" name="Slide Image Placeholder 1"/>
-          <p:cNvSpPr>
-            <a:spLocks noGrp="1" noRot="1" noChangeAspect="1"/>
-          </p:cNvSpPr>
-          <p:nvPr>
-            <p:ph type="sldImg"/>
-          </p:nvPr>
-        </p:nvSpPr>
-        <p:spPr/>
-      </p:sp>
-      <p:sp>
-        <p:nvSpPr>
-          <p:cNvPr id="3" name="Notes Placeholder 2"/>
-          <p:cNvSpPr>
-            <a:spLocks noGrp="1"/>
-          </p:cNvSpPr>
-          <p:nvPr>
-            <p:ph type="body" idx="1"/>
-          </p:nvPr>
-        </p:nvSpPr>
-        <p:spPr/>
-        <p:txBody>
-          <a:bodyPr/>
-          <a:lstStyle/>
-          <a:p>
-            <a:r>
-              <a:rPr lang="en-US" dirty="0"/>
-              <a:t>Live-Demo vor Auftrag 1.2. Erste VM vorab erstellt haben, damit die Demo nicht auf den Download wartet.</a:t>
-            </a:r>
-            <a:endParaRPr lang="en-US" dirty="0"/>
-          </a:p>
-        </p:txBody>
-      </p:sp>
-      <p:sp>
-        <p:nvSpPr>
-          <p:cNvPr id="4" name="Slide Number Placeholder 3"/>
-          <p:cNvSpPr>
-            <a:spLocks noGrp="1"/>
-          </p:cNvSpPr>
-          <p:nvPr>
-            <p:ph type="sldNum" sz="quarter" idx="10"/>
-          </p:nvPr>
-        </p:nvSpPr>
-        <p:spPr/>
-        <p:txBody>
-          <a:bodyPr/>
-          <a:lstStyle/>
-          <a:p>
-            <a:fld id="{F7021451-1387-4CA6-816F-3879F97B5CBC}" type="slidenum">
-              <a:rPr lang="en-US"/>
-              <a:t>10</a:t>
-            </a:fld>
-            <a:endParaRPr lang="en-US"/>
-          </a:p>
-        </p:txBody>
-      </p:sp>
-    </p:spTree>
-    <p:extLst>
-      <p:ext uri="{BB962C8B-B14F-4D97-AF65-F5344CB8AC3E}">
-        <p14:creationId xmlns:p14="http://schemas.microsoft.com/office/powerpoint/2010/main" val="1024086991"/>
-      </p:ext>
-    </p:extLst>
-  </p:cSld>
-  <p:clrMapOvr>
-    <a:masterClrMapping/>
-  </p:clrMapOvr>
-</p:notes>
-</file>
-
-<file path=ppt/notesSlides/notesSlide11.xml><?xml version="1.0" encoding="utf-8"?>
-<p:notes xmlns:a="http://schemas.openxmlformats.org/drawingml/2006/main" xmlns:r="http://schemas.openxmlformats.org/officeDocument/2006/relationships" xmlns:p="http://schemas.openxmlformats.org/presentationml/2006/main">
-  <p:cSld>
-    <p:spTree>
-      <p:nvGrpSpPr>
-        <p:cNvPr id="1" name=""/>
-        <p:cNvGrpSpPr/>
-        <p:nvPr/>
-      </p:nvGrpSpPr>
-      <p:grpSpPr>
-        <a:xfrm>
-          <a:off x="0" y="0"/>
-          <a:ext cx="0" cy="0"/>
-          <a:chOff x="0" y="0"/>
-          <a:chExt cx="0" cy="0"/>
-        </a:xfrm>
-      </p:grpSpPr>
-      <p:sp>
-        <p:nvSpPr>
-          <p:cNvPr id="2" name="Slide Image Placeholder 1"/>
-          <p:cNvSpPr>
-            <a:spLocks noGrp="1" noRot="1" noChangeAspect="1"/>
-          </p:cNvSpPr>
-          <p:nvPr>
-            <p:ph type="sldImg"/>
-          </p:nvPr>
-        </p:nvSpPr>
-        <p:spPr/>
-      </p:sp>
-      <p:sp>
-        <p:nvSpPr>
-          <p:cNvPr id="3" name="Notes Placeholder 2"/>
-          <p:cNvSpPr>
-            <a:spLocks noGrp="1"/>
-          </p:cNvSpPr>
-          <p:nvPr>
-            <p:ph type="body" idx="1"/>
-          </p:nvPr>
-        </p:nvSpPr>
-        <p:spPr/>
-        <p:txBody>
-          <a:bodyPr/>
-          <a:lstStyle/>
-          <a:p>
-            <a:r>
-              <a:rPr lang="en-US" dirty="0"/>
-              <a:t>Exit-Tickets einsammeln und an Tag 2 als Einstieg verwenden.</a:t>
-            </a:r>
-            <a:endParaRPr lang="en-US" dirty="0"/>
-          </a:p>
-        </p:txBody>
-      </p:sp>
-      <p:sp>
-        <p:nvSpPr>
-          <p:cNvPr id="4" name="Slide Number Placeholder 3"/>
-          <p:cNvSpPr>
-            <a:spLocks noGrp="1"/>
-          </p:cNvSpPr>
-          <p:nvPr>
-            <p:ph type="sldNum" sz="quarter" idx="10"/>
-          </p:nvPr>
-        </p:nvSpPr>
-        <p:spPr/>
-        <p:txBody>
-          <a:bodyPr/>
-          <a:lstStyle/>
-          <a:p>
-            <a:fld id="{F7021451-1387-4CA6-816F-3879F97B5CBC}" type="slidenum">
-              <a:rPr lang="en-US"/>
-              <a:t>11</a:t>
-            </a:fld>
-            <a:endParaRPr lang="en-US"/>
-          </a:p>
-        </p:txBody>
-      </p:sp>
-    </p:spTree>
-    <p:extLst>
-      <p:ext uri="{BB962C8B-B14F-4D97-AF65-F5344CB8AC3E}">
-        <p14:creationId xmlns:p14="http://schemas.microsoft.com/office/powerpoint/2010/main" val="1024086991"/>
-      </p:ext>
-    </p:extLst>
-  </p:cSld>
-  <p:clrMapOvr>
-    <a:masterClrMapping/>
-  </p:clrMapOvr>
-</p:notes>
-</file>
-
-<file path=ppt/notesSlides/notesSlide12.xml><?xml version="1.0" encoding="utf-8"?>
-<p:notes xmlns:a="http://schemas.openxmlformats.org/drawingml/2006/main" xmlns:r="http://schemas.openxmlformats.org/officeDocument/2006/relationships" xmlns:p="http://schemas.openxmlformats.org/presentationml/2006/main">
-  <p:cSld>
-    <p:spTree>
-      <p:nvGrpSpPr>
-        <p:cNvPr id="1" name=""/>
-        <p:cNvGrpSpPr/>
-        <p:nvPr/>
-      </p:nvGrpSpPr>
-      <p:grpSpPr>
-        <a:xfrm>
-          <a:off x="0" y="0"/>
-          <a:ext cx="0" cy="0"/>
-          <a:chOff x="0" y="0"/>
-          <a:chExt cx="0" cy="0"/>
-        </a:xfrm>
-      </p:grpSpPr>
-      <p:sp>
-        <p:nvSpPr>
-          <p:cNvPr id="2" name="Slide Image Placeholder 1"/>
-          <p:cNvSpPr>
-            <a:spLocks noGrp="1" noRot="1" noChangeAspect="1"/>
-          </p:cNvSpPr>
-          <p:nvPr>
-            <p:ph type="sldImg"/>
-          </p:nvPr>
-        </p:nvSpPr>
-        <p:spPr/>
-      </p:sp>
-      <p:sp>
-        <p:nvSpPr>
-          <p:cNvPr id="3" name="Notes Placeholder 2"/>
-          <p:cNvSpPr>
-            <a:spLocks noGrp="1"/>
-          </p:cNvSpPr>
-          <p:nvPr>
-            <p:ph type="body" idx="1"/>
-          </p:nvPr>
-        </p:nvSpPr>
-        <p:spPr/>
-        <p:txBody>
-          <a:bodyPr/>
-          <a:lstStyle/>
-          <a:p>
-            <a:r>
-              <a:rPr lang="en-US" dirty="0"/>
-              <a:t/>
-            </a:r>
-            <a:endParaRPr lang="en-US" dirty="0"/>
-          </a:p>
-        </p:txBody>
-      </p:sp>
-      <p:sp>
-        <p:nvSpPr>
-          <p:cNvPr id="4" name="Slide Number Placeholder 3"/>
-          <p:cNvSpPr>
-            <a:spLocks noGrp="1"/>
-          </p:cNvSpPr>
-          <p:nvPr>
-            <p:ph type="sldNum" sz="quarter" idx="10"/>
-          </p:nvPr>
-        </p:nvSpPr>
-        <p:spPr/>
-        <p:txBody>
-          <a:bodyPr/>
-          <a:lstStyle/>
-          <a:p>
-            <a:fld id="{F7021451-1387-4CA6-816F-3879F97B5CBC}" type="slidenum">
-              <a:rPr lang="en-US"/>
-              <a:t>12</a:t>
             </a:fld>
             <a:endParaRPr lang="en-US"/>
           </a:p>
@@ -898,7 +628,7 @@
           <a:p>
             <a:r>
               <a:rPr lang="en-US" dirty="0"/>
-              <a:t>Erwartungen klären: kein Frontalunterricht. Fragen sind jederzeit willkommen.</a:t>
+              <a:t>Vorwissen aktivieren, 5 Minuten. Handzeichen oder Kurzumfrage (z. B. Forms/Mentimeter).</a:t>
             </a:r>
             <a:endParaRPr lang="en-US" dirty="0"/>
           </a:p>
@@ -986,7 +716,7 @@
           <a:p>
             <a:r>
               <a:rPr lang="en-US" dirty="0"/>
-              <a:t>Roter Faden: von der VM auf dem eigenen Laptop zur automatisierten Umgebung in der Cloud.</a:t>
+              <a:t>⭐-Ziel für Schnelle: Unterschied VM und Container beschreiben (Auftrag 1.7).</a:t>
             </a:r>
             <a:endParaRPr lang="en-US" dirty="0"/>
           </a:p>
@@ -1074,7 +804,7 @@
           <a:p>
             <a:r>
               <a:rPr lang="en-US" dirty="0"/>
-              <a:t>Lernjournal-Format zeigen (Markdown, OneNote oder Word – nach Absprache).</a:t>
+              <a:t>Zeiten an den Stundenplan anpassen.</a:t>
             </a:r>
             <a:endParaRPr lang="en-US" dirty="0"/>
           </a:p>
@@ -1162,7 +892,7 @@
           <a:p>
             <a:r>
               <a:rPr lang="en-US" dirty="0"/>
-              <a:t>Vorwissen aktivieren, 5 Minuten. Handzeichen oder Kurzumfrage (z. B. Forms/Mentimeter).</a:t>
+              <a:t>Ablage auf der Website zeigen. Hinweis: Lösungen sind zum Vergleichen da.</a:t>
             </a:r>
             <a:endParaRPr lang="en-US" dirty="0"/>
           </a:p>
@@ -1250,7 +980,7 @@
           <a:p>
             <a:r>
               <a:rPr lang="en-US" dirty="0"/>
-              <a:t>⭐-Ziel für Schnelle: Unterschied VM und Container beschreiben (Auftrag 1.6).</a:t>
+              <a:t>Laptops mit deaktivierter Virtualisierung oder Windows Home sofort sammeln. Beim ersten launch evtl. reihenweise starten (Download ca. 600 MB).</a:t>
             </a:r>
             <a:endParaRPr lang="en-US" dirty="0"/>
           </a:p>
@@ -1338,7 +1068,7 @@
           <a:p>
             <a:r>
               <a:rPr lang="en-US" dirty="0"/>
-              <a:t>Zeiten an den Stundenplan anpassen.</a:t>
+              <a:t>Live-Demo vor Auftrag 1.2. Erste VM vorab erstellt haben, damit die Demo nicht auf den Download wartet.</a:t>
             </a:r>
             <a:endParaRPr lang="en-US" dirty="0"/>
           </a:p>
@@ -1426,7 +1156,7 @@
           <a:p>
             <a:r>
               <a:rPr lang="en-US" dirty="0"/>
-              <a:t>Ablage auf der Website zeigen. Hinweis: Lösungen sind zum Vergleichen da.</a:t>
+              <a:t>Exit-Tickets einsammeln und an Tag 2 als Einstieg verwenden. Die Hyperscaler-Frage auf der nächsten Folie nur stellen, nicht beantworten – der Input folgt an Tag 2, L1.</a:t>
             </a:r>
             <a:endParaRPr lang="en-US" dirty="0"/>
           </a:p>
@@ -1514,7 +1244,7 @@
           <a:p>
             <a:r>
               <a:rPr lang="en-US" dirty="0"/>
-              <a:t>Laptops mit deaktivierter Virtualisierung oder Windows Home sofort sammeln. Beim ersten launch evtl. reihenweise starten (Download ca. 600 MB).</a:t>
+              <a:t/>
             </a:r>
             <a:endParaRPr lang="en-US" dirty="0"/>
           </a:p>
@@ -1592,7 +1322,7 @@
     <p:bg>
       <p:bgPr>
         <a:solidFill>
-          <a:srgbClr val="27303A"/>
+          <a:srgbClr val="FFFFFF"/>
         </a:solidFill>
       </p:bgPr>
     </p:bg>
@@ -1612,7 +1342,7 @@
       </p:grpSpPr>
       <p:pic>
         <p:nvPicPr>
-          <p:cNvPr id="2" name="Image 0" descr="C:\Users\Thanam\AppData\Local\Temp\claude\c--Projekt-Trainings-azure-basics-training\a9e0bf4e-0d08-4082-a38a-5b8886538508\scratchpad\pptx\assets\logo-hell.png">    </p:cNvPr>
+          <p:cNvPr id="2" name="Image 0" descr="C:\Users\Thanam\AppData\Local\Temp\claude\c--Projekt-Trainings-azure-basics-training\a7a6b8eb-22f3-4b42-aecc-5af05d1502b1\scratchpad\folien\assets\logo-dunkel.png">    </p:cNvPr>
           <p:cNvPicPr>
             <a:picLocks noChangeAspect="1"/>
           </p:cNvPicPr>
@@ -1636,7 +1366,7 @@
       </p:pic>
       <p:pic>
         <p:nvPicPr>
-          <p:cNvPr id="3" name="Image 1" descr="C:\Users\Thanam\AppData\Local\Temp\claude\c--Projekt-Trainings-azure-basics-training\a9e0bf4e-0d08-4082-a38a-5b8886538508\scratchpad\pptx\assets\wolke.png">    </p:cNvPr>
+          <p:cNvPr id="3" name="Image 1" descr="C:\Users\Thanam\AppData\Local\Temp\claude\c--Projekt-Trainings-azure-basics-training\a7a6b8eb-22f3-4b42-aecc-5af05d1502b1\scratchpad\folien\assets\wolke.png">    </p:cNvPr>
           <p:cNvPicPr>
             <a:picLocks noChangeAspect="1"/>
           </p:cNvPicPr>
@@ -1684,7 +1414,7 @@
               <a:buNone/>
               <a:defRPr lang="en-US" sz="4400" b="1" dirty="0">
                 <a:solidFill>
-                  <a:srgbClr val="FFFFFF"/>
+                  <a:srgbClr val="27303A"/>
                 </a:solidFill>
               </a:defRPr>
             </a:lvl1pPr>
@@ -1723,7 +1453,7 @@
               <a:buNone/>
               <a:defRPr lang="en-US" sz="2000" dirty="0">
                 <a:solidFill>
-                  <a:srgbClr val="DEE2FB"/>
+                  <a:srgbClr val="006FAD"/>
                 </a:solidFill>
               </a:defRPr>
             </a:lvl1pPr>
@@ -1763,7 +1493,7 @@
             <a:r>
               <a:rPr lang="en-US" sz="1200" dirty="0">
                 <a:solidFill>
-                  <a:srgbClr val="DEE2FB"/>
+                  <a:srgbClr val="6F6F6F"/>
                 </a:solidFill>
               </a:rPr>
               <a:t>Kanton Zürich · ICT-Grundbildung · PAT Cloud Solutions</a:t>
@@ -1786,7 +1516,7 @@
     <p:bg>
       <p:bgPr>
         <a:solidFill>
-          <a:srgbClr val="006FAD"/>
+          <a:srgbClr val="F7F7F7"/>
         </a:solidFill>
       </p:bgPr>
     </p:bg>
@@ -1806,7 +1536,7 @@
       </p:grpSpPr>
       <p:pic>
         <p:nvPicPr>
-          <p:cNvPr id="2" name="Image 0" descr="C:\Users\Thanam\AppData\Local\Temp\claude\c--Projekt-Trainings-azure-basics-training\a9e0bf4e-0d08-4082-a38a-5b8886538508\scratchpad\pptx\assets\wolke.png">    </p:cNvPr>
+          <p:cNvPr id="2" name="Image 0" descr="C:\Users\Thanam\AppData\Local\Temp\claude\c--Projekt-Trainings-azure-basics-training\a7a6b8eb-22f3-4b42-aecc-5af05d1502b1\scratchpad\folien\assets\wolke.png">    </p:cNvPr>
           <p:cNvPicPr>
             <a:picLocks noChangeAspect="1"/>
           </p:cNvPicPr>
@@ -1830,7 +1560,7 @@
       </p:pic>
       <p:pic>
         <p:nvPicPr>
-          <p:cNvPr id="3" name="Image 1" descr="C:\Users\Thanam\AppData\Local\Temp\claude\c--Projekt-Trainings-azure-basics-training\a9e0bf4e-0d08-4082-a38a-5b8886538508\scratchpad\pptx\assets\logo-hell.png">    </p:cNvPr>
+          <p:cNvPr id="3" name="Image 1" descr="C:\Users\Thanam\AppData\Local\Temp\claude\c--Projekt-Trainings-azure-basics-training\a7a6b8eb-22f3-4b42-aecc-5af05d1502b1\scratchpad\folien\assets\logo-dunkel.png">    </p:cNvPr>
           <p:cNvPicPr>
             <a:picLocks noChangeAspect="1"/>
           </p:cNvPicPr>
@@ -1878,7 +1608,7 @@
               <a:buNone/>
               <a:defRPr lang="en-US" sz="4000" b="1" dirty="0">
                 <a:solidFill>
-                  <a:srgbClr val="FFFFFF"/>
+                  <a:srgbClr val="27303A"/>
                 </a:solidFill>
               </a:defRPr>
             </a:lvl1pPr>
@@ -1917,7 +1647,7 @@
               <a:buNone/>
               <a:defRPr lang="en-US" sz="2000" dirty="0">
                 <a:solidFill>
-                  <a:srgbClr val="DEE2FB"/>
+                  <a:srgbClr val="006FAD"/>
                 </a:solidFill>
               </a:defRPr>
             </a:lvl1pPr>
@@ -1964,7 +1694,7 @@
       </p:grpSpPr>
       <p:pic>
         <p:nvPicPr>
-          <p:cNvPr id="2" name="Image 0" descr="C:\Users\Thanam\AppData\Local\Temp\claude\c--Projekt-Trainings-azure-basics-training\a9e0bf4e-0d08-4082-a38a-5b8886538508\scratchpad\pptx\assets\logo-dunkel.png">    </p:cNvPr>
+          <p:cNvPr id="2" name="Image 0" descr="C:\Users\Thanam\AppData\Local\Temp\claude\c--Projekt-Trainings-azure-basics-training\a7a6b8eb-22f3-4b42-aecc-5af05d1502b1\scratchpad\folien\assets\logo-dunkel.png">    </p:cNvPr>
           <p:cNvPicPr>
             <a:picLocks noChangeAspect="1"/>
           </p:cNvPicPr>
@@ -2120,7 +1850,7 @@
     <p:bg>
       <p:bgPr>
         <a:solidFill>
-          <a:srgbClr val="27303A"/>
+          <a:srgbClr val="FFFFFF"/>
         </a:solidFill>
       </p:bgPr>
     </p:bg>
@@ -2140,7 +1870,7 @@
       </p:grpSpPr>
       <p:pic>
         <p:nvPicPr>
-          <p:cNvPr id="2" name="Image 0" descr="C:\Users\Thanam\AppData\Local\Temp\claude\c--Projekt-Trainings-azure-basics-training\a9e0bf4e-0d08-4082-a38a-5b8886538508\scratchpad\pptx\assets\logo-hell.png">    </p:cNvPr>
+          <p:cNvPr id="2" name="Image 0" descr="C:\Users\Thanam\AppData\Local\Temp\claude\c--Projekt-Trainings-azure-basics-training\a7a6b8eb-22f3-4b42-aecc-5af05d1502b1\scratchpad\folien\assets\logo-dunkel.png">    </p:cNvPr>
           <p:cNvPicPr>
             <a:picLocks noChangeAspect="1"/>
           </p:cNvPicPr>
@@ -2188,7 +1918,7 @@
               <a:buNone/>
               <a:defRPr lang="en-US" sz="4000" b="1" dirty="0">
                 <a:solidFill>
-                  <a:srgbClr val="FFFFFF"/>
+                  <a:srgbClr val="27303A"/>
                 </a:solidFill>
               </a:defRPr>
             </a:lvl1pPr>
@@ -2227,7 +1957,7 @@
               <a:buNone/>
               <a:defRPr lang="en-US" sz="2000" dirty="0">
                 <a:solidFill>
-                  <a:srgbClr val="DEE2FB"/>
+                  <a:srgbClr val="006FAD"/>
                 </a:solidFill>
               </a:defRPr>
             </a:lvl1pPr>
@@ -2620,7 +2350,7 @@
             <a:r>
               <a:rPr lang="en-US" sz="4400" b="1" dirty="0">
                 <a:solidFill>
-                  <a:srgbClr val="FFFFFF"/>
+                  <a:srgbClr val="27303A"/>
                 </a:solidFill>
               </a:rPr>
               <a:t>Tag 1: Grundlagen Virtualisierung</a:t>
@@ -2658,1282 +2388,12 @@
             <a:r>
               <a:rPr lang="en-US" sz="2000" dirty="0">
                 <a:solidFill>
-                  <a:srgbClr val="DEE2FB"/>
+                  <a:srgbClr val="006FAD"/>
                 </a:solidFill>
               </a:rPr>
               <a:t>Einführung in Cloud Computing mit Microsoft Azure</a:t>
             </a:r>
             <a:endParaRPr lang="en-US" sz="2000" dirty="0"/>
-          </a:p>
-        </p:txBody>
-      </p:sp>
-    </p:spTree>
-  </p:cSld>
-  <p:clrMapOvr>
-    <a:masterClrMapping/>
-  </p:clrMapOvr>
-</p:sld>
-</file>
-
-<file path=ppt/slides/slide10.xml><?xml version="1.0" encoding="utf-8"?>
-<p:sld xmlns:a="http://schemas.openxmlformats.org/drawingml/2006/main" xmlns:r="http://schemas.openxmlformats.org/officeDocument/2006/relationships" xmlns:p="http://schemas.openxmlformats.org/presentationml/2006/main">
-  <p:cSld name="Slide 10">
-    <p:spTree>
-      <p:nvGrpSpPr>
-        <p:cNvPr id="1" name=""/>
-        <p:cNvGrpSpPr/>
-        <p:nvPr/>
-      </p:nvGrpSpPr>
-      <p:grpSpPr>
-        <a:xfrm>
-          <a:off x="0" y="0"/>
-          <a:ext cx="0" cy="0"/>
-          <a:chOff x="0" y="0"/>
-          <a:chExt cx="0" cy="0"/>
-        </a:xfrm>
-      </p:grpSpPr>
-      <p:sp>
-        <p:nvSpPr>
-          <p:cNvPr id="2" name="Text 1"/>
-          <p:cNvSpPr/>
-          <p:nvPr>
-            <p:ph idx="102" type="title" hasCustomPrompt="1"/>
-          </p:nvPr>
-        </p:nvSpPr>
-        <p:spPr>
-          <a:xfrm>
-            <a:off x="548640" y="320040"/>
-            <a:ext cx="11094415" cy="822960"/>
-          </a:xfrm>
-          <a:prstGeom prst="rect">
-            <a:avLst/>
-          </a:prstGeom>
-          <a:noFill/>
-          <a:ln/>
-        </p:spPr>
-        <p:txBody>
-          <a:bodyPr wrap="square" lIns="0" tIns="0" rIns="0" bIns="0" rtlCol="0" anchor="ctr"/>
-          <a:lstStyle/>
-          <a:p>
-            <a:pPr algn="l" indent="0" marL="0">
-              <a:buNone/>
-            </a:pPr>
-            <a:r>
-              <a:rPr lang="en-US" sz="3400" b="1" dirty="0">
-                <a:solidFill>
-                  <a:srgbClr val="27303A"/>
-                </a:solidFill>
-              </a:rPr>
-              <a:t>Multipass in 6 Befehlen</a:t>
-            </a:r>
-            <a:endParaRPr lang="en-US" sz="3400" dirty="0"/>
-          </a:p>
-        </p:txBody>
-      </p:sp>
-      <p:sp>
-        <p:nvSpPr>
-          <p:cNvPr id="3" name="code-box"/>
-          <p:cNvSpPr/>
-          <p:nvPr/>
-        </p:nvSpPr>
-        <p:spPr>
-          <a:xfrm>
-            <a:off x="548640" y="1325880"/>
-            <a:ext cx="6583680" cy="4709160"/>
-          </a:xfrm>
-          <a:prstGeom prst="roundRect">
-            <a:avLst>
-              <a:gd name="adj" fmla="val 1942"/>
-            </a:avLst>
-          </a:prstGeom>
-          <a:solidFill>
-            <a:srgbClr val="27303A"/>
-          </a:solidFill>
-          <a:ln w="12700">
-            <a:solidFill>
-              <a:srgbClr val="27303A"/>
-            </a:solidFill>
-            <a:prstDash val="solid"/>
-          </a:ln>
-        </p:spPr>
-      </p:sp>
-      <p:sp>
-        <p:nvSpPr>
-          <p:cNvPr id="4" name="Text 2"/>
-          <p:cNvSpPr txBox="1"/>
-          <p:nvPr/>
-        </p:nvSpPr>
-        <p:spPr>
-          <a:xfrm>
-            <a:off x="822960" y="1554480"/>
-            <a:ext cx="6035040" cy="4251960"/>
-          </a:xfrm>
-          <a:prstGeom prst="rect">
-            <a:avLst/>
-          </a:prstGeom>
-          <a:noFill/>
-          <a:ln/>
-        </p:spPr>
-        <p:txBody>
-          <a:bodyPr wrap="square" lIns="0" tIns="0" rIns="0" bIns="0" rtlCol="0" anchor="t"/>
-          <a:lstStyle/>
-          <a:p>
-            <a:pPr indent="0" marL="0">
-              <a:buNone/>
-            </a:pPr>
-            <a:r>
-              <a:rPr lang="en-US" sz="1800" dirty="0">
-                <a:solidFill>
-                  <a:srgbClr val="F7F7F7"/>
-                </a:solidFill>
-                <a:latin typeface="Courier New" pitchFamily="34" charset="0"/>
-                <a:ea typeface="Courier New" pitchFamily="34" charset="-122"/>
-                <a:cs typeface="Courier New" pitchFamily="34" charset="-120"/>
-              </a:rPr>
-              <a:t>multipass launch --name vm1</a:t>
-            </a:r>
-            <a:endParaRPr lang="en-US" sz="1800" dirty="0"/>
-          </a:p>
-          <a:p>
-            <a:pPr indent="0" marL="0">
-              <a:buNone/>
-            </a:pPr>
-            <a:r>
-              <a:rPr lang="en-US" sz="1800" dirty="0">
-                <a:solidFill>
-                  <a:srgbClr val="F7F7F7"/>
-                </a:solidFill>
-                <a:latin typeface="Courier New" pitchFamily="34" charset="0"/>
-                <a:ea typeface="Courier New" pitchFamily="34" charset="-122"/>
-                <a:cs typeface="Courier New" pitchFamily="34" charset="-120"/>
-              </a:rPr>
-              <a:t>multipass list</a:t>
-            </a:r>
-            <a:endParaRPr lang="en-US" sz="1800" dirty="0"/>
-          </a:p>
-          <a:p>
-            <a:pPr indent="0" marL="0">
-              <a:buNone/>
-            </a:pPr>
-            <a:r>
-              <a:rPr lang="en-US" sz="1800" dirty="0">
-                <a:solidFill>
-                  <a:srgbClr val="F7F7F7"/>
-                </a:solidFill>
-                <a:latin typeface="Courier New" pitchFamily="34" charset="0"/>
-                <a:ea typeface="Courier New" pitchFamily="34" charset="-122"/>
-                <a:cs typeface="Courier New" pitchFamily="34" charset="-120"/>
-              </a:rPr>
-              <a:t>multipass shell vm1</a:t>
-            </a:r>
-            <a:endParaRPr lang="en-US" sz="1800" dirty="0"/>
-          </a:p>
-          <a:p>
-            <a:pPr indent="0" marL="0">
-              <a:buNone/>
-            </a:pPr>
-            <a:r>
-              <a:rPr lang="en-US" sz="1800" dirty="0">
-                <a:solidFill>
-                  <a:srgbClr val="F7F7F7"/>
-                </a:solidFill>
-                <a:latin typeface="Courier New" pitchFamily="34" charset="0"/>
-                <a:ea typeface="Courier New" pitchFamily="34" charset="-122"/>
-                <a:cs typeface="Courier New" pitchFamily="34" charset="-120"/>
-              </a:rPr>
-              <a:t>multipass exec vm1 -- free -h</a:t>
-            </a:r>
-            <a:endParaRPr lang="en-US" sz="1800" dirty="0"/>
-          </a:p>
-          <a:p>
-            <a:pPr indent="0" marL="0">
-              <a:buNone/>
-            </a:pPr>
-            <a:r>
-              <a:rPr lang="en-US" sz="1800" dirty="0">
-                <a:solidFill>
-                  <a:srgbClr val="F7F7F7"/>
-                </a:solidFill>
-                <a:latin typeface="Courier New" pitchFamily="34" charset="0"/>
-                <a:ea typeface="Courier New" pitchFamily="34" charset="-122"/>
-                <a:cs typeface="Courier New" pitchFamily="34" charset="-120"/>
-              </a:rPr>
-              <a:t>multipass stop vm1</a:t>
-            </a:r>
-            <a:endParaRPr lang="en-US" sz="1800" dirty="0"/>
-          </a:p>
-          <a:p>
-            <a:pPr indent="0" marL="0">
-              <a:buNone/>
-            </a:pPr>
-            <a:r>
-              <a:rPr lang="en-US" sz="1800" dirty="0">
-                <a:solidFill>
-                  <a:srgbClr val="F7F7F7"/>
-                </a:solidFill>
-                <a:latin typeface="Courier New" pitchFamily="34" charset="0"/>
-                <a:ea typeface="Courier New" pitchFamily="34" charset="-122"/>
-                <a:cs typeface="Courier New" pitchFamily="34" charset="-120"/>
-              </a:rPr>
-              <a:t>multipass delete --purge vm1</a:t>
-            </a:r>
-            <a:endParaRPr lang="en-US" sz="1800" dirty="0"/>
-          </a:p>
-        </p:txBody>
-      </p:sp>
-      <p:sp>
-        <p:nvSpPr>
-          <p:cNvPr id="5" name="Text 3"/>
-          <p:cNvSpPr txBox="1"/>
-          <p:nvPr/>
-        </p:nvSpPr>
-        <p:spPr>
-          <a:xfrm>
-            <a:off x="7498080" y="1325880"/>
-            <a:ext cx="4144975" cy="1143000"/>
-          </a:xfrm>
-          <a:prstGeom prst="rect">
-            <a:avLst/>
-          </a:prstGeom>
-          <a:noFill/>
-          <a:ln/>
-        </p:spPr>
-        <p:txBody>
-          <a:bodyPr wrap="square" lIns="0" tIns="0" rIns="0" bIns="0" rtlCol="0" anchor="t"/>
-          <a:lstStyle/>
-          <a:p>
-            <a:pPr indent="0" marL="0">
-              <a:buNone/>
-            </a:pPr>
-            <a:r>
-              <a:rPr lang="en-US" sz="1700" b="1" dirty="0">
-                <a:solidFill>
-                  <a:srgbClr val="006FAD"/>
-                </a:solidFill>
-              </a:rPr>
-              <a:t>launch</a:t>
-            </a:r>
-            <a:endParaRPr lang="en-US" sz="1700" dirty="0"/>
-          </a:p>
-          <a:p>
-            <a:pPr indent="0" marL="0">
-              <a:buNone/>
-            </a:pPr>
-            <a:r>
-              <a:rPr lang="en-US" sz="1700" dirty="0">
-                <a:solidFill>
-                  <a:srgbClr val="27303A"/>
-                </a:solidFill>
-              </a:rPr>
-              <a:t>VM erstellen und starten</a:t>
-            </a:r>
-            <a:endParaRPr lang="en-US" sz="1700" dirty="0"/>
-          </a:p>
-        </p:txBody>
-      </p:sp>
-      <p:sp>
-        <p:nvSpPr>
-          <p:cNvPr id="6" name="Text 4"/>
-          <p:cNvSpPr txBox="1"/>
-          <p:nvPr/>
-        </p:nvSpPr>
-        <p:spPr>
-          <a:xfrm>
-            <a:off x="7498080" y="2468880"/>
-            <a:ext cx="4144975" cy="1143000"/>
-          </a:xfrm>
-          <a:prstGeom prst="rect">
-            <a:avLst/>
-          </a:prstGeom>
-          <a:noFill/>
-          <a:ln/>
-        </p:spPr>
-        <p:txBody>
-          <a:bodyPr wrap="square" lIns="0" tIns="0" rIns="0" bIns="0" rtlCol="0" anchor="t"/>
-          <a:lstStyle/>
-          <a:p>
-            <a:pPr indent="0" marL="0">
-              <a:buNone/>
-            </a:pPr>
-            <a:r>
-              <a:rPr lang="en-US" sz="1700" b="1" dirty="0">
-                <a:solidFill>
-                  <a:srgbClr val="006FAD"/>
-                </a:solidFill>
-              </a:rPr>
-              <a:t>list</a:t>
-            </a:r>
-            <a:endParaRPr lang="en-US" sz="1700" dirty="0"/>
-          </a:p>
-          <a:p>
-            <a:pPr indent="0" marL="0">
-              <a:buNone/>
-            </a:pPr>
-            <a:r>
-              <a:rPr lang="en-US" sz="1700" dirty="0">
-                <a:solidFill>
-                  <a:srgbClr val="27303A"/>
-                </a:solidFill>
-              </a:rPr>
-              <a:t>alle VMs anzeigen</a:t>
-            </a:r>
-            <a:endParaRPr lang="en-US" sz="1700" dirty="0"/>
-          </a:p>
-        </p:txBody>
-      </p:sp>
-      <p:sp>
-        <p:nvSpPr>
-          <p:cNvPr id="7" name="Text 5"/>
-          <p:cNvSpPr txBox="1"/>
-          <p:nvPr/>
-        </p:nvSpPr>
-        <p:spPr>
-          <a:xfrm>
-            <a:off x="7498080" y="3611880"/>
-            <a:ext cx="4144975" cy="1143000"/>
-          </a:xfrm>
-          <a:prstGeom prst="rect">
-            <a:avLst/>
-          </a:prstGeom>
-          <a:noFill/>
-          <a:ln/>
-        </p:spPr>
-        <p:txBody>
-          <a:bodyPr wrap="square" lIns="0" tIns="0" rIns="0" bIns="0" rtlCol="0" anchor="t"/>
-          <a:lstStyle/>
-          <a:p>
-            <a:pPr indent="0" marL="0">
-              <a:buNone/>
-            </a:pPr>
-            <a:r>
-              <a:rPr lang="en-US" sz="1700" b="1" dirty="0">
-                <a:solidFill>
-                  <a:srgbClr val="006FAD"/>
-                </a:solidFill>
-              </a:rPr>
-              <a:t>shell / exec</a:t>
-            </a:r>
-            <a:endParaRPr lang="en-US" sz="1700" dirty="0"/>
-          </a:p>
-          <a:p>
-            <a:pPr indent="0" marL="0">
-              <a:buNone/>
-            </a:pPr>
-            <a:r>
-              <a:rPr lang="en-US" sz="1700" dirty="0">
-                <a:solidFill>
-                  <a:srgbClr val="27303A"/>
-                </a:solidFill>
-              </a:rPr>
-              <a:t>in der VM arbeiten / einen Befehl ausführen</a:t>
-            </a:r>
-            <a:endParaRPr lang="en-US" sz="1700" dirty="0"/>
-          </a:p>
-        </p:txBody>
-      </p:sp>
-      <p:sp>
-        <p:nvSpPr>
-          <p:cNvPr id="8" name="Text 6"/>
-          <p:cNvSpPr txBox="1"/>
-          <p:nvPr/>
-        </p:nvSpPr>
-        <p:spPr>
-          <a:xfrm>
-            <a:off x="7498080" y="4754880"/>
-            <a:ext cx="4144975" cy="1143000"/>
-          </a:xfrm>
-          <a:prstGeom prst="rect">
-            <a:avLst/>
-          </a:prstGeom>
-          <a:noFill/>
-          <a:ln/>
-        </p:spPr>
-        <p:txBody>
-          <a:bodyPr wrap="square" lIns="0" tIns="0" rIns="0" bIns="0" rtlCol="0" anchor="t"/>
-          <a:lstStyle/>
-          <a:p>
-            <a:pPr indent="0" marL="0">
-              <a:buNone/>
-            </a:pPr>
-            <a:r>
-              <a:rPr lang="en-US" sz="1700" b="1" dirty="0">
-                <a:solidFill>
-                  <a:srgbClr val="006FAD"/>
-                </a:solidFill>
-              </a:rPr>
-              <a:t>stop / delete</a:t>
-            </a:r>
-            <a:endParaRPr lang="en-US" sz="1700" dirty="0"/>
-          </a:p>
-          <a:p>
-            <a:pPr indent="0" marL="0">
-              <a:buNone/>
-            </a:pPr>
-            <a:r>
-              <a:rPr lang="en-US" sz="1700" dirty="0">
-                <a:solidFill>
-                  <a:srgbClr val="27303A"/>
-                </a:solidFill>
-              </a:rPr>
-              <a:t>VM stoppen / endgültig löschen</a:t>
-            </a:r>
-            <a:endParaRPr lang="en-US" sz="1700" dirty="0"/>
-          </a:p>
-        </p:txBody>
-      </p:sp>
-      <p:sp>
-        <p:nvSpPr>
-          <p:cNvPr id="25" name="Slide Number Placeholder 0"/>
-          <p:cNvSpPr>
-            <a:spLocks noGrp="1"/>
-          </p:cNvSpPr>
-          <p:nvPr>
-            <p:ph type="sldNum" sz="quarter" idx="4294967295"/>
-          </p:nvPr>
-        </p:nvSpPr>
-        <p:spPr>
-          <a:xfrm>
-            <a:off x="11183112" y="6336792"/>
-            <a:ext cx="457200" cy="365760"/>
-          </a:xfrm>
-          <a:prstGeom prst="rect">
-            <a:avLst/>
-          </a:prstGeom>
-          <a:extLst>
-            <a:ext uri="{C572A759-6A51-4108-AA02-DFA0A04FC94B}">
-              <ma14:wrappingTextBoxFlag xmlns:ma14="http://schemas.microsoft.com/office/mac/drawingml/2011/main" val="0"/>
-            </a:ext>
-          </a:extLst>
-        </p:spPr>
-        <p:txBody>
-          <a:bodyPr/>
-          <a:lstStyle>
-            <a:lvl1pPr>
-              <a:defRPr sz="1000">
-                <a:solidFill>
-                  <a:srgbClr val="6F6F6F"/>
-                </a:solidFill>
-              </a:defRPr>
-            </a:lvl1pPr>
-          </a:lstStyle>
-          <a:p>
-            <a:pPr algn="r"/>
-            <a:fld id="{F7021451-1387-4CA6-816F-3879F97B5CBC}" type="slidenum">
-              <a:rPr b="0" lang="en-US"/>
-              <a:t>10</a:t>
-            </a:fld>
-            <a:endParaRPr lang="en-US"/>
-          </a:p>
-        </p:txBody>
-      </p:sp>
-    </p:spTree>
-  </p:cSld>
-  <p:clrMapOvr>
-    <a:masterClrMapping/>
-  </p:clrMapOvr>
-</p:sld>
-</file>
-
-<file path=ppt/slides/slide11.xml><?xml version="1.0" encoding="utf-8"?>
-<p:sld xmlns:a="http://schemas.openxmlformats.org/drawingml/2006/main" xmlns:r="http://schemas.openxmlformats.org/officeDocument/2006/relationships" xmlns:p="http://schemas.openxmlformats.org/presentationml/2006/main">
-  <p:cSld name="Slide 11">
-    <p:spTree>
-      <p:nvGrpSpPr>
-        <p:cNvPr id="1" name=""/>
-        <p:cNvGrpSpPr/>
-        <p:nvPr/>
-      </p:nvGrpSpPr>
-      <p:grpSpPr>
-        <a:xfrm>
-          <a:off x="0" y="0"/>
-          <a:ext cx="0" cy="0"/>
-          <a:chOff x="0" y="0"/>
-          <a:chExt cx="0" cy="0"/>
-        </a:xfrm>
-      </p:grpSpPr>
-      <p:sp>
-        <p:nvSpPr>
-          <p:cNvPr id="2" name="Text 1"/>
-          <p:cNvSpPr/>
-          <p:nvPr>
-            <p:ph idx="102" type="title" hasCustomPrompt="1"/>
-          </p:nvPr>
-        </p:nvSpPr>
-        <p:spPr>
-          <a:xfrm>
-            <a:off x="548640" y="320040"/>
-            <a:ext cx="11094415" cy="822960"/>
-          </a:xfrm>
-          <a:prstGeom prst="rect">
-            <a:avLst/>
-          </a:prstGeom>
-          <a:noFill/>
-          <a:ln/>
-        </p:spPr>
-        <p:txBody>
-          <a:bodyPr wrap="square" lIns="0" tIns="0" rIns="0" bIns="0" rtlCol="0" anchor="ctr"/>
-          <a:lstStyle/>
-          <a:p>
-            <a:pPr algn="l" indent="0" marL="0">
-              <a:buNone/>
-            </a:pPr>
-            <a:r>
-              <a:rPr lang="en-US" sz="3400" b="1" dirty="0">
-                <a:solidFill>
-                  <a:srgbClr val="27303A"/>
-                </a:solidFill>
-              </a:rPr>
-              <a:t>Abschluss</a:t>
-            </a:r>
-            <a:endParaRPr lang="en-US" sz="3400" dirty="0"/>
-          </a:p>
-        </p:txBody>
-      </p:sp>
-      <p:sp>
-        <p:nvSpPr>
-          <p:cNvPr id="3" name="karte"/>
-          <p:cNvSpPr/>
-          <p:nvPr/>
-        </p:nvSpPr>
-        <p:spPr>
-          <a:xfrm>
-            <a:off x="548640" y="2446020"/>
-            <a:ext cx="5410048" cy="2468880"/>
-          </a:xfrm>
-          <a:prstGeom prst="roundRect">
-            <a:avLst>
-              <a:gd name="adj" fmla="val 4444"/>
-            </a:avLst>
-          </a:prstGeom>
-          <a:solidFill>
-            <a:srgbClr val="F7F7F7"/>
-          </a:solidFill>
-          <a:ln w="12700">
-            <a:solidFill>
-              <a:srgbClr val="F7F7F7"/>
-            </a:solidFill>
-            <a:prstDash val="solid"/>
-          </a:ln>
-        </p:spPr>
-      </p:sp>
-      <p:sp>
-        <p:nvSpPr>
-          <p:cNvPr id="4" name="icon-kreis-FaTrashAlt"/>
-          <p:cNvSpPr/>
-          <p:nvPr/>
-        </p:nvSpPr>
-        <p:spPr>
-          <a:xfrm>
-            <a:off x="822960" y="2720340"/>
-            <a:ext cx="640080" cy="640080"/>
-          </a:xfrm>
-          <a:prstGeom prst="ellipse">
-            <a:avLst/>
-          </a:prstGeom>
-          <a:solidFill>
-            <a:srgbClr val="006FAD"/>
-          </a:solidFill>
-          <a:ln w="12700">
-            <a:solidFill>
-              <a:srgbClr val="006FAD"/>
-            </a:solidFill>
-            <a:prstDash val="solid"/>
-          </a:ln>
-        </p:spPr>
-      </p:sp>
-      <p:pic>
-        <p:nvPicPr>
-          <p:cNvPr id="5" name="icon-FaTrashAlt" descr="C:\Users\Thanam\AppData\Local\Temp\claude\c--Projekt-Trainings-azure-basics-training\a9e0bf4e-0d08-4082-a38a-5b8886538508\scratchpad\pptx\assets\icons\FaTrashAlt.png">    </p:cNvPr>
-          <p:cNvPicPr>
-            <a:picLocks noChangeAspect="1"/>
-          </p:cNvPicPr>
-          <p:nvPr/>
-        </p:nvPicPr>
-        <p:blipFill>
-          <a:blip r:embed="rId1"/>
-          <a:stretch>
-            <a:fillRect/>
-          </a:stretch>
-        </p:blipFill>
-        <p:spPr>
-          <a:xfrm>
-            <a:off x="976579" y="2873959"/>
-            <a:ext cx="332842" cy="332842"/>
-          </a:xfrm>
-          <a:prstGeom prst="rect">
-            <a:avLst/>
-          </a:prstGeom>
-        </p:spPr>
-      </p:pic>
-      <p:sp>
-        <p:nvSpPr>
-          <p:cNvPr id="6" name="Text 3"/>
-          <p:cNvSpPr txBox="1"/>
-          <p:nvPr/>
-        </p:nvSpPr>
-        <p:spPr>
-          <a:xfrm>
-            <a:off x="1645920" y="2720340"/>
-            <a:ext cx="4084168" cy="640080"/>
-          </a:xfrm>
-          <a:prstGeom prst="rect">
-            <a:avLst/>
-          </a:prstGeom>
-          <a:noFill/>
-          <a:ln/>
-        </p:spPr>
-        <p:txBody>
-          <a:bodyPr wrap="square" lIns="0" tIns="0" rIns="0" bIns="0" rtlCol="0" anchor="ctr">
-            <a:normAutofit/>
-          </a:bodyPr>
-          <a:lstStyle/>
-          <a:p>
-            <a:pPr indent="0" marL="0">
-              <a:buNone/>
-            </a:pPr>
-            <a:r>
-              <a:rPr lang="en-US" sz="2000" b="1" dirty="0">
-                <a:solidFill>
-                  <a:srgbClr val="27303A"/>
-                </a:solidFill>
-              </a:rPr>
-              <a:t>Aufräumen</a:t>
-            </a:r>
-            <a:endParaRPr lang="en-US" sz="2000" dirty="0"/>
-          </a:p>
-        </p:txBody>
-      </p:sp>
-      <p:sp>
-        <p:nvSpPr>
-          <p:cNvPr id="7" name="Text 4"/>
-          <p:cNvSpPr txBox="1"/>
-          <p:nvPr/>
-        </p:nvSpPr>
-        <p:spPr>
-          <a:xfrm>
-            <a:off x="822960" y="3543300"/>
-            <a:ext cx="4861408" cy="1234440"/>
-          </a:xfrm>
-          <a:prstGeom prst="rect">
-            <a:avLst/>
-          </a:prstGeom>
-          <a:noFill/>
-          <a:ln/>
-        </p:spPr>
-        <p:txBody>
-          <a:bodyPr wrap="square" lIns="0" tIns="0" rIns="0" bIns="0" rtlCol="0" anchor="t"/>
-          <a:lstStyle/>
-          <a:p>
-            <a:pPr indent="0" marL="0">
-              <a:spcAft>
-                <a:spcPts val="400"/>
-              </a:spcAft>
-              <a:buNone/>
-            </a:pPr>
-            <a:r>
-              <a:rPr lang="en-US" sz="1600" dirty="0">
-                <a:solidFill>
-                  <a:srgbClr val="27303A"/>
-                </a:solidFill>
-              </a:rPr>
-              <a:t>multipass delete --purge --all · Den SSH-Schlüssel behalten – du brauchst ihn an Tag 3!</a:t>
-            </a:r>
-            <a:endParaRPr lang="en-US" sz="1600" dirty="0"/>
-          </a:p>
-        </p:txBody>
-      </p:sp>
-      <p:sp>
-        <p:nvSpPr>
-          <p:cNvPr id="8" name="karte"/>
-          <p:cNvSpPr/>
-          <p:nvPr/>
-        </p:nvSpPr>
-        <p:spPr>
-          <a:xfrm>
-            <a:off x="6233008" y="2446020"/>
-            <a:ext cx="5410048" cy="2468880"/>
-          </a:xfrm>
-          <a:prstGeom prst="roundRect">
-            <a:avLst>
-              <a:gd name="adj" fmla="val 4444"/>
-            </a:avLst>
-          </a:prstGeom>
-          <a:solidFill>
-            <a:srgbClr val="F7F7F7"/>
-          </a:solidFill>
-          <a:ln w="12700">
-            <a:solidFill>
-              <a:srgbClr val="F7F7F7"/>
-            </a:solidFill>
-            <a:prstDash val="solid"/>
-          </a:ln>
-        </p:spPr>
-      </p:sp>
-      <p:sp>
-        <p:nvSpPr>
-          <p:cNvPr id="9" name="icon-kreis-FaDoorOpen"/>
-          <p:cNvSpPr/>
-          <p:nvPr/>
-        </p:nvSpPr>
-        <p:spPr>
-          <a:xfrm>
-            <a:off x="6507328" y="2720340"/>
-            <a:ext cx="640080" cy="640080"/>
-          </a:xfrm>
-          <a:prstGeom prst="ellipse">
-            <a:avLst/>
-          </a:prstGeom>
-          <a:solidFill>
-            <a:srgbClr val="006FAD"/>
-          </a:solidFill>
-          <a:ln w="12700">
-            <a:solidFill>
-              <a:srgbClr val="006FAD"/>
-            </a:solidFill>
-            <a:prstDash val="solid"/>
-          </a:ln>
-        </p:spPr>
-      </p:sp>
-      <p:pic>
-        <p:nvPicPr>
-          <p:cNvPr id="10" name="icon-FaDoorOpen" descr="C:\Users\Thanam\AppData\Local\Temp\claude\c--Projekt-Trainings-azure-basics-training\a9e0bf4e-0d08-4082-a38a-5b8886538508\scratchpad\pptx\assets\icons\FaDoorOpen.png">    </p:cNvPr>
-          <p:cNvPicPr>
-            <a:picLocks noChangeAspect="1"/>
-          </p:cNvPicPr>
-          <p:nvPr/>
-        </p:nvPicPr>
-        <p:blipFill>
-          <a:blip r:embed="rId2"/>
-          <a:stretch>
-            <a:fillRect/>
-          </a:stretch>
-        </p:blipFill>
-        <p:spPr>
-          <a:xfrm>
-            <a:off x="6660947" y="2873959"/>
-            <a:ext cx="332842" cy="332842"/>
-          </a:xfrm>
-          <a:prstGeom prst="rect">
-            <a:avLst/>
-          </a:prstGeom>
-        </p:spPr>
-      </p:pic>
-      <p:sp>
-        <p:nvSpPr>
-          <p:cNvPr id="11" name="Text 7"/>
-          <p:cNvSpPr txBox="1"/>
-          <p:nvPr/>
-        </p:nvSpPr>
-        <p:spPr>
-          <a:xfrm>
-            <a:off x="7330288" y="2720340"/>
-            <a:ext cx="4084168" cy="640080"/>
-          </a:xfrm>
-          <a:prstGeom prst="rect">
-            <a:avLst/>
-          </a:prstGeom>
-          <a:noFill/>
-          <a:ln/>
-        </p:spPr>
-        <p:txBody>
-          <a:bodyPr wrap="square" lIns="0" tIns="0" rIns="0" bIns="0" rtlCol="0" anchor="ctr">
-            <a:normAutofit/>
-          </a:bodyPr>
-          <a:lstStyle/>
-          <a:p>
-            <a:pPr indent="0" marL="0">
-              <a:buNone/>
-            </a:pPr>
-            <a:r>
-              <a:rPr lang="en-US" sz="2000" b="1" dirty="0">
-                <a:solidFill>
-                  <a:srgbClr val="27303A"/>
-                </a:solidFill>
-              </a:rPr>
-              <a:t>Exit-Ticket</a:t>
-            </a:r>
-            <a:endParaRPr lang="en-US" sz="2000" dirty="0"/>
-          </a:p>
-        </p:txBody>
-      </p:sp>
-      <p:sp>
-        <p:nvSpPr>
-          <p:cNvPr id="12" name="Text 8"/>
-          <p:cNvSpPr txBox="1"/>
-          <p:nvPr/>
-        </p:nvSpPr>
-        <p:spPr>
-          <a:xfrm>
-            <a:off x="6507328" y="3543300"/>
-            <a:ext cx="4861408" cy="1234440"/>
-          </a:xfrm>
-          <a:prstGeom prst="rect">
-            <a:avLst/>
-          </a:prstGeom>
-          <a:noFill/>
-          <a:ln/>
-        </p:spPr>
-        <p:txBody>
-          <a:bodyPr wrap="square" lIns="0" tIns="0" rIns="0" bIns="0" rtlCol="0" anchor="t"/>
-          <a:lstStyle/>
-          <a:p>
-            <a:pPr indent="0" marL="0">
-              <a:spcAft>
-                <a:spcPts val="400"/>
-              </a:spcAft>
-              <a:buNone/>
-            </a:pPr>
-            <a:r>
-              <a:rPr lang="en-US" sz="1600" dirty="0">
-                <a:solidFill>
-                  <a:srgbClr val="27303A"/>
-                </a:solidFill>
-              </a:rPr>
-              <a:t>Was ist der grösste Unterschied zwischen deiner VM und einer VM in der Cloud?</a:t>
-            </a:r>
-            <a:endParaRPr lang="en-US" sz="1600" dirty="0"/>
-          </a:p>
-        </p:txBody>
-      </p:sp>
-      <p:sp>
-        <p:nvSpPr>
-          <p:cNvPr id="25" name="Slide Number Placeholder 0"/>
-          <p:cNvSpPr>
-            <a:spLocks noGrp="1"/>
-          </p:cNvSpPr>
-          <p:nvPr>
-            <p:ph type="sldNum" sz="quarter" idx="4294967295"/>
-          </p:nvPr>
-        </p:nvSpPr>
-        <p:spPr>
-          <a:xfrm>
-            <a:off x="11183112" y="6336792"/>
-            <a:ext cx="457200" cy="365760"/>
-          </a:xfrm>
-          <a:prstGeom prst="rect">
-            <a:avLst/>
-          </a:prstGeom>
-          <a:extLst>
-            <a:ext uri="{C572A759-6A51-4108-AA02-DFA0A04FC94B}">
-              <ma14:wrappingTextBoxFlag xmlns:ma14="http://schemas.microsoft.com/office/mac/drawingml/2011/main" val="0"/>
-            </a:ext>
-          </a:extLst>
-        </p:spPr>
-        <p:txBody>
-          <a:bodyPr/>
-          <a:lstStyle>
-            <a:lvl1pPr>
-              <a:defRPr sz="1000">
-                <a:solidFill>
-                  <a:srgbClr val="6F6F6F"/>
-                </a:solidFill>
-              </a:defRPr>
-            </a:lvl1pPr>
-          </a:lstStyle>
-          <a:p>
-            <a:pPr algn="r"/>
-            <a:fld id="{F7021451-1387-4CA6-816F-3879F97B5CBC}" type="slidenum">
-              <a:rPr b="0" lang="en-US"/>
-              <a:t>11</a:t>
-            </a:fld>
-            <a:endParaRPr lang="en-US"/>
-          </a:p>
-        </p:txBody>
-      </p:sp>
-    </p:spTree>
-  </p:cSld>
-  <p:clrMapOvr>
-    <a:masterClrMapping/>
-  </p:clrMapOvr>
-</p:sld>
-</file>
-
-<file path=ppt/slides/slide12.xml><?xml version="1.0" encoding="utf-8"?>
-<p:sld xmlns:a="http://schemas.openxmlformats.org/drawingml/2006/main" xmlns:r="http://schemas.openxmlformats.org/officeDocument/2006/relationships" xmlns:p="http://schemas.openxmlformats.org/presentationml/2006/main">
-  <p:cSld name="Slide 12">
-    <p:spTree>
-      <p:nvGrpSpPr>
-        <p:cNvPr id="1" name=""/>
-        <p:cNvGrpSpPr/>
-        <p:nvPr/>
-      </p:nvGrpSpPr>
-      <p:grpSpPr>
-        <a:xfrm>
-          <a:off x="0" y="0"/>
-          <a:ext cx="0" cy="0"/>
-          <a:chOff x="0" y="0"/>
-          <a:chExt cx="0" cy="0"/>
-        </a:xfrm>
-      </p:grpSpPr>
-      <p:sp>
-        <p:nvSpPr>
-          <p:cNvPr id="2" name="Text 0"/>
-          <p:cNvSpPr/>
-          <p:nvPr>
-            <p:ph idx="101" type="title" hasCustomPrompt="1"/>
-          </p:nvPr>
-        </p:nvSpPr>
-        <p:spPr>
-          <a:xfrm>
-            <a:off x="548640" y="1554480"/>
-            <a:ext cx="11094415" cy="914400"/>
-          </a:xfrm>
-          <a:prstGeom prst="rect">
-            <a:avLst/>
-          </a:prstGeom>
-          <a:noFill/>
-          <a:ln/>
-        </p:spPr>
-        <p:txBody>
-          <a:bodyPr wrap="square" lIns="0" tIns="0" rIns="0" bIns="0" rtlCol="0" anchor="ctr"/>
-          <a:lstStyle/>
-          <a:p>
-            <a:pPr algn="l" indent="0" marL="0">
-              <a:buNone/>
-            </a:pPr>
-            <a:r>
-              <a:rPr lang="en-US" sz="4000" b="1" dirty="0">
-                <a:solidFill>
-                  <a:srgbClr val="FFFFFF"/>
-                </a:solidFill>
-              </a:rPr>
-              <a:t>Morgen: ab in die Cloud</a:t>
-            </a:r>
-            <a:endParaRPr lang="en-US" sz="4000" dirty="0"/>
-          </a:p>
-        </p:txBody>
-      </p:sp>
-      <p:sp>
-        <p:nvSpPr>
-          <p:cNvPr id="3" name="Text 0"/>
-          <p:cNvSpPr/>
-          <p:nvPr>
-            <p:ph idx="102" type="body" hasCustomPrompt="1"/>
-          </p:nvPr>
-        </p:nvSpPr>
-        <p:spPr>
-          <a:xfrm>
-            <a:off x="548640" y="2560320"/>
-            <a:ext cx="11094415" cy="640080"/>
-          </a:xfrm>
-          <a:prstGeom prst="rect">
-            <a:avLst/>
-          </a:prstGeom>
-          <a:noFill/>
-          <a:ln/>
-        </p:spPr>
-        <p:txBody>
-          <a:bodyPr wrap="square" lIns="0" tIns="0" rIns="0" bIns="0" rtlCol="0" anchor="t"/>
-          <a:lstStyle/>
-          <a:p>
-            <a:pPr algn="l" indent="0" marL="0">
-              <a:buNone/>
-            </a:pPr>
-            <a:r>
-              <a:rPr lang="en-US" sz="2000" dirty="0">
-                <a:solidFill>
-                  <a:srgbClr val="DEE2FB"/>
-                </a:solidFill>
-              </a:rPr>
-              <a:t>Tag 2 · Public Cloud und Azure Grundlagen</a:t>
-            </a:r>
-            <a:endParaRPr lang="en-US" sz="2000" dirty="0"/>
-          </a:p>
-        </p:txBody>
-      </p:sp>
-      <p:sp>
-        <p:nvSpPr>
-          <p:cNvPr id="4" name="karte-dunkel"/>
-          <p:cNvSpPr/>
-          <p:nvPr/>
-        </p:nvSpPr>
-        <p:spPr>
-          <a:xfrm>
-            <a:off x="548640" y="3611880"/>
-            <a:ext cx="5410048" cy="2103120"/>
-          </a:xfrm>
-          <a:prstGeom prst="roundRect">
-            <a:avLst>
-              <a:gd name="adj" fmla="val 5217"/>
-            </a:avLst>
-          </a:prstGeom>
-          <a:solidFill>
-            <a:srgbClr val="323C48"/>
-          </a:solidFill>
-          <a:ln w="12700">
-            <a:solidFill>
-              <a:srgbClr val="323C48"/>
-            </a:solidFill>
-            <a:prstDash val="solid"/>
-          </a:ln>
-        </p:spPr>
-      </p:sp>
-      <p:sp>
-        <p:nvSpPr>
-          <p:cNvPr id="5" name="icon-kreis-FaCloud"/>
-          <p:cNvSpPr/>
-          <p:nvPr/>
-        </p:nvSpPr>
-        <p:spPr>
-          <a:xfrm>
-            <a:off x="822960" y="3886200"/>
-            <a:ext cx="640080" cy="640080"/>
-          </a:xfrm>
-          <a:prstGeom prst="ellipse">
-            <a:avLst/>
-          </a:prstGeom>
-          <a:solidFill>
-            <a:srgbClr val="006FAD"/>
-          </a:solidFill>
-          <a:ln w="12700">
-            <a:solidFill>
-              <a:srgbClr val="006FAD"/>
-            </a:solidFill>
-            <a:prstDash val="solid"/>
-          </a:ln>
-        </p:spPr>
-      </p:sp>
-      <p:pic>
-        <p:nvPicPr>
-          <p:cNvPr id="6" name="icon-FaCloud" descr="C:\Users\Thanam\AppData\Local\Temp\claude\c--Projekt-Trainings-azure-basics-training\a9e0bf4e-0d08-4082-a38a-5b8886538508\scratchpad\pptx\assets\icons\FaCloud.png">    </p:cNvPr>
-          <p:cNvPicPr>
-            <a:picLocks noChangeAspect="1"/>
-          </p:cNvPicPr>
-          <p:nvPr/>
-        </p:nvPicPr>
-        <p:blipFill>
-          <a:blip r:embed="rId1"/>
-          <a:stretch>
-            <a:fillRect/>
-          </a:stretch>
-        </p:blipFill>
-        <p:spPr>
-          <a:xfrm>
-            <a:off x="976579" y="4039819"/>
-            <a:ext cx="332842" cy="332842"/>
-          </a:xfrm>
-          <a:prstGeom prst="rect">
-            <a:avLst/>
-          </a:prstGeom>
-        </p:spPr>
-      </p:pic>
-      <p:sp>
-        <p:nvSpPr>
-          <p:cNvPr id="7" name="Text 4"/>
-          <p:cNvSpPr txBox="1"/>
-          <p:nvPr/>
-        </p:nvSpPr>
-        <p:spPr>
-          <a:xfrm>
-            <a:off x="1645920" y="3886200"/>
-            <a:ext cx="4084168" cy="640080"/>
-          </a:xfrm>
-          <a:prstGeom prst="rect">
-            <a:avLst/>
-          </a:prstGeom>
-          <a:noFill/>
-          <a:ln/>
-        </p:spPr>
-        <p:txBody>
-          <a:bodyPr wrap="square" lIns="0" tIns="0" rIns="0" bIns="0" rtlCol="0" anchor="ctr"/>
-          <a:lstStyle/>
-          <a:p>
-            <a:pPr indent="0" marL="0">
-              <a:buNone/>
-            </a:pPr>
-            <a:r>
-              <a:rPr lang="en-US" sz="2000" b="1" dirty="0">
-                <a:solidFill>
-                  <a:srgbClr val="FFFFFF"/>
-                </a:solidFill>
-              </a:rPr>
-              <a:t>Hyperscaler</a:t>
-            </a:r>
-            <a:endParaRPr lang="en-US" sz="2000" dirty="0"/>
-          </a:p>
-        </p:txBody>
-      </p:sp>
-      <p:sp>
-        <p:nvSpPr>
-          <p:cNvPr id="8" name="Text 5"/>
-          <p:cNvSpPr txBox="1"/>
-          <p:nvPr/>
-        </p:nvSpPr>
-        <p:spPr>
-          <a:xfrm>
-            <a:off x="822960" y="4709160"/>
-            <a:ext cx="4861408" cy="868680"/>
-          </a:xfrm>
-          <a:prstGeom prst="rect">
-            <a:avLst/>
-          </a:prstGeom>
-          <a:noFill/>
-          <a:ln/>
-        </p:spPr>
-        <p:txBody>
-          <a:bodyPr wrap="square" lIns="0" tIns="0" rIns="0" bIns="0" rtlCol="0" anchor="t"/>
-          <a:lstStyle/>
-          <a:p>
-            <a:pPr indent="0" marL="0">
-              <a:buNone/>
-            </a:pPr>
-            <a:r>
-              <a:rPr lang="en-US" sz="1600" dirty="0">
-                <a:solidFill>
-                  <a:srgbClr val="DEE2FB"/>
-                </a:solidFill>
-              </a:rPr>
-              <a:t>Was passiert, wenn man tausende Hypervisoren zusammenschaltet?</a:t>
-            </a:r>
-            <a:endParaRPr lang="en-US" sz="1600" dirty="0"/>
-          </a:p>
-        </p:txBody>
-      </p:sp>
-      <p:sp>
-        <p:nvSpPr>
-          <p:cNvPr id="9" name="karte-dunkel"/>
-          <p:cNvSpPr/>
-          <p:nvPr/>
-        </p:nvSpPr>
-        <p:spPr>
-          <a:xfrm>
-            <a:off x="6233008" y="3611880"/>
-            <a:ext cx="5410048" cy="2103120"/>
-          </a:xfrm>
-          <a:prstGeom prst="roundRect">
-            <a:avLst>
-              <a:gd name="adj" fmla="val 5217"/>
-            </a:avLst>
-          </a:prstGeom>
-          <a:solidFill>
-            <a:srgbClr val="323C48"/>
-          </a:solidFill>
-          <a:ln w="12700">
-            <a:solidFill>
-              <a:srgbClr val="323C48"/>
-            </a:solidFill>
-            <a:prstDash val="solid"/>
-          </a:ln>
-        </p:spPr>
-      </p:sp>
-      <p:sp>
-        <p:nvSpPr>
-          <p:cNvPr id="10" name="icon-kreis-FaKey"/>
-          <p:cNvSpPr/>
-          <p:nvPr/>
-        </p:nvSpPr>
-        <p:spPr>
-          <a:xfrm>
-            <a:off x="6507328" y="3886200"/>
-            <a:ext cx="640080" cy="640080"/>
-          </a:xfrm>
-          <a:prstGeom prst="ellipse">
-            <a:avLst/>
-          </a:prstGeom>
-          <a:solidFill>
-            <a:srgbClr val="006FAD"/>
-          </a:solidFill>
-          <a:ln w="12700">
-            <a:solidFill>
-              <a:srgbClr val="006FAD"/>
-            </a:solidFill>
-            <a:prstDash val="solid"/>
-          </a:ln>
-        </p:spPr>
-      </p:sp>
-      <p:pic>
-        <p:nvPicPr>
-          <p:cNvPr id="11" name="icon-FaKey" descr="C:\Users\Thanam\AppData\Local\Temp\claude\c--Projekt-Trainings-azure-basics-training\a9e0bf4e-0d08-4082-a38a-5b8886538508\scratchpad\pptx\assets\icons\FaKey.png">    </p:cNvPr>
-          <p:cNvPicPr>
-            <a:picLocks noChangeAspect="1"/>
-          </p:cNvPicPr>
-          <p:nvPr/>
-        </p:nvPicPr>
-        <p:blipFill>
-          <a:blip r:embed="rId2"/>
-          <a:stretch>
-            <a:fillRect/>
-          </a:stretch>
-        </p:blipFill>
-        <p:spPr>
-          <a:xfrm>
-            <a:off x="6660947" y="4039819"/>
-            <a:ext cx="332842" cy="332842"/>
-          </a:xfrm>
-          <a:prstGeom prst="rect">
-            <a:avLst/>
-          </a:prstGeom>
-        </p:spPr>
-      </p:pic>
-      <p:sp>
-        <p:nvSpPr>
-          <p:cNvPr id="12" name="Text 8"/>
-          <p:cNvSpPr txBox="1"/>
-          <p:nvPr/>
-        </p:nvSpPr>
-        <p:spPr>
-          <a:xfrm>
-            <a:off x="7330288" y="3886200"/>
-            <a:ext cx="4084168" cy="640080"/>
-          </a:xfrm>
-          <a:prstGeom prst="rect">
-            <a:avLst/>
-          </a:prstGeom>
-          <a:noFill/>
-          <a:ln/>
-        </p:spPr>
-        <p:txBody>
-          <a:bodyPr wrap="square" lIns="0" tIns="0" rIns="0" bIns="0" rtlCol="0" anchor="ctr"/>
-          <a:lstStyle/>
-          <a:p>
-            <a:pPr indent="0" marL="0">
-              <a:buNone/>
-            </a:pPr>
-            <a:r>
-              <a:rPr lang="en-US" sz="2000" b="1" dirty="0">
-                <a:solidFill>
-                  <a:srgbClr val="FFFFFF"/>
-                </a:solidFill>
-              </a:rPr>
-              <a:t>Azure for Students</a:t>
-            </a:r>
-            <a:endParaRPr lang="en-US" sz="2000" dirty="0"/>
-          </a:p>
-        </p:txBody>
-      </p:sp>
-      <p:sp>
-        <p:nvSpPr>
-          <p:cNvPr id="13" name="Text 9"/>
-          <p:cNvSpPr txBox="1"/>
-          <p:nvPr/>
-        </p:nvSpPr>
-        <p:spPr>
-          <a:xfrm>
-            <a:off x="6507328" y="4709160"/>
-            <a:ext cx="4861408" cy="868680"/>
-          </a:xfrm>
-          <a:prstGeom prst="rect">
-            <a:avLst/>
-          </a:prstGeom>
-          <a:noFill/>
-          <a:ln/>
-        </p:spPr>
-        <p:txBody>
-          <a:bodyPr wrap="square" lIns="0" tIns="0" rIns="0" bIns="0" rtlCol="0" anchor="t"/>
-          <a:lstStyle/>
-          <a:p>
-            <a:pPr indent="0" marL="0">
-              <a:buNone/>
-            </a:pPr>
-            <a:r>
-              <a:rPr lang="en-US" sz="1600" dirty="0">
-                <a:solidFill>
-                  <a:srgbClr val="DEE2FB"/>
-                </a:solidFill>
-              </a:rPr>
-              <a:t>Login testen: portal.azure.com</a:t>
-            </a:r>
-            <a:endParaRPr lang="en-US" sz="1600" dirty="0"/>
           </a:p>
         </p:txBody>
       </p:sp>
@@ -3994,7 +2454,7 @@
                   <a:srgbClr val="27303A"/>
                 </a:solidFill>
               </a:rPr>
-              <a:t>Willkommen im Kurs</a:t>
+              <a:t>Was weisst du schon?</a:t>
             </a:r>
             <a:endParaRPr lang="en-US" sz="3400" dirty="0"/>
           </a:p>
@@ -4002,41 +2462,14 @@
       </p:sp>
       <p:sp>
         <p:nvSpPr>
-          <p:cNvPr id="3" name="karte"/>
+          <p:cNvPr id="3" name="icon-kreis-FaServer"/>
           <p:cNvSpPr/>
           <p:nvPr/>
         </p:nvSpPr>
         <p:spPr>
           <a:xfrm>
             <a:off x="548640" y="2446020"/>
-            <a:ext cx="3515258" cy="2468880"/>
-          </a:xfrm>
-          <a:prstGeom prst="roundRect">
-            <a:avLst>
-              <a:gd name="adj" fmla="val 4444"/>
-            </a:avLst>
-          </a:prstGeom>
-          <a:solidFill>
-            <a:srgbClr val="F7F7F7"/>
-          </a:solidFill>
-          <a:ln w="12700">
-            <a:solidFill>
-              <a:srgbClr val="F7F7F7"/>
-            </a:solidFill>
-            <a:prstDash val="solid"/>
-          </a:ln>
-        </p:spPr>
-      </p:sp>
-      <p:sp>
-        <p:nvSpPr>
-          <p:cNvPr id="4" name="icon-kreis-FaLaptop"/>
-          <p:cNvSpPr/>
-          <p:nvPr/>
-        </p:nvSpPr>
-        <p:spPr>
-          <a:xfrm>
-            <a:off x="822960" y="2720340"/>
-            <a:ext cx="640080" cy="640080"/>
+            <a:ext cx="548640" cy="548640"/>
           </a:xfrm>
           <a:prstGeom prst="ellipse">
             <a:avLst/>
@@ -4054,7 +2487,7 @@
       </p:sp>
       <p:pic>
         <p:nvPicPr>
-          <p:cNvPr id="5" name="icon-FaLaptop" descr="C:\Users\Thanam\AppData\Local\Temp\claude\c--Projekt-Trainings-azure-basics-training\a9e0bf4e-0d08-4082-a38a-5b8886538508\scratchpad\pptx\assets\icons\FaLaptop.png">    </p:cNvPr>
+          <p:cNvPr id="4" name="icon-FaServer" descr="C:\Users\Thanam\AppData\Local\Temp\claude\c--Projekt-Trainings-azure-basics-training\a7a6b8eb-22f3-4b42-aecc-5af05d1502b1\scratchpad\folien\assets\icons\FaServer.png">    </p:cNvPr>
           <p:cNvPicPr>
             <a:picLocks noChangeAspect="1"/>
           </p:cNvPicPr>
@@ -4068,8 +2501,8 @@
         </p:blipFill>
         <p:spPr>
           <a:xfrm>
-            <a:off x="976579" y="2873959"/>
-            <a:ext cx="332842" cy="332842"/>
+            <a:off x="680314" y="2577694"/>
+            <a:ext cx="285293" cy="285293"/>
           </a:xfrm>
           <a:prstGeom prst="rect">
             <a:avLst/>
@@ -4078,14 +2511,14 @@
       </p:pic>
       <p:sp>
         <p:nvSpPr>
-          <p:cNvPr id="6" name="Text 3"/>
+          <p:cNvPr id="5" name="Text 2"/>
           <p:cNvSpPr txBox="1"/>
           <p:nvPr/>
         </p:nvSpPr>
         <p:spPr>
           <a:xfrm>
-            <a:off x="1645920" y="2720340"/>
-            <a:ext cx="2189378" cy="640080"/>
+            <a:off x="1325880" y="2240280"/>
+            <a:ext cx="10317175" cy="960120"/>
           </a:xfrm>
           <a:prstGeom prst="rect">
             <a:avLst/>
@@ -4094,102 +2527,48 @@
           <a:ln/>
         </p:spPr>
         <p:txBody>
-          <a:bodyPr wrap="square" lIns="0" tIns="0" rIns="0" bIns="0" rtlCol="0" anchor="ctr">
-            <a:normAutofit/>
-          </a:bodyPr>
+          <a:bodyPr wrap="square" lIns="0" tIns="0" rIns="0" bIns="0" rtlCol="0" anchor="ctr"/>
           <a:lstStyle/>
           <a:p>
             <a:pPr indent="0" marL="0">
               <a:buNone/>
             </a:pPr>
             <a:r>
-              <a:rPr lang="en-US" sz="2000" b="1" dirty="0">
+              <a:rPr lang="en-US" sz="1800" b="1" dirty="0">
                 <a:solidFill>
                   <a:srgbClr val="27303A"/>
                 </a:solidFill>
               </a:rPr>
-              <a:t>Hands-on</a:t>
+              <a:t>Wer hat schon eine virtuelle Maschine benutzt?</a:t>
             </a:r>
-            <a:endParaRPr lang="en-US" sz="2000" dirty="0"/>
-          </a:p>
-        </p:txBody>
-      </p:sp>
-      <p:sp>
-        <p:nvSpPr>
-          <p:cNvPr id="7" name="Text 4"/>
-          <p:cNvSpPr txBox="1"/>
-          <p:nvPr/>
-        </p:nvSpPr>
-        <p:spPr>
-          <a:xfrm>
-            <a:off x="822960" y="3543300"/>
-            <a:ext cx="2966618" cy="1234440"/>
-          </a:xfrm>
-          <a:prstGeom prst="rect">
-            <a:avLst/>
-          </a:prstGeom>
-          <a:noFill/>
-          <a:ln/>
-        </p:spPr>
-        <p:txBody>
-          <a:bodyPr wrap="square" lIns="0" tIns="0" rIns="0" bIns="0" rtlCol="0" anchor="t"/>
-          <a:lstStyle/>
+            <a:endParaRPr lang="en-US" sz="1800" dirty="0"/>
+          </a:p>
           <a:p>
             <a:pPr indent="0" marL="0">
-              <a:spcAft>
-                <a:spcPts val="400"/>
-              </a:spcAft>
               <a:buNone/>
             </a:pPr>
             <a:r>
-              <a:rPr lang="en-US" sz="1600" dirty="0">
+              <a:rPr lang="en-US" sz="1800" dirty="0">
                 <a:solidFill>
-                  <a:srgbClr val="27303A"/>
+                  <a:srgbClr val="6F6F6F"/>
                 </a:solidFill>
               </a:rPr>
-              <a:t>Rund 70 % der Zeit arbeitest du selbst an Aufträgen – einzeln oder zu zweit.</a:t>
+              <a:t>Mit welchem Programm? Wofür?</a:t>
             </a:r>
-            <a:endParaRPr lang="en-US" sz="1600" dirty="0"/>
+            <a:endParaRPr lang="en-US" sz="1800" dirty="0"/>
           </a:p>
         </p:txBody>
       </p:sp>
       <p:sp>
         <p:nvSpPr>
-          <p:cNvPr id="8" name="karte"/>
+          <p:cNvPr id="6" name="icon-kreis-FaBuilding"/>
           <p:cNvSpPr/>
           <p:nvPr/>
         </p:nvSpPr>
         <p:spPr>
           <a:xfrm>
-            <a:off x="4338218" y="2446020"/>
-            <a:ext cx="3515258" cy="2468880"/>
-          </a:xfrm>
-          <a:prstGeom prst="roundRect">
-            <a:avLst>
-              <a:gd name="adj" fmla="val 4444"/>
-            </a:avLst>
-          </a:prstGeom>
-          <a:solidFill>
-            <a:srgbClr val="F7F7F7"/>
-          </a:solidFill>
-          <a:ln w="12700">
-            <a:solidFill>
-              <a:srgbClr val="F7F7F7"/>
-            </a:solidFill>
-            <a:prstDash val="solid"/>
-          </a:ln>
-        </p:spPr>
-      </p:sp>
-      <p:sp>
-        <p:nvSpPr>
-          <p:cNvPr id="9" name="icon-kreis-FaLightbulb"/>
-          <p:cNvSpPr/>
-          <p:nvPr/>
-        </p:nvSpPr>
-        <p:spPr>
-          <a:xfrm>
-            <a:off x="4612538" y="2720340"/>
-            <a:ext cx="640080" cy="640080"/>
+            <a:off x="548640" y="3406140"/>
+            <a:ext cx="548640" cy="548640"/>
           </a:xfrm>
           <a:prstGeom prst="ellipse">
             <a:avLst/>
@@ -4207,7 +2586,7 @@
       </p:sp>
       <p:pic>
         <p:nvPicPr>
-          <p:cNvPr id="10" name="icon-FaLightbulb" descr="C:\Users\Thanam\AppData\Local\Temp\claude\c--Projekt-Trainings-azure-basics-training\a9e0bf4e-0d08-4082-a38a-5b8886538508\scratchpad\pptx\assets\icons\FaLightbulb.png">    </p:cNvPr>
+          <p:cNvPr id="7" name="icon-FaBuilding" descr="C:\Users\Thanam\AppData\Local\Temp\claude\c--Projekt-Trainings-azure-basics-training\a7a6b8eb-22f3-4b42-aecc-5af05d1502b1\scratchpad\folien\assets\icons\FaBuilding.png">    </p:cNvPr>
           <p:cNvPicPr>
             <a:picLocks noChangeAspect="1"/>
           </p:cNvPicPr>
@@ -4221,8 +2600,8 @@
         </p:blipFill>
         <p:spPr>
           <a:xfrm>
-            <a:off x="4766158" y="2873959"/>
-            <a:ext cx="332842" cy="332842"/>
+            <a:off x="680314" y="3537814"/>
+            <a:ext cx="285293" cy="285293"/>
           </a:xfrm>
           <a:prstGeom prst="rect">
             <a:avLst/>
@@ -4231,14 +2610,14 @@
       </p:pic>
       <p:sp>
         <p:nvSpPr>
-          <p:cNvPr id="11" name="Text 7"/>
+          <p:cNvPr id="8" name="Text 4"/>
           <p:cNvSpPr txBox="1"/>
           <p:nvPr/>
         </p:nvSpPr>
         <p:spPr>
           <a:xfrm>
-            <a:off x="5435498" y="2720340"/>
-            <a:ext cx="2189378" cy="640080"/>
+            <a:off x="1325880" y="3200400"/>
+            <a:ext cx="10317175" cy="960120"/>
           </a:xfrm>
           <a:prstGeom prst="rect">
             <a:avLst/>
@@ -4247,102 +2626,48 @@
           <a:ln/>
         </p:spPr>
         <p:txBody>
-          <a:bodyPr wrap="square" lIns="0" tIns="0" rIns="0" bIns="0" rtlCol="0" anchor="ctr">
-            <a:normAutofit/>
-          </a:bodyPr>
+          <a:bodyPr wrap="square" lIns="0" tIns="0" rIns="0" bIns="0" rtlCol="0" anchor="ctr"/>
           <a:lstStyle/>
           <a:p>
             <a:pPr indent="0" marL="0">
               <a:buNone/>
             </a:pPr>
             <a:r>
-              <a:rPr lang="en-US" sz="2000" b="1" dirty="0">
+              <a:rPr lang="en-US" sz="1800" b="1" dirty="0">
                 <a:solidFill>
                   <a:srgbClr val="27303A"/>
                 </a:solidFill>
               </a:rPr>
-              <a:t>Kurze Inputs</a:t>
+              <a:t>Wo laufen VMs in deinem Lehrbetrieb?</a:t>
             </a:r>
-            <a:endParaRPr lang="en-US" sz="2000" dirty="0"/>
-          </a:p>
-        </p:txBody>
-      </p:sp>
-      <p:sp>
-        <p:nvSpPr>
-          <p:cNvPr id="12" name="Text 8"/>
-          <p:cNvSpPr txBox="1"/>
-          <p:nvPr/>
-        </p:nvSpPr>
-        <p:spPr>
-          <a:xfrm>
-            <a:off x="4612538" y="3543300"/>
-            <a:ext cx="2966618" cy="1234440"/>
-          </a:xfrm>
-          <a:prstGeom prst="rect">
-            <a:avLst/>
-          </a:prstGeom>
-          <a:noFill/>
-          <a:ln/>
-        </p:spPr>
-        <p:txBody>
-          <a:bodyPr wrap="square" lIns="0" tIns="0" rIns="0" bIns="0" rtlCol="0" anchor="t"/>
-          <a:lstStyle/>
+            <a:endParaRPr lang="en-US" sz="1800" dirty="0"/>
+          </a:p>
           <a:p>
             <a:pPr indent="0" marL="0">
-              <a:spcAft>
-                <a:spcPts val="400"/>
-              </a:spcAft>
               <a:buNone/>
             </a:pPr>
             <a:r>
-              <a:rPr lang="en-US" sz="1600" dirty="0">
+              <a:rPr lang="en-US" sz="1800" dirty="0">
                 <a:solidFill>
-                  <a:srgbClr val="27303A"/>
+                  <a:srgbClr val="6F6F6F"/>
                 </a:solidFill>
               </a:rPr>
-              <a:t>Zu wichtigen Themen gibt es kurze Inputs, höchstens 20 Minuten, immer mit Live-Demo.</a:t>
+              <a:t>Server im Keller, Rechenzentrum, Cloud?</a:t>
             </a:r>
-            <a:endParaRPr lang="en-US" sz="1600" dirty="0"/>
+            <a:endParaRPr lang="en-US" sz="1800" dirty="0"/>
           </a:p>
         </p:txBody>
       </p:sp>
       <p:sp>
         <p:nvSpPr>
-          <p:cNvPr id="13" name="karte"/>
+          <p:cNvPr id="9" name="icon-kreis-FaDocker"/>
           <p:cNvSpPr/>
           <p:nvPr/>
         </p:nvSpPr>
         <p:spPr>
           <a:xfrm>
-            <a:off x="8127797" y="2446020"/>
-            <a:ext cx="3515258" cy="2468880"/>
-          </a:xfrm>
-          <a:prstGeom prst="roundRect">
-            <a:avLst>
-              <a:gd name="adj" fmla="val 4444"/>
-            </a:avLst>
-          </a:prstGeom>
-          <a:solidFill>
-            <a:srgbClr val="F7F7F7"/>
-          </a:solidFill>
-          <a:ln w="12700">
-            <a:solidFill>
-              <a:srgbClr val="F7F7F7"/>
-            </a:solidFill>
-            <a:prstDash val="solid"/>
-          </a:ln>
-        </p:spPr>
-      </p:sp>
-      <p:sp>
-        <p:nvSpPr>
-          <p:cNvPr id="14" name="icon-kreis-FaHandsHelping"/>
-          <p:cNvSpPr/>
-          <p:nvPr/>
-        </p:nvSpPr>
-        <p:spPr>
-          <a:xfrm>
-            <a:off x="8402117" y="2720340"/>
-            <a:ext cx="640080" cy="640080"/>
+            <a:off x="548640" y="4366260"/>
+            <a:ext cx="548640" cy="548640"/>
           </a:xfrm>
           <a:prstGeom prst="ellipse">
             <a:avLst/>
@@ -4360,7 +2685,7 @@
       </p:sp>
       <p:pic>
         <p:nvPicPr>
-          <p:cNvPr id="15" name="icon-FaHandsHelping" descr="C:\Users\Thanam\AppData\Local\Temp\claude\c--Projekt-Trainings-azure-basics-training\a9e0bf4e-0d08-4082-a38a-5b8886538508\scratchpad\pptx\assets\icons\FaHandsHelping.png">    </p:cNvPr>
+          <p:cNvPr id="10" name="icon-FaDocker" descr="C:\Users\Thanam\AppData\Local\Temp\claude\c--Projekt-Trainings-azure-basics-training\a7a6b8eb-22f3-4b42-aecc-5af05d1502b1\scratchpad\folien\assets\icons\FaDocker.png">    </p:cNvPr>
           <p:cNvPicPr>
             <a:picLocks noChangeAspect="1"/>
           </p:cNvPicPr>
@@ -4374,8 +2699,8 @@
         </p:blipFill>
         <p:spPr>
           <a:xfrm>
-            <a:off x="8555736" y="2873959"/>
-            <a:ext cx="332842" cy="332842"/>
+            <a:off x="680314" y="4497934"/>
+            <a:ext cx="285293" cy="285293"/>
           </a:xfrm>
           <a:prstGeom prst="rect">
             <a:avLst/>
@@ -4384,14 +2709,14 @@
       </p:pic>
       <p:sp>
         <p:nvSpPr>
-          <p:cNvPr id="16" name="Text 11"/>
+          <p:cNvPr id="11" name="Text 6"/>
           <p:cNvSpPr txBox="1"/>
           <p:nvPr/>
         </p:nvSpPr>
         <p:spPr>
           <a:xfrm>
-            <a:off x="9225077" y="2720340"/>
-            <a:ext cx="2189378" cy="640080"/>
+            <a:off x="1325880" y="4160520"/>
+            <a:ext cx="10317175" cy="960120"/>
           </a:xfrm>
           <a:prstGeom prst="rect">
             <a:avLst/>
@@ -4400,62 +2725,35 @@
           <a:ln/>
         </p:spPr>
         <p:txBody>
-          <a:bodyPr wrap="square" lIns="0" tIns="0" rIns="0" bIns="0" rtlCol="0" anchor="ctr">
-            <a:normAutofit/>
-          </a:bodyPr>
+          <a:bodyPr wrap="square" lIns="0" tIns="0" rIns="0" bIns="0" rtlCol="0" anchor="ctr"/>
           <a:lstStyle/>
           <a:p>
             <a:pPr indent="0" marL="0">
               <a:buNone/>
             </a:pPr>
             <a:r>
-              <a:rPr lang="en-US" sz="2000" b="1" dirty="0">
+              <a:rPr lang="en-US" sz="1800" b="1" dirty="0">
                 <a:solidFill>
                   <a:srgbClr val="27303A"/>
                 </a:solidFill>
               </a:rPr>
-              <a:t>Coaching</a:t>
+              <a:t>Wer kennt Docker?</a:t>
             </a:r>
-            <a:endParaRPr lang="en-US" sz="2000" dirty="0"/>
-          </a:p>
-        </p:txBody>
-      </p:sp>
-      <p:sp>
-        <p:nvSpPr>
-          <p:cNvPr id="17" name="Text 12"/>
-          <p:cNvSpPr txBox="1"/>
-          <p:nvPr/>
-        </p:nvSpPr>
-        <p:spPr>
-          <a:xfrm>
-            <a:off x="8402117" y="3543300"/>
-            <a:ext cx="2966618" cy="1234440"/>
-          </a:xfrm>
-          <a:prstGeom prst="rect">
-            <a:avLst/>
-          </a:prstGeom>
-          <a:noFill/>
-          <a:ln/>
-        </p:spPr>
-        <p:txBody>
-          <a:bodyPr wrap="square" lIns="0" tIns="0" rIns="0" bIns="0" rtlCol="0" anchor="t"/>
-          <a:lstStyle/>
+            <a:endParaRPr lang="en-US" sz="1800" dirty="0"/>
+          </a:p>
           <a:p>
             <a:pPr indent="0" marL="0">
-              <a:spcAft>
-                <a:spcPts val="400"/>
-              </a:spcAft>
               <a:buNone/>
             </a:pPr>
             <a:r>
-              <a:rPr lang="en-US" sz="1600" dirty="0">
+              <a:rPr lang="en-US" sz="1800" dirty="0">
                 <a:solidFill>
-                  <a:srgbClr val="27303A"/>
+                  <a:srgbClr val="6F6F6F"/>
                 </a:solidFill>
               </a:rPr>
-              <a:t>Die Kursleitung geht herum und hilft. Du bestimmst dein Tempo.</a:t>
+              <a:t>Was ist der Unterschied zu einer VM? Eine Vermutung reicht.</a:t>
             </a:r>
-            <a:endParaRPr lang="en-US" sz="1600" dirty="0"/>
+            <a:endParaRPr lang="en-US" sz="1800" dirty="0"/>
           </a:p>
         </p:txBody>
       </p:sp>
@@ -4561,1153 +2859,777 @@
                   <a:srgbClr val="27303A"/>
                 </a:solidFill>
               </a:rPr>
-              <a:t>Die Woche im Überblick</a:t>
+              <a:t>Deine Ziele heute</a:t>
             </a:r>
             <a:endParaRPr lang="en-US" sz="3400" dirty="0"/>
           </a:p>
         </p:txBody>
       </p:sp>
-      <p:graphicFrame>
-        <p:nvGraphicFramePr>
-          <p:cNvPr id="4" name="Table 0"/>
-          <p:cNvGraphicFramePr>
-            <a:graphicFrameLocks noGrp="1"/>
-          </p:cNvGraphicFramePr>
-          <p:nvPr>
-            <p:extLst>
-              <p:ext uri="{D42A27DB-BD31-4B8C-83A1-F6EECF244321}">
-                <p14:modId xmlns:p14="http://schemas.microsoft.com/office/powerpoint/2010/main" val="1579011935"/>
-              </p:ext>
-            </p:extLst>
-          </p:nvPr>
-        </p:nvGraphicFramePr>
-        <p:xfrm>
-          <a:off x="548640" y="1325880"/>
-          <a:ext cx="11094415" cy="914400"/>
-        </p:xfrm>
-        <a:graphic>
-          <a:graphicData uri="http://schemas.openxmlformats.org/drawingml/2006/table">
-            <a:tbl>
-              <a:tblPr/>
-              <a:tblGrid>
-                <a:gridCol w="1008583"/>
-                <a:gridCol w="4034333"/>
-                <a:gridCol w="6051499"/>
-              </a:tblGrid>
-              <a:tr h="0">
-                <a:tc>
-                  <a:txBody>
-                    <a:bodyPr/>
-                    <a:lstStyle/>
-                    <a:p>
-                      <a:pPr indent="0" marL="0">
-                        <a:buNone/>
-                      </a:pPr>
-                      <a:r>
-                        <a:rPr lang="en-US" sz="1700" b="1" dirty="0">
-                          <a:solidFill>
-                            <a:srgbClr val="FFFFFF"/>
-                          </a:solidFill>
-                        </a:rPr>
-                        <a:t>Tag</a:t>
-                      </a:r>
-                      <a:endParaRPr lang="en-US" sz="1700" dirty="0"/>
-                    </a:p>
-                  </a:txBody>
-                  <a:tcPr marL="127000" marR="127000" marT="88900" marB="88900" anchor="ctr">
-                    <a:lnL w="9525" cap="flat" cmpd="sng" algn="ctr">
-                      <a:solidFill>
-                        <a:srgbClr val="D5D8F4"/>
-                      </a:solidFill>
-                      <a:prstDash val="solid"/>
-                      <a:round/>
-                      <a:headEnd type="none" w="med" len="med"/>
-                      <a:tailEnd type="none" w="med" len="med"/>
-                    </a:lnL>
-                    <a:lnR w="9525" cap="flat" cmpd="sng" algn="ctr">
-                      <a:solidFill>
-                        <a:srgbClr val="D5D8F4"/>
-                      </a:solidFill>
-                      <a:prstDash val="solid"/>
-                      <a:round/>
-                      <a:headEnd type="none" w="med" len="med"/>
-                      <a:tailEnd type="none" w="med" len="med"/>
-                    </a:lnR>
-                    <a:lnT w="9525" cap="flat" cmpd="sng" algn="ctr">
-                      <a:solidFill>
-                        <a:srgbClr val="D5D8F4"/>
-                      </a:solidFill>
-                      <a:prstDash val="solid"/>
-                      <a:round/>
-                      <a:headEnd type="none" w="med" len="med"/>
-                      <a:tailEnd type="none" w="med" len="med"/>
-                    </a:lnT>
-                    <a:lnB w="9525" cap="flat" cmpd="sng" algn="ctr">
-                      <a:solidFill>
-                        <a:srgbClr val="D5D8F4"/>
-                      </a:solidFill>
-                      <a:prstDash val="solid"/>
-                      <a:round/>
-                      <a:headEnd type="none" w="med" len="med"/>
-                      <a:tailEnd type="none" w="med" len="med"/>
-                    </a:lnB>
-                    <a:solidFill>
-                      <a:srgbClr val="27303A"/>
-                    </a:solidFill>
-                  </a:tcPr>
-                </a:tc>
-                <a:tc>
-                  <a:txBody>
-                    <a:bodyPr/>
-                    <a:lstStyle/>
-                    <a:p>
-                      <a:pPr indent="0" marL="0">
-                        <a:buNone/>
-                      </a:pPr>
-                      <a:r>
-                        <a:rPr lang="en-US" sz="1700" b="1" dirty="0">
-                          <a:solidFill>
-                            <a:srgbClr val="FFFFFF"/>
-                          </a:solidFill>
-                        </a:rPr>
-                        <a:t>Schwerpunkt</a:t>
-                      </a:r>
-                      <a:endParaRPr lang="en-US" sz="1700" dirty="0"/>
-                    </a:p>
-                  </a:txBody>
-                  <a:tcPr marL="127000" marR="127000" marT="88900" marB="88900" anchor="ctr">
-                    <a:lnL w="9525" cap="flat" cmpd="sng" algn="ctr">
-                      <a:solidFill>
-                        <a:srgbClr val="D5D8F4"/>
-                      </a:solidFill>
-                      <a:prstDash val="solid"/>
-                      <a:round/>
-                      <a:headEnd type="none" w="med" len="med"/>
-                      <a:tailEnd type="none" w="med" len="med"/>
-                    </a:lnL>
-                    <a:lnR w="9525" cap="flat" cmpd="sng" algn="ctr">
-                      <a:solidFill>
-                        <a:srgbClr val="D5D8F4"/>
-                      </a:solidFill>
-                      <a:prstDash val="solid"/>
-                      <a:round/>
-                      <a:headEnd type="none" w="med" len="med"/>
-                      <a:tailEnd type="none" w="med" len="med"/>
-                    </a:lnR>
-                    <a:lnT w="9525" cap="flat" cmpd="sng" algn="ctr">
-                      <a:solidFill>
-                        <a:srgbClr val="D5D8F4"/>
-                      </a:solidFill>
-                      <a:prstDash val="solid"/>
-                      <a:round/>
-                      <a:headEnd type="none" w="med" len="med"/>
-                      <a:tailEnd type="none" w="med" len="med"/>
-                    </a:lnT>
-                    <a:lnB w="9525" cap="flat" cmpd="sng" algn="ctr">
-                      <a:solidFill>
-                        <a:srgbClr val="D5D8F4"/>
-                      </a:solidFill>
-                      <a:prstDash val="solid"/>
-                      <a:round/>
-                      <a:headEnd type="none" w="med" len="med"/>
-                      <a:tailEnd type="none" w="med" len="med"/>
-                    </a:lnB>
-                    <a:solidFill>
-                      <a:srgbClr val="27303A"/>
-                    </a:solidFill>
-                  </a:tcPr>
-                </a:tc>
-                <a:tc>
-                  <a:txBody>
-                    <a:bodyPr/>
-                    <a:lstStyle/>
-                    <a:p>
-                      <a:pPr indent="0" marL="0">
-                        <a:buNone/>
-                      </a:pPr>
-                      <a:r>
-                        <a:rPr lang="en-US" sz="1700" b="1" dirty="0">
-                          <a:solidFill>
-                            <a:srgbClr val="FFFFFF"/>
-                          </a:solidFill>
-                        </a:rPr>
-                        <a:t>Du baust …</a:t>
-                      </a:r>
-                      <a:endParaRPr lang="en-US" sz="1700" dirty="0"/>
-                    </a:p>
-                  </a:txBody>
-                  <a:tcPr marL="127000" marR="127000" marT="88900" marB="88900" anchor="ctr">
-                    <a:lnL w="9525" cap="flat" cmpd="sng" algn="ctr">
-                      <a:solidFill>
-                        <a:srgbClr val="D5D8F4"/>
-                      </a:solidFill>
-                      <a:prstDash val="solid"/>
-                      <a:round/>
-                      <a:headEnd type="none" w="med" len="med"/>
-                      <a:tailEnd type="none" w="med" len="med"/>
-                    </a:lnL>
-                    <a:lnR w="9525" cap="flat" cmpd="sng" algn="ctr">
-                      <a:solidFill>
-                        <a:srgbClr val="D5D8F4"/>
-                      </a:solidFill>
-                      <a:prstDash val="solid"/>
-                      <a:round/>
-                      <a:headEnd type="none" w="med" len="med"/>
-                      <a:tailEnd type="none" w="med" len="med"/>
-                    </a:lnR>
-                    <a:lnT w="9525" cap="flat" cmpd="sng" algn="ctr">
-                      <a:solidFill>
-                        <a:srgbClr val="D5D8F4"/>
-                      </a:solidFill>
-                      <a:prstDash val="solid"/>
-                      <a:round/>
-                      <a:headEnd type="none" w="med" len="med"/>
-                      <a:tailEnd type="none" w="med" len="med"/>
-                    </a:lnT>
-                    <a:lnB w="9525" cap="flat" cmpd="sng" algn="ctr">
-                      <a:solidFill>
-                        <a:srgbClr val="D5D8F4"/>
-                      </a:solidFill>
-                      <a:prstDash val="solid"/>
-                      <a:round/>
-                      <a:headEnd type="none" w="med" len="med"/>
-                      <a:tailEnd type="none" w="med" len="med"/>
-                    </a:lnB>
-                    <a:solidFill>
-                      <a:srgbClr val="27303A"/>
-                    </a:solidFill>
-                  </a:tcPr>
-                </a:tc>
-              </a:tr>
-              <a:tr h="0">
-                <a:tc>
-                  <a:txBody>
-                    <a:bodyPr/>
-                    <a:lstStyle/>
-                    <a:p>
-                      <a:pPr indent="0" marL="0">
-                        <a:buNone/>
-                      </a:pPr>
-                      <a:r>
-                        <a:rPr lang="en-US" sz="1700" dirty="0">
-                          <a:solidFill>
-                            <a:srgbClr val="27303A"/>
-                          </a:solidFill>
-                        </a:rPr>
-                        <a:t>1</a:t>
-                      </a:r>
-                      <a:endParaRPr lang="en-US" sz="1700" dirty="0"/>
-                    </a:p>
-                  </a:txBody>
-                  <a:tcPr marL="127000" marR="127000" marT="88900" marB="88900" anchor="ctr">
-                    <a:lnL w="9525" cap="flat" cmpd="sng" algn="ctr">
-                      <a:solidFill>
-                        <a:srgbClr val="D5D8F4"/>
-                      </a:solidFill>
-                      <a:prstDash val="solid"/>
-                      <a:round/>
-                      <a:headEnd type="none" w="med" len="med"/>
-                      <a:tailEnd type="none" w="med" len="med"/>
-                    </a:lnL>
-                    <a:lnR w="9525" cap="flat" cmpd="sng" algn="ctr">
-                      <a:solidFill>
-                        <a:srgbClr val="D5D8F4"/>
-                      </a:solidFill>
-                      <a:prstDash val="solid"/>
-                      <a:round/>
-                      <a:headEnd type="none" w="med" len="med"/>
-                      <a:tailEnd type="none" w="med" len="med"/>
-                    </a:lnR>
-                    <a:lnT w="9525" cap="flat" cmpd="sng" algn="ctr">
-                      <a:solidFill>
-                        <a:srgbClr val="D5D8F4"/>
-                      </a:solidFill>
-                      <a:prstDash val="solid"/>
-                      <a:round/>
-                      <a:headEnd type="none" w="med" len="med"/>
-                      <a:tailEnd type="none" w="med" len="med"/>
-                    </a:lnT>
-                    <a:lnB w="9525" cap="flat" cmpd="sng" algn="ctr">
-                      <a:solidFill>
-                        <a:srgbClr val="D5D8F4"/>
-                      </a:solidFill>
-                      <a:prstDash val="solid"/>
-                      <a:round/>
-                      <a:headEnd type="none" w="med" len="med"/>
-                      <a:tailEnd type="none" w="med" len="med"/>
-                    </a:lnB>
-                    <a:solidFill>
-                      <a:srgbClr val="F7F7F7"/>
-                    </a:solidFill>
-                  </a:tcPr>
-                </a:tc>
-                <a:tc>
-                  <a:txBody>
-                    <a:bodyPr/>
-                    <a:lstStyle/>
-                    <a:p>
-                      <a:pPr indent="0" marL="0">
-                        <a:buNone/>
-                      </a:pPr>
-                      <a:r>
-                        <a:rPr lang="en-US" sz="1700" dirty="0">
-                          <a:solidFill>
-                            <a:srgbClr val="27303A"/>
-                          </a:solidFill>
-                        </a:rPr>
-                        <a:t>Grundlagen Virtualisierung</a:t>
-                      </a:r>
-                      <a:endParaRPr lang="en-US" sz="1700" dirty="0"/>
-                    </a:p>
-                  </a:txBody>
-                  <a:tcPr marL="127000" marR="127000" marT="88900" marB="88900" anchor="ctr">
-                    <a:lnL w="9525" cap="flat" cmpd="sng" algn="ctr">
-                      <a:solidFill>
-                        <a:srgbClr val="D5D8F4"/>
-                      </a:solidFill>
-                      <a:prstDash val="solid"/>
-                      <a:round/>
-                      <a:headEnd type="none" w="med" len="med"/>
-                      <a:tailEnd type="none" w="med" len="med"/>
-                    </a:lnL>
-                    <a:lnR w="9525" cap="flat" cmpd="sng" algn="ctr">
-                      <a:solidFill>
-                        <a:srgbClr val="D5D8F4"/>
-                      </a:solidFill>
-                      <a:prstDash val="solid"/>
-                      <a:round/>
-                      <a:headEnd type="none" w="med" len="med"/>
-                      <a:tailEnd type="none" w="med" len="med"/>
-                    </a:lnR>
-                    <a:lnT w="9525" cap="flat" cmpd="sng" algn="ctr">
-                      <a:solidFill>
-                        <a:srgbClr val="D5D8F4"/>
-                      </a:solidFill>
-                      <a:prstDash val="solid"/>
-                      <a:round/>
-                      <a:headEnd type="none" w="med" len="med"/>
-                      <a:tailEnd type="none" w="med" len="med"/>
-                    </a:lnT>
-                    <a:lnB w="9525" cap="flat" cmpd="sng" algn="ctr">
-                      <a:solidFill>
-                        <a:srgbClr val="D5D8F4"/>
-                      </a:solidFill>
-                      <a:prstDash val="solid"/>
-                      <a:round/>
-                      <a:headEnd type="none" w="med" len="med"/>
-                      <a:tailEnd type="none" w="med" len="med"/>
-                    </a:lnB>
-                    <a:solidFill>
-                      <a:srgbClr val="F7F7F7"/>
-                    </a:solidFill>
-                  </a:tcPr>
-                </a:tc>
-                <a:tc>
-                  <a:txBody>
-                    <a:bodyPr/>
-                    <a:lstStyle/>
-                    <a:p>
-                      <a:pPr indent="0" marL="0">
-                        <a:buNone/>
-                      </a:pPr>
-                      <a:r>
-                        <a:rPr lang="en-US" sz="1700" dirty="0">
-                          <a:solidFill>
-                            <a:srgbClr val="27303A"/>
-                          </a:solidFill>
-                        </a:rPr>
-                        <a:t>lokale VMs mit Multipass, deine erste automatische VM</a:t>
-                      </a:r>
-                      <a:endParaRPr lang="en-US" sz="1700" dirty="0"/>
-                    </a:p>
-                  </a:txBody>
-                  <a:tcPr marL="127000" marR="127000" marT="88900" marB="88900" anchor="ctr">
-                    <a:lnL w="9525" cap="flat" cmpd="sng" algn="ctr">
-                      <a:solidFill>
-                        <a:srgbClr val="D5D8F4"/>
-                      </a:solidFill>
-                      <a:prstDash val="solid"/>
-                      <a:round/>
-                      <a:headEnd type="none" w="med" len="med"/>
-                      <a:tailEnd type="none" w="med" len="med"/>
-                    </a:lnL>
-                    <a:lnR w="9525" cap="flat" cmpd="sng" algn="ctr">
-                      <a:solidFill>
-                        <a:srgbClr val="D5D8F4"/>
-                      </a:solidFill>
-                      <a:prstDash val="solid"/>
-                      <a:round/>
-                      <a:headEnd type="none" w="med" len="med"/>
-                      <a:tailEnd type="none" w="med" len="med"/>
-                    </a:lnR>
-                    <a:lnT w="9525" cap="flat" cmpd="sng" algn="ctr">
-                      <a:solidFill>
-                        <a:srgbClr val="D5D8F4"/>
-                      </a:solidFill>
-                      <a:prstDash val="solid"/>
-                      <a:round/>
-                      <a:headEnd type="none" w="med" len="med"/>
-                      <a:tailEnd type="none" w="med" len="med"/>
-                    </a:lnT>
-                    <a:lnB w="9525" cap="flat" cmpd="sng" algn="ctr">
-                      <a:solidFill>
-                        <a:srgbClr val="D5D8F4"/>
-                      </a:solidFill>
-                      <a:prstDash val="solid"/>
-                      <a:round/>
-                      <a:headEnd type="none" w="med" len="med"/>
-                      <a:tailEnd type="none" w="med" len="med"/>
-                    </a:lnB>
-                    <a:solidFill>
-                      <a:srgbClr val="F7F7F7"/>
-                    </a:solidFill>
-                  </a:tcPr>
-                </a:tc>
-              </a:tr>
-              <a:tr h="0">
-                <a:tc>
-                  <a:txBody>
-                    <a:bodyPr/>
-                    <a:lstStyle/>
-                    <a:p>
-                      <a:pPr indent="0" marL="0">
-                        <a:buNone/>
-                      </a:pPr>
-                      <a:r>
-                        <a:rPr lang="en-US" sz="1700" dirty="0">
-                          <a:solidFill>
-                            <a:srgbClr val="27303A"/>
-                          </a:solidFill>
-                        </a:rPr>
-                        <a:t>2</a:t>
-                      </a:r>
-                      <a:endParaRPr lang="en-US" sz="1700" dirty="0"/>
-                    </a:p>
-                  </a:txBody>
-                  <a:tcPr marL="127000" marR="127000" marT="88900" marB="88900" anchor="ctr">
-                    <a:lnL w="9525" cap="flat" cmpd="sng" algn="ctr">
-                      <a:solidFill>
-                        <a:srgbClr val="D5D8F4"/>
-                      </a:solidFill>
-                      <a:prstDash val="solid"/>
-                      <a:round/>
-                      <a:headEnd type="none" w="med" len="med"/>
-                      <a:tailEnd type="none" w="med" len="med"/>
-                    </a:lnL>
-                    <a:lnR w="9525" cap="flat" cmpd="sng" algn="ctr">
-                      <a:solidFill>
-                        <a:srgbClr val="D5D8F4"/>
-                      </a:solidFill>
-                      <a:prstDash val="solid"/>
-                      <a:round/>
-                      <a:headEnd type="none" w="med" len="med"/>
-                      <a:tailEnd type="none" w="med" len="med"/>
-                    </a:lnR>
-                    <a:lnT w="9525" cap="flat" cmpd="sng" algn="ctr">
-                      <a:solidFill>
-                        <a:srgbClr val="D5D8F4"/>
-                      </a:solidFill>
-                      <a:prstDash val="solid"/>
-                      <a:round/>
-                      <a:headEnd type="none" w="med" len="med"/>
-                      <a:tailEnd type="none" w="med" len="med"/>
-                    </a:lnT>
-                    <a:lnB w="9525" cap="flat" cmpd="sng" algn="ctr">
-                      <a:solidFill>
-                        <a:srgbClr val="D5D8F4"/>
-                      </a:solidFill>
-                      <a:prstDash val="solid"/>
-                      <a:round/>
-                      <a:headEnd type="none" w="med" len="med"/>
-                      <a:tailEnd type="none" w="med" len="med"/>
-                    </a:lnB>
-                    <a:solidFill>
-                      <a:srgbClr val="FFFFFF"/>
-                    </a:solidFill>
-                  </a:tcPr>
-                </a:tc>
-                <a:tc>
-                  <a:txBody>
-                    <a:bodyPr/>
-                    <a:lstStyle/>
-                    <a:p>
-                      <a:pPr indent="0" marL="0">
-                        <a:buNone/>
-                      </a:pPr>
-                      <a:r>
-                        <a:rPr lang="en-US" sz="1700" dirty="0">
-                          <a:solidFill>
-                            <a:srgbClr val="27303A"/>
-                          </a:solidFill>
-                        </a:rPr>
-                        <a:t>Public Cloud und Azure Grundlagen</a:t>
-                      </a:r>
-                      <a:endParaRPr lang="en-US" sz="1700" dirty="0"/>
-                    </a:p>
-                  </a:txBody>
-                  <a:tcPr marL="127000" marR="127000" marT="88900" marB="88900" anchor="ctr">
-                    <a:lnL w="9525" cap="flat" cmpd="sng" algn="ctr">
-                      <a:solidFill>
-                        <a:srgbClr val="D5D8F4"/>
-                      </a:solidFill>
-                      <a:prstDash val="solid"/>
-                      <a:round/>
-                      <a:headEnd type="none" w="med" len="med"/>
-                      <a:tailEnd type="none" w="med" len="med"/>
-                    </a:lnL>
-                    <a:lnR w="9525" cap="flat" cmpd="sng" algn="ctr">
-                      <a:solidFill>
-                        <a:srgbClr val="D5D8F4"/>
-                      </a:solidFill>
-                      <a:prstDash val="solid"/>
-                      <a:round/>
-                      <a:headEnd type="none" w="med" len="med"/>
-                      <a:tailEnd type="none" w="med" len="med"/>
-                    </a:lnR>
-                    <a:lnT w="9525" cap="flat" cmpd="sng" algn="ctr">
-                      <a:solidFill>
-                        <a:srgbClr val="D5D8F4"/>
-                      </a:solidFill>
-                      <a:prstDash val="solid"/>
-                      <a:round/>
-                      <a:headEnd type="none" w="med" len="med"/>
-                      <a:tailEnd type="none" w="med" len="med"/>
-                    </a:lnT>
-                    <a:lnB w="9525" cap="flat" cmpd="sng" algn="ctr">
-                      <a:solidFill>
-                        <a:srgbClr val="D5D8F4"/>
-                      </a:solidFill>
-                      <a:prstDash val="solid"/>
-                      <a:round/>
-                      <a:headEnd type="none" w="med" len="med"/>
-                      <a:tailEnd type="none" w="med" len="med"/>
-                    </a:lnB>
-                    <a:solidFill>
-                      <a:srgbClr val="FFFFFF"/>
-                    </a:solidFill>
-                  </a:tcPr>
-                </a:tc>
-                <a:tc>
-                  <a:txBody>
-                    <a:bodyPr/>
-                    <a:lstStyle/>
-                    <a:p>
-                      <a:pPr indent="0" marL="0">
-                        <a:buNone/>
-                      </a:pPr>
-                      <a:r>
-                        <a:rPr lang="en-US" sz="1700" dirty="0">
-                          <a:solidFill>
-                            <a:srgbClr val="27303A"/>
-                          </a:solidFill>
-                        </a:rPr>
-                        <a:t>deine ersten Azure-Ressourcen im Portal und mit der Azure CLI</a:t>
-                      </a:r>
-                      <a:endParaRPr lang="en-US" sz="1700" dirty="0"/>
-                    </a:p>
-                  </a:txBody>
-                  <a:tcPr marL="127000" marR="127000" marT="88900" marB="88900" anchor="ctr">
-                    <a:lnL w="9525" cap="flat" cmpd="sng" algn="ctr">
-                      <a:solidFill>
-                        <a:srgbClr val="D5D8F4"/>
-                      </a:solidFill>
-                      <a:prstDash val="solid"/>
-                      <a:round/>
-                      <a:headEnd type="none" w="med" len="med"/>
-                      <a:tailEnd type="none" w="med" len="med"/>
-                    </a:lnL>
-                    <a:lnR w="9525" cap="flat" cmpd="sng" algn="ctr">
-                      <a:solidFill>
-                        <a:srgbClr val="D5D8F4"/>
-                      </a:solidFill>
-                      <a:prstDash val="solid"/>
-                      <a:round/>
-                      <a:headEnd type="none" w="med" len="med"/>
-                      <a:tailEnd type="none" w="med" len="med"/>
-                    </a:lnR>
-                    <a:lnT w="9525" cap="flat" cmpd="sng" algn="ctr">
-                      <a:solidFill>
-                        <a:srgbClr val="D5D8F4"/>
-                      </a:solidFill>
-                      <a:prstDash val="solid"/>
-                      <a:round/>
-                      <a:headEnd type="none" w="med" len="med"/>
-                      <a:tailEnd type="none" w="med" len="med"/>
-                    </a:lnT>
-                    <a:lnB w="9525" cap="flat" cmpd="sng" algn="ctr">
-                      <a:solidFill>
-                        <a:srgbClr val="D5D8F4"/>
-                      </a:solidFill>
-                      <a:prstDash val="solid"/>
-                      <a:round/>
-                      <a:headEnd type="none" w="med" len="med"/>
-                      <a:tailEnd type="none" w="med" len="med"/>
-                    </a:lnB>
-                    <a:solidFill>
-                      <a:srgbClr val="FFFFFF"/>
-                    </a:solidFill>
-                  </a:tcPr>
-                </a:tc>
-              </a:tr>
-              <a:tr h="0">
-                <a:tc>
-                  <a:txBody>
-                    <a:bodyPr/>
-                    <a:lstStyle/>
-                    <a:p>
-                      <a:pPr indent="0" marL="0">
-                        <a:buNone/>
-                      </a:pPr>
-                      <a:r>
-                        <a:rPr lang="en-US" sz="1700" dirty="0">
-                          <a:solidFill>
-                            <a:srgbClr val="27303A"/>
-                          </a:solidFill>
-                        </a:rPr>
-                        <a:t>3</a:t>
-                      </a:r>
-                      <a:endParaRPr lang="en-US" sz="1700" dirty="0"/>
-                    </a:p>
-                  </a:txBody>
-                  <a:tcPr marL="127000" marR="127000" marT="88900" marB="88900" anchor="ctr">
-                    <a:lnL w="9525" cap="flat" cmpd="sng" algn="ctr">
-                      <a:solidFill>
-                        <a:srgbClr val="D5D8F4"/>
-                      </a:solidFill>
-                      <a:prstDash val="solid"/>
-                      <a:round/>
-                      <a:headEnd type="none" w="med" len="med"/>
-                      <a:tailEnd type="none" w="med" len="med"/>
-                    </a:lnL>
-                    <a:lnR w="9525" cap="flat" cmpd="sng" algn="ctr">
-                      <a:solidFill>
-                        <a:srgbClr val="D5D8F4"/>
-                      </a:solidFill>
-                      <a:prstDash val="solid"/>
-                      <a:round/>
-                      <a:headEnd type="none" w="med" len="med"/>
-                      <a:tailEnd type="none" w="med" len="med"/>
-                    </a:lnR>
-                    <a:lnT w="9525" cap="flat" cmpd="sng" algn="ctr">
-                      <a:solidFill>
-                        <a:srgbClr val="D5D8F4"/>
-                      </a:solidFill>
-                      <a:prstDash val="solid"/>
-                      <a:round/>
-                      <a:headEnd type="none" w="med" len="med"/>
-                      <a:tailEnd type="none" w="med" len="med"/>
-                    </a:lnT>
-                    <a:lnB w="9525" cap="flat" cmpd="sng" algn="ctr">
-                      <a:solidFill>
-                        <a:srgbClr val="D5D8F4"/>
-                      </a:solidFill>
-                      <a:prstDash val="solid"/>
-                      <a:round/>
-                      <a:headEnd type="none" w="med" len="med"/>
-                      <a:tailEnd type="none" w="med" len="med"/>
-                    </a:lnB>
-                    <a:solidFill>
-                      <a:srgbClr val="F7F7F7"/>
-                    </a:solidFill>
-                  </a:tcPr>
-                </a:tc>
-                <a:tc>
-                  <a:txBody>
-                    <a:bodyPr/>
-                    <a:lstStyle/>
-                    <a:p>
-                      <a:pPr indent="0" marL="0">
-                        <a:buNone/>
-                      </a:pPr>
-                      <a:r>
-                        <a:rPr lang="en-US" sz="1700" dirty="0">
-                          <a:solidFill>
-                            <a:srgbClr val="27303A"/>
-                          </a:solidFill>
-                        </a:rPr>
-                        <a:t>Azure Compute und Storage</a:t>
-                      </a:r>
-                      <a:endParaRPr lang="en-US" sz="1700" dirty="0"/>
-                    </a:p>
-                  </a:txBody>
-                  <a:tcPr marL="127000" marR="127000" marT="88900" marB="88900" anchor="ctr">
-                    <a:lnL w="9525" cap="flat" cmpd="sng" algn="ctr">
-                      <a:solidFill>
-                        <a:srgbClr val="D5D8F4"/>
-                      </a:solidFill>
-                      <a:prstDash val="solid"/>
-                      <a:round/>
-                      <a:headEnd type="none" w="med" len="med"/>
-                      <a:tailEnd type="none" w="med" len="med"/>
-                    </a:lnL>
-                    <a:lnR w="9525" cap="flat" cmpd="sng" algn="ctr">
-                      <a:solidFill>
-                        <a:srgbClr val="D5D8F4"/>
-                      </a:solidFill>
-                      <a:prstDash val="solid"/>
-                      <a:round/>
-                      <a:headEnd type="none" w="med" len="med"/>
-                      <a:tailEnd type="none" w="med" len="med"/>
-                    </a:lnR>
-                    <a:lnT w="9525" cap="flat" cmpd="sng" algn="ctr">
-                      <a:solidFill>
-                        <a:srgbClr val="D5D8F4"/>
-                      </a:solidFill>
-                      <a:prstDash val="solid"/>
-                      <a:round/>
-                      <a:headEnd type="none" w="med" len="med"/>
-                      <a:tailEnd type="none" w="med" len="med"/>
-                    </a:lnT>
-                    <a:lnB w="9525" cap="flat" cmpd="sng" algn="ctr">
-                      <a:solidFill>
-                        <a:srgbClr val="D5D8F4"/>
-                      </a:solidFill>
-                      <a:prstDash val="solid"/>
-                      <a:round/>
-                      <a:headEnd type="none" w="med" len="med"/>
-                      <a:tailEnd type="none" w="med" len="med"/>
-                    </a:lnB>
-                    <a:solidFill>
-                      <a:srgbClr val="F7F7F7"/>
-                    </a:solidFill>
-                  </a:tcPr>
-                </a:tc>
-                <a:tc>
-                  <a:txBody>
-                    <a:bodyPr/>
-                    <a:lstStyle/>
-                    <a:p>
-                      <a:pPr indent="0" marL="0">
-                        <a:buNone/>
-                      </a:pPr>
-                      <a:r>
-                        <a:rPr lang="en-US" sz="1700" dirty="0">
-                          <a:solidFill>
-                            <a:srgbClr val="27303A"/>
-                          </a:solidFill>
-                        </a:rPr>
-                        <a:t>eine Linux-VM in Azure und ein Speicherkonto</a:t>
-                      </a:r>
-                      <a:endParaRPr lang="en-US" sz="1700" dirty="0"/>
-                    </a:p>
-                  </a:txBody>
-                  <a:tcPr marL="127000" marR="127000" marT="88900" marB="88900" anchor="ctr">
-                    <a:lnL w="9525" cap="flat" cmpd="sng" algn="ctr">
-                      <a:solidFill>
-                        <a:srgbClr val="D5D8F4"/>
-                      </a:solidFill>
-                      <a:prstDash val="solid"/>
-                      <a:round/>
-                      <a:headEnd type="none" w="med" len="med"/>
-                      <a:tailEnd type="none" w="med" len="med"/>
-                    </a:lnL>
-                    <a:lnR w="9525" cap="flat" cmpd="sng" algn="ctr">
-                      <a:solidFill>
-                        <a:srgbClr val="D5D8F4"/>
-                      </a:solidFill>
-                      <a:prstDash val="solid"/>
-                      <a:round/>
-                      <a:headEnd type="none" w="med" len="med"/>
-                      <a:tailEnd type="none" w="med" len="med"/>
-                    </a:lnR>
-                    <a:lnT w="9525" cap="flat" cmpd="sng" algn="ctr">
-                      <a:solidFill>
-                        <a:srgbClr val="D5D8F4"/>
-                      </a:solidFill>
-                      <a:prstDash val="solid"/>
-                      <a:round/>
-                      <a:headEnd type="none" w="med" len="med"/>
-                      <a:tailEnd type="none" w="med" len="med"/>
-                    </a:lnT>
-                    <a:lnB w="9525" cap="flat" cmpd="sng" algn="ctr">
-                      <a:solidFill>
-                        <a:srgbClr val="D5D8F4"/>
-                      </a:solidFill>
-                      <a:prstDash val="solid"/>
-                      <a:round/>
-                      <a:headEnd type="none" w="med" len="med"/>
-                      <a:tailEnd type="none" w="med" len="med"/>
-                    </a:lnB>
-                    <a:solidFill>
-                      <a:srgbClr val="F7F7F7"/>
-                    </a:solidFill>
-                  </a:tcPr>
-                </a:tc>
-              </a:tr>
-              <a:tr h="0">
-                <a:tc>
-                  <a:txBody>
-                    <a:bodyPr/>
-                    <a:lstStyle/>
-                    <a:p>
-                      <a:pPr indent="0" marL="0">
-                        <a:buNone/>
-                      </a:pPr>
-                      <a:r>
-                        <a:rPr lang="en-US" sz="1700" dirty="0">
-                          <a:solidFill>
-                            <a:srgbClr val="27303A"/>
-                          </a:solidFill>
-                        </a:rPr>
-                        <a:t>4</a:t>
-                      </a:r>
-                      <a:endParaRPr lang="en-US" sz="1700" dirty="0"/>
-                    </a:p>
-                  </a:txBody>
-                  <a:tcPr marL="127000" marR="127000" marT="88900" marB="88900" anchor="ctr">
-                    <a:lnL w="9525" cap="flat" cmpd="sng" algn="ctr">
-                      <a:solidFill>
-                        <a:srgbClr val="D5D8F4"/>
-                      </a:solidFill>
-                      <a:prstDash val="solid"/>
-                      <a:round/>
-                      <a:headEnd type="none" w="med" len="med"/>
-                      <a:tailEnd type="none" w="med" len="med"/>
-                    </a:lnL>
-                    <a:lnR w="9525" cap="flat" cmpd="sng" algn="ctr">
-                      <a:solidFill>
-                        <a:srgbClr val="D5D8F4"/>
-                      </a:solidFill>
-                      <a:prstDash val="solid"/>
-                      <a:round/>
-                      <a:headEnd type="none" w="med" len="med"/>
-                      <a:tailEnd type="none" w="med" len="med"/>
-                    </a:lnR>
-                    <a:lnT w="9525" cap="flat" cmpd="sng" algn="ctr">
-                      <a:solidFill>
-                        <a:srgbClr val="D5D8F4"/>
-                      </a:solidFill>
-                      <a:prstDash val="solid"/>
-                      <a:round/>
-                      <a:headEnd type="none" w="med" len="med"/>
-                      <a:tailEnd type="none" w="med" len="med"/>
-                    </a:lnT>
-                    <a:lnB w="9525" cap="flat" cmpd="sng" algn="ctr">
-                      <a:solidFill>
-                        <a:srgbClr val="D5D8F4"/>
-                      </a:solidFill>
-                      <a:prstDash val="solid"/>
-                      <a:round/>
-                      <a:headEnd type="none" w="med" len="med"/>
-                      <a:tailEnd type="none" w="med" len="med"/>
-                    </a:lnB>
-                    <a:solidFill>
-                      <a:srgbClr val="FFFFFF"/>
-                    </a:solidFill>
-                  </a:tcPr>
-                </a:tc>
-                <a:tc>
-                  <a:txBody>
-                    <a:bodyPr/>
-                    <a:lstStyle/>
-                    <a:p>
-                      <a:pPr indent="0" marL="0">
-                        <a:buNone/>
-                      </a:pPr>
-                      <a:r>
-                        <a:rPr lang="en-US" sz="1700" dirty="0">
-                          <a:solidFill>
-                            <a:srgbClr val="27303A"/>
-                          </a:solidFill>
-                        </a:rPr>
-                        <a:t>Azure Networking</a:t>
-                      </a:r>
-                      <a:endParaRPr lang="en-US" sz="1700" dirty="0"/>
-                    </a:p>
-                  </a:txBody>
-                  <a:tcPr marL="127000" marR="127000" marT="88900" marB="88900" anchor="ctr">
-                    <a:lnL w="9525" cap="flat" cmpd="sng" algn="ctr">
-                      <a:solidFill>
-                        <a:srgbClr val="D5D8F4"/>
-                      </a:solidFill>
-                      <a:prstDash val="solid"/>
-                      <a:round/>
-                      <a:headEnd type="none" w="med" len="med"/>
-                      <a:tailEnd type="none" w="med" len="med"/>
-                    </a:lnL>
-                    <a:lnR w="9525" cap="flat" cmpd="sng" algn="ctr">
-                      <a:solidFill>
-                        <a:srgbClr val="D5D8F4"/>
-                      </a:solidFill>
-                      <a:prstDash val="solid"/>
-                      <a:round/>
-                      <a:headEnd type="none" w="med" len="med"/>
-                      <a:tailEnd type="none" w="med" len="med"/>
-                    </a:lnR>
-                    <a:lnT w="9525" cap="flat" cmpd="sng" algn="ctr">
-                      <a:solidFill>
-                        <a:srgbClr val="D5D8F4"/>
-                      </a:solidFill>
-                      <a:prstDash val="solid"/>
-                      <a:round/>
-                      <a:headEnd type="none" w="med" len="med"/>
-                      <a:tailEnd type="none" w="med" len="med"/>
-                    </a:lnT>
-                    <a:lnB w="9525" cap="flat" cmpd="sng" algn="ctr">
-                      <a:solidFill>
-                        <a:srgbClr val="D5D8F4"/>
-                      </a:solidFill>
-                      <a:prstDash val="solid"/>
-                      <a:round/>
-                      <a:headEnd type="none" w="med" len="med"/>
-                      <a:tailEnd type="none" w="med" len="med"/>
-                    </a:lnB>
-                    <a:solidFill>
-                      <a:srgbClr val="FFFFFF"/>
-                    </a:solidFill>
-                  </a:tcPr>
-                </a:tc>
-                <a:tc>
-                  <a:txBody>
-                    <a:bodyPr/>
-                    <a:lstStyle/>
-                    <a:p>
-                      <a:pPr indent="0" marL="0">
-                        <a:buNone/>
-                      </a:pPr>
-                      <a:r>
-                        <a:rPr lang="en-US" sz="1700" dirty="0">
-                          <a:solidFill>
-                            <a:srgbClr val="27303A"/>
-                          </a:solidFill>
-                        </a:rPr>
-                        <a:t>ein VNet mit Subnetzen und NSG-Regeln</a:t>
-                      </a:r>
-                      <a:endParaRPr lang="en-US" sz="1700" dirty="0"/>
-                    </a:p>
-                  </a:txBody>
-                  <a:tcPr marL="127000" marR="127000" marT="88900" marB="88900" anchor="ctr">
-                    <a:lnL w="9525" cap="flat" cmpd="sng" algn="ctr">
-                      <a:solidFill>
-                        <a:srgbClr val="D5D8F4"/>
-                      </a:solidFill>
-                      <a:prstDash val="solid"/>
-                      <a:round/>
-                      <a:headEnd type="none" w="med" len="med"/>
-                      <a:tailEnd type="none" w="med" len="med"/>
-                    </a:lnL>
-                    <a:lnR w="9525" cap="flat" cmpd="sng" algn="ctr">
-                      <a:solidFill>
-                        <a:srgbClr val="D5D8F4"/>
-                      </a:solidFill>
-                      <a:prstDash val="solid"/>
-                      <a:round/>
-                      <a:headEnd type="none" w="med" len="med"/>
-                      <a:tailEnd type="none" w="med" len="med"/>
-                    </a:lnR>
-                    <a:lnT w="9525" cap="flat" cmpd="sng" algn="ctr">
-                      <a:solidFill>
-                        <a:srgbClr val="D5D8F4"/>
-                      </a:solidFill>
-                      <a:prstDash val="solid"/>
-                      <a:round/>
-                      <a:headEnd type="none" w="med" len="med"/>
-                      <a:tailEnd type="none" w="med" len="med"/>
-                    </a:lnT>
-                    <a:lnB w="9525" cap="flat" cmpd="sng" algn="ctr">
-                      <a:solidFill>
-                        <a:srgbClr val="D5D8F4"/>
-                      </a:solidFill>
-                      <a:prstDash val="solid"/>
-                      <a:round/>
-                      <a:headEnd type="none" w="med" len="med"/>
-                      <a:tailEnd type="none" w="med" len="med"/>
-                    </a:lnB>
-                    <a:solidFill>
-                      <a:srgbClr val="FFFFFF"/>
-                    </a:solidFill>
-                  </a:tcPr>
-                </a:tc>
-              </a:tr>
-              <a:tr h="0">
-                <a:tc>
-                  <a:txBody>
-                    <a:bodyPr/>
-                    <a:lstStyle/>
-                    <a:p>
-                      <a:pPr indent="0" marL="0">
-                        <a:buNone/>
-                      </a:pPr>
-                      <a:r>
-                        <a:rPr lang="en-US" sz="1700" dirty="0">
-                          <a:solidFill>
-                            <a:srgbClr val="27303A"/>
-                          </a:solidFill>
-                        </a:rPr>
-                        <a:t>5</a:t>
-                      </a:r>
-                      <a:endParaRPr lang="en-US" sz="1700" dirty="0"/>
-                    </a:p>
-                  </a:txBody>
-                  <a:tcPr marL="127000" marR="127000" marT="88900" marB="88900" anchor="ctr">
-                    <a:lnL w="9525" cap="flat" cmpd="sng" algn="ctr">
-                      <a:solidFill>
-                        <a:srgbClr val="D5D8F4"/>
-                      </a:solidFill>
-                      <a:prstDash val="solid"/>
-                      <a:round/>
-                      <a:headEnd type="none" w="med" len="med"/>
-                      <a:tailEnd type="none" w="med" len="med"/>
-                    </a:lnL>
-                    <a:lnR w="9525" cap="flat" cmpd="sng" algn="ctr">
-                      <a:solidFill>
-                        <a:srgbClr val="D5D8F4"/>
-                      </a:solidFill>
-                      <a:prstDash val="solid"/>
-                      <a:round/>
-                      <a:headEnd type="none" w="med" len="med"/>
-                      <a:tailEnd type="none" w="med" len="med"/>
-                    </a:lnR>
-                    <a:lnT w="9525" cap="flat" cmpd="sng" algn="ctr">
-                      <a:solidFill>
-                        <a:srgbClr val="D5D8F4"/>
-                      </a:solidFill>
-                      <a:prstDash val="solid"/>
-                      <a:round/>
-                      <a:headEnd type="none" w="med" len="med"/>
-                      <a:tailEnd type="none" w="med" len="med"/>
-                    </a:lnT>
-                    <a:lnB w="9525" cap="flat" cmpd="sng" algn="ctr">
-                      <a:solidFill>
-                        <a:srgbClr val="D5D8F4"/>
-                      </a:solidFill>
-                      <a:prstDash val="solid"/>
-                      <a:round/>
-                      <a:headEnd type="none" w="med" len="med"/>
-                      <a:tailEnd type="none" w="med" len="med"/>
-                    </a:lnB>
-                    <a:solidFill>
-                      <a:srgbClr val="F7F7F7"/>
-                    </a:solidFill>
-                  </a:tcPr>
-                </a:tc>
-                <a:tc>
-                  <a:txBody>
-                    <a:bodyPr/>
-                    <a:lstStyle/>
-                    <a:p>
-                      <a:pPr indent="0" marL="0">
-                        <a:buNone/>
-                      </a:pPr>
-                      <a:r>
-                        <a:rPr lang="en-US" sz="1700" dirty="0">
-                          <a:solidFill>
-                            <a:srgbClr val="27303A"/>
-                          </a:solidFill>
-                        </a:rPr>
-                        <a:t>Automatisierung mit Bicep und cloud-init</a:t>
-                      </a:r>
-                      <a:endParaRPr lang="en-US" sz="1700" dirty="0"/>
-                    </a:p>
-                  </a:txBody>
-                  <a:tcPr marL="127000" marR="127000" marT="88900" marB="88900" anchor="ctr">
-                    <a:lnL w="9525" cap="flat" cmpd="sng" algn="ctr">
-                      <a:solidFill>
-                        <a:srgbClr val="D5D8F4"/>
-                      </a:solidFill>
-                      <a:prstDash val="solid"/>
-                      <a:round/>
-                      <a:headEnd type="none" w="med" len="med"/>
-                      <a:tailEnd type="none" w="med" len="med"/>
-                    </a:lnL>
-                    <a:lnR w="9525" cap="flat" cmpd="sng" algn="ctr">
-                      <a:solidFill>
-                        <a:srgbClr val="D5D8F4"/>
-                      </a:solidFill>
-                      <a:prstDash val="solid"/>
-                      <a:round/>
-                      <a:headEnd type="none" w="med" len="med"/>
-                      <a:tailEnd type="none" w="med" len="med"/>
-                    </a:lnR>
-                    <a:lnT w="9525" cap="flat" cmpd="sng" algn="ctr">
-                      <a:solidFill>
-                        <a:srgbClr val="D5D8F4"/>
-                      </a:solidFill>
-                      <a:prstDash val="solid"/>
-                      <a:round/>
-                      <a:headEnd type="none" w="med" len="med"/>
-                      <a:tailEnd type="none" w="med" len="med"/>
-                    </a:lnT>
-                    <a:lnB w="9525" cap="flat" cmpd="sng" algn="ctr">
-                      <a:solidFill>
-                        <a:srgbClr val="D5D8F4"/>
-                      </a:solidFill>
-                      <a:prstDash val="solid"/>
-                      <a:round/>
-                      <a:headEnd type="none" w="med" len="med"/>
-                      <a:tailEnd type="none" w="med" len="med"/>
-                    </a:lnB>
-                    <a:solidFill>
-                      <a:srgbClr val="F7F7F7"/>
-                    </a:solidFill>
-                  </a:tcPr>
-                </a:tc>
-                <a:tc>
-                  <a:txBody>
-                    <a:bodyPr/>
-                    <a:lstStyle/>
-                    <a:p>
-                      <a:pPr indent="0" marL="0">
-                        <a:buNone/>
-                      </a:pPr>
-                      <a:r>
-                        <a:rPr lang="en-US" sz="1700" dirty="0">
-                          <a:solidFill>
-                            <a:srgbClr val="27303A"/>
-                          </a:solidFill>
-                        </a:rPr>
-                        <a:t>eine komplette Umgebung als Code – Abschlussprojekt</a:t>
-                      </a:r>
-                      <a:endParaRPr lang="en-US" sz="1700" dirty="0"/>
-                    </a:p>
-                  </a:txBody>
-                  <a:tcPr marL="127000" marR="127000" marT="88900" marB="88900" anchor="ctr">
-                    <a:lnL w="9525" cap="flat" cmpd="sng" algn="ctr">
-                      <a:solidFill>
-                        <a:srgbClr val="D5D8F4"/>
-                      </a:solidFill>
-                      <a:prstDash val="solid"/>
-                      <a:round/>
-                      <a:headEnd type="none" w="med" len="med"/>
-                      <a:tailEnd type="none" w="med" len="med"/>
-                    </a:lnL>
-                    <a:lnR w="9525" cap="flat" cmpd="sng" algn="ctr">
-                      <a:solidFill>
-                        <a:srgbClr val="D5D8F4"/>
-                      </a:solidFill>
-                      <a:prstDash val="solid"/>
-                      <a:round/>
-                      <a:headEnd type="none" w="med" len="med"/>
-                      <a:tailEnd type="none" w="med" len="med"/>
-                    </a:lnR>
-                    <a:lnT w="9525" cap="flat" cmpd="sng" algn="ctr">
-                      <a:solidFill>
-                        <a:srgbClr val="D5D8F4"/>
-                      </a:solidFill>
-                      <a:prstDash val="solid"/>
-                      <a:round/>
-                      <a:headEnd type="none" w="med" len="med"/>
-                      <a:tailEnd type="none" w="med" len="med"/>
-                    </a:lnT>
-                    <a:lnB w="9525" cap="flat" cmpd="sng" algn="ctr">
-                      <a:solidFill>
-                        <a:srgbClr val="D5D8F4"/>
-                      </a:solidFill>
-                      <a:prstDash val="solid"/>
-                      <a:round/>
-                      <a:headEnd type="none" w="med" len="med"/>
-                      <a:tailEnd type="none" w="med" len="med"/>
-                    </a:lnB>
-                    <a:solidFill>
-                      <a:srgbClr val="F7F7F7"/>
-                    </a:solidFill>
-                  </a:tcPr>
-                </a:tc>
-              </a:tr>
-            </a:tbl>
-          </a:graphicData>
-        </a:graphic>
-      </p:graphicFrame>
+      <p:sp>
+        <p:nvSpPr>
+          <p:cNvPr id="3" name="karte"/>
+          <p:cNvSpPr/>
+          <p:nvPr/>
+        </p:nvSpPr>
+        <p:spPr>
+          <a:xfrm>
+            <a:off x="548640" y="1325880"/>
+            <a:ext cx="3515258" cy="2217420"/>
+          </a:xfrm>
+          <a:prstGeom prst="roundRect">
+            <a:avLst>
+              <a:gd name="adj" fmla="val 4948"/>
+            </a:avLst>
+          </a:prstGeom>
+          <a:solidFill>
+            <a:srgbClr val="F7F7F7"/>
+          </a:solidFill>
+          <a:ln w="12700">
+            <a:solidFill>
+              <a:srgbClr val="F7F7F7"/>
+            </a:solidFill>
+            <a:prstDash val="solid"/>
+          </a:ln>
+        </p:spPr>
+      </p:sp>
+      <p:sp>
+        <p:nvSpPr>
+          <p:cNvPr id="4" name="icon-kreis-FaLayerGroup"/>
+          <p:cNvSpPr/>
+          <p:nvPr/>
+        </p:nvSpPr>
+        <p:spPr>
+          <a:xfrm>
+            <a:off x="822960" y="1600200"/>
+            <a:ext cx="640080" cy="640080"/>
+          </a:xfrm>
+          <a:prstGeom prst="ellipse">
+            <a:avLst/>
+          </a:prstGeom>
+          <a:solidFill>
+            <a:srgbClr val="006FAD"/>
+          </a:solidFill>
+          <a:ln w="12700">
+            <a:solidFill>
+              <a:srgbClr val="006FAD"/>
+            </a:solidFill>
+            <a:prstDash val="solid"/>
+          </a:ln>
+        </p:spPr>
+      </p:sp>
+      <p:pic>
+        <p:nvPicPr>
+          <p:cNvPr id="5" name="icon-FaLayerGroup" descr="C:\Users\Thanam\AppData\Local\Temp\claude\c--Projekt-Trainings-azure-basics-training\a7a6b8eb-22f3-4b42-aecc-5af05d1502b1\scratchpad\folien\assets\icons\FaLayerGroup.png">    </p:cNvPr>
+          <p:cNvPicPr>
+            <a:picLocks noChangeAspect="1"/>
+          </p:cNvPicPr>
+          <p:nvPr/>
+        </p:nvPicPr>
+        <p:blipFill>
+          <a:blip r:embed="rId1"/>
+          <a:stretch>
+            <a:fillRect/>
+          </a:stretch>
+        </p:blipFill>
+        <p:spPr>
+          <a:xfrm>
+            <a:off x="976579" y="1753819"/>
+            <a:ext cx="332842" cy="332842"/>
+          </a:xfrm>
+          <a:prstGeom prst="rect">
+            <a:avLst/>
+          </a:prstGeom>
+        </p:spPr>
+      </p:pic>
+      <p:sp>
+        <p:nvSpPr>
+          <p:cNvPr id="6" name="Text 3"/>
+          <p:cNvSpPr txBox="1"/>
+          <p:nvPr/>
+        </p:nvSpPr>
+        <p:spPr>
+          <a:xfrm>
+            <a:off x="1645920" y="1600200"/>
+            <a:ext cx="2189378" cy="640080"/>
+          </a:xfrm>
+          <a:prstGeom prst="rect">
+            <a:avLst/>
+          </a:prstGeom>
+          <a:noFill/>
+          <a:ln/>
+        </p:spPr>
+        <p:txBody>
+          <a:bodyPr wrap="square" lIns="0" tIns="0" rIns="0" bIns="0" rtlCol="0" anchor="ctr">
+            <a:normAutofit/>
+          </a:bodyPr>
+          <a:lstStyle/>
+          <a:p>
+            <a:pPr indent="0" marL="0">
+              <a:buNone/>
+            </a:pPr>
+            <a:r>
+              <a:rPr lang="en-US" sz="2000" b="1" dirty="0">
+                <a:solidFill>
+                  <a:srgbClr val="27303A"/>
+                </a:solidFill>
+              </a:rPr>
+              <a:t>Hypervisor (K2)</a:t>
+            </a:r>
+            <a:endParaRPr lang="en-US" sz="2000" dirty="0"/>
+          </a:p>
+        </p:txBody>
+      </p:sp>
+      <p:sp>
+        <p:nvSpPr>
+          <p:cNvPr id="7" name="Text 4"/>
+          <p:cNvSpPr txBox="1"/>
+          <p:nvPr/>
+        </p:nvSpPr>
+        <p:spPr>
+          <a:xfrm>
+            <a:off x="822960" y="2423160"/>
+            <a:ext cx="2966618" cy="982980"/>
+          </a:xfrm>
+          <a:prstGeom prst="rect">
+            <a:avLst/>
+          </a:prstGeom>
+          <a:noFill/>
+          <a:ln/>
+        </p:spPr>
+        <p:txBody>
+          <a:bodyPr wrap="square" lIns="0" tIns="0" rIns="0" bIns="0" rtlCol="0" anchor="t"/>
+          <a:lstStyle/>
+          <a:p>
+            <a:pPr indent="0" marL="0">
+              <a:spcAft>
+                <a:spcPts val="400"/>
+              </a:spcAft>
+              <a:buNone/>
+            </a:pPr>
+            <a:r>
+              <a:rPr lang="en-US" sz="1600" dirty="0">
+                <a:solidFill>
+                  <a:srgbClr val="27303A"/>
+                </a:solidFill>
+              </a:rPr>
+              <a:t>Du erklärst, was ein Hypervisor macht, und ordnest Typ 1 und Typ 2 zu.</a:t>
+            </a:r>
+            <a:endParaRPr lang="en-US" sz="1600" dirty="0"/>
+          </a:p>
+        </p:txBody>
+      </p:sp>
+      <p:sp>
+        <p:nvSpPr>
+          <p:cNvPr id="8" name="karte"/>
+          <p:cNvSpPr/>
+          <p:nvPr/>
+        </p:nvSpPr>
+        <p:spPr>
+          <a:xfrm>
+            <a:off x="4338218" y="1325880"/>
+            <a:ext cx="3515258" cy="2217420"/>
+          </a:xfrm>
+          <a:prstGeom prst="roundRect">
+            <a:avLst>
+              <a:gd name="adj" fmla="val 4948"/>
+            </a:avLst>
+          </a:prstGeom>
+          <a:solidFill>
+            <a:srgbClr val="F7F7F7"/>
+          </a:solidFill>
+          <a:ln w="12700">
+            <a:solidFill>
+              <a:srgbClr val="F7F7F7"/>
+            </a:solidFill>
+            <a:prstDash val="solid"/>
+          </a:ln>
+        </p:spPr>
+      </p:sp>
+      <p:sp>
+        <p:nvSpPr>
+          <p:cNvPr id="9" name="icon-kreis-FaServer"/>
+          <p:cNvSpPr/>
+          <p:nvPr/>
+        </p:nvSpPr>
+        <p:spPr>
+          <a:xfrm>
+            <a:off x="4612538" y="1600200"/>
+            <a:ext cx="640080" cy="640080"/>
+          </a:xfrm>
+          <a:prstGeom prst="ellipse">
+            <a:avLst/>
+          </a:prstGeom>
+          <a:solidFill>
+            <a:srgbClr val="006FAD"/>
+          </a:solidFill>
+          <a:ln w="12700">
+            <a:solidFill>
+              <a:srgbClr val="006FAD"/>
+            </a:solidFill>
+            <a:prstDash val="solid"/>
+          </a:ln>
+        </p:spPr>
+      </p:sp>
+      <p:pic>
+        <p:nvPicPr>
+          <p:cNvPr id="10" name="icon-FaServer" descr="C:\Users\Thanam\AppData\Local\Temp\claude\c--Projekt-Trainings-azure-basics-training\a7a6b8eb-22f3-4b42-aecc-5af05d1502b1\scratchpad\folien\assets\icons\FaServer.png">    </p:cNvPr>
+          <p:cNvPicPr>
+            <a:picLocks noChangeAspect="1"/>
+          </p:cNvPicPr>
+          <p:nvPr/>
+        </p:nvPicPr>
+        <p:blipFill>
+          <a:blip r:embed="rId2"/>
+          <a:stretch>
+            <a:fillRect/>
+          </a:stretch>
+        </p:blipFill>
+        <p:spPr>
+          <a:xfrm>
+            <a:off x="4766158" y="1753819"/>
+            <a:ext cx="332842" cy="332842"/>
+          </a:xfrm>
+          <a:prstGeom prst="rect">
+            <a:avLst/>
+          </a:prstGeom>
+        </p:spPr>
+      </p:pic>
+      <p:sp>
+        <p:nvSpPr>
+          <p:cNvPr id="11" name="Text 7"/>
+          <p:cNvSpPr txBox="1"/>
+          <p:nvPr/>
+        </p:nvSpPr>
+        <p:spPr>
+          <a:xfrm>
+            <a:off x="5435498" y="1600200"/>
+            <a:ext cx="2189378" cy="640080"/>
+          </a:xfrm>
+          <a:prstGeom prst="rect">
+            <a:avLst/>
+          </a:prstGeom>
+          <a:noFill/>
+          <a:ln/>
+        </p:spPr>
+        <p:txBody>
+          <a:bodyPr wrap="square" lIns="0" tIns="0" rIns="0" bIns="0" rtlCol="0" anchor="ctr">
+            <a:normAutofit/>
+          </a:bodyPr>
+          <a:lstStyle/>
+          <a:p>
+            <a:pPr indent="0" marL="0">
+              <a:buNone/>
+            </a:pPr>
+            <a:r>
+              <a:rPr lang="en-US" sz="2000" b="1" dirty="0">
+                <a:solidFill>
+                  <a:srgbClr val="27303A"/>
+                </a:solidFill>
+              </a:rPr>
+              <a:t>VMs mit Multipass (K3)</a:t>
+            </a:r>
+            <a:endParaRPr lang="en-US" sz="2000" dirty="0"/>
+          </a:p>
+        </p:txBody>
+      </p:sp>
+      <p:sp>
+        <p:nvSpPr>
+          <p:cNvPr id="12" name="Text 8"/>
+          <p:cNvSpPr txBox="1"/>
+          <p:nvPr/>
+        </p:nvSpPr>
+        <p:spPr>
+          <a:xfrm>
+            <a:off x="4612538" y="2423160"/>
+            <a:ext cx="2966618" cy="982980"/>
+          </a:xfrm>
+          <a:prstGeom prst="rect">
+            <a:avLst/>
+          </a:prstGeom>
+          <a:noFill/>
+          <a:ln/>
+        </p:spPr>
+        <p:txBody>
+          <a:bodyPr wrap="square" lIns="0" tIns="0" rIns="0" bIns="0" rtlCol="0" anchor="t"/>
+          <a:lstStyle/>
+          <a:p>
+            <a:pPr indent="0" marL="0">
+              <a:spcAft>
+                <a:spcPts val="400"/>
+              </a:spcAft>
+              <a:buNone/>
+            </a:pPr>
+            <a:r>
+              <a:rPr lang="en-US" sz="1600" dirty="0">
+                <a:solidFill>
+                  <a:srgbClr val="27303A"/>
+                </a:solidFill>
+              </a:rPr>
+              <a:t>Du erstellst, startest, stoppst und löschst VMs.</a:t>
+            </a:r>
+            <a:endParaRPr lang="en-US" sz="1600" dirty="0"/>
+          </a:p>
+        </p:txBody>
+      </p:sp>
+      <p:sp>
+        <p:nvSpPr>
+          <p:cNvPr id="13" name="karte"/>
+          <p:cNvSpPr/>
+          <p:nvPr/>
+        </p:nvSpPr>
+        <p:spPr>
+          <a:xfrm>
+            <a:off x="8127797" y="1325880"/>
+            <a:ext cx="3515258" cy="2217420"/>
+          </a:xfrm>
+          <a:prstGeom prst="roundRect">
+            <a:avLst>
+              <a:gd name="adj" fmla="val 4948"/>
+            </a:avLst>
+          </a:prstGeom>
+          <a:solidFill>
+            <a:srgbClr val="F7F7F7"/>
+          </a:solidFill>
+          <a:ln w="12700">
+            <a:solidFill>
+              <a:srgbClr val="F7F7F7"/>
+            </a:solidFill>
+            <a:prstDash val="solid"/>
+          </a:ln>
+        </p:spPr>
+      </p:sp>
+      <p:sp>
+        <p:nvSpPr>
+          <p:cNvPr id="14" name="icon-kreis-FaMemory"/>
+          <p:cNvSpPr/>
+          <p:nvPr/>
+        </p:nvSpPr>
+        <p:spPr>
+          <a:xfrm>
+            <a:off x="8402117" y="1600200"/>
+            <a:ext cx="640080" cy="640080"/>
+          </a:xfrm>
+          <a:prstGeom prst="ellipse">
+            <a:avLst/>
+          </a:prstGeom>
+          <a:solidFill>
+            <a:srgbClr val="006FAD"/>
+          </a:solidFill>
+          <a:ln w="12700">
+            <a:solidFill>
+              <a:srgbClr val="006FAD"/>
+            </a:solidFill>
+            <a:prstDash val="solid"/>
+          </a:ln>
+        </p:spPr>
+      </p:sp>
+      <p:pic>
+        <p:nvPicPr>
+          <p:cNvPr id="15" name="icon-FaMemory" descr="C:\Users\Thanam\AppData\Local\Temp\claude\c--Projekt-Trainings-azure-basics-training\a7a6b8eb-22f3-4b42-aecc-5af05d1502b1\scratchpad\folien\assets\icons\FaMemory.png">    </p:cNvPr>
+          <p:cNvPicPr>
+            <a:picLocks noChangeAspect="1"/>
+          </p:cNvPicPr>
+          <p:nvPr/>
+        </p:nvPicPr>
+        <p:blipFill>
+          <a:blip r:embed="rId3"/>
+          <a:stretch>
+            <a:fillRect/>
+          </a:stretch>
+        </p:blipFill>
+        <p:spPr>
+          <a:xfrm>
+            <a:off x="8555736" y="1753819"/>
+            <a:ext cx="332842" cy="332842"/>
+          </a:xfrm>
+          <a:prstGeom prst="rect">
+            <a:avLst/>
+          </a:prstGeom>
+        </p:spPr>
+      </p:pic>
+      <p:sp>
+        <p:nvSpPr>
+          <p:cNvPr id="16" name="Text 11"/>
+          <p:cNvSpPr txBox="1"/>
+          <p:nvPr/>
+        </p:nvSpPr>
+        <p:spPr>
+          <a:xfrm>
+            <a:off x="9225077" y="1600200"/>
+            <a:ext cx="2189378" cy="640080"/>
+          </a:xfrm>
+          <a:prstGeom prst="rect">
+            <a:avLst/>
+          </a:prstGeom>
+          <a:noFill/>
+          <a:ln/>
+        </p:spPr>
+        <p:txBody>
+          <a:bodyPr wrap="square" lIns="0" tIns="0" rIns="0" bIns="0" rtlCol="0" anchor="ctr">
+            <a:normAutofit/>
+          </a:bodyPr>
+          <a:lstStyle/>
+          <a:p>
+            <a:pPr indent="0" marL="0">
+              <a:buNone/>
+            </a:pPr>
+            <a:r>
+              <a:rPr lang="en-US" sz="2000" b="1" dirty="0">
+                <a:solidFill>
+                  <a:srgbClr val="27303A"/>
+                </a:solidFill>
+              </a:rPr>
+              <a:t>Ressourcen (K3)</a:t>
+            </a:r>
+            <a:endParaRPr lang="en-US" sz="2000" dirty="0"/>
+          </a:p>
+        </p:txBody>
+      </p:sp>
+      <p:sp>
+        <p:nvSpPr>
+          <p:cNvPr id="17" name="Text 12"/>
+          <p:cNvSpPr txBox="1"/>
+          <p:nvPr/>
+        </p:nvSpPr>
+        <p:spPr>
+          <a:xfrm>
+            <a:off x="8402117" y="2423160"/>
+            <a:ext cx="2966618" cy="982980"/>
+          </a:xfrm>
+          <a:prstGeom prst="rect">
+            <a:avLst/>
+          </a:prstGeom>
+          <a:noFill/>
+          <a:ln/>
+        </p:spPr>
+        <p:txBody>
+          <a:bodyPr wrap="square" lIns="0" tIns="0" rIns="0" bIns="0" rtlCol="0" anchor="t"/>
+          <a:lstStyle/>
+          <a:p>
+            <a:pPr indent="0" marL="0">
+              <a:spcAft>
+                <a:spcPts val="400"/>
+              </a:spcAft>
+              <a:buNone/>
+            </a:pPr>
+            <a:r>
+              <a:rPr lang="en-US" sz="1600" dirty="0">
+                <a:solidFill>
+                  <a:srgbClr val="27303A"/>
+                </a:solidFill>
+              </a:rPr>
+              <a:t>Du gibst einer VM CPU, RAM und Festplatte und prüfst es.</a:t>
+            </a:r>
+            <a:endParaRPr lang="en-US" sz="1600" dirty="0"/>
+          </a:p>
+        </p:txBody>
+      </p:sp>
+      <p:sp>
+        <p:nvSpPr>
+          <p:cNvPr id="18" name="karte"/>
+          <p:cNvSpPr/>
+          <p:nvPr/>
+        </p:nvSpPr>
+        <p:spPr>
+          <a:xfrm>
+            <a:off x="548640" y="3817620"/>
+            <a:ext cx="3515258" cy="2217420"/>
+          </a:xfrm>
+          <a:prstGeom prst="roundRect">
+            <a:avLst>
+              <a:gd name="adj" fmla="val 4948"/>
+            </a:avLst>
+          </a:prstGeom>
+          <a:solidFill>
+            <a:srgbClr val="F7F7F7"/>
+          </a:solidFill>
+          <a:ln w="12700">
+            <a:solidFill>
+              <a:srgbClr val="F7F7F7"/>
+            </a:solidFill>
+            <a:prstDash val="solid"/>
+          </a:ln>
+        </p:spPr>
+      </p:sp>
+      <p:sp>
+        <p:nvSpPr>
+          <p:cNvPr id="19" name="icon-kreis-FaRocket"/>
+          <p:cNvSpPr/>
+          <p:nvPr/>
+        </p:nvSpPr>
+        <p:spPr>
+          <a:xfrm>
+            <a:off x="822960" y="4091940"/>
+            <a:ext cx="640080" cy="640080"/>
+          </a:xfrm>
+          <a:prstGeom prst="ellipse">
+            <a:avLst/>
+          </a:prstGeom>
+          <a:solidFill>
+            <a:srgbClr val="006FAD"/>
+          </a:solidFill>
+          <a:ln w="12700">
+            <a:solidFill>
+              <a:srgbClr val="006FAD"/>
+            </a:solidFill>
+            <a:prstDash val="solid"/>
+          </a:ln>
+        </p:spPr>
+      </p:sp>
+      <p:pic>
+        <p:nvPicPr>
+          <p:cNvPr id="20" name="icon-FaRocket" descr="C:\Users\Thanam\AppData\Local\Temp\claude\c--Projekt-Trainings-azure-basics-training\a7a6b8eb-22f3-4b42-aecc-5af05d1502b1\scratchpad\folien\assets\icons\FaRocket.png">    </p:cNvPr>
+          <p:cNvPicPr>
+            <a:picLocks noChangeAspect="1"/>
+          </p:cNvPicPr>
+          <p:nvPr/>
+        </p:nvPicPr>
+        <p:blipFill>
+          <a:blip r:embed="rId4"/>
+          <a:stretch>
+            <a:fillRect/>
+          </a:stretch>
+        </p:blipFill>
+        <p:spPr>
+          <a:xfrm>
+            <a:off x="976579" y="4245559"/>
+            <a:ext cx="332842" cy="332842"/>
+          </a:xfrm>
+          <a:prstGeom prst="rect">
+            <a:avLst/>
+          </a:prstGeom>
+        </p:spPr>
+      </p:pic>
+      <p:sp>
+        <p:nvSpPr>
+          <p:cNvPr id="21" name="Text 15"/>
+          <p:cNvSpPr txBox="1"/>
+          <p:nvPr/>
+        </p:nvSpPr>
+        <p:spPr>
+          <a:xfrm>
+            <a:off x="1645920" y="4091940"/>
+            <a:ext cx="2189378" cy="640080"/>
+          </a:xfrm>
+          <a:prstGeom prst="rect">
+            <a:avLst/>
+          </a:prstGeom>
+          <a:noFill/>
+          <a:ln/>
+        </p:spPr>
+        <p:txBody>
+          <a:bodyPr wrap="square" lIns="0" tIns="0" rIns="0" bIns="0" rtlCol="0" anchor="ctr">
+            <a:normAutofit/>
+          </a:bodyPr>
+          <a:lstStyle/>
+          <a:p>
+            <a:pPr indent="0" marL="0">
+              <a:buNone/>
+            </a:pPr>
+            <a:r>
+              <a:rPr lang="en-US" sz="2000" b="1" dirty="0">
+                <a:solidFill>
+                  <a:srgbClr val="27303A"/>
+                </a:solidFill>
+              </a:rPr>
+              <a:t>cloud-init (K3)</a:t>
+            </a:r>
+            <a:endParaRPr lang="en-US" sz="2000" dirty="0"/>
+          </a:p>
+        </p:txBody>
+      </p:sp>
+      <p:sp>
+        <p:nvSpPr>
+          <p:cNvPr id="22" name="Text 16"/>
+          <p:cNvSpPr txBox="1"/>
+          <p:nvPr/>
+        </p:nvSpPr>
+        <p:spPr>
+          <a:xfrm>
+            <a:off x="822960" y="4914900"/>
+            <a:ext cx="2966618" cy="982980"/>
+          </a:xfrm>
+          <a:prstGeom prst="rect">
+            <a:avLst/>
+          </a:prstGeom>
+          <a:noFill/>
+          <a:ln/>
+        </p:spPr>
+        <p:txBody>
+          <a:bodyPr wrap="square" lIns="0" tIns="0" rIns="0" bIns="0" rtlCol="0" anchor="t"/>
+          <a:lstStyle/>
+          <a:p>
+            <a:pPr indent="0" marL="0">
+              <a:spcAft>
+                <a:spcPts val="400"/>
+              </a:spcAft>
+              <a:buNone/>
+            </a:pPr>
+            <a:r>
+              <a:rPr lang="en-US" sz="1600" dirty="0">
+                <a:solidFill>
+                  <a:srgbClr val="27303A"/>
+                </a:solidFill>
+              </a:rPr>
+              <a:t>Du richtest eine VM von Hand und automatisch mit einer Datei ein.</a:t>
+            </a:r>
+            <a:endParaRPr lang="en-US" sz="1600" dirty="0"/>
+          </a:p>
+        </p:txBody>
+      </p:sp>
+      <p:sp>
+        <p:nvSpPr>
+          <p:cNvPr id="23" name="karte"/>
+          <p:cNvSpPr/>
+          <p:nvPr/>
+        </p:nvSpPr>
+        <p:spPr>
+          <a:xfrm>
+            <a:off x="4338218" y="3817620"/>
+            <a:ext cx="3515258" cy="2217420"/>
+          </a:xfrm>
+          <a:prstGeom prst="roundRect">
+            <a:avLst>
+              <a:gd name="adj" fmla="val 4948"/>
+            </a:avLst>
+          </a:prstGeom>
+          <a:solidFill>
+            <a:srgbClr val="F7F7F7"/>
+          </a:solidFill>
+          <a:ln w="12700">
+            <a:solidFill>
+              <a:srgbClr val="F7F7F7"/>
+            </a:solidFill>
+            <a:prstDash val="solid"/>
+          </a:ln>
+        </p:spPr>
+      </p:sp>
+      <p:sp>
+        <p:nvSpPr>
+          <p:cNvPr id="24" name="icon-kreis-FaKey"/>
+          <p:cNvSpPr/>
+          <p:nvPr/>
+        </p:nvSpPr>
+        <p:spPr>
+          <a:xfrm>
+            <a:off x="4612538" y="4091940"/>
+            <a:ext cx="640080" cy="640080"/>
+          </a:xfrm>
+          <a:prstGeom prst="ellipse">
+            <a:avLst/>
+          </a:prstGeom>
+          <a:solidFill>
+            <a:srgbClr val="006FAD"/>
+          </a:solidFill>
+          <a:ln w="12700">
+            <a:solidFill>
+              <a:srgbClr val="006FAD"/>
+            </a:solidFill>
+            <a:prstDash val="solid"/>
+          </a:ln>
+        </p:spPr>
+      </p:sp>
+      <p:pic>
+        <p:nvPicPr>
+          <p:cNvPr id="25" name="icon-FaKey" descr="C:\Users\Thanam\AppData\Local\Temp\claude\c--Projekt-Trainings-azure-basics-training\a7a6b8eb-22f3-4b42-aecc-5af05d1502b1\scratchpad\folien\assets\icons\FaKey.png">    </p:cNvPr>
+          <p:cNvPicPr>
+            <a:picLocks noChangeAspect="1"/>
+          </p:cNvPicPr>
+          <p:nvPr/>
+        </p:nvPicPr>
+        <p:blipFill>
+          <a:blip r:embed="rId5"/>
+          <a:stretch>
+            <a:fillRect/>
+          </a:stretch>
+        </p:blipFill>
+        <p:spPr>
+          <a:xfrm>
+            <a:off x="4766158" y="4245559"/>
+            <a:ext cx="332842" cy="332842"/>
+          </a:xfrm>
+          <a:prstGeom prst="rect">
+            <a:avLst/>
+          </a:prstGeom>
+        </p:spPr>
+      </p:pic>
+      <p:sp>
+        <p:nvSpPr>
+          <p:cNvPr id="26" name="Text 19"/>
+          <p:cNvSpPr txBox="1"/>
+          <p:nvPr/>
+        </p:nvSpPr>
+        <p:spPr>
+          <a:xfrm>
+            <a:off x="5435498" y="4091940"/>
+            <a:ext cx="2189378" cy="640080"/>
+          </a:xfrm>
+          <a:prstGeom prst="rect">
+            <a:avLst/>
+          </a:prstGeom>
+          <a:noFill/>
+          <a:ln/>
+        </p:spPr>
+        <p:txBody>
+          <a:bodyPr wrap="square" lIns="0" tIns="0" rIns="0" bIns="0" rtlCol="0" anchor="ctr">
+            <a:normAutofit/>
+          </a:bodyPr>
+          <a:lstStyle/>
+          <a:p>
+            <a:pPr indent="0" marL="0">
+              <a:buNone/>
+            </a:pPr>
+            <a:r>
+              <a:rPr lang="en-US" sz="2000" b="1" dirty="0">
+                <a:solidFill>
+                  <a:srgbClr val="27303A"/>
+                </a:solidFill>
+              </a:rPr>
+              <a:t>SSH-Schlüssel (K3)</a:t>
+            </a:r>
+            <a:endParaRPr lang="en-US" sz="2000" dirty="0"/>
+          </a:p>
+        </p:txBody>
+      </p:sp>
+      <p:sp>
+        <p:nvSpPr>
+          <p:cNvPr id="27" name="Text 20"/>
+          <p:cNvSpPr txBox="1"/>
+          <p:nvPr/>
+        </p:nvSpPr>
+        <p:spPr>
+          <a:xfrm>
+            <a:off x="4612538" y="4914900"/>
+            <a:ext cx="2966618" cy="982980"/>
+          </a:xfrm>
+          <a:prstGeom prst="rect">
+            <a:avLst/>
+          </a:prstGeom>
+          <a:noFill/>
+          <a:ln/>
+        </p:spPr>
+        <p:txBody>
+          <a:bodyPr wrap="square" lIns="0" tIns="0" rIns="0" bIns="0" rtlCol="0" anchor="t"/>
+          <a:lstStyle/>
+          <a:p>
+            <a:pPr indent="0" marL="0">
+              <a:spcAft>
+                <a:spcPts val="400"/>
+              </a:spcAft>
+              <a:buNone/>
+            </a:pPr>
+            <a:r>
+              <a:rPr lang="en-US" sz="1600" dirty="0">
+                <a:solidFill>
+                  <a:srgbClr val="27303A"/>
+                </a:solidFill>
+              </a:rPr>
+              <a:t>Du erstellst ein Schlüsselpaar für die Cloud.</a:t>
+            </a:r>
+            <a:endParaRPr lang="en-US" sz="1600" dirty="0"/>
+          </a:p>
+        </p:txBody>
+      </p:sp>
       <p:sp>
         <p:nvSpPr>
           <p:cNvPr id="25" name="Slide Number Placeholder 0"/>
@@ -5810,2004 +3732,6 @@
                   <a:srgbClr val="27303A"/>
                 </a:solidFill>
               </a:rPr>
-              <a:t>So arbeiten wir</a:t>
-            </a:r>
-            <a:endParaRPr lang="en-US" sz="3400" dirty="0"/>
-          </a:p>
-        </p:txBody>
-      </p:sp>
-      <p:sp>
-        <p:nvSpPr>
-          <p:cNvPr id="3" name="karte"/>
-          <p:cNvSpPr/>
-          <p:nvPr/>
-        </p:nvSpPr>
-        <p:spPr>
-          <a:xfrm>
-            <a:off x="548640" y="1325880"/>
-            <a:ext cx="5410048" cy="2217420"/>
-          </a:xfrm>
-          <a:prstGeom prst="roundRect">
-            <a:avLst>
-              <a:gd name="adj" fmla="val 4948"/>
-            </a:avLst>
-          </a:prstGeom>
-          <a:solidFill>
-            <a:srgbClr val="F7F7F7"/>
-          </a:solidFill>
-          <a:ln w="12700">
-            <a:solidFill>
-              <a:srgbClr val="F7F7F7"/>
-            </a:solidFill>
-            <a:prstDash val="solid"/>
-          </a:ln>
-        </p:spPr>
-      </p:sp>
-      <p:sp>
-        <p:nvSpPr>
-          <p:cNvPr id="4" name="icon-kreis-FaPencilAlt"/>
-          <p:cNvSpPr/>
-          <p:nvPr/>
-        </p:nvSpPr>
-        <p:spPr>
-          <a:xfrm>
-            <a:off x="822960" y="1600200"/>
-            <a:ext cx="640080" cy="640080"/>
-          </a:xfrm>
-          <a:prstGeom prst="ellipse">
-            <a:avLst/>
-          </a:prstGeom>
-          <a:solidFill>
-            <a:srgbClr val="006FAD"/>
-          </a:solidFill>
-          <a:ln w="12700">
-            <a:solidFill>
-              <a:srgbClr val="006FAD"/>
-            </a:solidFill>
-            <a:prstDash val="solid"/>
-          </a:ln>
-        </p:spPr>
-      </p:sp>
-      <p:pic>
-        <p:nvPicPr>
-          <p:cNvPr id="5" name="icon-FaPencilAlt" descr="C:\Users\Thanam\AppData\Local\Temp\claude\c--Projekt-Trainings-azure-basics-training\a9e0bf4e-0d08-4082-a38a-5b8886538508\scratchpad\pptx\assets\icons\FaPencilAlt.png">    </p:cNvPr>
-          <p:cNvPicPr>
-            <a:picLocks noChangeAspect="1"/>
-          </p:cNvPicPr>
-          <p:nvPr/>
-        </p:nvPicPr>
-        <p:blipFill>
-          <a:blip r:embed="rId1"/>
-          <a:stretch>
-            <a:fillRect/>
-          </a:stretch>
-        </p:blipFill>
-        <p:spPr>
-          <a:xfrm>
-            <a:off x="976579" y="1753819"/>
-            <a:ext cx="332842" cy="332842"/>
-          </a:xfrm>
-          <a:prstGeom prst="rect">
-            <a:avLst/>
-          </a:prstGeom>
-        </p:spPr>
-      </p:pic>
-      <p:sp>
-        <p:nvSpPr>
-          <p:cNvPr id="6" name="Text 3"/>
-          <p:cNvSpPr txBox="1"/>
-          <p:nvPr/>
-        </p:nvSpPr>
-        <p:spPr>
-          <a:xfrm>
-            <a:off x="1645920" y="1600200"/>
-            <a:ext cx="4084168" cy="640080"/>
-          </a:xfrm>
-          <a:prstGeom prst="rect">
-            <a:avLst/>
-          </a:prstGeom>
-          <a:noFill/>
-          <a:ln/>
-        </p:spPr>
-        <p:txBody>
-          <a:bodyPr wrap="square" lIns="0" tIns="0" rIns="0" bIns="0" rtlCol="0" anchor="ctr">
-            <a:normAutofit/>
-          </a:bodyPr>
-          <a:lstStyle/>
-          <a:p>
-            <a:pPr indent="0" marL="0">
-              <a:buNone/>
-            </a:pPr>
-            <a:r>
-              <a:rPr lang="en-US" sz="2000" b="1" dirty="0">
-                <a:solidFill>
-                  <a:srgbClr val="27303A"/>
-                </a:solidFill>
-              </a:rPr>
-              <a:t>Lernjournal</a:t>
-            </a:r>
-            <a:endParaRPr lang="en-US" sz="2000" dirty="0"/>
-          </a:p>
-        </p:txBody>
-      </p:sp>
-      <p:sp>
-        <p:nvSpPr>
-          <p:cNvPr id="7" name="Text 4"/>
-          <p:cNvSpPr txBox="1"/>
-          <p:nvPr/>
-        </p:nvSpPr>
-        <p:spPr>
-          <a:xfrm>
-            <a:off x="822960" y="2423160"/>
-            <a:ext cx="4861408" cy="982980"/>
-          </a:xfrm>
-          <a:prstGeom prst="rect">
-            <a:avLst/>
-          </a:prstGeom>
-          <a:noFill/>
-          <a:ln/>
-        </p:spPr>
-        <p:txBody>
-          <a:bodyPr wrap="square" lIns="0" tIns="0" rIns="0" bIns="0" rtlCol="0" anchor="t"/>
-          <a:lstStyle/>
-          <a:p>
-            <a:pPr indent="0" marL="0">
-              <a:spcAft>
-                <a:spcPts val="400"/>
-              </a:spcAft>
-              <a:buNone/>
-            </a:pPr>
-            <a:r>
-              <a:rPr lang="en-US" sz="1600" dirty="0">
-                <a:solidFill>
-                  <a:srgbClr val="27303A"/>
-                </a:solidFill>
-              </a:rPr>
-              <a:t>Pro Auftrag: Befehle, Screenshot als Nachweis (ohne persönliche Daten), was nicht geklappt hat.</a:t>
-            </a:r>
-            <a:endParaRPr lang="en-US" sz="1600" dirty="0"/>
-          </a:p>
-        </p:txBody>
-      </p:sp>
-      <p:sp>
-        <p:nvSpPr>
-          <p:cNvPr id="8" name="karte"/>
-          <p:cNvSpPr/>
-          <p:nvPr/>
-        </p:nvSpPr>
-        <p:spPr>
-          <a:xfrm>
-            <a:off x="6233008" y="1325880"/>
-            <a:ext cx="5410048" cy="2217420"/>
-          </a:xfrm>
-          <a:prstGeom prst="roundRect">
-            <a:avLst>
-              <a:gd name="adj" fmla="val 4948"/>
-            </a:avLst>
-          </a:prstGeom>
-          <a:solidFill>
-            <a:srgbClr val="F7F7F7"/>
-          </a:solidFill>
-          <a:ln w="12700">
-            <a:solidFill>
-              <a:srgbClr val="F7F7F7"/>
-            </a:solidFill>
-            <a:prstDash val="solid"/>
-          </a:ln>
-        </p:spPr>
-      </p:sp>
-      <p:sp>
-        <p:nvSpPr>
-          <p:cNvPr id="9" name="icon-kreis-FaUsers"/>
-          <p:cNvSpPr/>
-          <p:nvPr/>
-        </p:nvSpPr>
-        <p:spPr>
-          <a:xfrm>
-            <a:off x="6507328" y="1600200"/>
-            <a:ext cx="640080" cy="640080"/>
-          </a:xfrm>
-          <a:prstGeom prst="ellipse">
-            <a:avLst/>
-          </a:prstGeom>
-          <a:solidFill>
-            <a:srgbClr val="006FAD"/>
-          </a:solidFill>
-          <a:ln w="12700">
-            <a:solidFill>
-              <a:srgbClr val="006FAD"/>
-            </a:solidFill>
-            <a:prstDash val="solid"/>
-          </a:ln>
-        </p:spPr>
-      </p:sp>
-      <p:pic>
-        <p:nvPicPr>
-          <p:cNvPr id="10" name="icon-FaUsers" descr="C:\Users\Thanam\AppData\Local\Temp\claude\c--Projekt-Trainings-azure-basics-training\a9e0bf4e-0d08-4082-a38a-5b8886538508\scratchpad\pptx\assets\icons\FaUsers.png">    </p:cNvPr>
-          <p:cNvPicPr>
-            <a:picLocks noChangeAspect="1"/>
-          </p:cNvPicPr>
-          <p:nvPr/>
-        </p:nvPicPr>
-        <p:blipFill>
-          <a:blip r:embed="rId2"/>
-          <a:stretch>
-            <a:fillRect/>
-          </a:stretch>
-        </p:blipFill>
-        <p:spPr>
-          <a:xfrm>
-            <a:off x="6660947" y="1753819"/>
-            <a:ext cx="332842" cy="332842"/>
-          </a:xfrm>
-          <a:prstGeom prst="rect">
-            <a:avLst/>
-          </a:prstGeom>
-        </p:spPr>
-      </p:pic>
-      <p:sp>
-        <p:nvSpPr>
-          <p:cNvPr id="11" name="Text 7"/>
-          <p:cNvSpPr txBox="1"/>
-          <p:nvPr/>
-        </p:nvSpPr>
-        <p:spPr>
-          <a:xfrm>
-            <a:off x="7330288" y="1600200"/>
-            <a:ext cx="4084168" cy="640080"/>
-          </a:xfrm>
-          <a:prstGeom prst="rect">
-            <a:avLst/>
-          </a:prstGeom>
-          <a:noFill/>
-          <a:ln/>
-        </p:spPr>
-        <p:txBody>
-          <a:bodyPr wrap="square" lIns="0" tIns="0" rIns="0" bIns="0" rtlCol="0" anchor="ctr">
-            <a:normAutofit/>
-          </a:bodyPr>
-          <a:lstStyle/>
-          <a:p>
-            <a:pPr indent="0" marL="0">
-              <a:buNone/>
-            </a:pPr>
-            <a:r>
-              <a:rPr lang="en-US" sz="2000" b="1" dirty="0">
-                <a:solidFill>
-                  <a:srgbClr val="27303A"/>
-                </a:solidFill>
-              </a:rPr>
-              <a:t>Partnerarbeit</a:t>
-            </a:r>
-            <a:endParaRPr lang="en-US" sz="2000" dirty="0"/>
-          </a:p>
-        </p:txBody>
-      </p:sp>
-      <p:sp>
-        <p:nvSpPr>
-          <p:cNvPr id="12" name="Text 8"/>
-          <p:cNvSpPr txBox="1"/>
-          <p:nvPr/>
-        </p:nvSpPr>
-        <p:spPr>
-          <a:xfrm>
-            <a:off x="6507328" y="2423160"/>
-            <a:ext cx="4861408" cy="982980"/>
-          </a:xfrm>
-          <a:prstGeom prst="rect">
-            <a:avLst/>
-          </a:prstGeom>
-          <a:noFill/>
-          <a:ln/>
-        </p:spPr>
-        <p:txBody>
-          <a:bodyPr wrap="square" lIns="0" tIns="0" rIns="0" bIns="0" rtlCol="0" anchor="t"/>
-          <a:lstStyle/>
-          <a:p>
-            <a:pPr indent="0" marL="0">
-              <a:spcAft>
-                <a:spcPts val="400"/>
-              </a:spcAft>
-              <a:buNone/>
-            </a:pPr>
-            <a:r>
-              <a:rPr lang="en-US" sz="1600" dirty="0">
-                <a:solidFill>
-                  <a:srgbClr val="27303A"/>
-                </a:solidFill>
-              </a:rPr>
-              <a:t>Driver tippt, Navigator liest und kontrolliert. Nach jedem Auftrag wechseln.</a:t>
-            </a:r>
-            <a:endParaRPr lang="en-US" sz="1600" dirty="0"/>
-          </a:p>
-        </p:txBody>
-      </p:sp>
-      <p:sp>
-        <p:nvSpPr>
-          <p:cNvPr id="13" name="karte"/>
-          <p:cNvSpPr/>
-          <p:nvPr/>
-        </p:nvSpPr>
-        <p:spPr>
-          <a:xfrm>
-            <a:off x="548640" y="3817620"/>
-            <a:ext cx="5410048" cy="2217420"/>
-          </a:xfrm>
-          <a:prstGeom prst="roundRect">
-            <a:avLst>
-              <a:gd name="adj" fmla="val 4948"/>
-            </a:avLst>
-          </a:prstGeom>
-          <a:solidFill>
-            <a:srgbClr val="F7F7F7"/>
-          </a:solidFill>
-          <a:ln w="12700">
-            <a:solidFill>
-              <a:srgbClr val="F7F7F7"/>
-            </a:solidFill>
-            <a:prstDash val="solid"/>
-          </a:ln>
-        </p:spPr>
-      </p:sp>
-      <p:sp>
-        <p:nvSpPr>
-          <p:cNvPr id="14" name="icon-kreis-FaClock"/>
-          <p:cNvSpPr/>
-          <p:nvPr/>
-        </p:nvSpPr>
-        <p:spPr>
-          <a:xfrm>
-            <a:off x="822960" y="4091940"/>
-            <a:ext cx="640080" cy="640080"/>
-          </a:xfrm>
-          <a:prstGeom prst="ellipse">
-            <a:avLst/>
-          </a:prstGeom>
-          <a:solidFill>
-            <a:srgbClr val="006FAD"/>
-          </a:solidFill>
-          <a:ln w="12700">
-            <a:solidFill>
-              <a:srgbClr val="006FAD"/>
-            </a:solidFill>
-            <a:prstDash val="solid"/>
-          </a:ln>
-        </p:spPr>
-      </p:sp>
-      <p:pic>
-        <p:nvPicPr>
-          <p:cNvPr id="15" name="icon-FaClock" descr="C:\Users\Thanam\AppData\Local\Temp\claude\c--Projekt-Trainings-azure-basics-training\a9e0bf4e-0d08-4082-a38a-5b8886538508\scratchpad\pptx\assets\icons\FaClock.png">    </p:cNvPr>
-          <p:cNvPicPr>
-            <a:picLocks noChangeAspect="1"/>
-          </p:cNvPicPr>
-          <p:nvPr/>
-        </p:nvPicPr>
-        <p:blipFill>
-          <a:blip r:embed="rId3"/>
-          <a:stretch>
-            <a:fillRect/>
-          </a:stretch>
-        </p:blipFill>
-        <p:spPr>
-          <a:xfrm>
-            <a:off x="976579" y="4245559"/>
-            <a:ext cx="332842" cy="332842"/>
-          </a:xfrm>
-          <a:prstGeom prst="rect">
-            <a:avLst/>
-          </a:prstGeom>
-        </p:spPr>
-      </p:pic>
-      <p:sp>
-        <p:nvSpPr>
-          <p:cNvPr id="16" name="Text 11"/>
-          <p:cNvSpPr txBox="1"/>
-          <p:nvPr/>
-        </p:nvSpPr>
-        <p:spPr>
-          <a:xfrm>
-            <a:off x="1645920" y="4091940"/>
-            <a:ext cx="4084168" cy="640080"/>
-          </a:xfrm>
-          <a:prstGeom prst="rect">
-            <a:avLst/>
-          </a:prstGeom>
-          <a:noFill/>
-          <a:ln/>
-        </p:spPr>
-        <p:txBody>
-          <a:bodyPr wrap="square" lIns="0" tIns="0" rIns="0" bIns="0" rtlCol="0" anchor="ctr">
-            <a:normAutofit/>
-          </a:bodyPr>
-          <a:lstStyle/>
-          <a:p>
-            <a:pPr indent="0" marL="0">
-              <a:buNone/>
-            </a:pPr>
-            <a:r>
-              <a:rPr lang="en-US" sz="2000" b="1" dirty="0">
-                <a:solidFill>
-                  <a:srgbClr val="27303A"/>
-                </a:solidFill>
-              </a:rPr>
-              <a:t>Hilfe holen</a:t>
-            </a:r>
-            <a:endParaRPr lang="en-US" sz="2000" dirty="0"/>
-          </a:p>
-        </p:txBody>
-      </p:sp>
-      <p:sp>
-        <p:nvSpPr>
-          <p:cNvPr id="17" name="Text 12"/>
-          <p:cNvSpPr txBox="1"/>
-          <p:nvPr/>
-        </p:nvSpPr>
-        <p:spPr>
-          <a:xfrm>
-            <a:off x="822960" y="4914900"/>
-            <a:ext cx="4861408" cy="982980"/>
-          </a:xfrm>
-          <a:prstGeom prst="rect">
-            <a:avLst/>
-          </a:prstGeom>
-          <a:noFill/>
-          <a:ln/>
-        </p:spPr>
-        <p:txBody>
-          <a:bodyPr wrap="square" lIns="0" tIns="0" rIns="0" bIns="0" rtlCol="0" anchor="t"/>
-          <a:lstStyle/>
-          <a:p>
-            <a:pPr indent="0" marL="0">
-              <a:spcAft>
-                <a:spcPts val="400"/>
-              </a:spcAft>
-              <a:buNone/>
-            </a:pPr>
-            <a:r>
-              <a:rPr lang="en-US" sz="1600" dirty="0">
-                <a:solidFill>
-                  <a:srgbClr val="27303A"/>
-                </a:solidFill>
-              </a:rPr>
-              <a:t>10 Minuten selbst probieren, dann Partner fragen, dann Kursleitung.</a:t>
-            </a:r>
-            <a:endParaRPr lang="en-US" sz="1600" dirty="0"/>
-          </a:p>
-        </p:txBody>
-      </p:sp>
-      <p:sp>
-        <p:nvSpPr>
-          <p:cNvPr id="18" name="karte"/>
-          <p:cNvSpPr/>
-          <p:nvPr/>
-        </p:nvSpPr>
-        <p:spPr>
-          <a:xfrm>
-            <a:off x="6233008" y="3817620"/>
-            <a:ext cx="5410048" cy="2217420"/>
-          </a:xfrm>
-          <a:prstGeom prst="roundRect">
-            <a:avLst>
-              <a:gd name="adj" fmla="val 4948"/>
-            </a:avLst>
-          </a:prstGeom>
-          <a:solidFill>
-            <a:srgbClr val="F7F7F7"/>
-          </a:solidFill>
-          <a:ln w="12700">
-            <a:solidFill>
-              <a:srgbClr val="F7F7F7"/>
-            </a:solidFill>
-            <a:prstDash val="solid"/>
-          </a:ln>
-        </p:spPr>
-      </p:sp>
-      <p:sp>
-        <p:nvSpPr>
-          <p:cNvPr id="19" name="icon-kreis-FaTrashAlt"/>
-          <p:cNvSpPr/>
-          <p:nvPr/>
-        </p:nvSpPr>
-        <p:spPr>
-          <a:xfrm>
-            <a:off x="6507328" y="4091940"/>
-            <a:ext cx="640080" cy="640080"/>
-          </a:xfrm>
-          <a:prstGeom prst="ellipse">
-            <a:avLst/>
-          </a:prstGeom>
-          <a:solidFill>
-            <a:srgbClr val="006FAD"/>
-          </a:solidFill>
-          <a:ln w="12700">
-            <a:solidFill>
-              <a:srgbClr val="006FAD"/>
-            </a:solidFill>
-            <a:prstDash val="solid"/>
-          </a:ln>
-        </p:spPr>
-      </p:sp>
-      <p:pic>
-        <p:nvPicPr>
-          <p:cNvPr id="20" name="icon-FaTrashAlt" descr="C:\Users\Thanam\AppData\Local\Temp\claude\c--Projekt-Trainings-azure-basics-training\a9e0bf4e-0d08-4082-a38a-5b8886538508\scratchpad\pptx\assets\icons\FaTrashAlt.png">    </p:cNvPr>
-          <p:cNvPicPr>
-            <a:picLocks noChangeAspect="1"/>
-          </p:cNvPicPr>
-          <p:nvPr/>
-        </p:nvPicPr>
-        <p:blipFill>
-          <a:blip r:embed="rId4"/>
-          <a:stretch>
-            <a:fillRect/>
-          </a:stretch>
-        </p:blipFill>
-        <p:spPr>
-          <a:xfrm>
-            <a:off x="6660947" y="4245559"/>
-            <a:ext cx="332842" cy="332842"/>
-          </a:xfrm>
-          <a:prstGeom prst="rect">
-            <a:avLst/>
-          </a:prstGeom>
-        </p:spPr>
-      </p:pic>
-      <p:sp>
-        <p:nvSpPr>
-          <p:cNvPr id="21" name="Text 15"/>
-          <p:cNvSpPr txBox="1"/>
-          <p:nvPr/>
-        </p:nvSpPr>
-        <p:spPr>
-          <a:xfrm>
-            <a:off x="7330288" y="4091940"/>
-            <a:ext cx="4084168" cy="640080"/>
-          </a:xfrm>
-          <a:prstGeom prst="rect">
-            <a:avLst/>
-          </a:prstGeom>
-          <a:noFill/>
-          <a:ln/>
-        </p:spPr>
-        <p:txBody>
-          <a:bodyPr wrap="square" lIns="0" tIns="0" rIns="0" bIns="0" rtlCol="0" anchor="ctr">
-            <a:normAutofit/>
-          </a:bodyPr>
-          <a:lstStyle/>
-          <a:p>
-            <a:pPr indent="0" marL="0">
-              <a:buNone/>
-            </a:pPr>
-            <a:r>
-              <a:rPr lang="en-US" sz="2000" b="1" dirty="0">
-                <a:solidFill>
-                  <a:srgbClr val="27303A"/>
-                </a:solidFill>
-              </a:rPr>
-              <a:t>Aufräumen</a:t>
-            </a:r>
-            <a:endParaRPr lang="en-US" sz="2000" dirty="0"/>
-          </a:p>
-        </p:txBody>
-      </p:sp>
-      <p:sp>
-        <p:nvSpPr>
-          <p:cNvPr id="22" name="Text 16"/>
-          <p:cNvSpPr txBox="1"/>
-          <p:nvPr/>
-        </p:nvSpPr>
-        <p:spPr>
-          <a:xfrm>
-            <a:off x="6507328" y="4914900"/>
-            <a:ext cx="4861408" cy="982980"/>
-          </a:xfrm>
-          <a:prstGeom prst="rect">
-            <a:avLst/>
-          </a:prstGeom>
-          <a:noFill/>
-          <a:ln/>
-        </p:spPr>
-        <p:txBody>
-          <a:bodyPr wrap="square" lIns="0" tIns="0" rIns="0" bIns="0" rtlCol="0" anchor="t"/>
-          <a:lstStyle/>
-          <a:p>
-            <a:pPr indent="0" marL="0">
-              <a:spcAft>
-                <a:spcPts val="400"/>
-              </a:spcAft>
-              <a:buNone/>
-            </a:pPr>
-            <a:r>
-              <a:rPr lang="en-US" sz="1600" dirty="0">
-                <a:solidFill>
-                  <a:srgbClr val="27303A"/>
-                </a:solidFill>
-              </a:rPr>
-              <a:t>Ab Tag 2: Nach jedem Azure-Auftrag die Ressourcengruppe löschen. Das schont dein Guthaben.</a:t>
-            </a:r>
-            <a:endParaRPr lang="en-US" sz="1600" dirty="0"/>
-          </a:p>
-        </p:txBody>
-      </p:sp>
-      <p:sp>
-        <p:nvSpPr>
-          <p:cNvPr id="25" name="Slide Number Placeholder 0"/>
-          <p:cNvSpPr>
-            <a:spLocks noGrp="1"/>
-          </p:cNvSpPr>
-          <p:nvPr>
-            <p:ph type="sldNum" sz="quarter" idx="4294967295"/>
-          </p:nvPr>
-        </p:nvSpPr>
-        <p:spPr>
-          <a:xfrm>
-            <a:off x="11183112" y="6336792"/>
-            <a:ext cx="457200" cy="365760"/>
-          </a:xfrm>
-          <a:prstGeom prst="rect">
-            <a:avLst/>
-          </a:prstGeom>
-          <a:extLst>
-            <a:ext uri="{C572A759-6A51-4108-AA02-DFA0A04FC94B}">
-              <ma14:wrappingTextBoxFlag xmlns:ma14="http://schemas.microsoft.com/office/mac/drawingml/2011/main" val="0"/>
-            </a:ext>
-          </a:extLst>
-        </p:spPr>
-        <p:txBody>
-          <a:bodyPr/>
-          <a:lstStyle>
-            <a:lvl1pPr>
-              <a:defRPr sz="1000">
-                <a:solidFill>
-                  <a:srgbClr val="6F6F6F"/>
-                </a:solidFill>
-              </a:defRPr>
-            </a:lvl1pPr>
-          </a:lstStyle>
-          <a:p>
-            <a:pPr algn="r"/>
-            <a:fld id="{F7021451-1387-4CA6-816F-3879F97B5CBC}" type="slidenum">
-              <a:rPr b="0" lang="en-US"/>
-              <a:t>4</a:t>
-            </a:fld>
-            <a:endParaRPr lang="en-US"/>
-          </a:p>
-        </p:txBody>
-      </p:sp>
-    </p:spTree>
-  </p:cSld>
-  <p:clrMapOvr>
-    <a:masterClrMapping/>
-  </p:clrMapOvr>
-</p:sld>
-</file>
-
-<file path=ppt/slides/slide5.xml><?xml version="1.0" encoding="utf-8"?>
-<p:sld xmlns:a="http://schemas.openxmlformats.org/drawingml/2006/main" xmlns:r="http://schemas.openxmlformats.org/officeDocument/2006/relationships" xmlns:p="http://schemas.openxmlformats.org/presentationml/2006/main">
-  <p:cSld name="Slide 5">
-    <p:spTree>
-      <p:nvGrpSpPr>
-        <p:cNvPr id="1" name=""/>
-        <p:cNvGrpSpPr/>
-        <p:nvPr/>
-      </p:nvGrpSpPr>
-      <p:grpSpPr>
-        <a:xfrm>
-          <a:off x="0" y="0"/>
-          <a:ext cx="0" cy="0"/>
-          <a:chOff x="0" y="0"/>
-          <a:chExt cx="0" cy="0"/>
-        </a:xfrm>
-      </p:grpSpPr>
-      <p:sp>
-        <p:nvSpPr>
-          <p:cNvPr id="2" name="Text 1"/>
-          <p:cNvSpPr/>
-          <p:nvPr>
-            <p:ph idx="102" type="title" hasCustomPrompt="1"/>
-          </p:nvPr>
-        </p:nvSpPr>
-        <p:spPr>
-          <a:xfrm>
-            <a:off x="548640" y="320040"/>
-            <a:ext cx="11094415" cy="822960"/>
-          </a:xfrm>
-          <a:prstGeom prst="rect">
-            <a:avLst/>
-          </a:prstGeom>
-          <a:noFill/>
-          <a:ln/>
-        </p:spPr>
-        <p:txBody>
-          <a:bodyPr wrap="square" lIns="0" tIns="0" rIns="0" bIns="0" rtlCol="0" anchor="ctr"/>
-          <a:lstStyle/>
-          <a:p>
-            <a:pPr algn="l" indent="0" marL="0">
-              <a:buNone/>
-            </a:pPr>
-            <a:r>
-              <a:rPr lang="en-US" sz="3400" b="1" dirty="0">
-                <a:solidFill>
-                  <a:srgbClr val="27303A"/>
-                </a:solidFill>
-              </a:rPr>
-              <a:t>Was weisst du schon?</a:t>
-            </a:r>
-            <a:endParaRPr lang="en-US" sz="3400" dirty="0"/>
-          </a:p>
-        </p:txBody>
-      </p:sp>
-      <p:sp>
-        <p:nvSpPr>
-          <p:cNvPr id="3" name="icon-kreis-FaServer"/>
-          <p:cNvSpPr/>
-          <p:nvPr/>
-        </p:nvSpPr>
-        <p:spPr>
-          <a:xfrm>
-            <a:off x="548640" y="2446020"/>
-            <a:ext cx="548640" cy="548640"/>
-          </a:xfrm>
-          <a:prstGeom prst="ellipse">
-            <a:avLst/>
-          </a:prstGeom>
-          <a:solidFill>
-            <a:srgbClr val="006FAD"/>
-          </a:solidFill>
-          <a:ln w="12700">
-            <a:solidFill>
-              <a:srgbClr val="006FAD"/>
-            </a:solidFill>
-            <a:prstDash val="solid"/>
-          </a:ln>
-        </p:spPr>
-      </p:sp>
-      <p:pic>
-        <p:nvPicPr>
-          <p:cNvPr id="4" name="icon-FaServer" descr="C:\Users\Thanam\AppData\Local\Temp\claude\c--Projekt-Trainings-azure-basics-training\a9e0bf4e-0d08-4082-a38a-5b8886538508\scratchpad\pptx\assets\icons\FaServer.png">    </p:cNvPr>
-          <p:cNvPicPr>
-            <a:picLocks noChangeAspect="1"/>
-          </p:cNvPicPr>
-          <p:nvPr/>
-        </p:nvPicPr>
-        <p:blipFill>
-          <a:blip r:embed="rId1"/>
-          <a:stretch>
-            <a:fillRect/>
-          </a:stretch>
-        </p:blipFill>
-        <p:spPr>
-          <a:xfrm>
-            <a:off x="680314" y="2577694"/>
-            <a:ext cx="285293" cy="285293"/>
-          </a:xfrm>
-          <a:prstGeom prst="rect">
-            <a:avLst/>
-          </a:prstGeom>
-        </p:spPr>
-      </p:pic>
-      <p:sp>
-        <p:nvSpPr>
-          <p:cNvPr id="5" name="Text 2"/>
-          <p:cNvSpPr txBox="1"/>
-          <p:nvPr/>
-        </p:nvSpPr>
-        <p:spPr>
-          <a:xfrm>
-            <a:off x="1325880" y="2240280"/>
-            <a:ext cx="10317175" cy="960120"/>
-          </a:xfrm>
-          <a:prstGeom prst="rect">
-            <a:avLst/>
-          </a:prstGeom>
-          <a:noFill/>
-          <a:ln/>
-        </p:spPr>
-        <p:txBody>
-          <a:bodyPr wrap="square" lIns="0" tIns="0" rIns="0" bIns="0" rtlCol="0" anchor="ctr"/>
-          <a:lstStyle/>
-          <a:p>
-            <a:pPr indent="0" marL="0">
-              <a:buNone/>
-            </a:pPr>
-            <a:r>
-              <a:rPr lang="en-US" sz="1800" b="1" dirty="0">
-                <a:solidFill>
-                  <a:srgbClr val="27303A"/>
-                </a:solidFill>
-              </a:rPr>
-              <a:t>Wer hat schon eine virtuelle Maschine benutzt?</a:t>
-            </a:r>
-            <a:endParaRPr lang="en-US" sz="1800" dirty="0"/>
-          </a:p>
-          <a:p>
-            <a:pPr indent="0" marL="0">
-              <a:buNone/>
-            </a:pPr>
-            <a:r>
-              <a:rPr lang="en-US" sz="1800" dirty="0">
-                <a:solidFill>
-                  <a:srgbClr val="6F6F6F"/>
-                </a:solidFill>
-              </a:rPr>
-              <a:t>Mit welchem Programm? Wofür?</a:t>
-            </a:r>
-            <a:endParaRPr lang="en-US" sz="1800" dirty="0"/>
-          </a:p>
-        </p:txBody>
-      </p:sp>
-      <p:sp>
-        <p:nvSpPr>
-          <p:cNvPr id="6" name="icon-kreis-FaBuilding"/>
-          <p:cNvSpPr/>
-          <p:nvPr/>
-        </p:nvSpPr>
-        <p:spPr>
-          <a:xfrm>
-            <a:off x="548640" y="3406140"/>
-            <a:ext cx="548640" cy="548640"/>
-          </a:xfrm>
-          <a:prstGeom prst="ellipse">
-            <a:avLst/>
-          </a:prstGeom>
-          <a:solidFill>
-            <a:srgbClr val="006FAD"/>
-          </a:solidFill>
-          <a:ln w="12700">
-            <a:solidFill>
-              <a:srgbClr val="006FAD"/>
-            </a:solidFill>
-            <a:prstDash val="solid"/>
-          </a:ln>
-        </p:spPr>
-      </p:sp>
-      <p:pic>
-        <p:nvPicPr>
-          <p:cNvPr id="7" name="icon-FaBuilding" descr="C:\Users\Thanam\AppData\Local\Temp\claude\c--Projekt-Trainings-azure-basics-training\a9e0bf4e-0d08-4082-a38a-5b8886538508\scratchpad\pptx\assets\icons\FaBuilding.png">    </p:cNvPr>
-          <p:cNvPicPr>
-            <a:picLocks noChangeAspect="1"/>
-          </p:cNvPicPr>
-          <p:nvPr/>
-        </p:nvPicPr>
-        <p:blipFill>
-          <a:blip r:embed="rId2"/>
-          <a:stretch>
-            <a:fillRect/>
-          </a:stretch>
-        </p:blipFill>
-        <p:spPr>
-          <a:xfrm>
-            <a:off x="680314" y="3537814"/>
-            <a:ext cx="285293" cy="285293"/>
-          </a:xfrm>
-          <a:prstGeom prst="rect">
-            <a:avLst/>
-          </a:prstGeom>
-        </p:spPr>
-      </p:pic>
-      <p:sp>
-        <p:nvSpPr>
-          <p:cNvPr id="8" name="Text 4"/>
-          <p:cNvSpPr txBox="1"/>
-          <p:nvPr/>
-        </p:nvSpPr>
-        <p:spPr>
-          <a:xfrm>
-            <a:off x="1325880" y="3200400"/>
-            <a:ext cx="10317175" cy="960120"/>
-          </a:xfrm>
-          <a:prstGeom prst="rect">
-            <a:avLst/>
-          </a:prstGeom>
-          <a:noFill/>
-          <a:ln/>
-        </p:spPr>
-        <p:txBody>
-          <a:bodyPr wrap="square" lIns="0" tIns="0" rIns="0" bIns="0" rtlCol="0" anchor="ctr"/>
-          <a:lstStyle/>
-          <a:p>
-            <a:pPr indent="0" marL="0">
-              <a:buNone/>
-            </a:pPr>
-            <a:r>
-              <a:rPr lang="en-US" sz="1800" b="1" dirty="0">
-                <a:solidFill>
-                  <a:srgbClr val="27303A"/>
-                </a:solidFill>
-              </a:rPr>
-              <a:t>Wo laufen VMs in deinem Lehrbetrieb?</a:t>
-            </a:r>
-            <a:endParaRPr lang="en-US" sz="1800" dirty="0"/>
-          </a:p>
-          <a:p>
-            <a:pPr indent="0" marL="0">
-              <a:buNone/>
-            </a:pPr>
-            <a:r>
-              <a:rPr lang="en-US" sz="1800" dirty="0">
-                <a:solidFill>
-                  <a:srgbClr val="6F6F6F"/>
-                </a:solidFill>
-              </a:rPr>
-              <a:t>Server im Keller, Rechenzentrum, Cloud?</a:t>
-            </a:r>
-            <a:endParaRPr lang="en-US" sz="1800" dirty="0"/>
-          </a:p>
-        </p:txBody>
-      </p:sp>
-      <p:sp>
-        <p:nvSpPr>
-          <p:cNvPr id="9" name="icon-kreis-FaDocker"/>
-          <p:cNvSpPr/>
-          <p:nvPr/>
-        </p:nvSpPr>
-        <p:spPr>
-          <a:xfrm>
-            <a:off x="548640" y="4366260"/>
-            <a:ext cx="548640" cy="548640"/>
-          </a:xfrm>
-          <a:prstGeom prst="ellipse">
-            <a:avLst/>
-          </a:prstGeom>
-          <a:solidFill>
-            <a:srgbClr val="006FAD"/>
-          </a:solidFill>
-          <a:ln w="12700">
-            <a:solidFill>
-              <a:srgbClr val="006FAD"/>
-            </a:solidFill>
-            <a:prstDash val="solid"/>
-          </a:ln>
-        </p:spPr>
-      </p:sp>
-      <p:pic>
-        <p:nvPicPr>
-          <p:cNvPr id="10" name="icon-FaDocker" descr="C:\Users\Thanam\AppData\Local\Temp\claude\c--Projekt-Trainings-azure-basics-training\a9e0bf4e-0d08-4082-a38a-5b8886538508\scratchpad\pptx\assets\icons\FaDocker.png">    </p:cNvPr>
-          <p:cNvPicPr>
-            <a:picLocks noChangeAspect="1"/>
-          </p:cNvPicPr>
-          <p:nvPr/>
-        </p:nvPicPr>
-        <p:blipFill>
-          <a:blip r:embed="rId3"/>
-          <a:stretch>
-            <a:fillRect/>
-          </a:stretch>
-        </p:blipFill>
-        <p:spPr>
-          <a:xfrm>
-            <a:off x="680314" y="4497934"/>
-            <a:ext cx="285293" cy="285293"/>
-          </a:xfrm>
-          <a:prstGeom prst="rect">
-            <a:avLst/>
-          </a:prstGeom>
-        </p:spPr>
-      </p:pic>
-      <p:sp>
-        <p:nvSpPr>
-          <p:cNvPr id="11" name="Text 6"/>
-          <p:cNvSpPr txBox="1"/>
-          <p:nvPr/>
-        </p:nvSpPr>
-        <p:spPr>
-          <a:xfrm>
-            <a:off x="1325880" y="4160520"/>
-            <a:ext cx="10317175" cy="960120"/>
-          </a:xfrm>
-          <a:prstGeom prst="rect">
-            <a:avLst/>
-          </a:prstGeom>
-          <a:noFill/>
-          <a:ln/>
-        </p:spPr>
-        <p:txBody>
-          <a:bodyPr wrap="square" lIns="0" tIns="0" rIns="0" bIns="0" rtlCol="0" anchor="ctr"/>
-          <a:lstStyle/>
-          <a:p>
-            <a:pPr indent="0" marL="0">
-              <a:buNone/>
-            </a:pPr>
-            <a:r>
-              <a:rPr lang="en-US" sz="1800" b="1" dirty="0">
-                <a:solidFill>
-                  <a:srgbClr val="27303A"/>
-                </a:solidFill>
-              </a:rPr>
-              <a:t>Wer kennt Docker?</a:t>
-            </a:r>
-            <a:endParaRPr lang="en-US" sz="1800" dirty="0"/>
-          </a:p>
-          <a:p>
-            <a:pPr indent="0" marL="0">
-              <a:buNone/>
-            </a:pPr>
-            <a:r>
-              <a:rPr lang="en-US" sz="1800" dirty="0">
-                <a:solidFill>
-                  <a:srgbClr val="6F6F6F"/>
-                </a:solidFill>
-              </a:rPr>
-              <a:t>Was ist der Unterschied zu einer VM? Eine Vermutung reicht.</a:t>
-            </a:r>
-            <a:endParaRPr lang="en-US" sz="1800" dirty="0"/>
-          </a:p>
-        </p:txBody>
-      </p:sp>
-      <p:sp>
-        <p:nvSpPr>
-          <p:cNvPr id="25" name="Slide Number Placeholder 0"/>
-          <p:cNvSpPr>
-            <a:spLocks noGrp="1"/>
-          </p:cNvSpPr>
-          <p:nvPr>
-            <p:ph type="sldNum" sz="quarter" idx="4294967295"/>
-          </p:nvPr>
-        </p:nvSpPr>
-        <p:spPr>
-          <a:xfrm>
-            <a:off x="11183112" y="6336792"/>
-            <a:ext cx="457200" cy="365760"/>
-          </a:xfrm>
-          <a:prstGeom prst="rect">
-            <a:avLst/>
-          </a:prstGeom>
-          <a:extLst>
-            <a:ext uri="{C572A759-6A51-4108-AA02-DFA0A04FC94B}">
-              <ma14:wrappingTextBoxFlag xmlns:ma14="http://schemas.microsoft.com/office/mac/drawingml/2011/main" val="0"/>
-            </a:ext>
-          </a:extLst>
-        </p:spPr>
-        <p:txBody>
-          <a:bodyPr/>
-          <a:lstStyle>
-            <a:lvl1pPr>
-              <a:defRPr sz="1000">
-                <a:solidFill>
-                  <a:srgbClr val="6F6F6F"/>
-                </a:solidFill>
-              </a:defRPr>
-            </a:lvl1pPr>
-          </a:lstStyle>
-          <a:p>
-            <a:pPr algn="r"/>
-            <a:fld id="{F7021451-1387-4CA6-816F-3879F97B5CBC}" type="slidenum">
-              <a:rPr b="0" lang="en-US"/>
-              <a:t>5</a:t>
-            </a:fld>
-            <a:endParaRPr lang="en-US"/>
-          </a:p>
-        </p:txBody>
-      </p:sp>
-    </p:spTree>
-  </p:cSld>
-  <p:clrMapOvr>
-    <a:masterClrMapping/>
-  </p:clrMapOvr>
-</p:sld>
-</file>
-
-<file path=ppt/slides/slide6.xml><?xml version="1.0" encoding="utf-8"?>
-<p:sld xmlns:a="http://schemas.openxmlformats.org/drawingml/2006/main" xmlns:r="http://schemas.openxmlformats.org/officeDocument/2006/relationships" xmlns:p="http://schemas.openxmlformats.org/presentationml/2006/main">
-  <p:cSld name="Slide 6">
-    <p:spTree>
-      <p:nvGrpSpPr>
-        <p:cNvPr id="1" name=""/>
-        <p:cNvGrpSpPr/>
-        <p:nvPr/>
-      </p:nvGrpSpPr>
-      <p:grpSpPr>
-        <a:xfrm>
-          <a:off x="0" y="0"/>
-          <a:ext cx="0" cy="0"/>
-          <a:chOff x="0" y="0"/>
-          <a:chExt cx="0" cy="0"/>
-        </a:xfrm>
-      </p:grpSpPr>
-      <p:sp>
-        <p:nvSpPr>
-          <p:cNvPr id="2" name="Text 1"/>
-          <p:cNvSpPr/>
-          <p:nvPr>
-            <p:ph idx="102" type="title" hasCustomPrompt="1"/>
-          </p:nvPr>
-        </p:nvSpPr>
-        <p:spPr>
-          <a:xfrm>
-            <a:off x="548640" y="320040"/>
-            <a:ext cx="11094415" cy="822960"/>
-          </a:xfrm>
-          <a:prstGeom prst="rect">
-            <a:avLst/>
-          </a:prstGeom>
-          <a:noFill/>
-          <a:ln/>
-        </p:spPr>
-        <p:txBody>
-          <a:bodyPr wrap="square" lIns="0" tIns="0" rIns="0" bIns="0" rtlCol="0" anchor="ctr"/>
-          <a:lstStyle/>
-          <a:p>
-            <a:pPr algn="l" indent="0" marL="0">
-              <a:buNone/>
-            </a:pPr>
-            <a:r>
-              <a:rPr lang="en-US" sz="3400" b="1" dirty="0">
-                <a:solidFill>
-                  <a:srgbClr val="27303A"/>
-                </a:solidFill>
-              </a:rPr>
-              <a:t>Deine Ziele heute</a:t>
-            </a:r>
-            <a:endParaRPr lang="en-US" sz="3400" dirty="0"/>
-          </a:p>
-        </p:txBody>
-      </p:sp>
-      <p:sp>
-        <p:nvSpPr>
-          <p:cNvPr id="3" name="karte"/>
-          <p:cNvSpPr/>
-          <p:nvPr/>
-        </p:nvSpPr>
-        <p:spPr>
-          <a:xfrm>
-            <a:off x="548640" y="1325880"/>
-            <a:ext cx="3515258" cy="2217420"/>
-          </a:xfrm>
-          <a:prstGeom prst="roundRect">
-            <a:avLst>
-              <a:gd name="adj" fmla="val 4948"/>
-            </a:avLst>
-          </a:prstGeom>
-          <a:solidFill>
-            <a:srgbClr val="F7F7F7"/>
-          </a:solidFill>
-          <a:ln w="12700">
-            <a:solidFill>
-              <a:srgbClr val="F7F7F7"/>
-            </a:solidFill>
-            <a:prstDash val="solid"/>
-          </a:ln>
-        </p:spPr>
-      </p:sp>
-      <p:sp>
-        <p:nvSpPr>
-          <p:cNvPr id="4" name="icon-kreis-FaLayerGroup"/>
-          <p:cNvSpPr/>
-          <p:nvPr/>
-        </p:nvSpPr>
-        <p:spPr>
-          <a:xfrm>
-            <a:off x="822960" y="1600200"/>
-            <a:ext cx="640080" cy="640080"/>
-          </a:xfrm>
-          <a:prstGeom prst="ellipse">
-            <a:avLst/>
-          </a:prstGeom>
-          <a:solidFill>
-            <a:srgbClr val="006FAD"/>
-          </a:solidFill>
-          <a:ln w="12700">
-            <a:solidFill>
-              <a:srgbClr val="006FAD"/>
-            </a:solidFill>
-            <a:prstDash val="solid"/>
-          </a:ln>
-        </p:spPr>
-      </p:sp>
-      <p:pic>
-        <p:nvPicPr>
-          <p:cNvPr id="5" name="icon-FaLayerGroup" descr="C:\Users\Thanam\AppData\Local\Temp\claude\c--Projekt-Trainings-azure-basics-training\a9e0bf4e-0d08-4082-a38a-5b8886538508\scratchpad\pptx\assets\icons\FaLayerGroup.png">    </p:cNvPr>
-          <p:cNvPicPr>
-            <a:picLocks noChangeAspect="1"/>
-          </p:cNvPicPr>
-          <p:nvPr/>
-        </p:nvPicPr>
-        <p:blipFill>
-          <a:blip r:embed="rId1"/>
-          <a:stretch>
-            <a:fillRect/>
-          </a:stretch>
-        </p:blipFill>
-        <p:spPr>
-          <a:xfrm>
-            <a:off x="976579" y="1753819"/>
-            <a:ext cx="332842" cy="332842"/>
-          </a:xfrm>
-          <a:prstGeom prst="rect">
-            <a:avLst/>
-          </a:prstGeom>
-        </p:spPr>
-      </p:pic>
-      <p:sp>
-        <p:nvSpPr>
-          <p:cNvPr id="6" name="Text 3"/>
-          <p:cNvSpPr txBox="1"/>
-          <p:nvPr/>
-        </p:nvSpPr>
-        <p:spPr>
-          <a:xfrm>
-            <a:off x="1645920" y="1600200"/>
-            <a:ext cx="2189378" cy="640080"/>
-          </a:xfrm>
-          <a:prstGeom prst="rect">
-            <a:avLst/>
-          </a:prstGeom>
-          <a:noFill/>
-          <a:ln/>
-        </p:spPr>
-        <p:txBody>
-          <a:bodyPr wrap="square" lIns="0" tIns="0" rIns="0" bIns="0" rtlCol="0" anchor="ctr">
-            <a:normAutofit/>
-          </a:bodyPr>
-          <a:lstStyle/>
-          <a:p>
-            <a:pPr indent="0" marL="0">
-              <a:buNone/>
-            </a:pPr>
-            <a:r>
-              <a:rPr lang="en-US" sz="2000" b="1" dirty="0">
-                <a:solidFill>
-                  <a:srgbClr val="27303A"/>
-                </a:solidFill>
-              </a:rPr>
-              <a:t>Hypervisor (K2)</a:t>
-            </a:r>
-            <a:endParaRPr lang="en-US" sz="2000" dirty="0"/>
-          </a:p>
-        </p:txBody>
-      </p:sp>
-      <p:sp>
-        <p:nvSpPr>
-          <p:cNvPr id="7" name="Text 4"/>
-          <p:cNvSpPr txBox="1"/>
-          <p:nvPr/>
-        </p:nvSpPr>
-        <p:spPr>
-          <a:xfrm>
-            <a:off x="822960" y="2423160"/>
-            <a:ext cx="2966618" cy="982980"/>
-          </a:xfrm>
-          <a:prstGeom prst="rect">
-            <a:avLst/>
-          </a:prstGeom>
-          <a:noFill/>
-          <a:ln/>
-        </p:spPr>
-        <p:txBody>
-          <a:bodyPr wrap="square" lIns="0" tIns="0" rIns="0" bIns="0" rtlCol="0" anchor="t"/>
-          <a:lstStyle/>
-          <a:p>
-            <a:pPr indent="0" marL="0">
-              <a:spcAft>
-                <a:spcPts val="400"/>
-              </a:spcAft>
-              <a:buNone/>
-            </a:pPr>
-            <a:r>
-              <a:rPr lang="en-US" sz="1600" dirty="0">
-                <a:solidFill>
-                  <a:srgbClr val="27303A"/>
-                </a:solidFill>
-              </a:rPr>
-              <a:t>Du erklärst, was ein Hypervisor macht, und ordnest Typ 1 und Typ 2 zu.</a:t>
-            </a:r>
-            <a:endParaRPr lang="en-US" sz="1600" dirty="0"/>
-          </a:p>
-        </p:txBody>
-      </p:sp>
-      <p:sp>
-        <p:nvSpPr>
-          <p:cNvPr id="8" name="karte"/>
-          <p:cNvSpPr/>
-          <p:nvPr/>
-        </p:nvSpPr>
-        <p:spPr>
-          <a:xfrm>
-            <a:off x="4338218" y="1325880"/>
-            <a:ext cx="3515258" cy="2217420"/>
-          </a:xfrm>
-          <a:prstGeom prst="roundRect">
-            <a:avLst>
-              <a:gd name="adj" fmla="val 4948"/>
-            </a:avLst>
-          </a:prstGeom>
-          <a:solidFill>
-            <a:srgbClr val="F7F7F7"/>
-          </a:solidFill>
-          <a:ln w="12700">
-            <a:solidFill>
-              <a:srgbClr val="F7F7F7"/>
-            </a:solidFill>
-            <a:prstDash val="solid"/>
-          </a:ln>
-        </p:spPr>
-      </p:sp>
-      <p:sp>
-        <p:nvSpPr>
-          <p:cNvPr id="9" name="icon-kreis-FaServer"/>
-          <p:cNvSpPr/>
-          <p:nvPr/>
-        </p:nvSpPr>
-        <p:spPr>
-          <a:xfrm>
-            <a:off x="4612538" y="1600200"/>
-            <a:ext cx="640080" cy="640080"/>
-          </a:xfrm>
-          <a:prstGeom prst="ellipse">
-            <a:avLst/>
-          </a:prstGeom>
-          <a:solidFill>
-            <a:srgbClr val="006FAD"/>
-          </a:solidFill>
-          <a:ln w="12700">
-            <a:solidFill>
-              <a:srgbClr val="006FAD"/>
-            </a:solidFill>
-            <a:prstDash val="solid"/>
-          </a:ln>
-        </p:spPr>
-      </p:sp>
-      <p:pic>
-        <p:nvPicPr>
-          <p:cNvPr id="10" name="icon-FaServer" descr="C:\Users\Thanam\AppData\Local\Temp\claude\c--Projekt-Trainings-azure-basics-training\a9e0bf4e-0d08-4082-a38a-5b8886538508\scratchpad\pptx\assets\icons\FaServer.png">    </p:cNvPr>
-          <p:cNvPicPr>
-            <a:picLocks noChangeAspect="1"/>
-          </p:cNvPicPr>
-          <p:nvPr/>
-        </p:nvPicPr>
-        <p:blipFill>
-          <a:blip r:embed="rId2"/>
-          <a:stretch>
-            <a:fillRect/>
-          </a:stretch>
-        </p:blipFill>
-        <p:spPr>
-          <a:xfrm>
-            <a:off x="4766158" y="1753819"/>
-            <a:ext cx="332842" cy="332842"/>
-          </a:xfrm>
-          <a:prstGeom prst="rect">
-            <a:avLst/>
-          </a:prstGeom>
-        </p:spPr>
-      </p:pic>
-      <p:sp>
-        <p:nvSpPr>
-          <p:cNvPr id="11" name="Text 7"/>
-          <p:cNvSpPr txBox="1"/>
-          <p:nvPr/>
-        </p:nvSpPr>
-        <p:spPr>
-          <a:xfrm>
-            <a:off x="5435498" y="1600200"/>
-            <a:ext cx="2189378" cy="640080"/>
-          </a:xfrm>
-          <a:prstGeom prst="rect">
-            <a:avLst/>
-          </a:prstGeom>
-          <a:noFill/>
-          <a:ln/>
-        </p:spPr>
-        <p:txBody>
-          <a:bodyPr wrap="square" lIns="0" tIns="0" rIns="0" bIns="0" rtlCol="0" anchor="ctr">
-            <a:normAutofit/>
-          </a:bodyPr>
-          <a:lstStyle/>
-          <a:p>
-            <a:pPr indent="0" marL="0">
-              <a:buNone/>
-            </a:pPr>
-            <a:r>
-              <a:rPr lang="en-US" sz="2000" b="1" dirty="0">
-                <a:solidFill>
-                  <a:srgbClr val="27303A"/>
-                </a:solidFill>
-              </a:rPr>
-              <a:t>VMs mit Multipass (K3)</a:t>
-            </a:r>
-            <a:endParaRPr lang="en-US" sz="2000" dirty="0"/>
-          </a:p>
-        </p:txBody>
-      </p:sp>
-      <p:sp>
-        <p:nvSpPr>
-          <p:cNvPr id="12" name="Text 8"/>
-          <p:cNvSpPr txBox="1"/>
-          <p:nvPr/>
-        </p:nvSpPr>
-        <p:spPr>
-          <a:xfrm>
-            <a:off x="4612538" y="2423160"/>
-            <a:ext cx="2966618" cy="982980"/>
-          </a:xfrm>
-          <a:prstGeom prst="rect">
-            <a:avLst/>
-          </a:prstGeom>
-          <a:noFill/>
-          <a:ln/>
-        </p:spPr>
-        <p:txBody>
-          <a:bodyPr wrap="square" lIns="0" tIns="0" rIns="0" bIns="0" rtlCol="0" anchor="t"/>
-          <a:lstStyle/>
-          <a:p>
-            <a:pPr indent="0" marL="0">
-              <a:spcAft>
-                <a:spcPts val="400"/>
-              </a:spcAft>
-              <a:buNone/>
-            </a:pPr>
-            <a:r>
-              <a:rPr lang="en-US" sz="1600" dirty="0">
-                <a:solidFill>
-                  <a:srgbClr val="27303A"/>
-                </a:solidFill>
-              </a:rPr>
-              <a:t>Du erstellst, startest, stoppst und löschst VMs.</a:t>
-            </a:r>
-            <a:endParaRPr lang="en-US" sz="1600" dirty="0"/>
-          </a:p>
-        </p:txBody>
-      </p:sp>
-      <p:sp>
-        <p:nvSpPr>
-          <p:cNvPr id="13" name="karte"/>
-          <p:cNvSpPr/>
-          <p:nvPr/>
-        </p:nvSpPr>
-        <p:spPr>
-          <a:xfrm>
-            <a:off x="8127797" y="1325880"/>
-            <a:ext cx="3515258" cy="2217420"/>
-          </a:xfrm>
-          <a:prstGeom prst="roundRect">
-            <a:avLst>
-              <a:gd name="adj" fmla="val 4948"/>
-            </a:avLst>
-          </a:prstGeom>
-          <a:solidFill>
-            <a:srgbClr val="F7F7F7"/>
-          </a:solidFill>
-          <a:ln w="12700">
-            <a:solidFill>
-              <a:srgbClr val="F7F7F7"/>
-            </a:solidFill>
-            <a:prstDash val="solid"/>
-          </a:ln>
-        </p:spPr>
-      </p:sp>
-      <p:sp>
-        <p:nvSpPr>
-          <p:cNvPr id="14" name="icon-kreis-FaMemory"/>
-          <p:cNvSpPr/>
-          <p:nvPr/>
-        </p:nvSpPr>
-        <p:spPr>
-          <a:xfrm>
-            <a:off x="8402117" y="1600200"/>
-            <a:ext cx="640080" cy="640080"/>
-          </a:xfrm>
-          <a:prstGeom prst="ellipse">
-            <a:avLst/>
-          </a:prstGeom>
-          <a:solidFill>
-            <a:srgbClr val="006FAD"/>
-          </a:solidFill>
-          <a:ln w="12700">
-            <a:solidFill>
-              <a:srgbClr val="006FAD"/>
-            </a:solidFill>
-            <a:prstDash val="solid"/>
-          </a:ln>
-        </p:spPr>
-      </p:sp>
-      <p:pic>
-        <p:nvPicPr>
-          <p:cNvPr id="15" name="icon-FaMemory" descr="C:\Users\Thanam\AppData\Local\Temp\claude\c--Projekt-Trainings-azure-basics-training\a9e0bf4e-0d08-4082-a38a-5b8886538508\scratchpad\pptx\assets\icons\FaMemory.png">    </p:cNvPr>
-          <p:cNvPicPr>
-            <a:picLocks noChangeAspect="1"/>
-          </p:cNvPicPr>
-          <p:nvPr/>
-        </p:nvPicPr>
-        <p:blipFill>
-          <a:blip r:embed="rId3"/>
-          <a:stretch>
-            <a:fillRect/>
-          </a:stretch>
-        </p:blipFill>
-        <p:spPr>
-          <a:xfrm>
-            <a:off x="8555736" y="1753819"/>
-            <a:ext cx="332842" cy="332842"/>
-          </a:xfrm>
-          <a:prstGeom prst="rect">
-            <a:avLst/>
-          </a:prstGeom>
-        </p:spPr>
-      </p:pic>
-      <p:sp>
-        <p:nvSpPr>
-          <p:cNvPr id="16" name="Text 11"/>
-          <p:cNvSpPr txBox="1"/>
-          <p:nvPr/>
-        </p:nvSpPr>
-        <p:spPr>
-          <a:xfrm>
-            <a:off x="9225077" y="1600200"/>
-            <a:ext cx="2189378" cy="640080"/>
-          </a:xfrm>
-          <a:prstGeom prst="rect">
-            <a:avLst/>
-          </a:prstGeom>
-          <a:noFill/>
-          <a:ln/>
-        </p:spPr>
-        <p:txBody>
-          <a:bodyPr wrap="square" lIns="0" tIns="0" rIns="0" bIns="0" rtlCol="0" anchor="ctr">
-            <a:normAutofit/>
-          </a:bodyPr>
-          <a:lstStyle/>
-          <a:p>
-            <a:pPr indent="0" marL="0">
-              <a:buNone/>
-            </a:pPr>
-            <a:r>
-              <a:rPr lang="en-US" sz="2000" b="1" dirty="0">
-                <a:solidFill>
-                  <a:srgbClr val="27303A"/>
-                </a:solidFill>
-              </a:rPr>
-              <a:t>Ressourcen (K3)</a:t>
-            </a:r>
-            <a:endParaRPr lang="en-US" sz="2000" dirty="0"/>
-          </a:p>
-        </p:txBody>
-      </p:sp>
-      <p:sp>
-        <p:nvSpPr>
-          <p:cNvPr id="17" name="Text 12"/>
-          <p:cNvSpPr txBox="1"/>
-          <p:nvPr/>
-        </p:nvSpPr>
-        <p:spPr>
-          <a:xfrm>
-            <a:off x="8402117" y="2423160"/>
-            <a:ext cx="2966618" cy="982980"/>
-          </a:xfrm>
-          <a:prstGeom prst="rect">
-            <a:avLst/>
-          </a:prstGeom>
-          <a:noFill/>
-          <a:ln/>
-        </p:spPr>
-        <p:txBody>
-          <a:bodyPr wrap="square" lIns="0" tIns="0" rIns="0" bIns="0" rtlCol="0" anchor="t"/>
-          <a:lstStyle/>
-          <a:p>
-            <a:pPr indent="0" marL="0">
-              <a:spcAft>
-                <a:spcPts val="400"/>
-              </a:spcAft>
-              <a:buNone/>
-            </a:pPr>
-            <a:r>
-              <a:rPr lang="en-US" sz="1600" dirty="0">
-                <a:solidFill>
-                  <a:srgbClr val="27303A"/>
-                </a:solidFill>
-              </a:rPr>
-              <a:t>Du gibst einer VM CPU, RAM und Festplatte und prüfst es.</a:t>
-            </a:r>
-            <a:endParaRPr lang="en-US" sz="1600" dirty="0"/>
-          </a:p>
-        </p:txBody>
-      </p:sp>
-      <p:sp>
-        <p:nvSpPr>
-          <p:cNvPr id="18" name="karte"/>
-          <p:cNvSpPr/>
-          <p:nvPr/>
-        </p:nvSpPr>
-        <p:spPr>
-          <a:xfrm>
-            <a:off x="548640" y="3817620"/>
-            <a:ext cx="3515258" cy="2217420"/>
-          </a:xfrm>
-          <a:prstGeom prst="roundRect">
-            <a:avLst>
-              <a:gd name="adj" fmla="val 4948"/>
-            </a:avLst>
-          </a:prstGeom>
-          <a:solidFill>
-            <a:srgbClr val="F7F7F7"/>
-          </a:solidFill>
-          <a:ln w="12700">
-            <a:solidFill>
-              <a:srgbClr val="F7F7F7"/>
-            </a:solidFill>
-            <a:prstDash val="solid"/>
-          </a:ln>
-        </p:spPr>
-      </p:sp>
-      <p:sp>
-        <p:nvSpPr>
-          <p:cNvPr id="19" name="icon-kreis-FaRocket"/>
-          <p:cNvSpPr/>
-          <p:nvPr/>
-        </p:nvSpPr>
-        <p:spPr>
-          <a:xfrm>
-            <a:off x="822960" y="4091940"/>
-            <a:ext cx="640080" cy="640080"/>
-          </a:xfrm>
-          <a:prstGeom prst="ellipse">
-            <a:avLst/>
-          </a:prstGeom>
-          <a:solidFill>
-            <a:srgbClr val="006FAD"/>
-          </a:solidFill>
-          <a:ln w="12700">
-            <a:solidFill>
-              <a:srgbClr val="006FAD"/>
-            </a:solidFill>
-            <a:prstDash val="solid"/>
-          </a:ln>
-        </p:spPr>
-      </p:sp>
-      <p:pic>
-        <p:nvPicPr>
-          <p:cNvPr id="20" name="icon-FaRocket" descr="C:\Users\Thanam\AppData\Local\Temp\claude\c--Projekt-Trainings-azure-basics-training\a9e0bf4e-0d08-4082-a38a-5b8886538508\scratchpad\pptx\assets\icons\FaRocket.png">    </p:cNvPr>
-          <p:cNvPicPr>
-            <a:picLocks noChangeAspect="1"/>
-          </p:cNvPicPr>
-          <p:nvPr/>
-        </p:nvPicPr>
-        <p:blipFill>
-          <a:blip r:embed="rId4"/>
-          <a:stretch>
-            <a:fillRect/>
-          </a:stretch>
-        </p:blipFill>
-        <p:spPr>
-          <a:xfrm>
-            <a:off x="976579" y="4245559"/>
-            <a:ext cx="332842" cy="332842"/>
-          </a:xfrm>
-          <a:prstGeom prst="rect">
-            <a:avLst/>
-          </a:prstGeom>
-        </p:spPr>
-      </p:pic>
-      <p:sp>
-        <p:nvSpPr>
-          <p:cNvPr id="21" name="Text 15"/>
-          <p:cNvSpPr txBox="1"/>
-          <p:nvPr/>
-        </p:nvSpPr>
-        <p:spPr>
-          <a:xfrm>
-            <a:off x="1645920" y="4091940"/>
-            <a:ext cx="2189378" cy="640080"/>
-          </a:xfrm>
-          <a:prstGeom prst="rect">
-            <a:avLst/>
-          </a:prstGeom>
-          <a:noFill/>
-          <a:ln/>
-        </p:spPr>
-        <p:txBody>
-          <a:bodyPr wrap="square" lIns="0" tIns="0" rIns="0" bIns="0" rtlCol="0" anchor="ctr">
-            <a:normAutofit/>
-          </a:bodyPr>
-          <a:lstStyle/>
-          <a:p>
-            <a:pPr indent="0" marL="0">
-              <a:buNone/>
-            </a:pPr>
-            <a:r>
-              <a:rPr lang="en-US" sz="2000" b="1" dirty="0">
-                <a:solidFill>
-                  <a:srgbClr val="27303A"/>
-                </a:solidFill>
-              </a:rPr>
-              <a:t>cloud-init (K3)</a:t>
-            </a:r>
-            <a:endParaRPr lang="en-US" sz="2000" dirty="0"/>
-          </a:p>
-        </p:txBody>
-      </p:sp>
-      <p:sp>
-        <p:nvSpPr>
-          <p:cNvPr id="22" name="Text 16"/>
-          <p:cNvSpPr txBox="1"/>
-          <p:nvPr/>
-        </p:nvSpPr>
-        <p:spPr>
-          <a:xfrm>
-            <a:off x="822960" y="4914900"/>
-            <a:ext cx="2966618" cy="982980"/>
-          </a:xfrm>
-          <a:prstGeom prst="rect">
-            <a:avLst/>
-          </a:prstGeom>
-          <a:noFill/>
-          <a:ln/>
-        </p:spPr>
-        <p:txBody>
-          <a:bodyPr wrap="square" lIns="0" tIns="0" rIns="0" bIns="0" rtlCol="0" anchor="t"/>
-          <a:lstStyle/>
-          <a:p>
-            <a:pPr indent="0" marL="0">
-              <a:spcAft>
-                <a:spcPts val="400"/>
-              </a:spcAft>
-              <a:buNone/>
-            </a:pPr>
-            <a:r>
-              <a:rPr lang="en-US" sz="1600" dirty="0">
-                <a:solidFill>
-                  <a:srgbClr val="27303A"/>
-                </a:solidFill>
-              </a:rPr>
-              <a:t>Du richtest eine VM automatisch mit einer Datei ein.</a:t>
-            </a:r>
-            <a:endParaRPr lang="en-US" sz="1600" dirty="0"/>
-          </a:p>
-        </p:txBody>
-      </p:sp>
-      <p:sp>
-        <p:nvSpPr>
-          <p:cNvPr id="23" name="karte"/>
-          <p:cNvSpPr/>
-          <p:nvPr/>
-        </p:nvSpPr>
-        <p:spPr>
-          <a:xfrm>
-            <a:off x="4338218" y="3817620"/>
-            <a:ext cx="3515258" cy="2217420"/>
-          </a:xfrm>
-          <a:prstGeom prst="roundRect">
-            <a:avLst>
-              <a:gd name="adj" fmla="val 4948"/>
-            </a:avLst>
-          </a:prstGeom>
-          <a:solidFill>
-            <a:srgbClr val="F7F7F7"/>
-          </a:solidFill>
-          <a:ln w="12700">
-            <a:solidFill>
-              <a:srgbClr val="F7F7F7"/>
-            </a:solidFill>
-            <a:prstDash val="solid"/>
-          </a:ln>
-        </p:spPr>
-      </p:sp>
-      <p:sp>
-        <p:nvSpPr>
-          <p:cNvPr id="24" name="icon-kreis-FaKey"/>
-          <p:cNvSpPr/>
-          <p:nvPr/>
-        </p:nvSpPr>
-        <p:spPr>
-          <a:xfrm>
-            <a:off x="4612538" y="4091940"/>
-            <a:ext cx="640080" cy="640080"/>
-          </a:xfrm>
-          <a:prstGeom prst="ellipse">
-            <a:avLst/>
-          </a:prstGeom>
-          <a:solidFill>
-            <a:srgbClr val="006FAD"/>
-          </a:solidFill>
-          <a:ln w="12700">
-            <a:solidFill>
-              <a:srgbClr val="006FAD"/>
-            </a:solidFill>
-            <a:prstDash val="solid"/>
-          </a:ln>
-        </p:spPr>
-      </p:sp>
-      <p:pic>
-        <p:nvPicPr>
-          <p:cNvPr id="25" name="icon-FaKey" descr="C:\Users\Thanam\AppData\Local\Temp\claude\c--Projekt-Trainings-azure-basics-training\a9e0bf4e-0d08-4082-a38a-5b8886538508\scratchpad\pptx\assets\icons\FaKey.png">    </p:cNvPr>
-          <p:cNvPicPr>
-            <a:picLocks noChangeAspect="1"/>
-          </p:cNvPicPr>
-          <p:nvPr/>
-        </p:nvPicPr>
-        <p:blipFill>
-          <a:blip r:embed="rId5"/>
-          <a:stretch>
-            <a:fillRect/>
-          </a:stretch>
-        </p:blipFill>
-        <p:spPr>
-          <a:xfrm>
-            <a:off x="4766158" y="4245559"/>
-            <a:ext cx="332842" cy="332842"/>
-          </a:xfrm>
-          <a:prstGeom prst="rect">
-            <a:avLst/>
-          </a:prstGeom>
-        </p:spPr>
-      </p:pic>
-      <p:sp>
-        <p:nvSpPr>
-          <p:cNvPr id="26" name="Text 19"/>
-          <p:cNvSpPr txBox="1"/>
-          <p:nvPr/>
-        </p:nvSpPr>
-        <p:spPr>
-          <a:xfrm>
-            <a:off x="5435498" y="4091940"/>
-            <a:ext cx="2189378" cy="640080"/>
-          </a:xfrm>
-          <a:prstGeom prst="rect">
-            <a:avLst/>
-          </a:prstGeom>
-          <a:noFill/>
-          <a:ln/>
-        </p:spPr>
-        <p:txBody>
-          <a:bodyPr wrap="square" lIns="0" tIns="0" rIns="0" bIns="0" rtlCol="0" anchor="ctr">
-            <a:normAutofit/>
-          </a:bodyPr>
-          <a:lstStyle/>
-          <a:p>
-            <a:pPr indent="0" marL="0">
-              <a:buNone/>
-            </a:pPr>
-            <a:r>
-              <a:rPr lang="en-US" sz="2000" b="1" dirty="0">
-                <a:solidFill>
-                  <a:srgbClr val="27303A"/>
-                </a:solidFill>
-              </a:rPr>
-              <a:t>SSH-Schlüssel (K3)</a:t>
-            </a:r>
-            <a:endParaRPr lang="en-US" sz="2000" dirty="0"/>
-          </a:p>
-        </p:txBody>
-      </p:sp>
-      <p:sp>
-        <p:nvSpPr>
-          <p:cNvPr id="27" name="Text 20"/>
-          <p:cNvSpPr txBox="1"/>
-          <p:nvPr/>
-        </p:nvSpPr>
-        <p:spPr>
-          <a:xfrm>
-            <a:off x="4612538" y="4914900"/>
-            <a:ext cx="2966618" cy="982980"/>
-          </a:xfrm>
-          <a:prstGeom prst="rect">
-            <a:avLst/>
-          </a:prstGeom>
-          <a:noFill/>
-          <a:ln/>
-        </p:spPr>
-        <p:txBody>
-          <a:bodyPr wrap="square" lIns="0" tIns="0" rIns="0" bIns="0" rtlCol="0" anchor="t"/>
-          <a:lstStyle/>
-          <a:p>
-            <a:pPr indent="0" marL="0">
-              <a:spcAft>
-                <a:spcPts val="400"/>
-              </a:spcAft>
-              <a:buNone/>
-            </a:pPr>
-            <a:r>
-              <a:rPr lang="en-US" sz="1600" dirty="0">
-                <a:solidFill>
-                  <a:srgbClr val="27303A"/>
-                </a:solidFill>
-              </a:rPr>
-              <a:t>Du erstellst ein Schlüsselpaar für die Cloud.</a:t>
-            </a:r>
-            <a:endParaRPr lang="en-US" sz="1600" dirty="0"/>
-          </a:p>
-        </p:txBody>
-      </p:sp>
-      <p:sp>
-        <p:nvSpPr>
-          <p:cNvPr id="25" name="Slide Number Placeholder 0"/>
-          <p:cNvSpPr>
-            <a:spLocks noGrp="1"/>
-          </p:cNvSpPr>
-          <p:nvPr>
-            <p:ph type="sldNum" sz="quarter" idx="4294967295"/>
-          </p:nvPr>
-        </p:nvSpPr>
-        <p:spPr>
-          <a:xfrm>
-            <a:off x="11183112" y="6336792"/>
-            <a:ext cx="457200" cy="365760"/>
-          </a:xfrm>
-          <a:prstGeom prst="rect">
-            <a:avLst/>
-          </a:prstGeom>
-          <a:extLst>
-            <a:ext uri="{C572A759-6A51-4108-AA02-DFA0A04FC94B}">
-              <ma14:wrappingTextBoxFlag xmlns:ma14="http://schemas.microsoft.com/office/mac/drawingml/2011/main" val="0"/>
-            </a:ext>
-          </a:extLst>
-        </p:spPr>
-        <p:txBody>
-          <a:bodyPr/>
-          <a:lstStyle>
-            <a:lvl1pPr>
-              <a:defRPr sz="1000">
-                <a:solidFill>
-                  <a:srgbClr val="6F6F6F"/>
-                </a:solidFill>
-              </a:defRPr>
-            </a:lvl1pPr>
-          </a:lstStyle>
-          <a:p>
-            <a:pPr algn="r"/>
-            <a:fld id="{F7021451-1387-4CA6-816F-3879F97B5CBC}" type="slidenum">
-              <a:rPr b="0" lang="en-US"/>
-              <a:t>6</a:t>
-            </a:fld>
-            <a:endParaRPr lang="en-US"/>
-          </a:p>
-        </p:txBody>
-      </p:sp>
-    </p:spTree>
-  </p:cSld>
-  <p:clrMapOvr>
-    <a:masterClrMapping/>
-  </p:clrMapOvr>
-</p:sld>
-</file>
-
-<file path=ppt/slides/slide7.xml><?xml version="1.0" encoding="utf-8"?>
-<p:sld xmlns:a="http://schemas.openxmlformats.org/drawingml/2006/main" xmlns:r="http://schemas.openxmlformats.org/officeDocument/2006/relationships" xmlns:p="http://schemas.openxmlformats.org/presentationml/2006/main">
-  <p:cSld name="Slide 7">
-    <p:spTree>
-      <p:nvGrpSpPr>
-        <p:cNvPr id="1" name=""/>
-        <p:cNvGrpSpPr/>
-        <p:nvPr/>
-      </p:nvGrpSpPr>
-      <p:grpSpPr>
-        <a:xfrm>
-          <a:off x="0" y="0"/>
-          <a:ext cx="0" cy="0"/>
-          <a:chOff x="0" y="0"/>
-          <a:chExt cx="0" cy="0"/>
-        </a:xfrm>
-      </p:grpSpPr>
-      <p:sp>
-        <p:nvSpPr>
-          <p:cNvPr id="2" name="Text 1"/>
-          <p:cNvSpPr/>
-          <p:nvPr>
-            <p:ph idx="102" type="title" hasCustomPrompt="1"/>
-          </p:nvPr>
-        </p:nvSpPr>
-        <p:spPr>
-          <a:xfrm>
-            <a:off x="548640" y="320040"/>
-            <a:ext cx="11094415" cy="822960"/>
-          </a:xfrm>
-          <a:prstGeom prst="rect">
-            <a:avLst/>
-          </a:prstGeom>
-          <a:noFill/>
-          <a:ln/>
-        </p:spPr>
-        <p:txBody>
-          <a:bodyPr wrap="square" lIns="0" tIns="0" rIns="0" bIns="0" rtlCol="0" anchor="ctr"/>
-          <a:lstStyle/>
-          <a:p>
-            <a:pPr algn="l" indent="0" marL="0">
-              <a:buNone/>
-            </a:pPr>
-            <a:r>
-              <a:rPr lang="en-US" sz="3400" b="1" dirty="0">
-                <a:solidFill>
-                  <a:srgbClr val="27303A"/>
-                </a:solidFill>
-              </a:rPr>
               <a:t>Ablauf</a:t>
             </a:r>
             <a:endParaRPr lang="en-US" sz="3400" dirty="0"/>
@@ -7816,7 +3740,7 @@
       </p:sp>
       <p:graphicFrame>
         <p:nvGraphicFramePr>
-          <p:cNvPr id="8" name="Table 0"/>
+          <p:cNvPr id="5" name="Table 0"/>
           <p:cNvGraphicFramePr>
             <a:graphicFrameLocks noGrp="1"/>
           </p:cNvGraphicFramePr>
@@ -8102,7 +4026,7 @@
                             <a:srgbClr val="27303A"/>
                           </a:solidFill>
                         </a:rPr>
-                        <a:t>Einstieg, Input 1</a:t>
+                        <a:t>Kurseinführung, Input 1</a:t>
                       </a:r>
                       <a:endParaRPr lang="en-US" sz="1700" dirty="0"/>
                     </a:p>
@@ -8163,7 +4087,7 @@
                             <a:srgbClr val="27303A"/>
                           </a:solidFill>
                         </a:rPr>
-                        <a:t>Kursstart · Was ist Virtualisierung?</a:t>
+                        <a:t>Ziel und Aufbau des Kurses · Was weisst du schon? · Was ist Virtualisierung?</a:t>
                       </a:r>
                       <a:endParaRPr lang="en-US" sz="1700" dirty="0"/>
                     </a:p>
@@ -8348,7 +4272,7 @@
                             <a:srgbClr val="27303A"/>
                           </a:solidFill>
                         </a:rPr>
-                        <a:t>Auftrag 1.1: Hypervisor und dein Laptop · Live-Demo Multipass</a:t>
+                        <a:t>Lernjournal anlegen · Auftrag 1.1: Hypervisor und dein Laptop · Live-Demo Multipass</a:t>
                       </a:r>
                       <a:endParaRPr lang="en-US" sz="1700" dirty="0"/>
                     </a:p>
@@ -8657,7 +4581,7 @@
                             <a:srgbClr val="27303A"/>
                           </a:solidFill>
                         </a:rPr>
-                        <a:t>Input</a:t>
+                        <a:t>Hands-on, Input</a:t>
                       </a:r>
                       <a:endParaRPr lang="en-US" sz="1700" dirty="0"/>
                     </a:p>
@@ -8718,7 +4642,7 @@
                             <a:srgbClr val="27303A"/>
                           </a:solidFill>
                         </a:rPr>
-                        <a:t>Automatisch statt von Hand: cloud-init</a:t>
+                        <a:t>Auftrag 1.4: Server von Hand · Automatisch statt von Hand: cloud-init</a:t>
                       </a:r>
                       <a:endParaRPr lang="en-US" sz="1700" dirty="0"/>
                     </a:p>
@@ -8781,7 +4705,7 @@
                             <a:srgbClr val="27303A"/>
                           </a:solidFill>
                         </a:rPr>
-                        <a:t>L5–L6</a:t>
+                        <a:t>L6</a:t>
                       </a:r>
                       <a:endParaRPr lang="en-US" sz="1700" dirty="0"/>
                     </a:p>
@@ -8903,7 +4827,7 @@
                             <a:srgbClr val="27303A"/>
                           </a:solidFill>
                         </a:rPr>
-                        <a:t>Auftrag 1.4: Deine erste automatische VM</a:t>
+                        <a:t>Auftrag 1.5: Deine erste automatische VM</a:t>
                       </a:r>
                       <a:endParaRPr lang="en-US" sz="1700" dirty="0"/>
                     </a:p>
@@ -9027,7 +4951,7 @@
                             <a:srgbClr val="27303A"/>
                           </a:solidFill>
                         </a:rPr>
-                        <a:t>Hands-on</a:t>
+                        <a:t>Kurz-Input, Hands-on</a:t>
                       </a:r>
                       <a:endParaRPr lang="en-US" sz="1700" dirty="0"/>
                     </a:p>
@@ -9088,7 +5012,7 @@
                             <a:srgbClr val="27303A"/>
                           </a:solidFill>
                         </a:rPr>
-                        <a:t>Auftrag 1.5: SSH-Schlüssel · ⭐ 1.6: Container mit Docker</a:t>
+                        <a:t>SSH-Schlüssel · Auftrag 1.6 · ⭐ 1.7: Container mit Docker</a:t>
                       </a:r>
                       <a:endParaRPr lang="en-US" sz="1700" dirty="0"/>
                     </a:p>
@@ -9212,7 +5136,7 @@
                             <a:srgbClr val="27303A"/>
                           </a:solidFill>
                         </a:rPr>
-                        <a:t>Input, Abschluss</a:t>
+                        <a:t>Puffer, Abschluss</a:t>
                       </a:r>
                       <a:endParaRPr lang="en-US" sz="1700" dirty="0"/>
                     </a:p>
@@ -9273,7 +5197,7 @@
                             <a:srgbClr val="27303A"/>
                           </a:solidFill>
                         </a:rPr>
-                        <a:t>Vom Hypervisor zum Hyperscaler · Aufräumen · Exit-Ticket</a:t>
+                        <a:t>Offene Aufträge fertig machen · Aufräumen · Exit-Ticket · Ausblick Tag 2</a:t>
                       </a:r>
                       <a:endParaRPr lang="en-US" sz="1700" dirty="0"/>
                     </a:p>
@@ -9364,7 +5288,7 @@
             <a:pPr algn="r"/>
             <a:fld id="{F7021451-1387-4CA6-816F-3879F97B5CBC}" type="slidenum">
               <a:rPr b="0" lang="en-US"/>
-              <a:t>7</a:t>
+              <a:t>4</a:t>
             </a:fld>
             <a:endParaRPr lang="en-US"/>
           </a:p>
@@ -9378,9 +5302,9 @@
 </p:sld>
 </file>
 
-<file path=ppt/slides/slide8.xml><?xml version="1.0" encoding="utf-8"?>
+<file path=ppt/slides/slide5.xml><?xml version="1.0" encoding="utf-8"?>
 <p:sld xmlns:a="http://schemas.openxmlformats.org/drawingml/2006/main" xmlns:r="http://schemas.openxmlformats.org/officeDocument/2006/relationships" xmlns:p="http://schemas.openxmlformats.org/presentationml/2006/main">
-  <p:cSld name="Slide 8">
+  <p:cSld name="Slide 5">
     <p:spTree>
       <p:nvGrpSpPr>
         <p:cNvPr id="1" name=""/>
@@ -9435,7 +5359,7 @@
       </p:sp>
       <p:graphicFrame>
         <p:nvGraphicFramePr>
-          <p:cNvPr id="9" name="Table 0"/>
+          <p:cNvPr id="6" name="Table 0"/>
           <p:cNvGraphicFramePr>
             <a:graphicFrameLocks noGrp="1"/>
           </p:cNvGraphicFramePr>
@@ -10521,7 +6445,7 @@
                             <a:srgbClr val="27303A"/>
                           </a:solidFill>
                         </a:rPr>
-                        <a:t>Deine erste automatische VM mit cloud-init</a:t>
+                        <a:t>Einen Server von Hand einrichten</a:t>
                       </a:r>
                       <a:endParaRPr lang="en-US" sz="1700" dirty="0"/>
                     </a:p>
@@ -10582,7 +6506,7 @@
                             <a:srgbClr val="27303A"/>
                           </a:solidFill>
                         </a:rPr>
-                        <a:t>60 Min.</a:t>
+                        <a:t>25 Min.</a:t>
                       </a:r>
                       <a:endParaRPr lang="en-US" sz="1700" dirty="0"/>
                     </a:p>
@@ -10767,7 +6691,7 @@
                             <a:srgbClr val="27303A"/>
                           </a:solidFill>
                         </a:rPr>
-                        <a:t>SSH-Schlüssel für die Cloud vorbereiten</a:t>
+                        <a:t>Deine erste automatische VM mit cloud-init</a:t>
                       </a:r>
                       <a:endParaRPr lang="en-US" sz="1700" dirty="0"/>
                     </a:p>
@@ -10828,7 +6752,7 @@
                             <a:srgbClr val="27303A"/>
                           </a:solidFill>
                         </a:rPr>
-                        <a:t>20 Min.</a:t>
+                        <a:t>45 Min.</a:t>
                       </a:r>
                       <a:endParaRPr lang="en-US" sz="1700" dirty="0"/>
                     </a:p>
@@ -10952,7 +6876,7 @@
                             <a:srgbClr val="27303A"/>
                           </a:solidFill>
                         </a:rPr>
-                        <a:t>⭐ 1.6</a:t>
+                        <a:t>1.6</a:t>
                       </a:r>
                       <a:endParaRPr lang="en-US" sz="1700" dirty="0"/>
                     </a:p>
@@ -11013,7 +6937,7 @@
                             <a:srgbClr val="27303A"/>
                           </a:solidFill>
                         </a:rPr>
-                        <a:t>Container mit Docker</a:t>
+                        <a:t>SSH-Schlüssel für die Cloud vorbereiten</a:t>
                       </a:r>
                       <a:endParaRPr lang="en-US" sz="1700" dirty="0"/>
                     </a:p>
@@ -11074,7 +6998,7 @@
                             <a:srgbClr val="27303A"/>
                           </a:solidFill>
                         </a:rPr>
-                        <a:t>30 Min.</a:t>
+                        <a:t>20 Min.</a:t>
                       </a:r>
                       <a:endParaRPr lang="en-US" sz="1700" dirty="0"/>
                     </a:p>
@@ -11183,6 +7107,252 @@
                   </a:tcPr>
                 </a:tc>
               </a:tr>
+              <a:tr h="0">
+                <a:tc>
+                  <a:txBody>
+                    <a:bodyPr/>
+                    <a:lstStyle/>
+                    <a:p>
+                      <a:pPr indent="0" marL="0">
+                        <a:buNone/>
+                      </a:pPr>
+                      <a:r>
+                        <a:rPr lang="en-US" sz="1700" dirty="0">
+                          <a:solidFill>
+                            <a:srgbClr val="27303A"/>
+                          </a:solidFill>
+                        </a:rPr>
+                        <a:t>⭐ 1.7</a:t>
+                      </a:r>
+                      <a:endParaRPr lang="en-US" sz="1700" dirty="0"/>
+                    </a:p>
+                  </a:txBody>
+                  <a:tcPr marL="127000" marR="127000" marT="88900" marB="88900" anchor="ctr">
+                    <a:lnL w="9525" cap="flat" cmpd="sng" algn="ctr">
+                      <a:solidFill>
+                        <a:srgbClr val="D5D8F4"/>
+                      </a:solidFill>
+                      <a:prstDash val="solid"/>
+                      <a:round/>
+                      <a:headEnd type="none" w="med" len="med"/>
+                      <a:tailEnd type="none" w="med" len="med"/>
+                    </a:lnL>
+                    <a:lnR w="9525" cap="flat" cmpd="sng" algn="ctr">
+                      <a:solidFill>
+                        <a:srgbClr val="D5D8F4"/>
+                      </a:solidFill>
+                      <a:prstDash val="solid"/>
+                      <a:round/>
+                      <a:headEnd type="none" w="med" len="med"/>
+                      <a:tailEnd type="none" w="med" len="med"/>
+                    </a:lnR>
+                    <a:lnT w="9525" cap="flat" cmpd="sng" algn="ctr">
+                      <a:solidFill>
+                        <a:srgbClr val="D5D8F4"/>
+                      </a:solidFill>
+                      <a:prstDash val="solid"/>
+                      <a:round/>
+                      <a:headEnd type="none" w="med" len="med"/>
+                      <a:tailEnd type="none" w="med" len="med"/>
+                    </a:lnT>
+                    <a:lnB w="9525" cap="flat" cmpd="sng" algn="ctr">
+                      <a:solidFill>
+                        <a:srgbClr val="D5D8F4"/>
+                      </a:solidFill>
+                      <a:prstDash val="solid"/>
+                      <a:round/>
+                      <a:headEnd type="none" w="med" len="med"/>
+                      <a:tailEnd type="none" w="med" len="med"/>
+                    </a:lnB>
+                    <a:solidFill>
+                      <a:srgbClr val="F7F7F7"/>
+                    </a:solidFill>
+                  </a:tcPr>
+                </a:tc>
+                <a:tc>
+                  <a:txBody>
+                    <a:bodyPr/>
+                    <a:lstStyle/>
+                    <a:p>
+                      <a:pPr indent="0" marL="0">
+                        <a:buNone/>
+                      </a:pPr>
+                      <a:r>
+                        <a:rPr lang="en-US" sz="1700" dirty="0">
+                          <a:solidFill>
+                            <a:srgbClr val="27303A"/>
+                          </a:solidFill>
+                        </a:rPr>
+                        <a:t>Container mit Docker</a:t>
+                      </a:r>
+                      <a:endParaRPr lang="en-US" sz="1700" dirty="0"/>
+                    </a:p>
+                  </a:txBody>
+                  <a:tcPr marL="127000" marR="127000" marT="88900" marB="88900" anchor="ctr">
+                    <a:lnL w="9525" cap="flat" cmpd="sng" algn="ctr">
+                      <a:solidFill>
+                        <a:srgbClr val="D5D8F4"/>
+                      </a:solidFill>
+                      <a:prstDash val="solid"/>
+                      <a:round/>
+                      <a:headEnd type="none" w="med" len="med"/>
+                      <a:tailEnd type="none" w="med" len="med"/>
+                    </a:lnL>
+                    <a:lnR w="9525" cap="flat" cmpd="sng" algn="ctr">
+                      <a:solidFill>
+                        <a:srgbClr val="D5D8F4"/>
+                      </a:solidFill>
+                      <a:prstDash val="solid"/>
+                      <a:round/>
+                      <a:headEnd type="none" w="med" len="med"/>
+                      <a:tailEnd type="none" w="med" len="med"/>
+                    </a:lnR>
+                    <a:lnT w="9525" cap="flat" cmpd="sng" algn="ctr">
+                      <a:solidFill>
+                        <a:srgbClr val="D5D8F4"/>
+                      </a:solidFill>
+                      <a:prstDash val="solid"/>
+                      <a:round/>
+                      <a:headEnd type="none" w="med" len="med"/>
+                      <a:tailEnd type="none" w="med" len="med"/>
+                    </a:lnT>
+                    <a:lnB w="9525" cap="flat" cmpd="sng" algn="ctr">
+                      <a:solidFill>
+                        <a:srgbClr val="D5D8F4"/>
+                      </a:solidFill>
+                      <a:prstDash val="solid"/>
+                      <a:round/>
+                      <a:headEnd type="none" w="med" len="med"/>
+                      <a:tailEnd type="none" w="med" len="med"/>
+                    </a:lnB>
+                    <a:solidFill>
+                      <a:srgbClr val="F7F7F7"/>
+                    </a:solidFill>
+                  </a:tcPr>
+                </a:tc>
+                <a:tc>
+                  <a:txBody>
+                    <a:bodyPr/>
+                    <a:lstStyle/>
+                    <a:p>
+                      <a:pPr indent="0" marL="0">
+                        <a:buNone/>
+                      </a:pPr>
+                      <a:r>
+                        <a:rPr lang="en-US" sz="1700" dirty="0">
+                          <a:solidFill>
+                            <a:srgbClr val="27303A"/>
+                          </a:solidFill>
+                        </a:rPr>
+                        <a:t>30 Min.</a:t>
+                      </a:r>
+                      <a:endParaRPr lang="en-US" sz="1700" dirty="0"/>
+                    </a:p>
+                  </a:txBody>
+                  <a:tcPr marL="127000" marR="127000" marT="88900" marB="88900" anchor="ctr">
+                    <a:lnL w="9525" cap="flat" cmpd="sng" algn="ctr">
+                      <a:solidFill>
+                        <a:srgbClr val="D5D8F4"/>
+                      </a:solidFill>
+                      <a:prstDash val="solid"/>
+                      <a:round/>
+                      <a:headEnd type="none" w="med" len="med"/>
+                      <a:tailEnd type="none" w="med" len="med"/>
+                    </a:lnL>
+                    <a:lnR w="9525" cap="flat" cmpd="sng" algn="ctr">
+                      <a:solidFill>
+                        <a:srgbClr val="D5D8F4"/>
+                      </a:solidFill>
+                      <a:prstDash val="solid"/>
+                      <a:round/>
+                      <a:headEnd type="none" w="med" len="med"/>
+                      <a:tailEnd type="none" w="med" len="med"/>
+                    </a:lnR>
+                    <a:lnT w="9525" cap="flat" cmpd="sng" algn="ctr">
+                      <a:solidFill>
+                        <a:srgbClr val="D5D8F4"/>
+                      </a:solidFill>
+                      <a:prstDash val="solid"/>
+                      <a:round/>
+                      <a:headEnd type="none" w="med" len="med"/>
+                      <a:tailEnd type="none" w="med" len="med"/>
+                    </a:lnT>
+                    <a:lnB w="9525" cap="flat" cmpd="sng" algn="ctr">
+                      <a:solidFill>
+                        <a:srgbClr val="D5D8F4"/>
+                      </a:solidFill>
+                      <a:prstDash val="solid"/>
+                      <a:round/>
+                      <a:headEnd type="none" w="med" len="med"/>
+                      <a:tailEnd type="none" w="med" len="med"/>
+                    </a:lnB>
+                    <a:solidFill>
+                      <a:srgbClr val="F7F7F7"/>
+                    </a:solidFill>
+                  </a:tcPr>
+                </a:tc>
+                <a:tc>
+                  <a:txBody>
+                    <a:bodyPr/>
+                    <a:lstStyle/>
+                    <a:p>
+                      <a:pPr indent="0" marL="0">
+                        <a:buNone/>
+                      </a:pPr>
+                      <a:r>
+                        <a:rPr lang="en-US" sz="1700" dirty="0">
+                          <a:solidFill>
+                            <a:srgbClr val="27303A"/>
+                          </a:solidFill>
+                        </a:rPr>
+                        <a:t>Einzel</a:t>
+                      </a:r>
+                      <a:endParaRPr lang="en-US" sz="1700" dirty="0"/>
+                    </a:p>
+                  </a:txBody>
+                  <a:tcPr marL="127000" marR="127000" marT="88900" marB="88900" anchor="ctr">
+                    <a:lnL w="9525" cap="flat" cmpd="sng" algn="ctr">
+                      <a:solidFill>
+                        <a:srgbClr val="D5D8F4"/>
+                      </a:solidFill>
+                      <a:prstDash val="solid"/>
+                      <a:round/>
+                      <a:headEnd type="none" w="med" len="med"/>
+                      <a:tailEnd type="none" w="med" len="med"/>
+                    </a:lnL>
+                    <a:lnR w="9525" cap="flat" cmpd="sng" algn="ctr">
+                      <a:solidFill>
+                        <a:srgbClr val="D5D8F4"/>
+                      </a:solidFill>
+                      <a:prstDash val="solid"/>
+                      <a:round/>
+                      <a:headEnd type="none" w="med" len="med"/>
+                      <a:tailEnd type="none" w="med" len="med"/>
+                    </a:lnR>
+                    <a:lnT w="9525" cap="flat" cmpd="sng" algn="ctr">
+                      <a:solidFill>
+                        <a:srgbClr val="D5D8F4"/>
+                      </a:solidFill>
+                      <a:prstDash val="solid"/>
+                      <a:round/>
+                      <a:headEnd type="none" w="med" len="med"/>
+                      <a:tailEnd type="none" w="med" len="med"/>
+                    </a:lnT>
+                    <a:lnB w="9525" cap="flat" cmpd="sng" algn="ctr">
+                      <a:solidFill>
+                        <a:srgbClr val="D5D8F4"/>
+                      </a:solidFill>
+                      <a:prstDash val="solid"/>
+                      <a:round/>
+                      <a:headEnd type="none" w="med" len="med"/>
+                      <a:tailEnd type="none" w="med" len="med"/>
+                    </a:lnB>
+                    <a:solidFill>
+                      <a:srgbClr val="F7F7F7"/>
+                    </a:solidFill>
+                  </a:tcPr>
+                </a:tc>
+              </a:tr>
             </a:tbl>
           </a:graphicData>
         </a:graphic>
@@ -11220,6 +7390,1284 @@
               <a:t>Aufträge: auftraege/tag-1/ · Lösungen erst nach dem eigenen Versuch: loesungen/tag-1/</a:t>
             </a:r>
             <a:endParaRPr lang="en-US" sz="1500" dirty="0"/>
+          </a:p>
+        </p:txBody>
+      </p:sp>
+      <p:sp>
+        <p:nvSpPr>
+          <p:cNvPr id="25" name="Slide Number Placeholder 0"/>
+          <p:cNvSpPr>
+            <a:spLocks noGrp="1"/>
+          </p:cNvSpPr>
+          <p:nvPr>
+            <p:ph type="sldNum" sz="quarter" idx="4294967295"/>
+          </p:nvPr>
+        </p:nvSpPr>
+        <p:spPr>
+          <a:xfrm>
+            <a:off x="11183112" y="6336792"/>
+            <a:ext cx="457200" cy="365760"/>
+          </a:xfrm>
+          <a:prstGeom prst="rect">
+            <a:avLst/>
+          </a:prstGeom>
+          <a:extLst>
+            <a:ext uri="{C572A759-6A51-4108-AA02-DFA0A04FC94B}">
+              <ma14:wrappingTextBoxFlag xmlns:ma14="http://schemas.microsoft.com/office/mac/drawingml/2011/main" val="0"/>
+            </a:ext>
+          </a:extLst>
+        </p:spPr>
+        <p:txBody>
+          <a:bodyPr/>
+          <a:lstStyle>
+            <a:lvl1pPr>
+              <a:defRPr sz="1000">
+                <a:solidFill>
+                  <a:srgbClr val="6F6F6F"/>
+                </a:solidFill>
+              </a:defRPr>
+            </a:lvl1pPr>
+          </a:lstStyle>
+          <a:p>
+            <a:pPr algn="r"/>
+            <a:fld id="{F7021451-1387-4CA6-816F-3879F97B5CBC}" type="slidenum">
+              <a:rPr b="0" lang="en-US"/>
+              <a:t>5</a:t>
+            </a:fld>
+            <a:endParaRPr lang="en-US"/>
+          </a:p>
+        </p:txBody>
+      </p:sp>
+    </p:spTree>
+  </p:cSld>
+  <p:clrMapOvr>
+    <a:masterClrMapping/>
+  </p:clrMapOvr>
+</p:sld>
+</file>
+
+<file path=ppt/slides/slide6.xml><?xml version="1.0" encoding="utf-8"?>
+<p:sld xmlns:a="http://schemas.openxmlformats.org/drawingml/2006/main" xmlns:r="http://schemas.openxmlformats.org/officeDocument/2006/relationships" xmlns:p="http://schemas.openxmlformats.org/presentationml/2006/main">
+  <p:cSld name="Slide 6">
+    <p:spTree>
+      <p:nvGrpSpPr>
+        <p:cNvPr id="1" name=""/>
+        <p:cNvGrpSpPr/>
+        <p:nvPr/>
+      </p:nvGrpSpPr>
+      <p:grpSpPr>
+        <a:xfrm>
+          <a:off x="0" y="0"/>
+          <a:ext cx="0" cy="0"/>
+          <a:chOff x="0" y="0"/>
+          <a:chExt cx="0" cy="0"/>
+        </a:xfrm>
+      </p:grpSpPr>
+      <p:sp>
+        <p:nvSpPr>
+          <p:cNvPr id="2" name="Text 1"/>
+          <p:cNvSpPr/>
+          <p:nvPr>
+            <p:ph idx="102" type="title" hasCustomPrompt="1"/>
+          </p:nvPr>
+        </p:nvSpPr>
+        <p:spPr>
+          <a:xfrm>
+            <a:off x="548640" y="320040"/>
+            <a:ext cx="11094415" cy="822960"/>
+          </a:xfrm>
+          <a:prstGeom prst="rect">
+            <a:avLst/>
+          </a:prstGeom>
+          <a:noFill/>
+          <a:ln/>
+        </p:spPr>
+        <p:txBody>
+          <a:bodyPr wrap="square" lIns="0" tIns="0" rIns="0" bIns="0" rtlCol="0" anchor="ctr"/>
+          <a:lstStyle/>
+          <a:p>
+            <a:pPr algn="l" indent="0" marL="0">
+              <a:buNone/>
+            </a:pPr>
+            <a:r>
+              <a:rPr lang="en-US" sz="3400" b="1" dirty="0">
+                <a:solidFill>
+                  <a:srgbClr val="27303A"/>
+                </a:solidFill>
+              </a:rPr>
+              <a:t>Bevor du startest</a:t>
+            </a:r>
+            <a:endParaRPr lang="en-US" sz="3400" dirty="0"/>
+          </a:p>
+        </p:txBody>
+      </p:sp>
+      <p:sp>
+        <p:nvSpPr>
+          <p:cNvPr id="3" name="icon-kreis-FaMicrochip"/>
+          <p:cNvSpPr/>
+          <p:nvPr/>
+        </p:nvSpPr>
+        <p:spPr>
+          <a:xfrm>
+            <a:off x="548640" y="2446020"/>
+            <a:ext cx="548640" cy="548640"/>
+          </a:xfrm>
+          <a:prstGeom prst="ellipse">
+            <a:avLst/>
+          </a:prstGeom>
+          <a:solidFill>
+            <a:srgbClr val="006FAD"/>
+          </a:solidFill>
+          <a:ln w="12700">
+            <a:solidFill>
+              <a:srgbClr val="006FAD"/>
+            </a:solidFill>
+            <a:prstDash val="solid"/>
+          </a:ln>
+        </p:spPr>
+      </p:sp>
+      <p:pic>
+        <p:nvPicPr>
+          <p:cNvPr id="4" name="icon-FaMicrochip" descr="C:\Users\Thanam\AppData\Local\Temp\claude\c--Projekt-Trainings-azure-basics-training\a7a6b8eb-22f3-4b42-aecc-5af05d1502b1\scratchpad\folien\assets\icons\FaMicrochip.png">    </p:cNvPr>
+          <p:cNvPicPr>
+            <a:picLocks noChangeAspect="1"/>
+          </p:cNvPicPr>
+          <p:nvPr/>
+        </p:nvPicPr>
+        <p:blipFill>
+          <a:blip r:embed="rId1"/>
+          <a:stretch>
+            <a:fillRect/>
+          </a:stretch>
+        </p:blipFill>
+        <p:spPr>
+          <a:xfrm>
+            <a:off x="680314" y="2577694"/>
+            <a:ext cx="285293" cy="285293"/>
+          </a:xfrm>
+          <a:prstGeom prst="rect">
+            <a:avLst/>
+          </a:prstGeom>
+        </p:spPr>
+      </p:pic>
+      <p:sp>
+        <p:nvSpPr>
+          <p:cNvPr id="5" name="Text 2"/>
+          <p:cNvSpPr txBox="1"/>
+          <p:nvPr/>
+        </p:nvSpPr>
+        <p:spPr>
+          <a:xfrm>
+            <a:off x="1325880" y="2240280"/>
+            <a:ext cx="10317175" cy="960120"/>
+          </a:xfrm>
+          <a:prstGeom prst="rect">
+            <a:avLst/>
+          </a:prstGeom>
+          <a:noFill/>
+          <a:ln/>
+        </p:spPr>
+        <p:txBody>
+          <a:bodyPr wrap="square" lIns="0" tIns="0" rIns="0" bIns="0" rtlCol="0" anchor="ctr"/>
+          <a:lstStyle/>
+          <a:p>
+            <a:pPr indent="0" marL="0">
+              <a:buNone/>
+            </a:pPr>
+            <a:r>
+              <a:rPr lang="en-US" sz="1800" b="1" dirty="0">
+                <a:solidFill>
+                  <a:srgbClr val="27303A"/>
+                </a:solidFill>
+              </a:rPr>
+              <a:t>Virtualisierung aktiv?</a:t>
+            </a:r>
+            <a:endParaRPr lang="en-US" sz="1800" dirty="0"/>
+          </a:p>
+          <a:p>
+            <a:pPr indent="0" marL="0">
+              <a:buNone/>
+            </a:pPr>
+            <a:r>
+              <a:rPr lang="en-US" sz="1800" dirty="0">
+                <a:solidFill>
+                  <a:srgbClr val="6F6F6F"/>
+                </a:solidFill>
+              </a:rPr>
+              <a:t>Task-Manager &gt; Leistung &gt; CPU &gt; «Virtualisierung: Aktiviert»</a:t>
+            </a:r>
+            <a:endParaRPr lang="en-US" sz="1800" dirty="0"/>
+          </a:p>
+        </p:txBody>
+      </p:sp>
+      <p:sp>
+        <p:nvSpPr>
+          <p:cNvPr id="6" name="icon-kreis-FaLaptop"/>
+          <p:cNvSpPr/>
+          <p:nvPr/>
+        </p:nvSpPr>
+        <p:spPr>
+          <a:xfrm>
+            <a:off x="548640" y="3406140"/>
+            <a:ext cx="548640" cy="548640"/>
+          </a:xfrm>
+          <a:prstGeom prst="ellipse">
+            <a:avLst/>
+          </a:prstGeom>
+          <a:solidFill>
+            <a:srgbClr val="006FAD"/>
+          </a:solidFill>
+          <a:ln w="12700">
+            <a:solidFill>
+              <a:srgbClr val="006FAD"/>
+            </a:solidFill>
+            <a:prstDash val="solid"/>
+          </a:ln>
+        </p:spPr>
+      </p:sp>
+      <p:pic>
+        <p:nvPicPr>
+          <p:cNvPr id="7" name="icon-FaLaptop" descr="C:\Users\Thanam\AppData\Local\Temp\claude\c--Projekt-Trainings-azure-basics-training\a7a6b8eb-22f3-4b42-aecc-5af05d1502b1\scratchpad\folien\assets\icons\FaLaptop.png">    </p:cNvPr>
+          <p:cNvPicPr>
+            <a:picLocks noChangeAspect="1"/>
+          </p:cNvPicPr>
+          <p:nvPr/>
+        </p:nvPicPr>
+        <p:blipFill>
+          <a:blip r:embed="rId2"/>
+          <a:stretch>
+            <a:fillRect/>
+          </a:stretch>
+        </p:blipFill>
+        <p:spPr>
+          <a:xfrm>
+            <a:off x="680314" y="3537814"/>
+            <a:ext cx="285293" cy="285293"/>
+          </a:xfrm>
+          <a:prstGeom prst="rect">
+            <a:avLst/>
+          </a:prstGeom>
+        </p:spPr>
+      </p:pic>
+      <p:sp>
+        <p:nvSpPr>
+          <p:cNvPr id="8" name="Text 4"/>
+          <p:cNvSpPr txBox="1"/>
+          <p:nvPr/>
+        </p:nvSpPr>
+        <p:spPr>
+          <a:xfrm>
+            <a:off x="1325880" y="3200400"/>
+            <a:ext cx="10317175" cy="960120"/>
+          </a:xfrm>
+          <a:prstGeom prst="rect">
+            <a:avLst/>
+          </a:prstGeom>
+          <a:noFill/>
+          <a:ln/>
+        </p:spPr>
+        <p:txBody>
+          <a:bodyPr wrap="square" lIns="0" tIns="0" rIns="0" bIns="0" rtlCol="0" anchor="ctr"/>
+          <a:lstStyle/>
+          <a:p>
+            <a:pPr indent="0" marL="0">
+              <a:buNone/>
+            </a:pPr>
+            <a:r>
+              <a:rPr lang="en-US" sz="1800" b="1" dirty="0">
+                <a:solidFill>
+                  <a:srgbClr val="27303A"/>
+                </a:solidFill>
+              </a:rPr>
+              <a:t>Windows Pro oder Education?</a:t>
+            </a:r>
+            <a:endParaRPr lang="en-US" sz="1800" dirty="0"/>
+          </a:p>
+          <a:p>
+            <a:pPr indent="0" marL="0">
+              <a:buNone/>
+            </a:pPr>
+            <a:r>
+              <a:rPr lang="en-US" sz="1800" dirty="0">
+                <a:solidFill>
+                  <a:srgbClr val="6F6F6F"/>
+                </a:solidFill>
+              </a:rPr>
+              <a:t>Dann ist Hyper-V eingebaut. Bei Windows Home: Kursleitung holen.</a:t>
+            </a:r>
+            <a:endParaRPr lang="en-US" sz="1800" dirty="0"/>
+          </a:p>
+        </p:txBody>
+      </p:sp>
+      <p:sp>
+        <p:nvSpPr>
+          <p:cNvPr id="9" name="icon-kreis-FaHdd"/>
+          <p:cNvSpPr/>
+          <p:nvPr/>
+        </p:nvSpPr>
+        <p:spPr>
+          <a:xfrm>
+            <a:off x="548640" y="4366260"/>
+            <a:ext cx="548640" cy="548640"/>
+          </a:xfrm>
+          <a:prstGeom prst="ellipse">
+            <a:avLst/>
+          </a:prstGeom>
+          <a:solidFill>
+            <a:srgbClr val="006FAD"/>
+          </a:solidFill>
+          <a:ln w="12700">
+            <a:solidFill>
+              <a:srgbClr val="006FAD"/>
+            </a:solidFill>
+            <a:prstDash val="solid"/>
+          </a:ln>
+        </p:spPr>
+      </p:sp>
+      <p:pic>
+        <p:nvPicPr>
+          <p:cNvPr id="10" name="icon-FaHdd" descr="C:\Users\Thanam\AppData\Local\Temp\claude\c--Projekt-Trainings-azure-basics-training\a7a6b8eb-22f3-4b42-aecc-5af05d1502b1\scratchpad\folien\assets\icons\FaHdd.png">    </p:cNvPr>
+          <p:cNvPicPr>
+            <a:picLocks noChangeAspect="1"/>
+          </p:cNvPicPr>
+          <p:nvPr/>
+        </p:nvPicPr>
+        <p:blipFill>
+          <a:blip r:embed="rId3"/>
+          <a:stretch>
+            <a:fillRect/>
+          </a:stretch>
+        </p:blipFill>
+        <p:spPr>
+          <a:xfrm>
+            <a:off x="680314" y="4497934"/>
+            <a:ext cx="285293" cy="285293"/>
+          </a:xfrm>
+          <a:prstGeom prst="rect">
+            <a:avLst/>
+          </a:prstGeom>
+        </p:spPr>
+      </p:pic>
+      <p:sp>
+        <p:nvSpPr>
+          <p:cNvPr id="11" name="Text 6"/>
+          <p:cNvSpPr txBox="1"/>
+          <p:nvPr/>
+        </p:nvSpPr>
+        <p:spPr>
+          <a:xfrm>
+            <a:off x="1325880" y="4160520"/>
+            <a:ext cx="10317175" cy="960120"/>
+          </a:xfrm>
+          <a:prstGeom prst="rect">
+            <a:avLst/>
+          </a:prstGeom>
+          <a:noFill/>
+          <a:ln/>
+        </p:spPr>
+        <p:txBody>
+          <a:bodyPr wrap="square" lIns="0" tIns="0" rIns="0" bIns="0" rtlCol="0" anchor="ctr"/>
+          <a:lstStyle/>
+          <a:p>
+            <a:pPr indent="0" marL="0">
+              <a:buNone/>
+            </a:pPr>
+            <a:r>
+              <a:rPr lang="en-US" sz="1800" b="1" dirty="0">
+                <a:solidFill>
+                  <a:srgbClr val="27303A"/>
+                </a:solidFill>
+              </a:rPr>
+              <a:t>Genug Platz?</a:t>
+            </a:r>
+            <a:endParaRPr lang="en-US" sz="1800" dirty="0"/>
+          </a:p>
+          <a:p>
+            <a:pPr indent="0" marL="0">
+              <a:buNone/>
+            </a:pPr>
+            <a:r>
+              <a:rPr lang="en-US" sz="1800" dirty="0">
+                <a:solidFill>
+                  <a:srgbClr val="6F6F6F"/>
+                </a:solidFill>
+              </a:rPr>
+              <a:t>Mindestens 15 GB frei. Multipass lädt Ubuntu selbst herunter.</a:t>
+            </a:r>
+            <a:endParaRPr lang="en-US" sz="1800" dirty="0"/>
+          </a:p>
+        </p:txBody>
+      </p:sp>
+      <p:sp>
+        <p:nvSpPr>
+          <p:cNvPr id="25" name="Slide Number Placeholder 0"/>
+          <p:cNvSpPr>
+            <a:spLocks noGrp="1"/>
+          </p:cNvSpPr>
+          <p:nvPr>
+            <p:ph type="sldNum" sz="quarter" idx="4294967295"/>
+          </p:nvPr>
+        </p:nvSpPr>
+        <p:spPr>
+          <a:xfrm>
+            <a:off x="11183112" y="6336792"/>
+            <a:ext cx="457200" cy="365760"/>
+          </a:xfrm>
+          <a:prstGeom prst="rect">
+            <a:avLst/>
+          </a:prstGeom>
+          <a:extLst>
+            <a:ext uri="{C572A759-6A51-4108-AA02-DFA0A04FC94B}">
+              <ma14:wrappingTextBoxFlag xmlns:ma14="http://schemas.microsoft.com/office/mac/drawingml/2011/main" val="0"/>
+            </a:ext>
+          </a:extLst>
+        </p:spPr>
+        <p:txBody>
+          <a:bodyPr/>
+          <a:lstStyle>
+            <a:lvl1pPr>
+              <a:defRPr sz="1000">
+                <a:solidFill>
+                  <a:srgbClr val="6F6F6F"/>
+                </a:solidFill>
+              </a:defRPr>
+            </a:lvl1pPr>
+          </a:lstStyle>
+          <a:p>
+            <a:pPr algn="r"/>
+            <a:fld id="{F7021451-1387-4CA6-816F-3879F97B5CBC}" type="slidenum">
+              <a:rPr b="0" lang="en-US"/>
+              <a:t>6</a:t>
+            </a:fld>
+            <a:endParaRPr lang="en-US"/>
+          </a:p>
+        </p:txBody>
+      </p:sp>
+    </p:spTree>
+  </p:cSld>
+  <p:clrMapOvr>
+    <a:masterClrMapping/>
+  </p:clrMapOvr>
+</p:sld>
+</file>
+
+<file path=ppt/slides/slide7.xml><?xml version="1.0" encoding="utf-8"?>
+<p:sld xmlns:a="http://schemas.openxmlformats.org/drawingml/2006/main" xmlns:r="http://schemas.openxmlformats.org/officeDocument/2006/relationships" xmlns:p="http://schemas.openxmlformats.org/presentationml/2006/main">
+  <p:cSld name="Slide 7">
+    <p:spTree>
+      <p:nvGrpSpPr>
+        <p:cNvPr id="1" name=""/>
+        <p:cNvGrpSpPr/>
+        <p:nvPr/>
+      </p:nvGrpSpPr>
+      <p:grpSpPr>
+        <a:xfrm>
+          <a:off x="0" y="0"/>
+          <a:ext cx="0" cy="0"/>
+          <a:chOff x="0" y="0"/>
+          <a:chExt cx="0" cy="0"/>
+        </a:xfrm>
+      </p:grpSpPr>
+      <p:sp>
+        <p:nvSpPr>
+          <p:cNvPr id="2" name="Text 1"/>
+          <p:cNvSpPr/>
+          <p:nvPr>
+            <p:ph idx="102" type="title" hasCustomPrompt="1"/>
+          </p:nvPr>
+        </p:nvSpPr>
+        <p:spPr>
+          <a:xfrm>
+            <a:off x="548640" y="320040"/>
+            <a:ext cx="11094415" cy="822960"/>
+          </a:xfrm>
+          <a:prstGeom prst="rect">
+            <a:avLst/>
+          </a:prstGeom>
+          <a:noFill/>
+          <a:ln/>
+        </p:spPr>
+        <p:txBody>
+          <a:bodyPr wrap="square" lIns="0" tIns="0" rIns="0" bIns="0" rtlCol="0" anchor="ctr"/>
+          <a:lstStyle/>
+          <a:p>
+            <a:pPr algn="l" indent="0" marL="0">
+              <a:buNone/>
+            </a:pPr>
+            <a:r>
+              <a:rPr lang="en-US" sz="3400" b="1" dirty="0">
+                <a:solidFill>
+                  <a:srgbClr val="27303A"/>
+                </a:solidFill>
+              </a:rPr>
+              <a:t>Multipass in 6 Befehlen</a:t>
+            </a:r>
+            <a:endParaRPr lang="en-US" sz="3400" dirty="0"/>
+          </a:p>
+        </p:txBody>
+      </p:sp>
+      <p:sp>
+        <p:nvSpPr>
+          <p:cNvPr id="3" name="code-box"/>
+          <p:cNvSpPr/>
+          <p:nvPr/>
+        </p:nvSpPr>
+        <p:spPr>
+          <a:xfrm>
+            <a:off x="548640" y="1325880"/>
+            <a:ext cx="6583680" cy="4709160"/>
+          </a:xfrm>
+          <a:prstGeom prst="roundRect">
+            <a:avLst>
+              <a:gd name="adj" fmla="val 1942"/>
+            </a:avLst>
+          </a:prstGeom>
+          <a:solidFill>
+            <a:srgbClr val="27303A"/>
+          </a:solidFill>
+          <a:ln w="12700">
+            <a:solidFill>
+              <a:srgbClr val="27303A"/>
+            </a:solidFill>
+            <a:prstDash val="solid"/>
+          </a:ln>
+        </p:spPr>
+      </p:sp>
+      <p:sp>
+        <p:nvSpPr>
+          <p:cNvPr id="4" name="Text 2"/>
+          <p:cNvSpPr txBox="1"/>
+          <p:nvPr/>
+        </p:nvSpPr>
+        <p:spPr>
+          <a:xfrm>
+            <a:off x="822960" y="1554480"/>
+            <a:ext cx="6035040" cy="4251960"/>
+          </a:xfrm>
+          <a:prstGeom prst="rect">
+            <a:avLst/>
+          </a:prstGeom>
+          <a:noFill/>
+          <a:ln/>
+        </p:spPr>
+        <p:txBody>
+          <a:bodyPr wrap="square" lIns="0" tIns="0" rIns="0" bIns="0" rtlCol="0" anchor="t"/>
+          <a:lstStyle/>
+          <a:p>
+            <a:pPr indent="0" marL="0">
+              <a:buNone/>
+            </a:pPr>
+            <a:r>
+              <a:rPr lang="en-US" sz="1800" dirty="0">
+                <a:solidFill>
+                  <a:srgbClr val="F7F7F7"/>
+                </a:solidFill>
+                <a:latin typeface="Courier New" pitchFamily="34" charset="0"/>
+                <a:ea typeface="Courier New" pitchFamily="34" charset="-122"/>
+                <a:cs typeface="Courier New" pitchFamily="34" charset="-120"/>
+              </a:rPr>
+              <a:t>multipass launch --name vm1</a:t>
+            </a:r>
+            <a:endParaRPr lang="en-US" sz="1800" dirty="0"/>
+          </a:p>
+          <a:p>
+            <a:pPr indent="0" marL="0">
+              <a:buNone/>
+            </a:pPr>
+            <a:r>
+              <a:rPr lang="en-US" sz="1800" dirty="0">
+                <a:solidFill>
+                  <a:srgbClr val="F7F7F7"/>
+                </a:solidFill>
+                <a:latin typeface="Courier New" pitchFamily="34" charset="0"/>
+                <a:ea typeface="Courier New" pitchFamily="34" charset="-122"/>
+                <a:cs typeface="Courier New" pitchFamily="34" charset="-120"/>
+              </a:rPr>
+              <a:t>multipass list</a:t>
+            </a:r>
+            <a:endParaRPr lang="en-US" sz="1800" dirty="0"/>
+          </a:p>
+          <a:p>
+            <a:pPr indent="0" marL="0">
+              <a:buNone/>
+            </a:pPr>
+            <a:r>
+              <a:rPr lang="en-US" sz="1800" dirty="0">
+                <a:solidFill>
+                  <a:srgbClr val="F7F7F7"/>
+                </a:solidFill>
+                <a:latin typeface="Courier New" pitchFamily="34" charset="0"/>
+                <a:ea typeface="Courier New" pitchFamily="34" charset="-122"/>
+                <a:cs typeface="Courier New" pitchFamily="34" charset="-120"/>
+              </a:rPr>
+              <a:t>multipass shell vm1</a:t>
+            </a:r>
+            <a:endParaRPr lang="en-US" sz="1800" dirty="0"/>
+          </a:p>
+          <a:p>
+            <a:pPr indent="0" marL="0">
+              <a:buNone/>
+            </a:pPr>
+            <a:r>
+              <a:rPr lang="en-US" sz="1800" dirty="0">
+                <a:solidFill>
+                  <a:srgbClr val="F7F7F7"/>
+                </a:solidFill>
+                <a:latin typeface="Courier New" pitchFamily="34" charset="0"/>
+                <a:ea typeface="Courier New" pitchFamily="34" charset="-122"/>
+                <a:cs typeface="Courier New" pitchFamily="34" charset="-120"/>
+              </a:rPr>
+              <a:t>multipass exec vm1 -- free -h</a:t>
+            </a:r>
+            <a:endParaRPr lang="en-US" sz="1800" dirty="0"/>
+          </a:p>
+          <a:p>
+            <a:pPr indent="0" marL="0">
+              <a:buNone/>
+            </a:pPr>
+            <a:r>
+              <a:rPr lang="en-US" sz="1800" dirty="0">
+                <a:solidFill>
+                  <a:srgbClr val="F7F7F7"/>
+                </a:solidFill>
+                <a:latin typeface="Courier New" pitchFamily="34" charset="0"/>
+                <a:ea typeface="Courier New" pitchFamily="34" charset="-122"/>
+                <a:cs typeface="Courier New" pitchFamily="34" charset="-120"/>
+              </a:rPr>
+              <a:t>multipass stop vm1</a:t>
+            </a:r>
+            <a:endParaRPr lang="en-US" sz="1800" dirty="0"/>
+          </a:p>
+          <a:p>
+            <a:pPr indent="0" marL="0">
+              <a:buNone/>
+            </a:pPr>
+            <a:r>
+              <a:rPr lang="en-US" sz="1800" dirty="0">
+                <a:solidFill>
+                  <a:srgbClr val="F7F7F7"/>
+                </a:solidFill>
+                <a:latin typeface="Courier New" pitchFamily="34" charset="0"/>
+                <a:ea typeface="Courier New" pitchFamily="34" charset="-122"/>
+                <a:cs typeface="Courier New" pitchFamily="34" charset="-120"/>
+              </a:rPr>
+              <a:t>multipass delete --purge vm1</a:t>
+            </a:r>
+            <a:endParaRPr lang="en-US" sz="1800" dirty="0"/>
+          </a:p>
+        </p:txBody>
+      </p:sp>
+      <p:sp>
+        <p:nvSpPr>
+          <p:cNvPr id="5" name="Text 3"/>
+          <p:cNvSpPr txBox="1"/>
+          <p:nvPr/>
+        </p:nvSpPr>
+        <p:spPr>
+          <a:xfrm>
+            <a:off x="7498080" y="1325880"/>
+            <a:ext cx="4144975" cy="1143000"/>
+          </a:xfrm>
+          <a:prstGeom prst="rect">
+            <a:avLst/>
+          </a:prstGeom>
+          <a:noFill/>
+          <a:ln/>
+        </p:spPr>
+        <p:txBody>
+          <a:bodyPr wrap="square" lIns="0" tIns="0" rIns="0" bIns="0" rtlCol="0" anchor="t"/>
+          <a:lstStyle/>
+          <a:p>
+            <a:pPr indent="0" marL="0">
+              <a:buNone/>
+            </a:pPr>
+            <a:r>
+              <a:rPr lang="en-US" sz="1700" b="1" dirty="0">
+                <a:solidFill>
+                  <a:srgbClr val="006FAD"/>
+                </a:solidFill>
+              </a:rPr>
+              <a:t>launch</a:t>
+            </a:r>
+            <a:endParaRPr lang="en-US" sz="1700" dirty="0"/>
+          </a:p>
+          <a:p>
+            <a:pPr indent="0" marL="0">
+              <a:buNone/>
+            </a:pPr>
+            <a:r>
+              <a:rPr lang="en-US" sz="1700" dirty="0">
+                <a:solidFill>
+                  <a:srgbClr val="27303A"/>
+                </a:solidFill>
+              </a:rPr>
+              <a:t>VM erstellen und starten</a:t>
+            </a:r>
+            <a:endParaRPr lang="en-US" sz="1700" dirty="0"/>
+          </a:p>
+        </p:txBody>
+      </p:sp>
+      <p:sp>
+        <p:nvSpPr>
+          <p:cNvPr id="6" name="Text 4"/>
+          <p:cNvSpPr txBox="1"/>
+          <p:nvPr/>
+        </p:nvSpPr>
+        <p:spPr>
+          <a:xfrm>
+            <a:off x="7498080" y="2468880"/>
+            <a:ext cx="4144975" cy="1143000"/>
+          </a:xfrm>
+          <a:prstGeom prst="rect">
+            <a:avLst/>
+          </a:prstGeom>
+          <a:noFill/>
+          <a:ln/>
+        </p:spPr>
+        <p:txBody>
+          <a:bodyPr wrap="square" lIns="0" tIns="0" rIns="0" bIns="0" rtlCol="0" anchor="t"/>
+          <a:lstStyle/>
+          <a:p>
+            <a:pPr indent="0" marL="0">
+              <a:buNone/>
+            </a:pPr>
+            <a:r>
+              <a:rPr lang="en-US" sz="1700" b="1" dirty="0">
+                <a:solidFill>
+                  <a:srgbClr val="006FAD"/>
+                </a:solidFill>
+              </a:rPr>
+              <a:t>list</a:t>
+            </a:r>
+            <a:endParaRPr lang="en-US" sz="1700" dirty="0"/>
+          </a:p>
+          <a:p>
+            <a:pPr indent="0" marL="0">
+              <a:buNone/>
+            </a:pPr>
+            <a:r>
+              <a:rPr lang="en-US" sz="1700" dirty="0">
+                <a:solidFill>
+                  <a:srgbClr val="27303A"/>
+                </a:solidFill>
+              </a:rPr>
+              <a:t>alle VMs anzeigen</a:t>
+            </a:r>
+            <a:endParaRPr lang="en-US" sz="1700" dirty="0"/>
+          </a:p>
+        </p:txBody>
+      </p:sp>
+      <p:sp>
+        <p:nvSpPr>
+          <p:cNvPr id="7" name="Text 5"/>
+          <p:cNvSpPr txBox="1"/>
+          <p:nvPr/>
+        </p:nvSpPr>
+        <p:spPr>
+          <a:xfrm>
+            <a:off x="7498080" y="3611880"/>
+            <a:ext cx="4144975" cy="1143000"/>
+          </a:xfrm>
+          <a:prstGeom prst="rect">
+            <a:avLst/>
+          </a:prstGeom>
+          <a:noFill/>
+          <a:ln/>
+        </p:spPr>
+        <p:txBody>
+          <a:bodyPr wrap="square" lIns="0" tIns="0" rIns="0" bIns="0" rtlCol="0" anchor="t"/>
+          <a:lstStyle/>
+          <a:p>
+            <a:pPr indent="0" marL="0">
+              <a:buNone/>
+            </a:pPr>
+            <a:r>
+              <a:rPr lang="en-US" sz="1700" b="1" dirty="0">
+                <a:solidFill>
+                  <a:srgbClr val="006FAD"/>
+                </a:solidFill>
+              </a:rPr>
+              <a:t>shell / exec</a:t>
+            </a:r>
+            <a:endParaRPr lang="en-US" sz="1700" dirty="0"/>
+          </a:p>
+          <a:p>
+            <a:pPr indent="0" marL="0">
+              <a:buNone/>
+            </a:pPr>
+            <a:r>
+              <a:rPr lang="en-US" sz="1700" dirty="0">
+                <a:solidFill>
+                  <a:srgbClr val="27303A"/>
+                </a:solidFill>
+              </a:rPr>
+              <a:t>in der VM arbeiten / einen Befehl ausführen</a:t>
+            </a:r>
+            <a:endParaRPr lang="en-US" sz="1700" dirty="0"/>
+          </a:p>
+        </p:txBody>
+      </p:sp>
+      <p:sp>
+        <p:nvSpPr>
+          <p:cNvPr id="8" name="Text 6"/>
+          <p:cNvSpPr txBox="1"/>
+          <p:nvPr/>
+        </p:nvSpPr>
+        <p:spPr>
+          <a:xfrm>
+            <a:off x="7498080" y="4754880"/>
+            <a:ext cx="4144975" cy="1143000"/>
+          </a:xfrm>
+          <a:prstGeom prst="rect">
+            <a:avLst/>
+          </a:prstGeom>
+          <a:noFill/>
+          <a:ln/>
+        </p:spPr>
+        <p:txBody>
+          <a:bodyPr wrap="square" lIns="0" tIns="0" rIns="0" bIns="0" rtlCol="0" anchor="t"/>
+          <a:lstStyle/>
+          <a:p>
+            <a:pPr indent="0" marL="0">
+              <a:buNone/>
+            </a:pPr>
+            <a:r>
+              <a:rPr lang="en-US" sz="1700" b="1" dirty="0">
+                <a:solidFill>
+                  <a:srgbClr val="006FAD"/>
+                </a:solidFill>
+              </a:rPr>
+              <a:t>stop / delete</a:t>
+            </a:r>
+            <a:endParaRPr lang="en-US" sz="1700" dirty="0"/>
+          </a:p>
+          <a:p>
+            <a:pPr indent="0" marL="0">
+              <a:buNone/>
+            </a:pPr>
+            <a:r>
+              <a:rPr lang="en-US" sz="1700" dirty="0">
+                <a:solidFill>
+                  <a:srgbClr val="27303A"/>
+                </a:solidFill>
+              </a:rPr>
+              <a:t>VM stoppen / endgültig löschen</a:t>
+            </a:r>
+            <a:endParaRPr lang="en-US" sz="1700" dirty="0"/>
+          </a:p>
+        </p:txBody>
+      </p:sp>
+      <p:sp>
+        <p:nvSpPr>
+          <p:cNvPr id="25" name="Slide Number Placeholder 0"/>
+          <p:cNvSpPr>
+            <a:spLocks noGrp="1"/>
+          </p:cNvSpPr>
+          <p:nvPr>
+            <p:ph type="sldNum" sz="quarter" idx="4294967295"/>
+          </p:nvPr>
+        </p:nvSpPr>
+        <p:spPr>
+          <a:xfrm>
+            <a:off x="11183112" y="6336792"/>
+            <a:ext cx="457200" cy="365760"/>
+          </a:xfrm>
+          <a:prstGeom prst="rect">
+            <a:avLst/>
+          </a:prstGeom>
+          <a:extLst>
+            <a:ext uri="{C572A759-6A51-4108-AA02-DFA0A04FC94B}">
+              <ma14:wrappingTextBoxFlag xmlns:ma14="http://schemas.microsoft.com/office/mac/drawingml/2011/main" val="0"/>
+            </a:ext>
+          </a:extLst>
+        </p:spPr>
+        <p:txBody>
+          <a:bodyPr/>
+          <a:lstStyle>
+            <a:lvl1pPr>
+              <a:defRPr sz="1000">
+                <a:solidFill>
+                  <a:srgbClr val="6F6F6F"/>
+                </a:solidFill>
+              </a:defRPr>
+            </a:lvl1pPr>
+          </a:lstStyle>
+          <a:p>
+            <a:pPr algn="r"/>
+            <a:fld id="{F7021451-1387-4CA6-816F-3879F97B5CBC}" type="slidenum">
+              <a:rPr b="0" lang="en-US"/>
+              <a:t>7</a:t>
+            </a:fld>
+            <a:endParaRPr lang="en-US"/>
+          </a:p>
+        </p:txBody>
+      </p:sp>
+    </p:spTree>
+  </p:cSld>
+  <p:clrMapOvr>
+    <a:masterClrMapping/>
+  </p:clrMapOvr>
+</p:sld>
+</file>
+
+<file path=ppt/slides/slide8.xml><?xml version="1.0" encoding="utf-8"?>
+<p:sld xmlns:a="http://schemas.openxmlformats.org/drawingml/2006/main" xmlns:r="http://schemas.openxmlformats.org/officeDocument/2006/relationships" xmlns:p="http://schemas.openxmlformats.org/presentationml/2006/main">
+  <p:cSld name="Slide 8">
+    <p:spTree>
+      <p:nvGrpSpPr>
+        <p:cNvPr id="1" name=""/>
+        <p:cNvGrpSpPr/>
+        <p:nvPr/>
+      </p:nvGrpSpPr>
+      <p:grpSpPr>
+        <a:xfrm>
+          <a:off x="0" y="0"/>
+          <a:ext cx="0" cy="0"/>
+          <a:chOff x="0" y="0"/>
+          <a:chExt cx="0" cy="0"/>
+        </a:xfrm>
+      </p:grpSpPr>
+      <p:sp>
+        <p:nvSpPr>
+          <p:cNvPr id="2" name="Text 1"/>
+          <p:cNvSpPr/>
+          <p:nvPr>
+            <p:ph idx="102" type="title" hasCustomPrompt="1"/>
+          </p:nvPr>
+        </p:nvSpPr>
+        <p:spPr>
+          <a:xfrm>
+            <a:off x="548640" y="320040"/>
+            <a:ext cx="11094415" cy="822960"/>
+          </a:xfrm>
+          <a:prstGeom prst="rect">
+            <a:avLst/>
+          </a:prstGeom>
+          <a:noFill/>
+          <a:ln/>
+        </p:spPr>
+        <p:txBody>
+          <a:bodyPr wrap="square" lIns="0" tIns="0" rIns="0" bIns="0" rtlCol="0" anchor="ctr"/>
+          <a:lstStyle/>
+          <a:p>
+            <a:pPr algn="l" indent="0" marL="0">
+              <a:buNone/>
+            </a:pPr>
+            <a:r>
+              <a:rPr lang="en-US" sz="3400" b="1" dirty="0">
+                <a:solidFill>
+                  <a:srgbClr val="27303A"/>
+                </a:solidFill>
+              </a:rPr>
+              <a:t>Abschluss</a:t>
+            </a:r>
+            <a:endParaRPr lang="en-US" sz="3400" dirty="0"/>
+          </a:p>
+        </p:txBody>
+      </p:sp>
+      <p:sp>
+        <p:nvSpPr>
+          <p:cNvPr id="3" name="karte"/>
+          <p:cNvSpPr/>
+          <p:nvPr/>
+        </p:nvSpPr>
+        <p:spPr>
+          <a:xfrm>
+            <a:off x="548640" y="2446020"/>
+            <a:ext cx="5410048" cy="2468880"/>
+          </a:xfrm>
+          <a:prstGeom prst="roundRect">
+            <a:avLst>
+              <a:gd name="adj" fmla="val 4444"/>
+            </a:avLst>
+          </a:prstGeom>
+          <a:solidFill>
+            <a:srgbClr val="F7F7F7"/>
+          </a:solidFill>
+          <a:ln w="12700">
+            <a:solidFill>
+              <a:srgbClr val="F7F7F7"/>
+            </a:solidFill>
+            <a:prstDash val="solid"/>
+          </a:ln>
+        </p:spPr>
+      </p:sp>
+      <p:sp>
+        <p:nvSpPr>
+          <p:cNvPr id="4" name="icon-kreis-FaTrashAlt"/>
+          <p:cNvSpPr/>
+          <p:nvPr/>
+        </p:nvSpPr>
+        <p:spPr>
+          <a:xfrm>
+            <a:off x="822960" y="2720340"/>
+            <a:ext cx="640080" cy="640080"/>
+          </a:xfrm>
+          <a:prstGeom prst="ellipse">
+            <a:avLst/>
+          </a:prstGeom>
+          <a:solidFill>
+            <a:srgbClr val="006FAD"/>
+          </a:solidFill>
+          <a:ln w="12700">
+            <a:solidFill>
+              <a:srgbClr val="006FAD"/>
+            </a:solidFill>
+            <a:prstDash val="solid"/>
+          </a:ln>
+        </p:spPr>
+      </p:sp>
+      <p:pic>
+        <p:nvPicPr>
+          <p:cNvPr id="5" name="icon-FaTrashAlt" descr="C:\Users\Thanam\AppData\Local\Temp\claude\c--Projekt-Trainings-azure-basics-training\a7a6b8eb-22f3-4b42-aecc-5af05d1502b1\scratchpad\folien\assets\icons\FaTrashAlt.png">    </p:cNvPr>
+          <p:cNvPicPr>
+            <a:picLocks noChangeAspect="1"/>
+          </p:cNvPicPr>
+          <p:nvPr/>
+        </p:nvPicPr>
+        <p:blipFill>
+          <a:blip r:embed="rId1"/>
+          <a:stretch>
+            <a:fillRect/>
+          </a:stretch>
+        </p:blipFill>
+        <p:spPr>
+          <a:xfrm>
+            <a:off x="976579" y="2873959"/>
+            <a:ext cx="332842" cy="332842"/>
+          </a:xfrm>
+          <a:prstGeom prst="rect">
+            <a:avLst/>
+          </a:prstGeom>
+        </p:spPr>
+      </p:pic>
+      <p:sp>
+        <p:nvSpPr>
+          <p:cNvPr id="6" name="Text 3"/>
+          <p:cNvSpPr txBox="1"/>
+          <p:nvPr/>
+        </p:nvSpPr>
+        <p:spPr>
+          <a:xfrm>
+            <a:off x="1645920" y="2720340"/>
+            <a:ext cx="4084168" cy="640080"/>
+          </a:xfrm>
+          <a:prstGeom prst="rect">
+            <a:avLst/>
+          </a:prstGeom>
+          <a:noFill/>
+          <a:ln/>
+        </p:spPr>
+        <p:txBody>
+          <a:bodyPr wrap="square" lIns="0" tIns="0" rIns="0" bIns="0" rtlCol="0" anchor="ctr">
+            <a:normAutofit/>
+          </a:bodyPr>
+          <a:lstStyle/>
+          <a:p>
+            <a:pPr indent="0" marL="0">
+              <a:buNone/>
+            </a:pPr>
+            <a:r>
+              <a:rPr lang="en-US" sz="2000" b="1" dirty="0">
+                <a:solidFill>
+                  <a:srgbClr val="27303A"/>
+                </a:solidFill>
+              </a:rPr>
+              <a:t>Aufräumen</a:t>
+            </a:r>
+            <a:endParaRPr lang="en-US" sz="2000" dirty="0"/>
+          </a:p>
+        </p:txBody>
+      </p:sp>
+      <p:sp>
+        <p:nvSpPr>
+          <p:cNvPr id="7" name="Text 4"/>
+          <p:cNvSpPr txBox="1"/>
+          <p:nvPr/>
+        </p:nvSpPr>
+        <p:spPr>
+          <a:xfrm>
+            <a:off x="822960" y="3543300"/>
+            <a:ext cx="4861408" cy="1234440"/>
+          </a:xfrm>
+          <a:prstGeom prst="rect">
+            <a:avLst/>
+          </a:prstGeom>
+          <a:noFill/>
+          <a:ln/>
+        </p:spPr>
+        <p:txBody>
+          <a:bodyPr wrap="square" lIns="0" tIns="0" rIns="0" bIns="0" rtlCol="0" anchor="t"/>
+          <a:lstStyle/>
+          <a:p>
+            <a:pPr indent="0" marL="0">
+              <a:spcAft>
+                <a:spcPts val="400"/>
+              </a:spcAft>
+              <a:buNone/>
+            </a:pPr>
+            <a:r>
+              <a:rPr lang="en-US" sz="1600" dirty="0">
+                <a:solidFill>
+                  <a:srgbClr val="27303A"/>
+                </a:solidFill>
+              </a:rPr>
+              <a:t>multipass delete --purge --all · Den SSH-Schlüssel behalten – du brauchst ihn an Tag 3!</a:t>
+            </a:r>
+            <a:endParaRPr lang="en-US" sz="1600" dirty="0"/>
+          </a:p>
+        </p:txBody>
+      </p:sp>
+      <p:sp>
+        <p:nvSpPr>
+          <p:cNvPr id="8" name="karte"/>
+          <p:cNvSpPr/>
+          <p:nvPr/>
+        </p:nvSpPr>
+        <p:spPr>
+          <a:xfrm>
+            <a:off x="6233008" y="2446020"/>
+            <a:ext cx="5410048" cy="2468880"/>
+          </a:xfrm>
+          <a:prstGeom prst="roundRect">
+            <a:avLst>
+              <a:gd name="adj" fmla="val 4444"/>
+            </a:avLst>
+          </a:prstGeom>
+          <a:solidFill>
+            <a:srgbClr val="F7F7F7"/>
+          </a:solidFill>
+          <a:ln w="12700">
+            <a:solidFill>
+              <a:srgbClr val="F7F7F7"/>
+            </a:solidFill>
+            <a:prstDash val="solid"/>
+          </a:ln>
+        </p:spPr>
+      </p:sp>
+      <p:sp>
+        <p:nvSpPr>
+          <p:cNvPr id="9" name="icon-kreis-FaDoorOpen"/>
+          <p:cNvSpPr/>
+          <p:nvPr/>
+        </p:nvSpPr>
+        <p:spPr>
+          <a:xfrm>
+            <a:off x="6507328" y="2720340"/>
+            <a:ext cx="640080" cy="640080"/>
+          </a:xfrm>
+          <a:prstGeom prst="ellipse">
+            <a:avLst/>
+          </a:prstGeom>
+          <a:solidFill>
+            <a:srgbClr val="006FAD"/>
+          </a:solidFill>
+          <a:ln w="12700">
+            <a:solidFill>
+              <a:srgbClr val="006FAD"/>
+            </a:solidFill>
+            <a:prstDash val="solid"/>
+          </a:ln>
+        </p:spPr>
+      </p:sp>
+      <p:pic>
+        <p:nvPicPr>
+          <p:cNvPr id="10" name="icon-FaDoorOpen" descr="C:\Users\Thanam\AppData\Local\Temp\claude\c--Projekt-Trainings-azure-basics-training\a7a6b8eb-22f3-4b42-aecc-5af05d1502b1\scratchpad\folien\assets\icons\FaDoorOpen.png">    </p:cNvPr>
+          <p:cNvPicPr>
+            <a:picLocks noChangeAspect="1"/>
+          </p:cNvPicPr>
+          <p:nvPr/>
+        </p:nvPicPr>
+        <p:blipFill>
+          <a:blip r:embed="rId2"/>
+          <a:stretch>
+            <a:fillRect/>
+          </a:stretch>
+        </p:blipFill>
+        <p:spPr>
+          <a:xfrm>
+            <a:off x="6660947" y="2873959"/>
+            <a:ext cx="332842" cy="332842"/>
+          </a:xfrm>
+          <a:prstGeom prst="rect">
+            <a:avLst/>
+          </a:prstGeom>
+        </p:spPr>
+      </p:pic>
+      <p:sp>
+        <p:nvSpPr>
+          <p:cNvPr id="11" name="Text 7"/>
+          <p:cNvSpPr txBox="1"/>
+          <p:nvPr/>
+        </p:nvSpPr>
+        <p:spPr>
+          <a:xfrm>
+            <a:off x="7330288" y="2720340"/>
+            <a:ext cx="4084168" cy="640080"/>
+          </a:xfrm>
+          <a:prstGeom prst="rect">
+            <a:avLst/>
+          </a:prstGeom>
+          <a:noFill/>
+          <a:ln/>
+        </p:spPr>
+        <p:txBody>
+          <a:bodyPr wrap="square" lIns="0" tIns="0" rIns="0" bIns="0" rtlCol="0" anchor="ctr">
+            <a:normAutofit/>
+          </a:bodyPr>
+          <a:lstStyle/>
+          <a:p>
+            <a:pPr indent="0" marL="0">
+              <a:buNone/>
+            </a:pPr>
+            <a:r>
+              <a:rPr lang="en-US" sz="2000" b="1" dirty="0">
+                <a:solidFill>
+                  <a:srgbClr val="27303A"/>
+                </a:solidFill>
+              </a:rPr>
+              <a:t>Exit-Ticket</a:t>
+            </a:r>
+            <a:endParaRPr lang="en-US" sz="2000" dirty="0"/>
+          </a:p>
+        </p:txBody>
+      </p:sp>
+      <p:sp>
+        <p:nvSpPr>
+          <p:cNvPr id="12" name="Text 8"/>
+          <p:cNvSpPr txBox="1"/>
+          <p:nvPr/>
+        </p:nvSpPr>
+        <p:spPr>
+          <a:xfrm>
+            <a:off x="6507328" y="3543300"/>
+            <a:ext cx="4861408" cy="1234440"/>
+          </a:xfrm>
+          <a:prstGeom prst="rect">
+            <a:avLst/>
+          </a:prstGeom>
+          <a:noFill/>
+          <a:ln/>
+        </p:spPr>
+        <p:txBody>
+          <a:bodyPr wrap="square" lIns="0" tIns="0" rIns="0" bIns="0" rtlCol="0" anchor="t"/>
+          <a:lstStyle/>
+          <a:p>
+            <a:pPr indent="0" marL="0">
+              <a:spcAft>
+                <a:spcPts val="400"/>
+              </a:spcAft>
+              <a:buNone/>
+            </a:pPr>
+            <a:r>
+              <a:rPr lang="en-US" sz="1600" dirty="0">
+                <a:solidFill>
+                  <a:srgbClr val="27303A"/>
+                </a:solidFill>
+              </a:rPr>
+              <a:t>Was ist der grösste Unterschied zwischen deiner VM und einer VM in der Cloud?</a:t>
+            </a:r>
+            <a:endParaRPr lang="en-US" sz="1600" dirty="0"/>
           </a:p>
         </p:txBody>
       </p:sp>
@@ -11295,16 +8743,16 @@
       </p:grpSpPr>
       <p:sp>
         <p:nvSpPr>
-          <p:cNvPr id="2" name="Text 1"/>
+          <p:cNvPr id="2" name="Text 0"/>
           <p:cNvSpPr/>
           <p:nvPr>
-            <p:ph idx="102" type="title" hasCustomPrompt="1"/>
+            <p:ph idx="101" type="title" hasCustomPrompt="1"/>
           </p:nvPr>
         </p:nvSpPr>
         <p:spPr>
           <a:xfrm>
-            <a:off x="548640" y="320040"/>
-            <a:ext cx="11094415" cy="822960"/>
+            <a:off x="548640" y="1554480"/>
+            <a:ext cx="11094415" cy="914400"/>
           </a:xfrm>
           <a:prstGeom prst="rect">
             <a:avLst/>
@@ -11320,27 +8768,92 @@
               <a:buNone/>
             </a:pPr>
             <a:r>
-              <a:rPr lang="en-US" sz="3400" b="1" dirty="0">
+              <a:rPr lang="en-US" sz="4000" b="1" dirty="0">
                 <a:solidFill>
                   <a:srgbClr val="27303A"/>
                 </a:solidFill>
               </a:rPr>
-              <a:t>Bevor du startest</a:t>
+              <a:t>Nächstes Mal: ab in die Cloud</a:t>
             </a:r>
-            <a:endParaRPr lang="en-US" sz="3400" dirty="0"/>
+            <a:endParaRPr lang="en-US" sz="4000" dirty="0"/>
           </a:p>
         </p:txBody>
       </p:sp>
       <p:sp>
         <p:nvSpPr>
-          <p:cNvPr id="3" name="icon-kreis-FaMicrochip"/>
+          <p:cNvPr id="3" name="Text 0"/>
+          <p:cNvSpPr/>
+          <p:nvPr>
+            <p:ph idx="102" type="body" hasCustomPrompt="1"/>
+          </p:nvPr>
+        </p:nvSpPr>
+        <p:spPr>
+          <a:xfrm>
+            <a:off x="548640" y="2560320"/>
+            <a:ext cx="11094415" cy="640080"/>
+          </a:xfrm>
+          <a:prstGeom prst="rect">
+            <a:avLst/>
+          </a:prstGeom>
+          <a:noFill/>
+          <a:ln/>
+        </p:spPr>
+        <p:txBody>
+          <a:bodyPr wrap="square" lIns="0" tIns="0" rIns="0" bIns="0" rtlCol="0" anchor="t"/>
+          <a:lstStyle/>
+          <a:p>
+            <a:pPr algn="l" indent="0" marL="0">
+              <a:buNone/>
+            </a:pPr>
+            <a:r>
+              <a:rPr lang="en-US" sz="2000" dirty="0">
+                <a:solidFill>
+                  <a:srgbClr val="006FAD"/>
+                </a:solidFill>
+              </a:rPr>
+              <a:t>Tag 2 · Public Cloud und Azure Grundlagen</a:t>
+            </a:r>
+            <a:endParaRPr lang="en-US" sz="2000" dirty="0"/>
+          </a:p>
+        </p:txBody>
+      </p:sp>
+      <p:sp>
+        <p:nvSpPr>
+          <p:cNvPr id="4" name="karte"/>
           <p:cNvSpPr/>
           <p:nvPr/>
         </p:nvSpPr>
         <p:spPr>
           <a:xfrm>
-            <a:off x="548640" y="2446020"/>
-            <a:ext cx="548640" cy="548640"/>
+            <a:off x="548640" y="3611880"/>
+            <a:ext cx="5410048" cy="2103120"/>
+          </a:xfrm>
+          <a:prstGeom prst="roundRect">
+            <a:avLst>
+              <a:gd name="adj" fmla="val 5217"/>
+            </a:avLst>
+          </a:prstGeom>
+          <a:solidFill>
+            <a:srgbClr val="F7F7F7"/>
+          </a:solidFill>
+          <a:ln w="12700">
+            <a:solidFill>
+              <a:srgbClr val="F7F7F7"/>
+            </a:solidFill>
+            <a:prstDash val="solid"/>
+          </a:ln>
+        </p:spPr>
+      </p:sp>
+      <p:sp>
+        <p:nvSpPr>
+          <p:cNvPr id="5" name="icon-kreis-FaCloud"/>
+          <p:cNvSpPr/>
+          <p:nvPr/>
+        </p:nvSpPr>
+        <p:spPr>
+          <a:xfrm>
+            <a:off x="822960" y="3886200"/>
+            <a:ext cx="640080" cy="640080"/>
           </a:xfrm>
           <a:prstGeom prst="ellipse">
             <a:avLst/>
@@ -11358,7 +8871,7 @@
       </p:sp>
       <p:pic>
         <p:nvPicPr>
-          <p:cNvPr id="4" name="icon-FaMicrochip" descr="C:\Users\Thanam\AppData\Local\Temp\claude\c--Projekt-Trainings-azure-basics-training\a9e0bf4e-0d08-4082-a38a-5b8886538508\scratchpad\pptx\assets\icons\FaMicrochip.png">    </p:cNvPr>
+          <p:cNvPr id="6" name="icon-FaCloud" descr="C:\Users\Thanam\AppData\Local\Temp\claude\c--Projekt-Trainings-azure-basics-training\a7a6b8eb-22f3-4b42-aecc-5af05d1502b1\scratchpad\folien\assets\icons\FaCloud.png">    </p:cNvPr>
           <p:cNvPicPr>
             <a:picLocks noChangeAspect="1"/>
           </p:cNvPicPr>
@@ -11372,8 +8885,8 @@
         </p:blipFill>
         <p:spPr>
           <a:xfrm>
-            <a:off x="680314" y="2577694"/>
-            <a:ext cx="285293" cy="285293"/>
+            <a:off x="976579" y="4039819"/>
+            <a:ext cx="332842" cy="332842"/>
           </a:xfrm>
           <a:prstGeom prst="rect">
             <a:avLst/>
@@ -11382,14 +8895,14 @@
       </p:pic>
       <p:sp>
         <p:nvSpPr>
-          <p:cNvPr id="5" name="Text 2"/>
+          <p:cNvPr id="7" name="Text 4"/>
           <p:cNvSpPr txBox="1"/>
           <p:nvPr/>
         </p:nvSpPr>
         <p:spPr>
           <a:xfrm>
-            <a:off x="1325880" y="2240280"/>
-            <a:ext cx="10317175" cy="960120"/>
+            <a:off x="1645920" y="3886200"/>
+            <a:ext cx="4084168" cy="640080"/>
           </a:xfrm>
           <a:prstGeom prst="rect">
             <a:avLst/>
@@ -11405,41 +8918,90 @@
               <a:buNone/>
             </a:pPr>
             <a:r>
-              <a:rPr lang="en-US" sz="1800" b="1" dirty="0">
+              <a:rPr lang="en-US" sz="2000" b="1" dirty="0">
                 <a:solidFill>
                   <a:srgbClr val="27303A"/>
                 </a:solidFill>
               </a:rPr>
-              <a:t>Virtualisierung aktiv?</a:t>
+              <a:t>Hyperscaler</a:t>
             </a:r>
-            <a:endParaRPr lang="en-US" sz="1800" dirty="0"/>
-          </a:p>
+            <a:endParaRPr lang="en-US" sz="2000" dirty="0"/>
+          </a:p>
+        </p:txBody>
+      </p:sp>
+      <p:sp>
+        <p:nvSpPr>
+          <p:cNvPr id="8" name="Text 5"/>
+          <p:cNvSpPr txBox="1"/>
+          <p:nvPr/>
+        </p:nvSpPr>
+        <p:spPr>
+          <a:xfrm>
+            <a:off x="822960" y="4709160"/>
+            <a:ext cx="4861408" cy="868680"/>
+          </a:xfrm>
+          <a:prstGeom prst="rect">
+            <a:avLst/>
+          </a:prstGeom>
+          <a:noFill/>
+          <a:ln/>
+        </p:spPr>
+        <p:txBody>
+          <a:bodyPr wrap="square" lIns="0" tIns="0" rIns="0" bIns="0" rtlCol="0" anchor="t"/>
+          <a:lstStyle/>
           <a:p>
             <a:pPr indent="0" marL="0">
               <a:buNone/>
             </a:pPr>
             <a:r>
-              <a:rPr lang="en-US" sz="1800" dirty="0">
+              <a:rPr lang="en-US" sz="1600" dirty="0">
                 <a:solidFill>
-                  <a:srgbClr val="6F6F6F"/>
+                  <a:srgbClr val="27303A"/>
                 </a:solidFill>
               </a:rPr>
-              <a:t>Task-Manager &gt; Leistung &gt; CPU &gt; «Virtualisierung: Aktiviert»</a:t>
+              <a:t>Was passiert, wenn man tausende Hypervisoren zusammenschaltet?</a:t>
             </a:r>
-            <a:endParaRPr lang="en-US" sz="1800" dirty="0"/>
+            <a:endParaRPr lang="en-US" sz="1600" dirty="0"/>
           </a:p>
         </p:txBody>
       </p:sp>
       <p:sp>
         <p:nvSpPr>
-          <p:cNvPr id="6" name="icon-kreis-FaLaptop"/>
+          <p:cNvPr id="9" name="karte"/>
           <p:cNvSpPr/>
           <p:nvPr/>
         </p:nvSpPr>
         <p:spPr>
           <a:xfrm>
-            <a:off x="548640" y="3406140"/>
-            <a:ext cx="548640" cy="548640"/>
+            <a:off x="6233008" y="3611880"/>
+            <a:ext cx="5410048" cy="2103120"/>
+          </a:xfrm>
+          <a:prstGeom prst="roundRect">
+            <a:avLst>
+              <a:gd name="adj" fmla="val 5217"/>
+            </a:avLst>
+          </a:prstGeom>
+          <a:solidFill>
+            <a:srgbClr val="F7F7F7"/>
+          </a:solidFill>
+          <a:ln w="12700">
+            <a:solidFill>
+              <a:srgbClr val="F7F7F7"/>
+            </a:solidFill>
+            <a:prstDash val="solid"/>
+          </a:ln>
+        </p:spPr>
+      </p:sp>
+      <p:sp>
+        <p:nvSpPr>
+          <p:cNvPr id="10" name="icon-kreis-FaKey"/>
+          <p:cNvSpPr/>
+          <p:nvPr/>
+        </p:nvSpPr>
+        <p:spPr>
+          <a:xfrm>
+            <a:off x="6507328" y="3886200"/>
+            <a:ext cx="640080" cy="640080"/>
           </a:xfrm>
           <a:prstGeom prst="ellipse">
             <a:avLst/>
@@ -11457,7 +9019,7 @@
       </p:sp>
       <p:pic>
         <p:nvPicPr>
-          <p:cNvPr id="7" name="icon-FaLaptop" descr="C:\Users\Thanam\AppData\Local\Temp\claude\c--Projekt-Trainings-azure-basics-training\a9e0bf4e-0d08-4082-a38a-5b8886538508\scratchpad\pptx\assets\icons\FaLaptop.png">    </p:cNvPr>
+          <p:cNvPr id="11" name="icon-FaKey" descr="C:\Users\Thanam\AppData\Local\Temp\claude\c--Projekt-Trainings-azure-basics-training\a7a6b8eb-22f3-4b42-aecc-5af05d1502b1\scratchpad\folien\assets\icons\FaKey.png">    </p:cNvPr>
           <p:cNvPicPr>
             <a:picLocks noChangeAspect="1"/>
           </p:cNvPicPr>
@@ -11471,8 +9033,8 @@
         </p:blipFill>
         <p:spPr>
           <a:xfrm>
-            <a:off x="680314" y="3537814"/>
-            <a:ext cx="285293" cy="285293"/>
+            <a:off x="6660947" y="4039819"/>
+            <a:ext cx="332842" cy="332842"/>
           </a:xfrm>
           <a:prstGeom prst="rect">
             <a:avLst/>
@@ -11481,14 +9043,14 @@
       </p:pic>
       <p:sp>
         <p:nvSpPr>
-          <p:cNvPr id="8" name="Text 4"/>
+          <p:cNvPr id="12" name="Text 8"/>
           <p:cNvSpPr txBox="1"/>
           <p:nvPr/>
         </p:nvSpPr>
         <p:spPr>
           <a:xfrm>
-            <a:off x="1325880" y="3200400"/>
-            <a:ext cx="10317175" cy="960120"/>
+            <a:off x="7330288" y="3886200"/>
+            <a:ext cx="4084168" cy="640080"/>
           </a:xfrm>
           <a:prstGeom prst="rect">
             <a:avLst/>
@@ -11504,172 +9066,50 @@
               <a:buNone/>
             </a:pPr>
             <a:r>
-              <a:rPr lang="en-US" sz="1800" b="1" dirty="0">
+              <a:rPr lang="en-US" sz="2000" b="1" dirty="0">
                 <a:solidFill>
                   <a:srgbClr val="27303A"/>
                 </a:solidFill>
               </a:rPr>
-              <a:t>Windows Pro oder Education?</a:t>
+              <a:t>Azure for Students</a:t>
             </a:r>
-            <a:endParaRPr lang="en-US" sz="1800" dirty="0"/>
-          </a:p>
+            <a:endParaRPr lang="en-US" sz="2000" dirty="0"/>
+          </a:p>
+        </p:txBody>
+      </p:sp>
+      <p:sp>
+        <p:nvSpPr>
+          <p:cNvPr id="13" name="Text 9"/>
+          <p:cNvSpPr txBox="1"/>
+          <p:nvPr/>
+        </p:nvSpPr>
+        <p:spPr>
+          <a:xfrm>
+            <a:off x="6507328" y="4709160"/>
+            <a:ext cx="4861408" cy="868680"/>
+          </a:xfrm>
+          <a:prstGeom prst="rect">
+            <a:avLst/>
+          </a:prstGeom>
+          <a:noFill/>
+          <a:ln/>
+        </p:spPr>
+        <p:txBody>
+          <a:bodyPr wrap="square" lIns="0" tIns="0" rIns="0" bIns="0" rtlCol="0" anchor="t"/>
+          <a:lstStyle/>
           <a:p>
             <a:pPr indent="0" marL="0">
               <a:buNone/>
             </a:pPr>
             <a:r>
-              <a:rPr lang="en-US" sz="1800" dirty="0">
-                <a:solidFill>
-                  <a:srgbClr val="6F6F6F"/>
-                </a:solidFill>
-              </a:rPr>
-              <a:t>Dann ist Hyper-V eingebaut. Bei Windows Home: Kursleitung holen.</a:t>
-            </a:r>
-            <a:endParaRPr lang="en-US" sz="1800" dirty="0"/>
-          </a:p>
-        </p:txBody>
-      </p:sp>
-      <p:sp>
-        <p:nvSpPr>
-          <p:cNvPr id="9" name="icon-kreis-FaHdd"/>
-          <p:cNvSpPr/>
-          <p:nvPr/>
-        </p:nvSpPr>
-        <p:spPr>
-          <a:xfrm>
-            <a:off x="548640" y="4366260"/>
-            <a:ext cx="548640" cy="548640"/>
-          </a:xfrm>
-          <a:prstGeom prst="ellipse">
-            <a:avLst/>
-          </a:prstGeom>
-          <a:solidFill>
-            <a:srgbClr val="006FAD"/>
-          </a:solidFill>
-          <a:ln w="12700">
-            <a:solidFill>
-              <a:srgbClr val="006FAD"/>
-            </a:solidFill>
-            <a:prstDash val="solid"/>
-          </a:ln>
-        </p:spPr>
-      </p:sp>
-      <p:pic>
-        <p:nvPicPr>
-          <p:cNvPr id="10" name="icon-FaHdd" descr="C:\Users\Thanam\AppData\Local\Temp\claude\c--Projekt-Trainings-azure-basics-training\a9e0bf4e-0d08-4082-a38a-5b8886538508\scratchpad\pptx\assets\icons\FaHdd.png">    </p:cNvPr>
-          <p:cNvPicPr>
-            <a:picLocks noChangeAspect="1"/>
-          </p:cNvPicPr>
-          <p:nvPr/>
-        </p:nvPicPr>
-        <p:blipFill>
-          <a:blip r:embed="rId3"/>
-          <a:stretch>
-            <a:fillRect/>
-          </a:stretch>
-        </p:blipFill>
-        <p:spPr>
-          <a:xfrm>
-            <a:off x="680314" y="4497934"/>
-            <a:ext cx="285293" cy="285293"/>
-          </a:xfrm>
-          <a:prstGeom prst="rect">
-            <a:avLst/>
-          </a:prstGeom>
-        </p:spPr>
-      </p:pic>
-      <p:sp>
-        <p:nvSpPr>
-          <p:cNvPr id="11" name="Text 6"/>
-          <p:cNvSpPr txBox="1"/>
-          <p:nvPr/>
-        </p:nvSpPr>
-        <p:spPr>
-          <a:xfrm>
-            <a:off x="1325880" y="4160520"/>
-            <a:ext cx="10317175" cy="960120"/>
-          </a:xfrm>
-          <a:prstGeom prst="rect">
-            <a:avLst/>
-          </a:prstGeom>
-          <a:noFill/>
-          <a:ln/>
-        </p:spPr>
-        <p:txBody>
-          <a:bodyPr wrap="square" lIns="0" tIns="0" rIns="0" bIns="0" rtlCol="0" anchor="ctr"/>
-          <a:lstStyle/>
-          <a:p>
-            <a:pPr indent="0" marL="0">
-              <a:buNone/>
-            </a:pPr>
-            <a:r>
-              <a:rPr lang="en-US" sz="1800" b="1" dirty="0">
+              <a:rPr lang="en-US" sz="1600" dirty="0">
                 <a:solidFill>
                   <a:srgbClr val="27303A"/>
                 </a:solidFill>
               </a:rPr>
-              <a:t>Genug Platz?</a:t>
+              <a:t>Login testen: portal.azure.com</a:t>
             </a:r>
-            <a:endParaRPr lang="en-US" sz="1800" dirty="0"/>
-          </a:p>
-          <a:p>
-            <a:pPr indent="0" marL="0">
-              <a:buNone/>
-            </a:pPr>
-            <a:r>
-              <a:rPr lang="en-US" sz="1800" dirty="0">
-                <a:solidFill>
-                  <a:srgbClr val="6F6F6F"/>
-                </a:solidFill>
-              </a:rPr>
-              <a:t>Mindestens 15 GB frei. Multipass lädt Ubuntu selbst herunter.</a:t>
-            </a:r>
-            <a:endParaRPr lang="en-US" sz="1800" dirty="0"/>
-          </a:p>
-        </p:txBody>
-      </p:sp>
-      <p:sp>
-        <p:nvSpPr>
-          <p:cNvPr id="25" name="Slide Number Placeholder 0"/>
-          <p:cNvSpPr>
-            <a:spLocks noGrp="1"/>
-          </p:cNvSpPr>
-          <p:nvPr>
-            <p:ph type="sldNum" sz="quarter" idx="4294967295"/>
-          </p:nvPr>
-        </p:nvSpPr>
-        <p:spPr>
-          <a:xfrm>
-            <a:off x="11183112" y="6336792"/>
-            <a:ext cx="457200" cy="365760"/>
-          </a:xfrm>
-          <a:prstGeom prst="rect">
-            <a:avLst/>
-          </a:prstGeom>
-          <a:extLst>
-            <a:ext uri="{C572A759-6A51-4108-AA02-DFA0A04FC94B}">
-              <ma14:wrappingTextBoxFlag xmlns:ma14="http://schemas.microsoft.com/office/mac/drawingml/2011/main" val="0"/>
-            </a:ext>
-          </a:extLst>
-        </p:spPr>
-        <p:txBody>
-          <a:bodyPr/>
-          <a:lstStyle>
-            <a:lvl1pPr>
-              <a:defRPr sz="1000">
-                <a:solidFill>
-                  <a:srgbClr val="6F6F6F"/>
-                </a:solidFill>
-              </a:defRPr>
-            </a:lvl1pPr>
-          </a:lstStyle>
-          <a:p>
-            <a:pPr algn="r"/>
-            <a:fld id="{F7021451-1387-4CA6-816F-3879F97B5CBC}" type="slidenum">
-              <a:rPr b="0" lang="en-US"/>
-              <a:t>9</a:t>
-            </a:fld>
-            <a:endParaRPr lang="en-US"/>
+            <a:endParaRPr lang="en-US" sz="1600" dirty="0"/>
           </a:p>
         </p:txBody>
       </p:sp>

--- a/praesentationen/tag-1-virtualisierung.pptx
+++ b/praesentationen/tag-1-virtualisierung.pptx
@@ -115,13 +115,13 @@
   <p:extLst>
     <p:ext uri="{521415D9-36F7-43E2-AB2F-B90AF26B5E84}">
       <p14:sectionLst xmlns:p14="http://schemas.microsoft.com/office/powerpoint/2010/main">
-        <p14:section name="Start" id="{7f4df3f6-18b2-a2b5-0478-268eb239de84}">
+        <p14:section name="Start" id="{4a743b04-9738-e4b6-9ded-bb496239763e}">
           <p14:sldIdLst>
             <p14:sldId id="256"/>
             <p14:sldId id="257"/>
           </p14:sldIdLst>
         </p14:section>
-        <p14:section name="Heute" id="{1ea09e53-3192-7f96-1ad7-7cd7c1ad9e67}">
+        <p14:section name="Heute" id="{f59feb66-1eb2-07c6-f9a7-9a266a9cd271}">
           <p14:sldIdLst>
             <p14:sldId id="258"/>
             <p14:sldId id="259"/>
@@ -130,7 +130,7 @@
             <p14:sldId id="262"/>
           </p14:sldIdLst>
         </p14:section>
-        <p14:section name="Abschluss" id="{19b5401e-bad2-a4ef-bf46-a17fece41dbc}">
+        <p14:section name="Abschluss" id="{d4c4a20e-04c6-3fdd-525e-14dde7e44c1b}">
           <p14:sldIdLst>
             <p14:sldId id="263"/>
             <p14:sldId id="264"/>
@@ -4211,7 +4211,7 @@
                             <a:srgbClr val="27303A"/>
                           </a:solidFill>
                         </a:rPr>
-                        <a:t>Hands-on, Demo</a:t>
+                        <a:t>Hands-on</a:t>
                       </a:r>
                       <a:endParaRPr lang="en-US" sz="1700" dirty="0"/>
                     </a:p>
@@ -4272,7 +4272,7 @@
                             <a:srgbClr val="27303A"/>
                           </a:solidFill>
                         </a:rPr>
-                        <a:t>Lernjournal anlegen · Auftrag 1.1: Hypervisor und dein Laptop · Live-Demo Multipass</a:t>
+                        <a:t>Auftrag 1.0: Dein Lernjournal · Auftrag 1.1: Hypervisor und dein Laptop</a:t>
                       </a:r>
                       <a:endParaRPr lang="en-US" sz="1700" dirty="0"/>
                     </a:p>
@@ -4396,7 +4396,7 @@
                             <a:srgbClr val="27303A"/>
                           </a:solidFill>
                         </a:rPr>
-                        <a:t>Hands-on</a:t>
+                        <a:t>Demo, Hands-on</a:t>
                       </a:r>
                       <a:endParaRPr lang="en-US" sz="1700" dirty="0"/>
                     </a:p>
@@ -4457,7 +4457,7 @@
                             <a:srgbClr val="27303A"/>
                           </a:solidFill>
                         </a:rPr>
-                        <a:t>Auftrag 1.2: Multipass und deine erste VM · 1.3: CPU und RAM</a:t>
+                        <a:t>Live-Demo Multipass · Auftrag 1.2: Multipass und deine erste VM · 1.3: CPU und RAM</a:t>
                       </a:r>
                       <a:endParaRPr lang="en-US" sz="1700" dirty="0"/>
                     </a:p>
@@ -5646,6 +5646,252 @@
                             <a:srgbClr val="27303A"/>
                           </a:solidFill>
                         </a:rPr>
+                        <a:t>1.0</a:t>
+                      </a:r>
+                      <a:endParaRPr lang="en-US" sz="1700" dirty="0"/>
+                    </a:p>
+                  </a:txBody>
+                  <a:tcPr marL="127000" marR="127000" marT="88900" marB="88900" anchor="ctr">
+                    <a:lnL w="9525" cap="flat" cmpd="sng" algn="ctr">
+                      <a:solidFill>
+                        <a:srgbClr val="D5D8F4"/>
+                      </a:solidFill>
+                      <a:prstDash val="solid"/>
+                      <a:round/>
+                      <a:headEnd type="none" w="med" len="med"/>
+                      <a:tailEnd type="none" w="med" len="med"/>
+                    </a:lnL>
+                    <a:lnR w="9525" cap="flat" cmpd="sng" algn="ctr">
+                      <a:solidFill>
+                        <a:srgbClr val="D5D8F4"/>
+                      </a:solidFill>
+                      <a:prstDash val="solid"/>
+                      <a:round/>
+                      <a:headEnd type="none" w="med" len="med"/>
+                      <a:tailEnd type="none" w="med" len="med"/>
+                    </a:lnR>
+                    <a:lnT w="9525" cap="flat" cmpd="sng" algn="ctr">
+                      <a:solidFill>
+                        <a:srgbClr val="D5D8F4"/>
+                      </a:solidFill>
+                      <a:prstDash val="solid"/>
+                      <a:round/>
+                      <a:headEnd type="none" w="med" len="med"/>
+                      <a:tailEnd type="none" w="med" len="med"/>
+                    </a:lnT>
+                    <a:lnB w="9525" cap="flat" cmpd="sng" algn="ctr">
+                      <a:solidFill>
+                        <a:srgbClr val="D5D8F4"/>
+                      </a:solidFill>
+                      <a:prstDash val="solid"/>
+                      <a:round/>
+                      <a:headEnd type="none" w="med" len="med"/>
+                      <a:tailEnd type="none" w="med" len="med"/>
+                    </a:lnB>
+                    <a:solidFill>
+                      <a:srgbClr val="F7F7F7"/>
+                    </a:solidFill>
+                  </a:tcPr>
+                </a:tc>
+                <a:tc>
+                  <a:txBody>
+                    <a:bodyPr/>
+                    <a:lstStyle/>
+                    <a:p>
+                      <a:pPr indent="0" marL="0">
+                        <a:buNone/>
+                      </a:pPr>
+                      <a:r>
+                        <a:rPr lang="en-US" sz="1700" dirty="0">
+                          <a:solidFill>
+                            <a:srgbClr val="27303A"/>
+                          </a:solidFill>
+                        </a:rPr>
+                        <a:t>Dein Lernjournal auf GitHub oder GitLab</a:t>
+                      </a:r>
+                      <a:endParaRPr lang="en-US" sz="1700" dirty="0"/>
+                    </a:p>
+                  </a:txBody>
+                  <a:tcPr marL="127000" marR="127000" marT="88900" marB="88900" anchor="ctr">
+                    <a:lnL w="9525" cap="flat" cmpd="sng" algn="ctr">
+                      <a:solidFill>
+                        <a:srgbClr val="D5D8F4"/>
+                      </a:solidFill>
+                      <a:prstDash val="solid"/>
+                      <a:round/>
+                      <a:headEnd type="none" w="med" len="med"/>
+                      <a:tailEnd type="none" w="med" len="med"/>
+                    </a:lnL>
+                    <a:lnR w="9525" cap="flat" cmpd="sng" algn="ctr">
+                      <a:solidFill>
+                        <a:srgbClr val="D5D8F4"/>
+                      </a:solidFill>
+                      <a:prstDash val="solid"/>
+                      <a:round/>
+                      <a:headEnd type="none" w="med" len="med"/>
+                      <a:tailEnd type="none" w="med" len="med"/>
+                    </a:lnR>
+                    <a:lnT w="9525" cap="flat" cmpd="sng" algn="ctr">
+                      <a:solidFill>
+                        <a:srgbClr val="D5D8F4"/>
+                      </a:solidFill>
+                      <a:prstDash val="solid"/>
+                      <a:round/>
+                      <a:headEnd type="none" w="med" len="med"/>
+                      <a:tailEnd type="none" w="med" len="med"/>
+                    </a:lnT>
+                    <a:lnB w="9525" cap="flat" cmpd="sng" algn="ctr">
+                      <a:solidFill>
+                        <a:srgbClr val="D5D8F4"/>
+                      </a:solidFill>
+                      <a:prstDash val="solid"/>
+                      <a:round/>
+                      <a:headEnd type="none" w="med" len="med"/>
+                      <a:tailEnd type="none" w="med" len="med"/>
+                    </a:lnB>
+                    <a:solidFill>
+                      <a:srgbClr val="F7F7F7"/>
+                    </a:solidFill>
+                  </a:tcPr>
+                </a:tc>
+                <a:tc>
+                  <a:txBody>
+                    <a:bodyPr/>
+                    <a:lstStyle/>
+                    <a:p>
+                      <a:pPr indent="0" marL="0">
+                        <a:buNone/>
+                      </a:pPr>
+                      <a:r>
+                        <a:rPr lang="en-US" sz="1700" dirty="0">
+                          <a:solidFill>
+                            <a:srgbClr val="27303A"/>
+                          </a:solidFill>
+                        </a:rPr>
+                        <a:t>25 Min.</a:t>
+                      </a:r>
+                      <a:endParaRPr lang="en-US" sz="1700" dirty="0"/>
+                    </a:p>
+                  </a:txBody>
+                  <a:tcPr marL="127000" marR="127000" marT="88900" marB="88900" anchor="ctr">
+                    <a:lnL w="9525" cap="flat" cmpd="sng" algn="ctr">
+                      <a:solidFill>
+                        <a:srgbClr val="D5D8F4"/>
+                      </a:solidFill>
+                      <a:prstDash val="solid"/>
+                      <a:round/>
+                      <a:headEnd type="none" w="med" len="med"/>
+                      <a:tailEnd type="none" w="med" len="med"/>
+                    </a:lnL>
+                    <a:lnR w="9525" cap="flat" cmpd="sng" algn="ctr">
+                      <a:solidFill>
+                        <a:srgbClr val="D5D8F4"/>
+                      </a:solidFill>
+                      <a:prstDash val="solid"/>
+                      <a:round/>
+                      <a:headEnd type="none" w="med" len="med"/>
+                      <a:tailEnd type="none" w="med" len="med"/>
+                    </a:lnR>
+                    <a:lnT w="9525" cap="flat" cmpd="sng" algn="ctr">
+                      <a:solidFill>
+                        <a:srgbClr val="D5D8F4"/>
+                      </a:solidFill>
+                      <a:prstDash val="solid"/>
+                      <a:round/>
+                      <a:headEnd type="none" w="med" len="med"/>
+                      <a:tailEnd type="none" w="med" len="med"/>
+                    </a:lnT>
+                    <a:lnB w="9525" cap="flat" cmpd="sng" algn="ctr">
+                      <a:solidFill>
+                        <a:srgbClr val="D5D8F4"/>
+                      </a:solidFill>
+                      <a:prstDash val="solid"/>
+                      <a:round/>
+                      <a:headEnd type="none" w="med" len="med"/>
+                      <a:tailEnd type="none" w="med" len="med"/>
+                    </a:lnB>
+                    <a:solidFill>
+                      <a:srgbClr val="F7F7F7"/>
+                    </a:solidFill>
+                  </a:tcPr>
+                </a:tc>
+                <a:tc>
+                  <a:txBody>
+                    <a:bodyPr/>
+                    <a:lstStyle/>
+                    <a:p>
+                      <a:pPr indent="0" marL="0">
+                        <a:buNone/>
+                      </a:pPr>
+                      <a:r>
+                        <a:rPr lang="en-US" sz="1700" dirty="0">
+                          <a:solidFill>
+                            <a:srgbClr val="27303A"/>
+                          </a:solidFill>
+                        </a:rPr>
+                        <a:t>Einzel</a:t>
+                      </a:r>
+                      <a:endParaRPr lang="en-US" sz="1700" dirty="0"/>
+                    </a:p>
+                  </a:txBody>
+                  <a:tcPr marL="127000" marR="127000" marT="88900" marB="88900" anchor="ctr">
+                    <a:lnL w="9525" cap="flat" cmpd="sng" algn="ctr">
+                      <a:solidFill>
+                        <a:srgbClr val="D5D8F4"/>
+                      </a:solidFill>
+                      <a:prstDash val="solid"/>
+                      <a:round/>
+                      <a:headEnd type="none" w="med" len="med"/>
+                      <a:tailEnd type="none" w="med" len="med"/>
+                    </a:lnL>
+                    <a:lnR w="9525" cap="flat" cmpd="sng" algn="ctr">
+                      <a:solidFill>
+                        <a:srgbClr val="D5D8F4"/>
+                      </a:solidFill>
+                      <a:prstDash val="solid"/>
+                      <a:round/>
+                      <a:headEnd type="none" w="med" len="med"/>
+                      <a:tailEnd type="none" w="med" len="med"/>
+                    </a:lnR>
+                    <a:lnT w="9525" cap="flat" cmpd="sng" algn="ctr">
+                      <a:solidFill>
+                        <a:srgbClr val="D5D8F4"/>
+                      </a:solidFill>
+                      <a:prstDash val="solid"/>
+                      <a:round/>
+                      <a:headEnd type="none" w="med" len="med"/>
+                      <a:tailEnd type="none" w="med" len="med"/>
+                    </a:lnT>
+                    <a:lnB w="9525" cap="flat" cmpd="sng" algn="ctr">
+                      <a:solidFill>
+                        <a:srgbClr val="D5D8F4"/>
+                      </a:solidFill>
+                      <a:prstDash val="solid"/>
+                      <a:round/>
+                      <a:headEnd type="none" w="med" len="med"/>
+                      <a:tailEnd type="none" w="med" len="med"/>
+                    </a:lnB>
+                    <a:solidFill>
+                      <a:srgbClr val="F7F7F7"/>
+                    </a:solidFill>
+                  </a:tcPr>
+                </a:tc>
+              </a:tr>
+              <a:tr h="0">
+                <a:tc>
+                  <a:txBody>
+                    <a:bodyPr/>
+                    <a:lstStyle/>
+                    <a:p>
+                      <a:pPr indent="0" marL="0">
+                        <a:buNone/>
+                      </a:pPr>
+                      <a:r>
+                        <a:rPr lang="en-US" sz="1700" dirty="0">
+                          <a:solidFill>
+                            <a:srgbClr val="27303A"/>
+                          </a:solidFill>
+                        </a:rPr>
                         <a:t>1.1</a:t>
                       </a:r>
                       <a:endParaRPr lang="en-US" sz="1700" dirty="0"/>
@@ -5689,7 +5935,7 @@
                       <a:tailEnd type="none" w="med" len="med"/>
                     </a:lnB>
                     <a:solidFill>
-                      <a:srgbClr val="F7F7F7"/>
+                      <a:srgbClr val="FFFFFF"/>
                     </a:solidFill>
                   </a:tcPr>
                 </a:tc>
@@ -5750,7 +5996,7 @@
                       <a:tailEnd type="none" w="med" len="med"/>
                     </a:lnB>
                     <a:solidFill>
-                      <a:srgbClr val="F7F7F7"/>
+                      <a:srgbClr val="FFFFFF"/>
                     </a:solidFill>
                   </a:tcPr>
                 </a:tc>
@@ -5811,7 +6057,7 @@
                       <a:tailEnd type="none" w="med" len="med"/>
                     </a:lnB>
                     <a:solidFill>
-                      <a:srgbClr val="F7F7F7"/>
+                      <a:srgbClr val="FFFFFF"/>
                     </a:solidFill>
                   </a:tcPr>
                 </a:tc>
@@ -5872,7 +6118,7 @@
                       <a:tailEnd type="none" w="med" len="med"/>
                     </a:lnB>
                     <a:solidFill>
-                      <a:srgbClr val="F7F7F7"/>
+                      <a:srgbClr val="FFFFFF"/>
                     </a:solidFill>
                   </a:tcPr>
                 </a:tc>
@@ -5935,7 +6181,7 @@
                       <a:tailEnd type="none" w="med" len="med"/>
                     </a:lnB>
                     <a:solidFill>
-                      <a:srgbClr val="FFFFFF"/>
+                      <a:srgbClr val="F7F7F7"/>
                     </a:solidFill>
                   </a:tcPr>
                 </a:tc>
@@ -5996,6 +6242,191 @@
                       <a:tailEnd type="none" w="med" len="med"/>
                     </a:lnB>
                     <a:solidFill>
+                      <a:srgbClr val="F7F7F7"/>
+                    </a:solidFill>
+                  </a:tcPr>
+                </a:tc>
+                <a:tc>
+                  <a:txBody>
+                    <a:bodyPr/>
+                    <a:lstStyle/>
+                    <a:p>
+                      <a:pPr indent="0" marL="0">
+                        <a:buNone/>
+                      </a:pPr>
+                      <a:r>
+                        <a:rPr lang="en-US" sz="1700" dirty="0">
+                          <a:solidFill>
+                            <a:srgbClr val="27303A"/>
+                          </a:solidFill>
+                        </a:rPr>
+                        <a:t>60 Min.</a:t>
+                      </a:r>
+                      <a:endParaRPr lang="en-US" sz="1700" dirty="0"/>
+                    </a:p>
+                  </a:txBody>
+                  <a:tcPr marL="127000" marR="127000" marT="88900" marB="88900" anchor="ctr">
+                    <a:lnL w="9525" cap="flat" cmpd="sng" algn="ctr">
+                      <a:solidFill>
+                        <a:srgbClr val="D5D8F4"/>
+                      </a:solidFill>
+                      <a:prstDash val="solid"/>
+                      <a:round/>
+                      <a:headEnd type="none" w="med" len="med"/>
+                      <a:tailEnd type="none" w="med" len="med"/>
+                    </a:lnL>
+                    <a:lnR w="9525" cap="flat" cmpd="sng" algn="ctr">
+                      <a:solidFill>
+                        <a:srgbClr val="D5D8F4"/>
+                      </a:solidFill>
+                      <a:prstDash val="solid"/>
+                      <a:round/>
+                      <a:headEnd type="none" w="med" len="med"/>
+                      <a:tailEnd type="none" w="med" len="med"/>
+                    </a:lnR>
+                    <a:lnT w="9525" cap="flat" cmpd="sng" algn="ctr">
+                      <a:solidFill>
+                        <a:srgbClr val="D5D8F4"/>
+                      </a:solidFill>
+                      <a:prstDash val="solid"/>
+                      <a:round/>
+                      <a:headEnd type="none" w="med" len="med"/>
+                      <a:tailEnd type="none" w="med" len="med"/>
+                    </a:lnT>
+                    <a:lnB w="9525" cap="flat" cmpd="sng" algn="ctr">
+                      <a:solidFill>
+                        <a:srgbClr val="D5D8F4"/>
+                      </a:solidFill>
+                      <a:prstDash val="solid"/>
+                      <a:round/>
+                      <a:headEnd type="none" w="med" len="med"/>
+                      <a:tailEnd type="none" w="med" len="med"/>
+                    </a:lnB>
+                    <a:solidFill>
+                      <a:srgbClr val="F7F7F7"/>
+                    </a:solidFill>
+                  </a:tcPr>
+                </a:tc>
+                <a:tc>
+                  <a:txBody>
+                    <a:bodyPr/>
+                    <a:lstStyle/>
+                    <a:p>
+                      <a:pPr indent="0" marL="0">
+                        <a:buNone/>
+                      </a:pPr>
+                      <a:r>
+                        <a:rPr lang="en-US" sz="1700" dirty="0">
+                          <a:solidFill>
+                            <a:srgbClr val="27303A"/>
+                          </a:solidFill>
+                        </a:rPr>
+                        <a:t>Einzel</a:t>
+                      </a:r>
+                      <a:endParaRPr lang="en-US" sz="1700" dirty="0"/>
+                    </a:p>
+                  </a:txBody>
+                  <a:tcPr marL="127000" marR="127000" marT="88900" marB="88900" anchor="ctr">
+                    <a:lnL w="9525" cap="flat" cmpd="sng" algn="ctr">
+                      <a:solidFill>
+                        <a:srgbClr val="D5D8F4"/>
+                      </a:solidFill>
+                      <a:prstDash val="solid"/>
+                      <a:round/>
+                      <a:headEnd type="none" w="med" len="med"/>
+                      <a:tailEnd type="none" w="med" len="med"/>
+                    </a:lnL>
+                    <a:lnR w="9525" cap="flat" cmpd="sng" algn="ctr">
+                      <a:solidFill>
+                        <a:srgbClr val="D5D8F4"/>
+                      </a:solidFill>
+                      <a:prstDash val="solid"/>
+                      <a:round/>
+                      <a:headEnd type="none" w="med" len="med"/>
+                      <a:tailEnd type="none" w="med" len="med"/>
+                    </a:lnR>
+                    <a:lnT w="9525" cap="flat" cmpd="sng" algn="ctr">
+                      <a:solidFill>
+                        <a:srgbClr val="D5D8F4"/>
+                      </a:solidFill>
+                      <a:prstDash val="solid"/>
+                      <a:round/>
+                      <a:headEnd type="none" w="med" len="med"/>
+                      <a:tailEnd type="none" w="med" len="med"/>
+                    </a:lnT>
+                    <a:lnB w="9525" cap="flat" cmpd="sng" algn="ctr">
+                      <a:solidFill>
+                        <a:srgbClr val="D5D8F4"/>
+                      </a:solidFill>
+                      <a:prstDash val="solid"/>
+                      <a:round/>
+                      <a:headEnd type="none" w="med" len="med"/>
+                      <a:tailEnd type="none" w="med" len="med"/>
+                    </a:lnB>
+                    <a:solidFill>
+                      <a:srgbClr val="F7F7F7"/>
+                    </a:solidFill>
+                  </a:tcPr>
+                </a:tc>
+              </a:tr>
+              <a:tr h="0">
+                <a:tc>
+                  <a:txBody>
+                    <a:bodyPr/>
+                    <a:lstStyle/>
+                    <a:p>
+                      <a:pPr indent="0" marL="0">
+                        <a:buNone/>
+                      </a:pPr>
+                      <a:r>
+                        <a:rPr lang="en-US" sz="1700" dirty="0">
+                          <a:solidFill>
+                            <a:srgbClr val="27303A"/>
+                          </a:solidFill>
+                        </a:rPr>
+                        <a:t>1.3</a:t>
+                      </a:r>
+                      <a:endParaRPr lang="en-US" sz="1700" dirty="0"/>
+                    </a:p>
+                  </a:txBody>
+                  <a:tcPr marL="127000" marR="127000" marT="88900" marB="88900" anchor="ctr">
+                    <a:lnL w="9525" cap="flat" cmpd="sng" algn="ctr">
+                      <a:solidFill>
+                        <a:srgbClr val="D5D8F4"/>
+                      </a:solidFill>
+                      <a:prstDash val="solid"/>
+                      <a:round/>
+                      <a:headEnd type="none" w="med" len="med"/>
+                      <a:tailEnd type="none" w="med" len="med"/>
+                    </a:lnL>
+                    <a:lnR w="9525" cap="flat" cmpd="sng" algn="ctr">
+                      <a:solidFill>
+                        <a:srgbClr val="D5D8F4"/>
+                      </a:solidFill>
+                      <a:prstDash val="solid"/>
+                      <a:round/>
+                      <a:headEnd type="none" w="med" len="med"/>
+                      <a:tailEnd type="none" w="med" len="med"/>
+                    </a:lnR>
+                    <a:lnT w="9525" cap="flat" cmpd="sng" algn="ctr">
+                      <a:solidFill>
+                        <a:srgbClr val="D5D8F4"/>
+                      </a:solidFill>
+                      <a:prstDash val="solid"/>
+                      <a:round/>
+                      <a:headEnd type="none" w="med" len="med"/>
+                      <a:tailEnd type="none" w="med" len="med"/>
+                    </a:lnT>
+                    <a:lnB w="9525" cap="flat" cmpd="sng" algn="ctr">
+                      <a:solidFill>
+                        <a:srgbClr val="D5D8F4"/>
+                      </a:solidFill>
+                      <a:prstDash val="solid"/>
+                      <a:round/>
+                      <a:headEnd type="none" w="med" len="med"/>
+                      <a:tailEnd type="none" w="med" len="med"/>
+                    </a:lnB>
+                    <a:solidFill>
                       <a:srgbClr val="FFFFFF"/>
                     </a:solidFill>
                   </a:tcPr>
@@ -6014,7 +6445,68 @@
                             <a:srgbClr val="27303A"/>
                           </a:solidFill>
                         </a:rPr>
-                        <a:t>60 Min.</a:t>
+                        <a:t>Wie viel CPU und RAM bekommt eine VM?</a:t>
+                      </a:r>
+                      <a:endParaRPr lang="en-US" sz="1700" dirty="0"/>
+                    </a:p>
+                  </a:txBody>
+                  <a:tcPr marL="127000" marR="127000" marT="88900" marB="88900" anchor="ctr">
+                    <a:lnL w="9525" cap="flat" cmpd="sng" algn="ctr">
+                      <a:solidFill>
+                        <a:srgbClr val="D5D8F4"/>
+                      </a:solidFill>
+                      <a:prstDash val="solid"/>
+                      <a:round/>
+                      <a:headEnd type="none" w="med" len="med"/>
+                      <a:tailEnd type="none" w="med" len="med"/>
+                    </a:lnL>
+                    <a:lnR w="9525" cap="flat" cmpd="sng" algn="ctr">
+                      <a:solidFill>
+                        <a:srgbClr val="D5D8F4"/>
+                      </a:solidFill>
+                      <a:prstDash val="solid"/>
+                      <a:round/>
+                      <a:headEnd type="none" w="med" len="med"/>
+                      <a:tailEnd type="none" w="med" len="med"/>
+                    </a:lnR>
+                    <a:lnT w="9525" cap="flat" cmpd="sng" algn="ctr">
+                      <a:solidFill>
+                        <a:srgbClr val="D5D8F4"/>
+                      </a:solidFill>
+                      <a:prstDash val="solid"/>
+                      <a:round/>
+                      <a:headEnd type="none" w="med" len="med"/>
+                      <a:tailEnd type="none" w="med" len="med"/>
+                    </a:lnT>
+                    <a:lnB w="9525" cap="flat" cmpd="sng" algn="ctr">
+                      <a:solidFill>
+                        <a:srgbClr val="D5D8F4"/>
+                      </a:solidFill>
+                      <a:prstDash val="solid"/>
+                      <a:round/>
+                      <a:headEnd type="none" w="med" len="med"/>
+                      <a:tailEnd type="none" w="med" len="med"/>
+                    </a:lnB>
+                    <a:solidFill>
+                      <a:srgbClr val="FFFFFF"/>
+                    </a:solidFill>
+                  </a:tcPr>
+                </a:tc>
+                <a:tc>
+                  <a:txBody>
+                    <a:bodyPr/>
+                    <a:lstStyle/>
+                    <a:p>
+                      <a:pPr indent="0" marL="0">
+                        <a:buNone/>
+                      </a:pPr>
+                      <a:r>
+                        <a:rPr lang="en-US" sz="1700" dirty="0">
+                          <a:solidFill>
+                            <a:srgbClr val="27303A"/>
+                          </a:solidFill>
+                        </a:rPr>
+                        <a:t>30 Min.</a:t>
                       </a:r>
                       <a:endParaRPr lang="en-US" sz="1700" dirty="0"/>
                     </a:p>
@@ -6138,7 +6630,7 @@
                             <a:srgbClr val="27303A"/>
                           </a:solidFill>
                         </a:rPr>
-                        <a:t>1.3</a:t>
+                        <a:t>1.4</a:t>
                       </a:r>
                       <a:endParaRPr lang="en-US" sz="1700" dirty="0"/>
                     </a:p>
@@ -6199,7 +6691,7 @@
                             <a:srgbClr val="27303A"/>
                           </a:solidFill>
                         </a:rPr>
-                        <a:t>Wie viel CPU und RAM bekommt eine VM?</a:t>
+                        <a:t>Einen Server von Hand einrichten</a:t>
                       </a:r>
                       <a:endParaRPr lang="en-US" sz="1700" dirty="0"/>
                     </a:p>
@@ -6260,7 +6752,7 @@
                             <a:srgbClr val="27303A"/>
                           </a:solidFill>
                         </a:rPr>
-                        <a:t>30 Min.</a:t>
+                        <a:t>25 Min.</a:t>
                       </a:r>
                       <a:endParaRPr lang="en-US" sz="1700" dirty="0"/>
                     </a:p>
@@ -6384,7 +6876,7 @@
                             <a:srgbClr val="27303A"/>
                           </a:solidFill>
                         </a:rPr>
-                        <a:t>1.4</a:t>
+                        <a:t>1.5</a:t>
                       </a:r>
                       <a:endParaRPr lang="en-US" sz="1700" dirty="0"/>
                     </a:p>
@@ -6445,7 +6937,7 @@
                             <a:srgbClr val="27303A"/>
                           </a:solidFill>
                         </a:rPr>
-                        <a:t>Einen Server von Hand einrichten</a:t>
+                        <a:t>Deine erste automatische VM mit cloud-init</a:t>
                       </a:r>
                       <a:endParaRPr lang="en-US" sz="1700" dirty="0"/>
                     </a:p>
@@ -6506,7 +6998,7 @@
                             <a:srgbClr val="27303A"/>
                           </a:solidFill>
                         </a:rPr>
-                        <a:t>25 Min.</a:t>
+                        <a:t>45 Min.</a:t>
                       </a:r>
                       <a:endParaRPr lang="en-US" sz="1700" dirty="0"/>
                     </a:p>
@@ -6630,7 +7122,7 @@
                             <a:srgbClr val="27303A"/>
                           </a:solidFill>
                         </a:rPr>
-                        <a:t>1.5</a:t>
+                        <a:t>1.6</a:t>
                       </a:r>
                       <a:endParaRPr lang="en-US" sz="1700" dirty="0"/>
                     </a:p>
@@ -6691,7 +7183,7 @@
                             <a:srgbClr val="27303A"/>
                           </a:solidFill>
                         </a:rPr>
-                        <a:t>Deine erste automatische VM mit cloud-init</a:t>
+                        <a:t>SSH-Schlüssel für die Cloud vorbereiten</a:t>
                       </a:r>
                       <a:endParaRPr lang="en-US" sz="1700" dirty="0"/>
                     </a:p>
@@ -6752,7 +7244,7 @@
                             <a:srgbClr val="27303A"/>
                           </a:solidFill>
                         </a:rPr>
-                        <a:t>45 Min.</a:t>
+                        <a:t>20 Min.</a:t>
                       </a:r>
                       <a:endParaRPr lang="en-US" sz="1700" dirty="0"/>
                     </a:p>
@@ -6876,7 +7368,7 @@
                             <a:srgbClr val="27303A"/>
                           </a:solidFill>
                         </a:rPr>
-                        <a:t>1.6</a:t>
+                        <a:t>⭐ 1.7</a:t>
                       </a:r>
                       <a:endParaRPr lang="en-US" sz="1700" dirty="0"/>
                     </a:p>
@@ -6937,7 +7429,7 @@
                             <a:srgbClr val="27303A"/>
                           </a:solidFill>
                         </a:rPr>
-                        <a:t>SSH-Schlüssel für die Cloud vorbereiten</a:t>
+                        <a:t>Container mit Docker</a:t>
                       </a:r>
                       <a:endParaRPr lang="en-US" sz="1700" dirty="0"/>
                     </a:p>
@@ -6998,7 +7490,7 @@
                             <a:srgbClr val="27303A"/>
                           </a:solidFill>
                         </a:rPr>
-                        <a:t>20 Min.</a:t>
+                        <a:t>30 Min.</a:t>
                       </a:r>
                       <a:endParaRPr lang="en-US" sz="1700" dirty="0"/>
                     </a:p>
@@ -7103,252 +7595,6 @@
                     </a:lnB>
                     <a:solidFill>
                       <a:srgbClr val="FFFFFF"/>
-                    </a:solidFill>
-                  </a:tcPr>
-                </a:tc>
-              </a:tr>
-              <a:tr h="0">
-                <a:tc>
-                  <a:txBody>
-                    <a:bodyPr/>
-                    <a:lstStyle/>
-                    <a:p>
-                      <a:pPr indent="0" marL="0">
-                        <a:buNone/>
-                      </a:pPr>
-                      <a:r>
-                        <a:rPr lang="en-US" sz="1700" dirty="0">
-                          <a:solidFill>
-                            <a:srgbClr val="27303A"/>
-                          </a:solidFill>
-                        </a:rPr>
-                        <a:t>⭐ 1.7</a:t>
-                      </a:r>
-                      <a:endParaRPr lang="en-US" sz="1700" dirty="0"/>
-                    </a:p>
-                  </a:txBody>
-                  <a:tcPr marL="127000" marR="127000" marT="88900" marB="88900" anchor="ctr">
-                    <a:lnL w="9525" cap="flat" cmpd="sng" algn="ctr">
-                      <a:solidFill>
-                        <a:srgbClr val="D5D8F4"/>
-                      </a:solidFill>
-                      <a:prstDash val="solid"/>
-                      <a:round/>
-                      <a:headEnd type="none" w="med" len="med"/>
-                      <a:tailEnd type="none" w="med" len="med"/>
-                    </a:lnL>
-                    <a:lnR w="9525" cap="flat" cmpd="sng" algn="ctr">
-                      <a:solidFill>
-                        <a:srgbClr val="D5D8F4"/>
-                      </a:solidFill>
-                      <a:prstDash val="solid"/>
-                      <a:round/>
-                      <a:headEnd type="none" w="med" len="med"/>
-                      <a:tailEnd type="none" w="med" len="med"/>
-                    </a:lnR>
-                    <a:lnT w="9525" cap="flat" cmpd="sng" algn="ctr">
-                      <a:solidFill>
-                        <a:srgbClr val="D5D8F4"/>
-                      </a:solidFill>
-                      <a:prstDash val="solid"/>
-                      <a:round/>
-                      <a:headEnd type="none" w="med" len="med"/>
-                      <a:tailEnd type="none" w="med" len="med"/>
-                    </a:lnT>
-                    <a:lnB w="9525" cap="flat" cmpd="sng" algn="ctr">
-                      <a:solidFill>
-                        <a:srgbClr val="D5D8F4"/>
-                      </a:solidFill>
-                      <a:prstDash val="solid"/>
-                      <a:round/>
-                      <a:headEnd type="none" w="med" len="med"/>
-                      <a:tailEnd type="none" w="med" len="med"/>
-                    </a:lnB>
-                    <a:solidFill>
-                      <a:srgbClr val="F7F7F7"/>
-                    </a:solidFill>
-                  </a:tcPr>
-                </a:tc>
-                <a:tc>
-                  <a:txBody>
-                    <a:bodyPr/>
-                    <a:lstStyle/>
-                    <a:p>
-                      <a:pPr indent="0" marL="0">
-                        <a:buNone/>
-                      </a:pPr>
-                      <a:r>
-                        <a:rPr lang="en-US" sz="1700" dirty="0">
-                          <a:solidFill>
-                            <a:srgbClr val="27303A"/>
-                          </a:solidFill>
-                        </a:rPr>
-                        <a:t>Container mit Docker</a:t>
-                      </a:r>
-                      <a:endParaRPr lang="en-US" sz="1700" dirty="0"/>
-                    </a:p>
-                  </a:txBody>
-                  <a:tcPr marL="127000" marR="127000" marT="88900" marB="88900" anchor="ctr">
-                    <a:lnL w="9525" cap="flat" cmpd="sng" algn="ctr">
-                      <a:solidFill>
-                        <a:srgbClr val="D5D8F4"/>
-                      </a:solidFill>
-                      <a:prstDash val="solid"/>
-                      <a:round/>
-                      <a:headEnd type="none" w="med" len="med"/>
-                      <a:tailEnd type="none" w="med" len="med"/>
-                    </a:lnL>
-                    <a:lnR w="9525" cap="flat" cmpd="sng" algn="ctr">
-                      <a:solidFill>
-                        <a:srgbClr val="D5D8F4"/>
-                      </a:solidFill>
-                      <a:prstDash val="solid"/>
-                      <a:round/>
-                      <a:headEnd type="none" w="med" len="med"/>
-                      <a:tailEnd type="none" w="med" len="med"/>
-                    </a:lnR>
-                    <a:lnT w="9525" cap="flat" cmpd="sng" algn="ctr">
-                      <a:solidFill>
-                        <a:srgbClr val="D5D8F4"/>
-                      </a:solidFill>
-                      <a:prstDash val="solid"/>
-                      <a:round/>
-                      <a:headEnd type="none" w="med" len="med"/>
-                      <a:tailEnd type="none" w="med" len="med"/>
-                    </a:lnT>
-                    <a:lnB w="9525" cap="flat" cmpd="sng" algn="ctr">
-                      <a:solidFill>
-                        <a:srgbClr val="D5D8F4"/>
-                      </a:solidFill>
-                      <a:prstDash val="solid"/>
-                      <a:round/>
-                      <a:headEnd type="none" w="med" len="med"/>
-                      <a:tailEnd type="none" w="med" len="med"/>
-                    </a:lnB>
-                    <a:solidFill>
-                      <a:srgbClr val="F7F7F7"/>
-                    </a:solidFill>
-                  </a:tcPr>
-                </a:tc>
-                <a:tc>
-                  <a:txBody>
-                    <a:bodyPr/>
-                    <a:lstStyle/>
-                    <a:p>
-                      <a:pPr indent="0" marL="0">
-                        <a:buNone/>
-                      </a:pPr>
-                      <a:r>
-                        <a:rPr lang="en-US" sz="1700" dirty="0">
-                          <a:solidFill>
-                            <a:srgbClr val="27303A"/>
-                          </a:solidFill>
-                        </a:rPr>
-                        <a:t>30 Min.</a:t>
-                      </a:r>
-                      <a:endParaRPr lang="en-US" sz="1700" dirty="0"/>
-                    </a:p>
-                  </a:txBody>
-                  <a:tcPr marL="127000" marR="127000" marT="88900" marB="88900" anchor="ctr">
-                    <a:lnL w="9525" cap="flat" cmpd="sng" algn="ctr">
-                      <a:solidFill>
-                        <a:srgbClr val="D5D8F4"/>
-                      </a:solidFill>
-                      <a:prstDash val="solid"/>
-                      <a:round/>
-                      <a:headEnd type="none" w="med" len="med"/>
-                      <a:tailEnd type="none" w="med" len="med"/>
-                    </a:lnL>
-                    <a:lnR w="9525" cap="flat" cmpd="sng" algn="ctr">
-                      <a:solidFill>
-                        <a:srgbClr val="D5D8F4"/>
-                      </a:solidFill>
-                      <a:prstDash val="solid"/>
-                      <a:round/>
-                      <a:headEnd type="none" w="med" len="med"/>
-                      <a:tailEnd type="none" w="med" len="med"/>
-                    </a:lnR>
-                    <a:lnT w="9525" cap="flat" cmpd="sng" algn="ctr">
-                      <a:solidFill>
-                        <a:srgbClr val="D5D8F4"/>
-                      </a:solidFill>
-                      <a:prstDash val="solid"/>
-                      <a:round/>
-                      <a:headEnd type="none" w="med" len="med"/>
-                      <a:tailEnd type="none" w="med" len="med"/>
-                    </a:lnT>
-                    <a:lnB w="9525" cap="flat" cmpd="sng" algn="ctr">
-                      <a:solidFill>
-                        <a:srgbClr val="D5D8F4"/>
-                      </a:solidFill>
-                      <a:prstDash val="solid"/>
-                      <a:round/>
-                      <a:headEnd type="none" w="med" len="med"/>
-                      <a:tailEnd type="none" w="med" len="med"/>
-                    </a:lnB>
-                    <a:solidFill>
-                      <a:srgbClr val="F7F7F7"/>
-                    </a:solidFill>
-                  </a:tcPr>
-                </a:tc>
-                <a:tc>
-                  <a:txBody>
-                    <a:bodyPr/>
-                    <a:lstStyle/>
-                    <a:p>
-                      <a:pPr indent="0" marL="0">
-                        <a:buNone/>
-                      </a:pPr>
-                      <a:r>
-                        <a:rPr lang="en-US" sz="1700" dirty="0">
-                          <a:solidFill>
-                            <a:srgbClr val="27303A"/>
-                          </a:solidFill>
-                        </a:rPr>
-                        <a:t>Einzel</a:t>
-                      </a:r>
-                      <a:endParaRPr lang="en-US" sz="1700" dirty="0"/>
-                    </a:p>
-                  </a:txBody>
-                  <a:tcPr marL="127000" marR="127000" marT="88900" marB="88900" anchor="ctr">
-                    <a:lnL w="9525" cap="flat" cmpd="sng" algn="ctr">
-                      <a:solidFill>
-                        <a:srgbClr val="D5D8F4"/>
-                      </a:solidFill>
-                      <a:prstDash val="solid"/>
-                      <a:round/>
-                      <a:headEnd type="none" w="med" len="med"/>
-                      <a:tailEnd type="none" w="med" len="med"/>
-                    </a:lnL>
-                    <a:lnR w="9525" cap="flat" cmpd="sng" algn="ctr">
-                      <a:solidFill>
-                        <a:srgbClr val="D5D8F4"/>
-                      </a:solidFill>
-                      <a:prstDash val="solid"/>
-                      <a:round/>
-                      <a:headEnd type="none" w="med" len="med"/>
-                      <a:tailEnd type="none" w="med" len="med"/>
-                    </a:lnR>
-                    <a:lnT w="9525" cap="flat" cmpd="sng" algn="ctr">
-                      <a:solidFill>
-                        <a:srgbClr val="D5D8F4"/>
-                      </a:solidFill>
-                      <a:prstDash val="solid"/>
-                      <a:round/>
-                      <a:headEnd type="none" w="med" len="med"/>
-                      <a:tailEnd type="none" w="med" len="med"/>
-                    </a:lnT>
-                    <a:lnB w="9525" cap="flat" cmpd="sng" algn="ctr">
-                      <a:solidFill>
-                        <a:srgbClr val="D5D8F4"/>
-                      </a:solidFill>
-                      <a:prstDash val="solid"/>
-                      <a:round/>
-                      <a:headEnd type="none" w="med" len="med"/>
-                      <a:tailEnd type="none" w="med" len="med"/>
-                    </a:lnB>
-                    <a:solidFill>
-                      <a:srgbClr val="F7F7F7"/>
                     </a:solidFill>
                   </a:tcPr>
                 </a:tc>

--- a/praesentationen/tag-1-virtualisierung.pptx
+++ b/praesentationen/tag-1-virtualisierung.pptx
@@ -115,13 +115,13 @@
   <p:extLst>
     <p:ext uri="{521415D9-36F7-43E2-AB2F-B90AF26B5E84}">
       <p14:sectionLst xmlns:p14="http://schemas.microsoft.com/office/powerpoint/2010/main">
-        <p14:section name="Start" id="{4a743b04-9738-e4b6-9ded-bb496239763e}">
+        <p14:section name="Start" id="{454da19f-e26b-5760-2ddb-4d8d4902741f}">
           <p14:sldIdLst>
             <p14:sldId id="256"/>
             <p14:sldId id="257"/>
           </p14:sldIdLst>
         </p14:section>
-        <p14:section name="Heute" id="{f59feb66-1eb2-07c6-f9a7-9a266a9cd271}">
+        <p14:section name="Heute" id="{34ea1e39-60b1-ce9d-dc95-f72d256ab480}">
           <p14:sldIdLst>
             <p14:sldId id="258"/>
             <p14:sldId id="259"/>
@@ -130,7 +130,7 @@
             <p14:sldId id="262"/>
           </p14:sldIdLst>
         </p14:section>
-        <p14:section name="Abschluss" id="{d4c4a20e-04c6-3fdd-525e-14dde7e44c1b}">
+        <p14:section name="Abschluss" id="{29aaeca5-a9e9-f282-f315-b5dca47fb855}">
           <p14:sldIdLst>
             <p14:sldId id="263"/>
             <p14:sldId id="264"/>
@@ -1342,7 +1342,7 @@
       </p:grpSpPr>
       <p:pic>
         <p:nvPicPr>
-          <p:cNvPr id="2" name="Image 0" descr="C:\Users\Thanam\AppData\Local\Temp\claude\c--Projekt-Trainings-azure-basics-training\a7a6b8eb-22f3-4b42-aecc-5af05d1502b1\scratchpad\folien\assets\logo-dunkel.png">    </p:cNvPr>
+          <p:cNvPr id="2" name="Image 0" descr="C:\Users\Thanam\AppData\Local\Temp\claude\c--Projekt-Trainings-azure-basics-training\d01384da-f513-40b3-985e-441cf1c86f9e\scratchpad\arbeit\assets\logo-dunkel.png">    </p:cNvPr>
           <p:cNvPicPr>
             <a:picLocks noChangeAspect="1"/>
           </p:cNvPicPr>
@@ -1366,7 +1366,7 @@
       </p:pic>
       <p:pic>
         <p:nvPicPr>
-          <p:cNvPr id="3" name="Image 1" descr="C:\Users\Thanam\AppData\Local\Temp\claude\c--Projekt-Trainings-azure-basics-training\a7a6b8eb-22f3-4b42-aecc-5af05d1502b1\scratchpad\folien\assets\wolke.png">    </p:cNvPr>
+          <p:cNvPr id="3" name="Image 1" descr="C:\Users\Thanam\AppData\Local\Temp\claude\c--Projekt-Trainings-azure-basics-training\d01384da-f513-40b3-985e-441cf1c86f9e\scratchpad\arbeit\assets\wolke.png">    </p:cNvPr>
           <p:cNvPicPr>
             <a:picLocks noChangeAspect="1"/>
           </p:cNvPicPr>
@@ -1536,7 +1536,7 @@
       </p:grpSpPr>
       <p:pic>
         <p:nvPicPr>
-          <p:cNvPr id="2" name="Image 0" descr="C:\Users\Thanam\AppData\Local\Temp\claude\c--Projekt-Trainings-azure-basics-training\a7a6b8eb-22f3-4b42-aecc-5af05d1502b1\scratchpad\folien\assets\wolke.png">    </p:cNvPr>
+          <p:cNvPr id="2" name="Image 0" descr="C:\Users\Thanam\AppData\Local\Temp\claude\c--Projekt-Trainings-azure-basics-training\d01384da-f513-40b3-985e-441cf1c86f9e\scratchpad\arbeit\assets\wolke.png">    </p:cNvPr>
           <p:cNvPicPr>
             <a:picLocks noChangeAspect="1"/>
           </p:cNvPicPr>
@@ -1560,7 +1560,7 @@
       </p:pic>
       <p:pic>
         <p:nvPicPr>
-          <p:cNvPr id="3" name="Image 1" descr="C:\Users\Thanam\AppData\Local\Temp\claude\c--Projekt-Trainings-azure-basics-training\a7a6b8eb-22f3-4b42-aecc-5af05d1502b1\scratchpad\folien\assets\logo-dunkel.png">    </p:cNvPr>
+          <p:cNvPr id="3" name="Image 1" descr="C:\Users\Thanam\AppData\Local\Temp\claude\c--Projekt-Trainings-azure-basics-training\d01384da-f513-40b3-985e-441cf1c86f9e\scratchpad\arbeit\assets\logo-dunkel.png">    </p:cNvPr>
           <p:cNvPicPr>
             <a:picLocks noChangeAspect="1"/>
           </p:cNvPicPr>
@@ -1694,7 +1694,7 @@
       </p:grpSpPr>
       <p:pic>
         <p:nvPicPr>
-          <p:cNvPr id="2" name="Image 0" descr="C:\Users\Thanam\AppData\Local\Temp\claude\c--Projekt-Trainings-azure-basics-training\a7a6b8eb-22f3-4b42-aecc-5af05d1502b1\scratchpad\folien\assets\logo-dunkel.png">    </p:cNvPr>
+          <p:cNvPr id="2" name="Image 0" descr="C:\Users\Thanam\AppData\Local\Temp\claude\c--Projekt-Trainings-azure-basics-training\d01384da-f513-40b3-985e-441cf1c86f9e\scratchpad\arbeit\assets\logo-dunkel.png">    </p:cNvPr>
           <p:cNvPicPr>
             <a:picLocks noChangeAspect="1"/>
           </p:cNvPicPr>
@@ -1870,7 +1870,7 @@
       </p:grpSpPr>
       <p:pic>
         <p:nvPicPr>
-          <p:cNvPr id="2" name="Image 0" descr="C:\Users\Thanam\AppData\Local\Temp\claude\c--Projekt-Trainings-azure-basics-training\a7a6b8eb-22f3-4b42-aecc-5af05d1502b1\scratchpad\folien\assets\logo-dunkel.png">    </p:cNvPr>
+          <p:cNvPr id="2" name="Image 0" descr="C:\Users\Thanam\AppData\Local\Temp\claude\c--Projekt-Trainings-azure-basics-training\d01384da-f513-40b3-985e-441cf1c86f9e\scratchpad\arbeit\assets\logo-dunkel.png">    </p:cNvPr>
           <p:cNvPicPr>
             <a:picLocks noChangeAspect="1"/>
           </p:cNvPicPr>
@@ -2487,7 +2487,7 @@
       </p:sp>
       <p:pic>
         <p:nvPicPr>
-          <p:cNvPr id="4" name="icon-FaServer" descr="C:\Users\Thanam\AppData\Local\Temp\claude\c--Projekt-Trainings-azure-basics-training\a7a6b8eb-22f3-4b42-aecc-5af05d1502b1\scratchpad\folien\assets\icons\FaServer.png">    </p:cNvPr>
+          <p:cNvPr id="4" name="icon-FaServer" descr="C:\Users\Thanam\AppData\Local\Temp\claude\c--Projekt-Trainings-azure-basics-training\d01384da-f513-40b3-985e-441cf1c86f9e\scratchpad\arbeit\assets\icons\FaServer.png">    </p:cNvPr>
           <p:cNvPicPr>
             <a:picLocks noChangeAspect="1"/>
           </p:cNvPicPr>
@@ -2586,7 +2586,7 @@
       </p:sp>
       <p:pic>
         <p:nvPicPr>
-          <p:cNvPr id="7" name="icon-FaBuilding" descr="C:\Users\Thanam\AppData\Local\Temp\claude\c--Projekt-Trainings-azure-basics-training\a7a6b8eb-22f3-4b42-aecc-5af05d1502b1\scratchpad\folien\assets\icons\FaBuilding.png">    </p:cNvPr>
+          <p:cNvPr id="7" name="icon-FaBuilding" descr="C:\Users\Thanam\AppData\Local\Temp\claude\c--Projekt-Trainings-azure-basics-training\d01384da-f513-40b3-985e-441cf1c86f9e\scratchpad\arbeit\assets\icons\FaBuilding.png">    </p:cNvPr>
           <p:cNvPicPr>
             <a:picLocks noChangeAspect="1"/>
           </p:cNvPicPr>
@@ -2685,7 +2685,7 @@
       </p:sp>
       <p:pic>
         <p:nvPicPr>
-          <p:cNvPr id="10" name="icon-FaDocker" descr="C:\Users\Thanam\AppData\Local\Temp\claude\c--Projekt-Trainings-azure-basics-training\a7a6b8eb-22f3-4b42-aecc-5af05d1502b1\scratchpad\folien\assets\icons\FaDocker.png">    </p:cNvPr>
+          <p:cNvPr id="10" name="icon-FaDocker" descr="C:\Users\Thanam\AppData\Local\Temp\claude\c--Projekt-Trainings-azure-basics-training\d01384da-f513-40b3-985e-441cf1c86f9e\scratchpad\arbeit\assets\icons\FaDocker.png">    </p:cNvPr>
           <p:cNvPicPr>
             <a:picLocks noChangeAspect="1"/>
           </p:cNvPicPr>
@@ -2919,7 +2919,7 @@
       </p:sp>
       <p:pic>
         <p:nvPicPr>
-          <p:cNvPr id="5" name="icon-FaLayerGroup" descr="C:\Users\Thanam\AppData\Local\Temp\claude\c--Projekt-Trainings-azure-basics-training\a7a6b8eb-22f3-4b42-aecc-5af05d1502b1\scratchpad\folien\assets\icons\FaLayerGroup.png">    </p:cNvPr>
+          <p:cNvPr id="5" name="icon-FaLayerGroup" descr="C:\Users\Thanam\AppData\Local\Temp\claude\c--Projekt-Trainings-azure-basics-training\d01384da-f513-40b3-985e-441cf1c86f9e\scratchpad\arbeit\assets\icons\FaLayerGroup.png">    </p:cNvPr>
           <p:cNvPicPr>
             <a:picLocks noChangeAspect="1"/>
           </p:cNvPicPr>
@@ -3072,7 +3072,7 @@
       </p:sp>
       <p:pic>
         <p:nvPicPr>
-          <p:cNvPr id="10" name="icon-FaServer" descr="C:\Users\Thanam\AppData\Local\Temp\claude\c--Projekt-Trainings-azure-basics-training\a7a6b8eb-22f3-4b42-aecc-5af05d1502b1\scratchpad\folien\assets\icons\FaServer.png">    </p:cNvPr>
+          <p:cNvPr id="10" name="icon-FaServer" descr="C:\Users\Thanam\AppData\Local\Temp\claude\c--Projekt-Trainings-azure-basics-training\d01384da-f513-40b3-985e-441cf1c86f9e\scratchpad\arbeit\assets\icons\FaServer.png">    </p:cNvPr>
           <p:cNvPicPr>
             <a:picLocks noChangeAspect="1"/>
           </p:cNvPicPr>
@@ -3225,7 +3225,7 @@
       </p:sp>
       <p:pic>
         <p:nvPicPr>
-          <p:cNvPr id="15" name="icon-FaMemory" descr="C:\Users\Thanam\AppData\Local\Temp\claude\c--Projekt-Trainings-azure-basics-training\a7a6b8eb-22f3-4b42-aecc-5af05d1502b1\scratchpad\folien\assets\icons\FaMemory.png">    </p:cNvPr>
+          <p:cNvPr id="15" name="icon-FaMemory" descr="C:\Users\Thanam\AppData\Local\Temp\claude\c--Projekt-Trainings-azure-basics-training\d01384da-f513-40b3-985e-441cf1c86f9e\scratchpad\arbeit\assets\icons\FaMemory.png">    </p:cNvPr>
           <p:cNvPicPr>
             <a:picLocks noChangeAspect="1"/>
           </p:cNvPicPr>
@@ -3378,7 +3378,7 @@
       </p:sp>
       <p:pic>
         <p:nvPicPr>
-          <p:cNvPr id="20" name="icon-FaRocket" descr="C:\Users\Thanam\AppData\Local\Temp\claude\c--Projekt-Trainings-azure-basics-training\a7a6b8eb-22f3-4b42-aecc-5af05d1502b1\scratchpad\folien\assets\icons\FaRocket.png">    </p:cNvPr>
+          <p:cNvPr id="20" name="icon-FaRocket" descr="C:\Users\Thanam\AppData\Local\Temp\claude\c--Projekt-Trainings-azure-basics-training\d01384da-f513-40b3-985e-441cf1c86f9e\scratchpad\arbeit\assets\icons\FaRocket.png">    </p:cNvPr>
           <p:cNvPicPr>
             <a:picLocks noChangeAspect="1"/>
           </p:cNvPicPr>
@@ -3531,7 +3531,7 @@
       </p:sp>
       <p:pic>
         <p:nvPicPr>
-          <p:cNvPr id="25" name="icon-FaKey" descr="C:\Users\Thanam\AppData\Local\Temp\claude\c--Projekt-Trainings-azure-basics-training\a7a6b8eb-22f3-4b42-aecc-5af05d1502b1\scratchpad\folien\assets\icons\FaKey.png">    </p:cNvPr>
+          <p:cNvPr id="25" name="icon-FaKey" descr="C:\Users\Thanam\AppData\Local\Temp\claude\c--Projekt-Trainings-azure-basics-training\d01384da-f513-40b3-985e-441cf1c86f9e\scratchpad\arbeit\assets\icons\FaKey.png">    </p:cNvPr>
           <p:cNvPicPr>
             <a:picLocks noChangeAspect="1"/>
           </p:cNvPicPr>
@@ -3624,7 +3624,7 @@
                   <a:srgbClr val="27303A"/>
                 </a:solidFill>
               </a:rPr>
-              <a:t>Du erstellst ein Schlüsselpaar für die Cloud.</a:t>
+              <a:t>Du erstellst ein Schlüsselpaar und meldest dich damit an vm1 an.</a:t>
             </a:r>
             <a:endParaRPr lang="en-US" sz="1600" dirty="0"/>
           </a:p>
@@ -7244,7 +7244,7 @@
                             <a:srgbClr val="27303A"/>
                           </a:solidFill>
                         </a:rPr>
-                        <a:t>20 Min.</a:t>
+                        <a:t>25 Min.</a:t>
                       </a:r>
                       <a:endParaRPr lang="en-US" sz="1700" dirty="0"/>
                     </a:p>
@@ -7774,7 +7774,7 @@
       </p:sp>
       <p:pic>
         <p:nvPicPr>
-          <p:cNvPr id="4" name="icon-FaMicrochip" descr="C:\Users\Thanam\AppData\Local\Temp\claude\c--Projekt-Trainings-azure-basics-training\a7a6b8eb-22f3-4b42-aecc-5af05d1502b1\scratchpad\folien\assets\icons\FaMicrochip.png">    </p:cNvPr>
+          <p:cNvPr id="4" name="icon-FaMicrochip" descr="C:\Users\Thanam\AppData\Local\Temp\claude\c--Projekt-Trainings-azure-basics-training\d01384da-f513-40b3-985e-441cf1c86f9e\scratchpad\arbeit\assets\icons\FaMicrochip.png">    </p:cNvPr>
           <p:cNvPicPr>
             <a:picLocks noChangeAspect="1"/>
           </p:cNvPicPr>
@@ -7873,7 +7873,7 @@
       </p:sp>
       <p:pic>
         <p:nvPicPr>
-          <p:cNvPr id="7" name="icon-FaLaptop" descr="C:\Users\Thanam\AppData\Local\Temp\claude\c--Projekt-Trainings-azure-basics-training\a7a6b8eb-22f3-4b42-aecc-5af05d1502b1\scratchpad\folien\assets\icons\FaLaptop.png">    </p:cNvPr>
+          <p:cNvPr id="7" name="icon-FaLaptop" descr="C:\Users\Thanam\AppData\Local\Temp\claude\c--Projekt-Trainings-azure-basics-training\d01384da-f513-40b3-985e-441cf1c86f9e\scratchpad\arbeit\assets\icons\FaLaptop.png">    </p:cNvPr>
           <p:cNvPicPr>
             <a:picLocks noChangeAspect="1"/>
           </p:cNvPicPr>
@@ -7972,7 +7972,7 @@
       </p:sp>
       <p:pic>
         <p:nvPicPr>
-          <p:cNvPr id="10" name="icon-FaHdd" descr="C:\Users\Thanam\AppData\Local\Temp\claude\c--Projekt-Trainings-azure-basics-training\a7a6b8eb-22f3-4b42-aecc-5af05d1502b1\scratchpad\folien\assets\icons\FaHdd.png">    </p:cNvPr>
+          <p:cNvPr id="10" name="icon-FaHdd" descr="C:\Users\Thanam\AppData\Local\Temp\claude\c--Projekt-Trainings-azure-basics-training\d01384da-f513-40b3-985e-441cf1c86f9e\scratchpad\arbeit\assets\icons\FaHdd.png">    </p:cNvPr>
           <p:cNvPicPr>
             <a:picLocks noChangeAspect="1"/>
           </p:cNvPicPr>
@@ -8665,7 +8665,7 @@
       </p:sp>
       <p:pic>
         <p:nvPicPr>
-          <p:cNvPr id="5" name="icon-FaTrashAlt" descr="C:\Users\Thanam\AppData\Local\Temp\claude\c--Projekt-Trainings-azure-basics-training\a7a6b8eb-22f3-4b42-aecc-5af05d1502b1\scratchpad\folien\assets\icons\FaTrashAlt.png">    </p:cNvPr>
+          <p:cNvPr id="5" name="icon-FaTrashAlt" descr="C:\Users\Thanam\AppData\Local\Temp\claude\c--Projekt-Trainings-azure-basics-training\d01384da-f513-40b3-985e-441cf1c86f9e\scratchpad\arbeit\assets\icons\FaTrashAlt.png">    </p:cNvPr>
           <p:cNvPicPr>
             <a:picLocks noChangeAspect="1"/>
           </p:cNvPicPr>
@@ -8818,7 +8818,7 @@
       </p:sp>
       <p:pic>
         <p:nvPicPr>
-          <p:cNvPr id="10" name="icon-FaDoorOpen" descr="C:\Users\Thanam\AppData\Local\Temp\claude\c--Projekt-Trainings-azure-basics-training\a7a6b8eb-22f3-4b42-aecc-5af05d1502b1\scratchpad\folien\assets\icons\FaDoorOpen.png">    </p:cNvPr>
+          <p:cNvPr id="10" name="icon-FaDoorOpen" descr="C:\Users\Thanam\AppData\Local\Temp\claude\c--Projekt-Trainings-azure-basics-training\d01384da-f513-40b3-985e-441cf1c86f9e\scratchpad\arbeit\assets\icons\FaDoorOpen.png">    </p:cNvPr>
           <p:cNvPicPr>
             <a:picLocks noChangeAspect="1"/>
           </p:cNvPicPr>
@@ -9117,7 +9117,7 @@
       </p:sp>
       <p:pic>
         <p:nvPicPr>
-          <p:cNvPr id="6" name="icon-FaCloud" descr="C:\Users\Thanam\AppData\Local\Temp\claude\c--Projekt-Trainings-azure-basics-training\a7a6b8eb-22f3-4b42-aecc-5af05d1502b1\scratchpad\folien\assets\icons\FaCloud.png">    </p:cNvPr>
+          <p:cNvPr id="6" name="icon-FaCloud" descr="C:\Users\Thanam\AppData\Local\Temp\claude\c--Projekt-Trainings-azure-basics-training\d01384da-f513-40b3-985e-441cf1c86f9e\scratchpad\arbeit\assets\icons\FaCloud.png">    </p:cNvPr>
           <p:cNvPicPr>
             <a:picLocks noChangeAspect="1"/>
           </p:cNvPicPr>
@@ -9265,7 +9265,7 @@
       </p:sp>
       <p:pic>
         <p:nvPicPr>
-          <p:cNvPr id="11" name="icon-FaKey" descr="C:\Users\Thanam\AppData\Local\Temp\claude\c--Projekt-Trainings-azure-basics-training\a7a6b8eb-22f3-4b42-aecc-5af05d1502b1\scratchpad\folien\assets\icons\FaKey.png">    </p:cNvPr>
+          <p:cNvPr id="11" name="icon-FaKey" descr="C:\Users\Thanam\AppData\Local\Temp\claude\c--Projekt-Trainings-azure-basics-training\d01384da-f513-40b3-985e-441cf1c86f9e\scratchpad\arbeit\assets\icons\FaKey.png">    </p:cNvPr>
           <p:cNvPicPr>
             <a:picLocks noChangeAspect="1"/>
           </p:cNvPicPr>
